--- a/스톱앤스케치_제안서.pptx
+++ b/스톱앤스케치_제안서.pptx
@@ -4,6 +4,9 @@
   <p:sldMasterIdLst>
     <p:sldMasterId id="2147483648" r:id="rId1"/>
   </p:sldMasterIdLst>
+  <p:notesMasterIdLst>
+    <p:notesMasterId r:id="rId13"/>
+  </p:notesMasterIdLst>
   <p:sldIdLst>
     <p:sldId id="256" r:id="rId2"/>
     <p:sldId id="257" r:id="rId3"/>
@@ -17,9 +20,6 @@
     <p:sldId id="265" r:id="rId11"/>
     <p:sldId id="266" r:id="rId12"/>
   </p:sldIdLst>
-  <p:notesMasterIdLst>
-    <p:notesMasterId r:id="rId13"/>
-  </p:notesMasterIdLst>
   <p:sldSz cx="12192000" cy="6858000"/>
   <p:notesSz cx="6858000" cy="12192000"/>
   <p:defaultTextStyle>
@@ -114,6 +114,11 @@
       </a:defRPr>
     </a:lvl9pPr>
   </p:defaultTextStyle>
+  <p:extLst>
+    <p:ext uri="{EFAFB233-063F-42B5-8137-9DF3F51BA10A}">
+      <p15:sldGuideLst xmlns:p15="http://schemas.microsoft.com/office/powerpoint/2012/main"/>
+    </p:ext>
+  </p:extLst>
 </p:presentation>
 </file>
 
@@ -139,240 +144,16 @@
           <a:chExt cx="0" cy="0"/>
         </a:xfrm>
       </p:grpSpPr>
-      <p:sp>
-        <p:nvSpPr>
-          <p:cNvPr id="2" name="Header Placeholder 1"/>
-          <p:cNvSpPr>
-            <a:spLocks noGrp="1"/>
-          </p:cNvSpPr>
-          <p:nvPr>
-            <p:ph type="hdr" sz="quarter"/>
-          </p:nvPr>
-        </p:nvSpPr>
-        <p:spPr>
-          <a:xfrm>
-            <a:off x="0" y="0"/>
-            <a:ext cx="2971800" cy="458788"/>
-          </a:xfrm>
-          <a:prstGeom prst="rect">
-            <a:avLst/>
-          </a:prstGeom>
-        </p:spPr>
-        <p:txBody>
-          <a:bodyPr vert="horz" lIns="91440" tIns="45720" rIns="91440" bIns="45720" rtlCol="0"/>
-          <a:lstStyle>
-            <a:lvl1pPr algn="l">
-              <a:defRPr sz="1200"/>
-            </a:lvl1pPr>
-          </a:lstStyle>
-          <a:p>
-            <a:endParaRPr lang="en-US"/>
-          </a:p>
-        </p:txBody>
-      </p:sp>
-      <p:sp>
-        <p:nvSpPr>
-          <p:cNvPr id="3" name="Date Placeholder 2"/>
-          <p:cNvSpPr>
-            <a:spLocks noGrp="1"/>
-          </p:cNvSpPr>
-          <p:nvPr>
-            <p:ph type="dt" idx="1"/>
-          </p:nvPr>
-        </p:nvSpPr>
-        <p:spPr>
-          <a:xfrm>
-            <a:off x="3884613" y="0"/>
-            <a:ext cx="2971800" cy="458788"/>
-          </a:xfrm>
-          <a:prstGeom prst="rect">
-            <a:avLst/>
-          </a:prstGeom>
-        </p:spPr>
-        <p:txBody>
-          <a:bodyPr vert="horz" lIns="91440" tIns="45720" rIns="91440" bIns="45720" rtlCol="0"/>
-          <a:lstStyle>
-            <a:lvl1pPr algn="r">
-              <a:defRPr sz="1200"/>
-            </a:lvl1pPr>
-          </a:lstStyle>
-          <a:p>
-            <a:fld id="{5282F153-3F37-0F45-9E97-73ACFA13230C}" type="datetimeFigureOut">
-              <a:rPr lang="en-US"/>
-              <a:t>7/23/19</a:t>
-            </a:fld>
-            <a:endParaRPr lang="en-US"/>
-          </a:p>
-        </p:txBody>
-      </p:sp>
-      <p:sp>
-        <p:nvSpPr>
-          <p:cNvPr id="4" name="Slide Image Placeholder 3"/>
-          <p:cNvSpPr>
-            <a:spLocks noGrp="1" noRot="1" noChangeAspect="1"/>
-          </p:cNvSpPr>
-          <p:nvPr>
-            <p:ph type="sldImg" idx="2"/>
-          </p:nvPr>
-        </p:nvSpPr>
-        <p:spPr>
-          <a:xfrm>
-            <a:off x="685800" y="1143000"/>
-            <a:ext cx="5486400" cy="3086100"/>
-          </a:xfrm>
-          <a:prstGeom prst="rect">
-            <a:avLst/>
-          </a:prstGeom>
-          <a:noFill/>
-          <a:ln w="12700">
-            <a:solidFill>
-              <a:prstClr val="black"/>
-            </a:solidFill>
-          </a:ln>
-        </p:spPr>
-        <p:txBody>
-          <a:bodyPr vert="horz" lIns="91440" tIns="45720" rIns="91440" bIns="45720" rtlCol="0" anchor="ctr"/>
-          <a:lstStyle/>
-          <a:p>
-            <a:endParaRPr lang="en-US"/>
-          </a:p>
-        </p:txBody>
-      </p:sp>
-      <p:sp>
-        <p:nvSpPr>
-          <p:cNvPr id="5" name="Notes Placeholder 4"/>
-          <p:cNvSpPr>
-            <a:spLocks noGrp="1"/>
-          </p:cNvSpPr>
-          <p:nvPr>
-            <p:ph type="body" sz="quarter" idx="3"/>
-          </p:nvPr>
-        </p:nvSpPr>
-        <p:spPr>
-          <a:xfrm>
-            <a:off x="685800" y="4400550"/>
-            <a:ext cx="5486400" cy="3600450"/>
-          </a:xfrm>
-          <a:prstGeom prst="rect">
-            <a:avLst/>
-          </a:prstGeom>
-        </p:spPr>
-        <p:txBody>
-          <a:bodyPr vert="horz" lIns="91440" tIns="45720" rIns="91440" bIns="45720" rtlCol="0"/>
-          <a:lstStyle/>
-          <a:p>
-            <a:pPr lvl="0"/>
-            <a:r>
-              <a:rPr lang="en-US"/>
-              <a:t>Click to edit Master text styles</a:t>
-            </a:r>
-          </a:p>
-          <a:p>
-            <a:pPr lvl="1"/>
-            <a:r>
-              <a:rPr lang="en-US"/>
-              <a:t>Second level</a:t>
-            </a:r>
-          </a:p>
-          <a:p>
-            <a:pPr lvl="2"/>
-            <a:r>
-              <a:rPr lang="en-US"/>
-              <a:t>Third level</a:t>
-            </a:r>
-          </a:p>
-          <a:p>
-            <a:pPr lvl="3"/>
-            <a:r>
-              <a:rPr lang="en-US"/>
-              <a:t>Fourth level</a:t>
-            </a:r>
-          </a:p>
-          <a:p>
-            <a:pPr lvl="4"/>
-            <a:r>
-              <a:rPr lang="en-US"/>
-              <a:t>Fifth level</a:t>
-            </a:r>
-          </a:p>
-        </p:txBody>
-      </p:sp>
-      <p:sp>
-        <p:nvSpPr>
-          <p:cNvPr id="6" name="Footer Placeholder 5"/>
-          <p:cNvSpPr>
-            <a:spLocks noGrp="1"/>
-          </p:cNvSpPr>
-          <p:nvPr>
-            <p:ph type="ftr" sz="quarter" idx="4"/>
-          </p:nvPr>
-        </p:nvSpPr>
-        <p:spPr>
-          <a:xfrm>
-            <a:off x="0" y="8685213"/>
-            <a:ext cx="2971800" cy="458787"/>
-          </a:xfrm>
-          <a:prstGeom prst="rect">
-            <a:avLst/>
-          </a:prstGeom>
-        </p:spPr>
-        <p:txBody>
-          <a:bodyPr vert="horz" lIns="91440" tIns="45720" rIns="91440" bIns="45720" rtlCol="0" anchor="b"/>
-          <a:lstStyle>
-            <a:lvl1pPr algn="l">
-              <a:defRPr sz="1200"/>
-            </a:lvl1pPr>
-          </a:lstStyle>
-          <a:p>
-            <a:endParaRPr lang="en-US"/>
-          </a:p>
-        </p:txBody>
-      </p:sp>
-      <p:sp>
-        <p:nvSpPr>
-          <p:cNvPr id="7" name="Slide Number Placeholder 6"/>
-          <p:cNvSpPr>
-            <a:spLocks noGrp="1"/>
-          </p:cNvSpPr>
-          <p:nvPr>
-            <p:ph type="sldNum" sz="quarter" idx="5"/>
-          </p:nvPr>
-        </p:nvSpPr>
-        <p:spPr>
-          <a:xfrm>
-            <a:off x="3884613" y="8685213"/>
-            <a:ext cx="2971800" cy="458787"/>
-          </a:xfrm>
-          <a:prstGeom prst="rect">
-            <a:avLst/>
-          </a:prstGeom>
-        </p:spPr>
-        <p:txBody>
-          <a:bodyPr vert="horz" lIns="91440" tIns="45720" rIns="91440" bIns="45720" rtlCol="0" anchor="b"/>
-          <a:lstStyle>
-            <a:lvl1pPr algn="r">
-              <a:defRPr sz="1200"/>
-            </a:lvl1pPr>
-          </a:lstStyle>
-          <a:p>
-            <a:fld id="{CE5E9CC1-C706-0F49-92D6-E571CC5EEA8F}" type="slidenum">
-              <a:rPr lang="en-US"/>
-              <a:t>‹#›</a:t>
-            </a:fld>
-            <a:endParaRPr lang="en-US"/>
-          </a:p>
-        </p:txBody>
-      </p:sp>
     </p:spTree>
     <p:extLst>
       <p:ext uri="{BB962C8B-B14F-4D97-AF65-F5344CB8AC3E}">
-        <p14:creationId xmlns:p14="http://schemas.microsoft.com/office/powerpoint/2010/main" val="1024086991"/>
+        <p14:creationId xmlns:p14="http://schemas.microsoft.com/office/powerpoint/2010/main" val="615949063"/>
       </p:ext>
     </p:extLst>
   </p:cSld>
   <p:clrMap bg1="lt1" tx1="dk1" bg2="lt2" tx2="dk2" accent1="accent1" accent2="accent2" accent3="accent3" accent4="accent4" accent5="accent5" accent6="accent6" hlink="hlink" folHlink="folHlink"/>
   <p:notesStyle>
-    <a:lvl1pPr marL="0" algn="l" defTabSz="914400" rtl="0" eaLnBrk="1" latinLnBrk="0" hangingPunct="1">
+    <a:lvl1pPr marL="0" algn="l" defTabSz="914400" rtl="0" eaLnBrk="1" latinLnBrk="1" hangingPunct="1">
       <a:defRPr sz="1200" kern="1200">
         <a:solidFill>
           <a:schemeClr val="tx1"/>
@@ -382,7 +163,7 @@
         <a:cs typeface="+mn-cs"/>
       </a:defRPr>
     </a:lvl1pPr>
-    <a:lvl2pPr marL="457200" algn="l" defTabSz="914400" rtl="0" eaLnBrk="1" latinLnBrk="0" hangingPunct="1">
+    <a:lvl2pPr marL="457200" algn="l" defTabSz="914400" rtl="0" eaLnBrk="1" latinLnBrk="1" hangingPunct="1">
       <a:defRPr sz="1200" kern="1200">
         <a:solidFill>
           <a:schemeClr val="tx1"/>
@@ -392,7 +173,7 @@
         <a:cs typeface="+mn-cs"/>
       </a:defRPr>
     </a:lvl2pPr>
-    <a:lvl3pPr marL="914400" algn="l" defTabSz="914400" rtl="0" eaLnBrk="1" latinLnBrk="0" hangingPunct="1">
+    <a:lvl3pPr marL="914400" algn="l" defTabSz="914400" rtl="0" eaLnBrk="1" latinLnBrk="1" hangingPunct="1">
       <a:defRPr sz="1200" kern="1200">
         <a:solidFill>
           <a:schemeClr val="tx1"/>
@@ -402,7 +183,7 @@
         <a:cs typeface="+mn-cs"/>
       </a:defRPr>
     </a:lvl3pPr>
-    <a:lvl4pPr marL="1371600" algn="l" defTabSz="914400" rtl="0" eaLnBrk="1" latinLnBrk="0" hangingPunct="1">
+    <a:lvl4pPr marL="1371600" algn="l" defTabSz="914400" rtl="0" eaLnBrk="1" latinLnBrk="1" hangingPunct="1">
       <a:defRPr sz="1200" kern="1200">
         <a:solidFill>
           <a:schemeClr val="tx1"/>
@@ -412,7 +193,7 @@
         <a:cs typeface="+mn-cs"/>
       </a:defRPr>
     </a:lvl4pPr>
-    <a:lvl5pPr marL="1828800" algn="l" defTabSz="914400" rtl="0" eaLnBrk="1" latinLnBrk="0" hangingPunct="1">
+    <a:lvl5pPr marL="1828800" algn="l" defTabSz="914400" rtl="0" eaLnBrk="1" latinLnBrk="1" hangingPunct="1">
       <a:defRPr sz="1200" kern="1200">
         <a:solidFill>
           <a:schemeClr val="tx1"/>
@@ -422,7 +203,7 @@
         <a:cs typeface="+mn-cs"/>
       </a:defRPr>
     </a:lvl5pPr>
-    <a:lvl6pPr marL="2286000" algn="l" defTabSz="914400" rtl="0" eaLnBrk="1" latinLnBrk="0" hangingPunct="1">
+    <a:lvl6pPr marL="2286000" algn="l" defTabSz="914400" rtl="0" eaLnBrk="1" latinLnBrk="1" hangingPunct="1">
       <a:defRPr sz="1200" kern="1200">
         <a:solidFill>
           <a:schemeClr val="tx1"/>
@@ -432,7 +213,7 @@
         <a:cs typeface="+mn-cs"/>
       </a:defRPr>
     </a:lvl6pPr>
-    <a:lvl7pPr marL="2743200" algn="l" defTabSz="914400" rtl="0" eaLnBrk="1" latinLnBrk="0" hangingPunct="1">
+    <a:lvl7pPr marL="2743200" algn="l" defTabSz="914400" rtl="0" eaLnBrk="1" latinLnBrk="1" hangingPunct="1">
       <a:defRPr sz="1200" kern="1200">
         <a:solidFill>
           <a:schemeClr val="tx1"/>
@@ -442,7 +223,7 @@
         <a:cs typeface="+mn-cs"/>
       </a:defRPr>
     </a:lvl7pPr>
-    <a:lvl8pPr marL="3200400" algn="l" defTabSz="914400" rtl="0" eaLnBrk="1" latinLnBrk="0" hangingPunct="1">
+    <a:lvl8pPr marL="3200400" algn="l" defTabSz="914400" rtl="0" eaLnBrk="1" latinLnBrk="1" hangingPunct="1">
       <a:defRPr sz="1200" kern="1200">
         <a:solidFill>
           <a:schemeClr val="tx1"/>
@@ -452,7 +233,7 @@
         <a:cs typeface="+mn-cs"/>
       </a:defRPr>
     </a:lvl8pPr>
-    <a:lvl9pPr marL="3657600" algn="l" defTabSz="914400" rtl="0" eaLnBrk="1" latinLnBrk="0" hangingPunct="1">
+    <a:lvl9pPr marL="3657600" algn="l" defTabSz="914400" rtl="0" eaLnBrk="1" latinLnBrk="1" hangingPunct="1">
       <a:defRPr sz="1200" kern="1200">
         <a:solidFill>
           <a:schemeClr val="tx1"/>
@@ -510,10 +291,6 @@
           <a:bodyPr/>
           <a:lstStyle/>
           <a:p>
-            <a:r>
-              <a:rPr lang="en-US" dirty="0"/>
-              <a:t/>
-            </a:r>
             <a:endParaRPr lang="en-US" dirty="0"/>
           </a:p>
         </p:txBody>
@@ -598,10 +375,6 @@
           <a:bodyPr/>
           <a:lstStyle/>
           <a:p>
-            <a:r>
-              <a:rPr lang="en-US" dirty="0"/>
-              <a:t/>
-            </a:r>
             <a:endParaRPr lang="en-US" dirty="0"/>
           </a:p>
         </p:txBody>
@@ -686,10 +459,6 @@
           <a:bodyPr/>
           <a:lstStyle/>
           <a:p>
-            <a:r>
-              <a:rPr lang="en-US" dirty="0"/>
-              <a:t/>
-            </a:r>
             <a:endParaRPr lang="en-US" dirty="0"/>
           </a:p>
         </p:txBody>
@@ -774,10 +543,6 @@
           <a:bodyPr/>
           <a:lstStyle/>
           <a:p>
-            <a:r>
-              <a:rPr lang="en-US" dirty="0"/>
-              <a:t/>
-            </a:r>
             <a:endParaRPr lang="en-US" dirty="0"/>
           </a:p>
         </p:txBody>
@@ -862,10 +627,6 @@
           <a:bodyPr/>
           <a:lstStyle/>
           <a:p>
-            <a:r>
-              <a:rPr lang="en-US" dirty="0"/>
-              <a:t/>
-            </a:r>
             <a:endParaRPr lang="en-US" dirty="0"/>
           </a:p>
         </p:txBody>
@@ -950,10 +711,6 @@
           <a:bodyPr/>
           <a:lstStyle/>
           <a:p>
-            <a:r>
-              <a:rPr lang="en-US" dirty="0"/>
-              <a:t/>
-            </a:r>
             <a:endParaRPr lang="en-US" dirty="0"/>
           </a:p>
         </p:txBody>
@@ -1038,10 +795,6 @@
           <a:bodyPr/>
           <a:lstStyle/>
           <a:p>
-            <a:r>
-              <a:rPr lang="en-US" dirty="0"/>
-              <a:t/>
-            </a:r>
             <a:endParaRPr lang="en-US" dirty="0"/>
           </a:p>
         </p:txBody>
@@ -1126,10 +879,6 @@
           <a:bodyPr/>
           <a:lstStyle/>
           <a:p>
-            <a:r>
-              <a:rPr lang="en-US" dirty="0"/>
-              <a:t/>
-            </a:r>
             <a:endParaRPr lang="en-US" dirty="0"/>
           </a:p>
         </p:txBody>
@@ -1214,10 +963,6 @@
           <a:bodyPr/>
           <a:lstStyle/>
           <a:p>
-            <a:r>
-              <a:rPr lang="en-US" dirty="0"/>
-              <a:t/>
-            </a:r>
             <a:endParaRPr lang="en-US" dirty="0"/>
           </a:p>
         </p:txBody>
@@ -1302,10 +1047,6 @@
           <a:bodyPr/>
           <a:lstStyle/>
           <a:p>
-            <a:r>
-              <a:rPr lang="en-US" dirty="0"/>
-              <a:t/>
-            </a:r>
             <a:endParaRPr lang="en-US" dirty="0"/>
           </a:p>
         </p:txBody>
@@ -1390,10 +1131,6 @@
           <a:bodyPr/>
           <a:lstStyle/>
           <a:p>
-            <a:r>
-              <a:rPr lang="en-US" dirty="0"/>
-              <a:t/>
-            </a:r>
             <a:endParaRPr lang="en-US" dirty="0"/>
           </a:p>
         </p:txBody>
@@ -1472,6 +1209,7 @@
         <a:solidFill>
           <a:srgbClr val="FFFFFF"/>
         </a:solidFill>
+        <a:effectLst/>
       </p:bgPr>
     </p:bg>
     <p:spTree>
@@ -1509,7 +1247,7 @@
           <a:bodyPr wrap="square" lIns="0" tIns="0" rIns="0" bIns="0" rtlCol="0" anchor="ctr"/>
           <a:lstStyle/>
           <a:p>
-            <a:pPr indent="0" marL="0">
+            <a:pPr marL="0" indent="0">
               <a:buNone/>
             </a:pPr>
             <a:r>
@@ -1530,9 +1268,11 @@
       <p:sp>
         <p:nvSpPr>
           <p:cNvPr id="3" name="Text 1"/>
-          <p:cNvSpPr/>
+          <p:cNvSpPr>
+            <a:spLocks noGrp="1"/>
+          </p:cNvSpPr>
           <p:nvPr>
-            <p:ph idx="101" type="title" hasCustomPrompt="1"/>
+            <p:ph type="title" idx="101" hasCustomPrompt="1"/>
           </p:nvPr>
         </p:nvSpPr>
         <p:spPr>
@@ -1549,7 +1289,7 @@
         <p:txBody>
           <a:bodyPr wrap="square" rtlCol="0"/>
           <a:lstStyle>
-            <a:lvl1pPr algn="l" indent="0" marL="0">
+            <a:lvl1pPr marL="0" indent="0" algn="l">
               <a:buNone/>
               <a:defRPr lang="en-US" sz="2800" b="1" dirty="0">
                 <a:solidFill>
@@ -1562,7 +1302,7 @@
             </a:lvl1pPr>
           </a:lstStyle>
           <a:p>
-            <a:pPr algn="l" indent="0" marL="0">
+            <a:pPr marL="0" indent="0" algn="l">
               <a:buNone/>
             </a:pPr>
             <a:endParaRPr lang="en-US" sz="2800" dirty="0"/>
@@ -1589,7 +1329,7 @@
           </a:prstGeom>
           <a:extLst>
             <a:ext uri="{C572A759-6A51-4108-AA02-DFA0A04FC94B}">
-              <ma14:wrappingTextBoxFlag xmlns:ma14="http://schemas.microsoft.com/office/mac/drawingml/2011/main" val="0"/>
+              <ma14:wrappingTextBoxFlag xmlns:ma14="http://schemas.microsoft.com/office/mac/drawingml/2011/main" xmlns="" val="0"/>
             </a:ext>
           </a:extLst>
         </p:spPr>
@@ -1610,8 +1350,8 @@
           <a:p>
             <a:pPr algn="r"/>
             <a:fld id="{F7021451-1387-4CA6-816F-3879F97B5CBC}" type="slidenum">
-              <a:rPr b="0" lang="en-US"/>
-              <a:t>1002</a:t>
+              <a:rPr lang="en-US" b="0"/>
+              <a:t>‹#›</a:t>
             </a:fld>
             <a:endParaRPr lang="en-US"/>
           </a:p>
@@ -1628,6 +1368,11 @@
 <file path=ppt/slideMasters/slideMaster1.xml><?xml version="1.0" encoding="utf-8"?>
 <p:sldMaster xmlns:a="http://schemas.openxmlformats.org/drawingml/2006/main" xmlns:r="http://schemas.openxmlformats.org/officeDocument/2006/relationships" xmlns:p="http://schemas.openxmlformats.org/presentationml/2006/main">
   <p:cSld>
+    <p:bg>
+      <p:bgRef idx="1001">
+        <a:schemeClr val="bg1"/>
+      </p:bgRef>
+    </p:bg>
     <p:spTree>
       <p:nvGrpSpPr>
         <p:cNvPr id="1" name=""/>
@@ -1662,7 +1407,7 @@
           </a:prstGeom>
           <a:extLst>
             <a:ext uri="{C572A759-6A51-4108-AA02-DFA0A04FC94B}">
-              <ma14:wrappingTextBoxFlag xmlns:ma14="http://schemas.microsoft.com/office/mac/drawingml/2011/main" val="0"/>
+              <ma14:wrappingTextBoxFlag xmlns:ma14="http://schemas.microsoft.com/office/mac/drawingml/2011/main" xmlns="" val="0"/>
             </a:ext>
           </a:extLst>
         </p:spPr>
@@ -1683,8 +1428,8 @@
           <a:p>
             <a:pPr algn="r"/>
             <a:fld id="{F7021451-1387-4CA6-816F-3879F97B5CBC}" type="slidenum">
-              <a:rPr b="0" lang="en-US"/>
-              <a:t>null</a:t>
+              <a:rPr lang="en-US" b="0"/>
+              <a:t>‹#›</a:t>
             </a:fld>
             <a:endParaRPr lang="en-US"/>
           </a:p>
@@ -1959,6 +1704,7 @@
         <a:solidFill>
           <a:srgbClr val="FFFFFF"/>
         </a:solidFill>
+        <a:effectLst/>
       </p:bgPr>
     </p:bg>
     <p:spTree>
@@ -1975,298 +1721,265 @@
           <a:chExt cx="0" cy="0"/>
         </a:xfrm>
       </p:grpSpPr>
+      <p:sp>
+        <p:nvSpPr>
+          <p:cNvPr id="3" name="Text 0"/>
+          <p:cNvSpPr txBox="1"/>
+          <p:nvPr/>
+        </p:nvSpPr>
+        <p:spPr>
+          <a:xfrm>
+            <a:off x="548640" y="1188720"/>
+            <a:ext cx="4572000" cy="320040"/>
+          </a:xfrm>
+          <a:prstGeom prst="rect">
+            <a:avLst/>
+          </a:prstGeom>
+          <a:noFill/>
+          <a:ln/>
+        </p:spPr>
+        <p:txBody>
+          <a:bodyPr wrap="square" lIns="0" tIns="0" rIns="0" bIns="0" rtlCol="0" anchor="t"/>
+          <a:lstStyle/>
+          <a:p>
+            <a:pPr marL="0" indent="0">
+              <a:buNone/>
+            </a:pPr>
+            <a:r>
+              <a:rPr lang="en-US" sz="1200" b="1" dirty="0">
+                <a:solidFill>
+                  <a:srgbClr val="1F6FE0"/>
+                </a:solidFill>
+                <a:latin typeface="Malgun Gothic" pitchFamily="34" charset="0"/>
+                <a:ea typeface="Malgun Gothic" pitchFamily="34" charset="-122"/>
+                <a:cs typeface="Malgun Gothic" pitchFamily="34" charset="-120"/>
+              </a:rPr>
+              <a:t>신규 개발 제안 · HTML5 플레이어블 데모</a:t>
+            </a:r>
+            <a:endParaRPr lang="en-US" sz="1200" dirty="0"/>
+          </a:p>
+        </p:txBody>
+      </p:sp>
+      <p:sp>
+        <p:nvSpPr>
+          <p:cNvPr id="4" name="Text 1"/>
+          <p:cNvSpPr txBox="1"/>
+          <p:nvPr/>
+        </p:nvSpPr>
+        <p:spPr>
+          <a:xfrm>
+            <a:off x="548640" y="1600200"/>
+            <a:ext cx="4754880" cy="914400"/>
+          </a:xfrm>
+          <a:prstGeom prst="rect">
+            <a:avLst/>
+          </a:prstGeom>
+          <a:noFill/>
+          <a:ln/>
+        </p:spPr>
+        <p:txBody>
+          <a:bodyPr wrap="square" lIns="0" tIns="0" rIns="0" bIns="0" rtlCol="0" anchor="t"/>
+          <a:lstStyle/>
+          <a:p>
+            <a:pPr marL="0" indent="0">
+              <a:buNone/>
+            </a:pPr>
+            <a:r>
+              <a:rPr lang="en-US" sz="4400" b="1" dirty="0">
+                <a:solidFill>
+                  <a:srgbClr val="2B2118"/>
+                </a:solidFill>
+                <a:latin typeface="Batang" pitchFamily="34" charset="0"/>
+                <a:ea typeface="Batang" pitchFamily="34" charset="-122"/>
+                <a:cs typeface="Batang" pitchFamily="34" charset="-120"/>
+              </a:rPr>
+              <a:t>스톱 앤 스케치</a:t>
+            </a:r>
+            <a:endParaRPr lang="en-US" sz="4400" dirty="0"/>
+          </a:p>
+        </p:txBody>
+      </p:sp>
+      <p:sp>
+        <p:nvSpPr>
+          <p:cNvPr id="5" name="Text 2"/>
+          <p:cNvSpPr txBox="1"/>
+          <p:nvPr/>
+        </p:nvSpPr>
+        <p:spPr>
+          <a:xfrm>
+            <a:off x="548640" y="2514600"/>
+            <a:ext cx="4572000" cy="365760"/>
+          </a:xfrm>
+          <a:prstGeom prst="rect">
+            <a:avLst/>
+          </a:prstGeom>
+          <a:noFill/>
+          <a:ln/>
+        </p:spPr>
+        <p:txBody>
+          <a:bodyPr wrap="square" lIns="0" tIns="0" rIns="0" bIns="0" rtlCol="0" anchor="t"/>
+          <a:lstStyle/>
+          <a:p>
+            <a:pPr marL="0" indent="0">
+              <a:buNone/>
+            </a:pPr>
+            <a:r>
+              <a:rPr lang="en-US" sz="1600" i="1" dirty="0">
+                <a:solidFill>
+                  <a:srgbClr val="7B6B57"/>
+                </a:solidFill>
+                <a:latin typeface="Batang" pitchFamily="34" charset="0"/>
+                <a:ea typeface="Batang" pitchFamily="34" charset="-122"/>
+                <a:cs typeface="Batang" pitchFamily="34" charset="-120"/>
+              </a:rPr>
+              <a:t>Stop &amp; Sketch (가제)</a:t>
+            </a:r>
+            <a:endParaRPr lang="en-US" sz="1600" dirty="0"/>
+          </a:p>
+        </p:txBody>
+      </p:sp>
+      <p:sp>
+        <p:nvSpPr>
+          <p:cNvPr id="6" name="Text 3"/>
+          <p:cNvSpPr txBox="1"/>
+          <p:nvPr/>
+        </p:nvSpPr>
+        <p:spPr>
+          <a:xfrm>
+            <a:off x="548640" y="3200400"/>
+            <a:ext cx="4572000" cy="1005840"/>
+          </a:xfrm>
+          <a:prstGeom prst="rect">
+            <a:avLst/>
+          </a:prstGeom>
+          <a:noFill/>
+          <a:ln/>
+        </p:spPr>
+        <p:txBody>
+          <a:bodyPr wrap="square" lIns="0" tIns="0" rIns="0" bIns="0" rtlCol="0" anchor="t"/>
+          <a:lstStyle/>
+          <a:p>
+            <a:pPr marL="0" indent="0">
+              <a:buNone/>
+            </a:pPr>
+            <a:r>
+              <a:rPr lang="en-US" sz="2200" dirty="0">
+                <a:solidFill>
+                  <a:srgbClr val="2B2118"/>
+                </a:solidFill>
+                <a:latin typeface="Batang" pitchFamily="34" charset="0"/>
+                <a:ea typeface="Batang" pitchFamily="34" charset="-122"/>
+                <a:cs typeface="Batang" pitchFamily="34" charset="-120"/>
+              </a:rPr>
+              <a:t>멈추고, 그리고,</a:t>
+            </a:r>
+            <a:endParaRPr lang="en-US" sz="2200" dirty="0"/>
+          </a:p>
+          <a:p>
+            <a:pPr marL="0" indent="0">
+              <a:buNone/>
+            </a:pPr>
+            <a:r>
+              <a:rPr lang="en-US" sz="2200" dirty="0">
+                <a:solidFill>
+                  <a:srgbClr val="2B2118"/>
+                </a:solidFill>
+                <a:latin typeface="Batang" pitchFamily="34" charset="0"/>
+                <a:ea typeface="Batang" pitchFamily="34" charset="-122"/>
+                <a:cs typeface="Batang" pitchFamily="34" charset="-120"/>
+              </a:rPr>
+              <a:t>모두 데려가자.</a:t>
+            </a:r>
+            <a:endParaRPr lang="en-US" sz="2200" dirty="0"/>
+          </a:p>
+        </p:txBody>
+      </p:sp>
+      <p:sp>
+        <p:nvSpPr>
+          <p:cNvPr id="7" name="Text 4"/>
+          <p:cNvSpPr txBox="1"/>
+          <p:nvPr/>
+        </p:nvSpPr>
+        <p:spPr>
+          <a:xfrm>
+            <a:off x="548640" y="4754880"/>
+            <a:ext cx="4572000" cy="640080"/>
+          </a:xfrm>
+          <a:prstGeom prst="rect">
+            <a:avLst/>
+          </a:prstGeom>
+          <a:noFill/>
+          <a:ln/>
+        </p:spPr>
+        <p:txBody>
+          <a:bodyPr wrap="square" lIns="0" tIns="0" rIns="0" bIns="0" rtlCol="0" anchor="t"/>
+          <a:lstStyle/>
+          <a:p>
+            <a:pPr marL="0" indent="0">
+              <a:buNone/>
+            </a:pPr>
+            <a:r>
+              <a:rPr lang="en-US" sz="1200" dirty="0">
+                <a:solidFill>
+                  <a:srgbClr val="7B6B57"/>
+                </a:solidFill>
+                <a:latin typeface="Malgun Gothic" pitchFamily="34" charset="0"/>
+                <a:ea typeface="Malgun Gothic" pitchFamily="34" charset="-122"/>
+                <a:cs typeface="Malgun Gothic" pitchFamily="34" charset="-120"/>
+              </a:rPr>
+              <a:t>물리 그리기 퍼즐 액션 · 물방울 무리 이끌기</a:t>
+            </a:r>
+            <a:endParaRPr lang="en-US" sz="1200" dirty="0"/>
+          </a:p>
+          <a:p>
+            <a:pPr marL="0" indent="0">
+              <a:buNone/>
+            </a:pPr>
+            <a:r>
+              <a:rPr lang="en-US" sz="1200" dirty="0">
+                <a:solidFill>
+                  <a:srgbClr val="7B6B57"/>
+                </a:solidFill>
+                <a:latin typeface="Malgun Gothic" pitchFamily="34" charset="0"/>
+                <a:ea typeface="Malgun Gothic" pitchFamily="34" charset="-122"/>
+                <a:cs typeface="Malgun Gothic" pitchFamily="34" charset="-120"/>
+              </a:rPr>
+              <a:t>웹 데모 스테이지 3개 · 2026-10-23</a:t>
+            </a:r>
+            <a:endParaRPr lang="en-US" sz="1200" dirty="0"/>
+          </a:p>
+        </p:txBody>
+      </p:sp>
       <p:pic>
         <p:nvPicPr>
-          <p:cNvPr id="2" name="Image 0" descr="D:\stopsketch\데모제출\2_대표이미지\03_파랑빨강으로_절벽뛰기.png">    </p:cNvPr>
+          <p:cNvPr id="12" name="그림 11">
+            <a:extLst>
+              <a:ext uri="{FF2B5EF4-FFF2-40B4-BE49-F238E27FC236}">
+                <a16:creationId xmlns:a16="http://schemas.microsoft.com/office/drawing/2014/main" id="{969DB60E-12B2-4C62-9399-DFA58508DF6A}"/>
+              </a:ext>
+            </a:extLst>
+          </p:cNvPr>
           <p:cNvPicPr>
             <a:picLocks noChangeAspect="1"/>
           </p:cNvPicPr>
           <p:nvPr/>
         </p:nvPicPr>
         <p:blipFill>
-          <a:blip r:embed="rId1"/>
+          <a:blip r:embed="rId3"/>
           <a:stretch>
             <a:fillRect/>
           </a:stretch>
         </p:blipFill>
         <p:spPr>
           <a:xfrm>
-            <a:off x="5242255" y="1474470"/>
-            <a:ext cx="6949440" cy="3909060"/>
+            <a:off x="4412973" y="1129805"/>
+            <a:ext cx="7339718" cy="4127995"/>
           </a:xfrm>
           <a:prstGeom prst="rect">
             <a:avLst/>
           </a:prstGeom>
         </p:spPr>
       </p:pic>
-      <p:sp>
-        <p:nvSpPr>
-          <p:cNvPr id="3" name="Text 0"/>
-          <p:cNvSpPr txBox="1"/>
-          <p:nvPr/>
-        </p:nvSpPr>
-        <p:spPr>
-          <a:xfrm>
-            <a:off x="548640" y="1188720"/>
-            <a:ext cx="4572000" cy="320040"/>
-          </a:xfrm>
-          <a:prstGeom prst="rect">
-            <a:avLst/>
-          </a:prstGeom>
-          <a:noFill/>
-          <a:ln/>
-        </p:spPr>
-        <p:txBody>
-          <a:bodyPr wrap="square" lIns="0" tIns="0" rIns="0" bIns="0" rtlCol="0" anchor="t"/>
-          <a:lstStyle/>
-          <a:p>
-            <a:pPr indent="0" marL="0">
-              <a:buNone/>
-            </a:pPr>
-            <a:r>
-              <a:rPr lang="en-US" sz="1200" b="1" dirty="0">
-                <a:solidFill>
-                  <a:srgbClr val="1F6FE0"/>
-                </a:solidFill>
-                <a:latin typeface="Malgun Gothic" pitchFamily="34" charset="0"/>
-                <a:ea typeface="Malgun Gothic" pitchFamily="34" charset="-122"/>
-                <a:cs typeface="Malgun Gothic" pitchFamily="34" charset="-120"/>
-              </a:rPr>
-              <a:t>신규 개발 제안 · HTML5 플레이어블 데모</a:t>
-            </a:r>
-            <a:endParaRPr lang="en-US" sz="1200" dirty="0"/>
-          </a:p>
-        </p:txBody>
-      </p:sp>
-      <p:sp>
-        <p:nvSpPr>
-          <p:cNvPr id="4" name="Text 1"/>
-          <p:cNvSpPr txBox="1"/>
-          <p:nvPr/>
-        </p:nvSpPr>
-        <p:spPr>
-          <a:xfrm>
-            <a:off x="548640" y="1600200"/>
-            <a:ext cx="4754880" cy="914400"/>
-          </a:xfrm>
-          <a:prstGeom prst="rect">
-            <a:avLst/>
-          </a:prstGeom>
-          <a:noFill/>
-          <a:ln/>
-        </p:spPr>
-        <p:txBody>
-          <a:bodyPr wrap="square" lIns="0" tIns="0" rIns="0" bIns="0" rtlCol="0" anchor="t"/>
-          <a:lstStyle/>
-          <a:p>
-            <a:pPr indent="0" marL="0">
-              <a:buNone/>
-            </a:pPr>
-            <a:r>
-              <a:rPr lang="en-US" sz="4400" b="1" dirty="0">
-                <a:solidFill>
-                  <a:srgbClr val="2B2118"/>
-                </a:solidFill>
-                <a:latin typeface="Batang" pitchFamily="34" charset="0"/>
-                <a:ea typeface="Batang" pitchFamily="34" charset="-122"/>
-                <a:cs typeface="Batang" pitchFamily="34" charset="-120"/>
-              </a:rPr>
-              <a:t>스톱 앤 스케치</a:t>
-            </a:r>
-            <a:endParaRPr lang="en-US" sz="4400" dirty="0"/>
-          </a:p>
-        </p:txBody>
-      </p:sp>
-      <p:sp>
-        <p:nvSpPr>
-          <p:cNvPr id="5" name="Text 2"/>
-          <p:cNvSpPr txBox="1"/>
-          <p:nvPr/>
-        </p:nvSpPr>
-        <p:spPr>
-          <a:xfrm>
-            <a:off x="548640" y="2514600"/>
-            <a:ext cx="4572000" cy="365760"/>
-          </a:xfrm>
-          <a:prstGeom prst="rect">
-            <a:avLst/>
-          </a:prstGeom>
-          <a:noFill/>
-          <a:ln/>
-        </p:spPr>
-        <p:txBody>
-          <a:bodyPr wrap="square" lIns="0" tIns="0" rIns="0" bIns="0" rtlCol="0" anchor="t"/>
-          <a:lstStyle/>
-          <a:p>
-            <a:pPr indent="0" marL="0">
-              <a:buNone/>
-            </a:pPr>
-            <a:r>
-              <a:rPr lang="en-US" sz="1600" i="1" dirty="0">
-                <a:solidFill>
-                  <a:srgbClr val="7B6B57"/>
-                </a:solidFill>
-                <a:latin typeface="Batang" pitchFamily="34" charset="0"/>
-                <a:ea typeface="Batang" pitchFamily="34" charset="-122"/>
-                <a:cs typeface="Batang" pitchFamily="34" charset="-120"/>
-              </a:rPr>
-              <a:t>Stop &amp; Sketch (가제)</a:t>
-            </a:r>
-            <a:endParaRPr lang="en-US" sz="1600" dirty="0"/>
-          </a:p>
-        </p:txBody>
-      </p:sp>
-      <p:sp>
-        <p:nvSpPr>
-          <p:cNvPr id="6" name="Text 3"/>
-          <p:cNvSpPr txBox="1"/>
-          <p:nvPr/>
-        </p:nvSpPr>
-        <p:spPr>
-          <a:xfrm>
-            <a:off x="548640" y="3200400"/>
-            <a:ext cx="4572000" cy="1005840"/>
-          </a:xfrm>
-          <a:prstGeom prst="rect">
-            <a:avLst/>
-          </a:prstGeom>
-          <a:noFill/>
-          <a:ln/>
-        </p:spPr>
-        <p:txBody>
-          <a:bodyPr wrap="square" lIns="0" tIns="0" rIns="0" bIns="0" rtlCol="0" anchor="t"/>
-          <a:lstStyle/>
-          <a:p>
-            <a:pPr indent="0" marL="0">
-              <a:buNone/>
-            </a:pPr>
-            <a:r>
-              <a:rPr lang="en-US" sz="2200" dirty="0">
-                <a:solidFill>
-                  <a:srgbClr val="2B2118"/>
-                </a:solidFill>
-                <a:latin typeface="Batang" pitchFamily="34" charset="0"/>
-                <a:ea typeface="Batang" pitchFamily="34" charset="-122"/>
-                <a:cs typeface="Batang" pitchFamily="34" charset="-120"/>
-              </a:rPr>
-              <a:t>멈추고, 그리고,</a:t>
-            </a:r>
-            <a:endParaRPr lang="en-US" sz="2200" dirty="0"/>
-          </a:p>
-          <a:p>
-            <a:pPr indent="0" marL="0">
-              <a:buNone/>
-            </a:pPr>
-            <a:r>
-              <a:rPr lang="en-US" sz="2200" dirty="0">
-                <a:solidFill>
-                  <a:srgbClr val="2B2118"/>
-                </a:solidFill>
-                <a:latin typeface="Batang" pitchFamily="34" charset="0"/>
-                <a:ea typeface="Batang" pitchFamily="34" charset="-122"/>
-                <a:cs typeface="Batang" pitchFamily="34" charset="-120"/>
-              </a:rPr>
-              <a:t>모두 데려가자.</a:t>
-            </a:r>
-            <a:endParaRPr lang="en-US" sz="2200" dirty="0"/>
-          </a:p>
-        </p:txBody>
-      </p:sp>
-      <p:sp>
-        <p:nvSpPr>
-          <p:cNvPr id="7" name="Text 4"/>
-          <p:cNvSpPr txBox="1"/>
-          <p:nvPr/>
-        </p:nvSpPr>
-        <p:spPr>
-          <a:xfrm>
-            <a:off x="548640" y="4754880"/>
-            <a:ext cx="4572000" cy="640080"/>
-          </a:xfrm>
-          <a:prstGeom prst="rect">
-            <a:avLst/>
-          </a:prstGeom>
-          <a:noFill/>
-          <a:ln/>
-        </p:spPr>
-        <p:txBody>
-          <a:bodyPr wrap="square" lIns="0" tIns="0" rIns="0" bIns="0" rtlCol="0" anchor="t"/>
-          <a:lstStyle/>
-          <a:p>
-            <a:pPr indent="0" marL="0">
-              <a:buNone/>
-            </a:pPr>
-            <a:r>
-              <a:rPr lang="en-US" sz="1200" dirty="0">
-                <a:solidFill>
-                  <a:srgbClr val="7B6B57"/>
-                </a:solidFill>
-                <a:latin typeface="Malgun Gothic" pitchFamily="34" charset="0"/>
-                <a:ea typeface="Malgun Gothic" pitchFamily="34" charset="-122"/>
-                <a:cs typeface="Malgun Gothic" pitchFamily="34" charset="-120"/>
-              </a:rPr>
-              <a:t>물리 그리기 퍼즐 액션 · 물방울 무리 이끌기</a:t>
-            </a:r>
-            <a:endParaRPr lang="en-US" sz="1200" dirty="0"/>
-          </a:p>
-          <a:p>
-            <a:pPr indent="0" marL="0">
-              <a:buNone/>
-            </a:pPr>
-            <a:r>
-              <a:rPr lang="en-US" sz="1200" dirty="0">
-                <a:solidFill>
-                  <a:srgbClr val="7B6B57"/>
-                </a:solidFill>
-                <a:latin typeface="Malgun Gothic" pitchFamily="34" charset="0"/>
-                <a:ea typeface="Malgun Gothic" pitchFamily="34" charset="-122"/>
-                <a:cs typeface="Malgun Gothic" pitchFamily="34" charset="-120"/>
-              </a:rPr>
-              <a:t>웹 데모 스테이지 3개 · 2026-10-22</a:t>
-            </a:r>
-            <a:endParaRPr lang="en-US" sz="1200" dirty="0"/>
-          </a:p>
-        </p:txBody>
-      </p:sp>
-      <p:sp>
-        <p:nvSpPr>
-          <p:cNvPr id="8" name="Text 5"/>
-          <p:cNvSpPr txBox="1"/>
-          <p:nvPr/>
-        </p:nvSpPr>
-        <p:spPr>
-          <a:xfrm>
-            <a:off x="5242255" y="5456682"/>
-            <a:ext cx="6400800" cy="274320"/>
-          </a:xfrm>
-          <a:prstGeom prst="rect">
-            <a:avLst/>
-          </a:prstGeom>
-          <a:noFill/>
-          <a:ln/>
-        </p:spPr>
-        <p:txBody>
-          <a:bodyPr wrap="square" lIns="0" tIns="0" rIns="0" bIns="0" rtlCol="0" anchor="t"/>
-          <a:lstStyle/>
-          <a:p>
-            <a:pPr algn="r" indent="0" marL="0">
-              <a:buNone/>
-            </a:pPr>
-            <a:r>
-              <a:rPr lang="en-US" sz="900" dirty="0">
-                <a:solidFill>
-                  <a:srgbClr val="7B6B57"/>
-                </a:solidFill>
-                <a:latin typeface="Malgun Gothic" pitchFamily="34" charset="0"/>
-                <a:ea typeface="Malgun Gothic" pitchFamily="34" charset="-122"/>
-                <a:cs typeface="Malgun Gothic" pitchFamily="34" charset="-120"/>
-              </a:rPr>
-              <a:t>오른쪽 그림: 실제 데모 화면</a:t>
-            </a:r>
-            <a:endParaRPr lang="en-US" sz="900" dirty="0"/>
-          </a:p>
-        </p:txBody>
-      </p:sp>
     </p:spTree>
   </p:cSld>
   <p:clrMapOvr>
@@ -2295,9 +2008,11 @@
       <p:sp>
         <p:nvSpPr>
           <p:cNvPr id="2" name="Text 1"/>
-          <p:cNvSpPr/>
+          <p:cNvSpPr>
+            <a:spLocks noGrp="1"/>
+          </p:cNvSpPr>
           <p:nvPr>
-            <p:ph idx="101" type="title" hasCustomPrompt="1"/>
+            <p:ph type="title" idx="101" hasCustomPrompt="1"/>
           </p:nvPr>
         </p:nvSpPr>
         <p:spPr>
@@ -2315,7 +2030,7 @@
           <a:bodyPr wrap="square" lIns="0" tIns="0" rIns="0" bIns="0" rtlCol="0" anchor="ctr"/>
           <a:lstStyle/>
           <a:p>
-            <a:pPr algn="l" indent="0" marL="0">
+            <a:pPr marL="0" indent="0" algn="l">
               <a:buNone/>
             </a:pPr>
             <a:r>
@@ -2381,7 +2096,7 @@
           <a:bodyPr wrap="square" lIns="0" tIns="0" rIns="0" bIns="0" rtlCol="0" anchor="t"/>
           <a:lstStyle/>
           <a:p>
-            <a:pPr indent="0" marL="0">
+            <a:pPr marL="0" indent="0">
               <a:buNone/>
             </a:pPr>
             <a:r>
@@ -2468,7 +2183,7 @@
           <a:bodyPr wrap="square" lIns="0" tIns="0" rIns="0" bIns="0" rtlCol="0" anchor="t"/>
           <a:lstStyle/>
           <a:p>
-            <a:pPr indent="0" marL="0">
+            <a:pPr marL="0" indent="0">
               <a:buNone/>
             </a:pPr>
             <a:r>
@@ -2507,7 +2222,7 @@
           <a:bodyPr wrap="square" lIns="0" tIns="0" rIns="0" bIns="0" rtlCol="0" anchor="t"/>
           <a:lstStyle/>
           <a:p>
-            <a:pPr indent="0" marL="0">
+            <a:pPr marL="0" indent="0">
               <a:buNone/>
             </a:pPr>
             <a:r>
@@ -2571,7 +2286,7 @@
           <a:bodyPr wrap="square" lIns="0" tIns="0" rIns="0" bIns="0" rtlCol="0" anchor="t"/>
           <a:lstStyle/>
           <a:p>
-            <a:pPr indent="0" marL="0">
+            <a:pPr marL="0" indent="0">
               <a:buNone/>
             </a:pPr>
             <a:r>
@@ -2610,7 +2325,7 @@
           <a:bodyPr wrap="square" lIns="0" tIns="0" rIns="0" bIns="0" rtlCol="0" anchor="t"/>
           <a:lstStyle/>
           <a:p>
-            <a:pPr indent="0" marL="0">
+            <a:pPr marL="0" indent="0">
               <a:buNone/>
             </a:pPr>
             <a:r>
@@ -2674,7 +2389,7 @@
           <a:bodyPr wrap="square" lIns="0" tIns="0" rIns="0" bIns="0" rtlCol="0" anchor="t"/>
           <a:lstStyle/>
           <a:p>
-            <a:pPr indent="0" marL="0">
+            <a:pPr marL="0" indent="0">
               <a:buNone/>
             </a:pPr>
             <a:r>
@@ -2713,7 +2428,7 @@
           <a:bodyPr wrap="square" lIns="0" tIns="0" rIns="0" bIns="0" rtlCol="0" anchor="t"/>
           <a:lstStyle/>
           <a:p>
-            <a:pPr indent="0" marL="0">
+            <a:pPr marL="0" indent="0">
               <a:buNone/>
             </a:pPr>
             <a:r>
@@ -2777,7 +2492,7 @@
           <a:bodyPr wrap="square" lIns="0" tIns="0" rIns="0" bIns="0" rtlCol="0" anchor="t"/>
           <a:lstStyle/>
           <a:p>
-            <a:pPr indent="0" marL="0">
+            <a:pPr marL="0" indent="0">
               <a:buNone/>
             </a:pPr>
             <a:r>
@@ -2816,7 +2531,7 @@
           <a:bodyPr wrap="square" lIns="0" tIns="0" rIns="0" bIns="0" rtlCol="0" anchor="t"/>
           <a:lstStyle/>
           <a:p>
-            <a:pPr indent="0" marL="0">
+            <a:pPr marL="0" indent="0">
               <a:buNone/>
             </a:pPr>
             <a:r>
@@ -2882,7 +2597,7 @@
           <a:bodyPr wrap="square" lIns="0" tIns="0" rIns="0" bIns="0" rtlCol="0" anchor="t"/>
           <a:lstStyle/>
           <a:p>
-            <a:pPr indent="0" marL="0">
+            <a:pPr marL="0" indent="0">
               <a:buNone/>
             </a:pPr>
             <a:r>
@@ -2946,7 +2661,7 @@
           <a:bodyPr wrap="square" lIns="0" tIns="0" rIns="0" bIns="0" rtlCol="0" anchor="ctr"/>
           <a:lstStyle/>
           <a:p>
-            <a:pPr algn="ctr" indent="0" marL="0">
+            <a:pPr marL="0" indent="0" algn="ctr">
               <a:buNone/>
             </a:pPr>
             <a:r>
@@ -2985,7 +2700,7 @@
           <a:bodyPr wrap="square" lIns="0" tIns="0" rIns="0" bIns="0" rtlCol="0" anchor="ctr"/>
           <a:lstStyle/>
           <a:p>
-            <a:pPr indent="0" marL="0">
+            <a:pPr marL="0" indent="0">
               <a:buNone/>
             </a:pPr>
             <a:r>
@@ -2999,9 +2714,6 @@
               </a:rPr>
               <a:t>기획 · 레벨</a:t>
             </a:r>
-            <a:pPr indent="0" marL="0">
-              <a:buNone/>
-            </a:pPr>
             <a:r>
               <a:rPr lang="en-US" sz="1100" dirty="0">
                 <a:solidFill>
@@ -3063,7 +2775,7 @@
           <a:bodyPr wrap="square" lIns="0" tIns="0" rIns="0" bIns="0" rtlCol="0" anchor="ctr"/>
           <a:lstStyle/>
           <a:p>
-            <a:pPr algn="ctr" indent="0" marL="0">
+            <a:pPr marL="0" indent="0" algn="ctr">
               <a:buNone/>
             </a:pPr>
             <a:r>
@@ -3102,7 +2814,7 @@
           <a:bodyPr wrap="square" lIns="0" tIns="0" rIns="0" bIns="0" rtlCol="0" anchor="ctr"/>
           <a:lstStyle/>
           <a:p>
-            <a:pPr indent="0" marL="0">
+            <a:pPr marL="0" indent="0">
               <a:buNone/>
             </a:pPr>
             <a:r>
@@ -3116,9 +2828,6 @@
               </a:rPr>
               <a:t>클라이언트</a:t>
             </a:r>
-            <a:pPr indent="0" marL="0">
-              <a:buNone/>
-            </a:pPr>
             <a:r>
               <a:rPr lang="en-US" sz="1100" dirty="0">
                 <a:solidFill>
@@ -3180,7 +2889,7 @@
           <a:bodyPr wrap="square" lIns="0" tIns="0" rIns="0" bIns="0" rtlCol="0" anchor="ctr"/>
           <a:lstStyle/>
           <a:p>
-            <a:pPr algn="ctr" indent="0" marL="0">
+            <a:pPr marL="0" indent="0" algn="ctr">
               <a:buNone/>
             </a:pPr>
             <a:r>
@@ -3219,7 +2928,7 @@
           <a:bodyPr wrap="square" lIns="0" tIns="0" rIns="0" bIns="0" rtlCol="0" anchor="ctr"/>
           <a:lstStyle/>
           <a:p>
-            <a:pPr indent="0" marL="0">
+            <a:pPr marL="0" indent="0">
               <a:buNone/>
             </a:pPr>
             <a:r>
@@ -3233,9 +2942,6 @@
               </a:rPr>
               <a:t>아트 · UI</a:t>
             </a:r>
-            <a:pPr indent="0" marL="0">
-              <a:buNone/>
-            </a:pPr>
             <a:r>
               <a:rPr lang="en-US" sz="1100" dirty="0">
                 <a:solidFill>
@@ -3299,7 +3005,7 @@
           <a:bodyPr wrap="square" lIns="0" tIns="0" rIns="0" bIns="0" rtlCol="0" anchor="t"/>
           <a:lstStyle/>
           <a:p>
-            <a:pPr indent="0" marL="0">
+            <a:pPr marL="0" indent="0">
               <a:buNone/>
             </a:pPr>
             <a:r>
@@ -3404,7 +3110,7 @@
       </p:sp>
       <p:sp>
         <p:nvSpPr>
-          <p:cNvPr id="25" name="Slide Number Placeholder 0"/>
+          <p:cNvPr id="32" name="Slide Number Placeholder 0"/>
           <p:cNvSpPr>
             <a:spLocks noGrp="1"/>
           </p:cNvSpPr>
@@ -3422,7 +3128,7 @@
           </a:prstGeom>
           <a:extLst>
             <a:ext uri="{C572A759-6A51-4108-AA02-DFA0A04FC94B}">
-              <ma14:wrappingTextBoxFlag xmlns:ma14="http://schemas.microsoft.com/office/mac/drawingml/2011/main" val="0"/>
+              <ma14:wrappingTextBoxFlag xmlns:ma14="http://schemas.microsoft.com/office/mac/drawingml/2011/main" xmlns="" val="0"/>
             </a:ext>
           </a:extLst>
         </p:spPr>
@@ -3443,7 +3149,7 @@
           <a:p>
             <a:pPr algn="r"/>
             <a:fld id="{F7021451-1387-4CA6-816F-3879F97B5CBC}" type="slidenum">
-              <a:rPr b="0" lang="en-US"/>
+              <a:rPr lang="en-US" b="0"/>
               <a:t>10</a:t>
             </a:fld>
             <a:endParaRPr lang="en-US"/>
@@ -3478,9 +3184,11 @@
       <p:sp>
         <p:nvSpPr>
           <p:cNvPr id="2" name="Text 1"/>
-          <p:cNvSpPr/>
+          <p:cNvSpPr>
+            <a:spLocks noGrp="1"/>
+          </p:cNvSpPr>
           <p:nvPr>
-            <p:ph idx="101" type="title" hasCustomPrompt="1"/>
+            <p:ph type="title" idx="101" hasCustomPrompt="1"/>
           </p:nvPr>
         </p:nvSpPr>
         <p:spPr>
@@ -3498,7 +3206,7 @@
           <a:bodyPr wrap="square" lIns="0" tIns="0" rIns="0" bIns="0" rtlCol="0" anchor="ctr"/>
           <a:lstStyle/>
           <a:p>
-            <a:pPr algn="l" indent="0" marL="0">
+            <a:pPr marL="0" indent="0" algn="l">
               <a:buNone/>
             </a:pPr>
             <a:r>
@@ -3518,14 +3226,14 @@
       </p:sp>
       <p:pic>
         <p:nvPicPr>
-          <p:cNvPr id="3" name="Image 0" descr="D:\stopsketch\데모제출\2_대표이미지\06_줄지어_튕겨올라_공중물방울_깨우기.png">    </p:cNvPr>
+          <p:cNvPr id="3" name="Image 0" descr="D:\stopsketch\데모제출\2_대표이미지\06_줄지어_튕겨올라_공중물방울_깨우기.png"/>
           <p:cNvPicPr>
             <a:picLocks noChangeAspect="1"/>
           </p:cNvPicPr>
           <p:nvPr/>
         </p:nvPicPr>
         <p:blipFill>
-          <a:blip r:embed="rId1"/>
+          <a:blip r:embed="rId3"/>
           <a:stretch>
             <a:fillRect/>
           </a:stretch>
@@ -3583,7 +3291,7 @@
           <a:bodyPr wrap="square" lIns="0" tIns="0" rIns="0" bIns="0" rtlCol="0" anchor="t"/>
           <a:lstStyle/>
           <a:p>
-            <a:pPr indent="0" marL="0">
+            <a:pPr marL="0" indent="0">
               <a:buNone/>
             </a:pPr>
             <a:r>
@@ -3647,7 +3355,7 @@
           <a:bodyPr wrap="square" lIns="0" tIns="0" rIns="0" bIns="0" rtlCol="0" anchor="ctr"/>
           <a:lstStyle/>
           <a:p>
-            <a:pPr algn="ctr" indent="0" marL="0">
+            <a:pPr marL="0" indent="0" algn="ctr">
               <a:buNone/>
             </a:pPr>
             <a:r>
@@ -3686,7 +3394,7 @@
           <a:bodyPr wrap="square" lIns="0" tIns="0" rIns="0" bIns="0" rtlCol="0" anchor="t"/>
           <a:lstStyle/>
           <a:p>
-            <a:pPr indent="0" marL="0">
+            <a:pPr marL="0" indent="0">
               <a:buNone/>
             </a:pPr>
             <a:r>
@@ -3725,7 +3433,7 @@
           <a:bodyPr wrap="square" lIns="0" tIns="0" rIns="0" bIns="0" rtlCol="0" anchor="t"/>
           <a:lstStyle/>
           <a:p>
-            <a:pPr indent="0" marL="0">
+            <a:pPr marL="0" indent="0">
               <a:buNone/>
             </a:pPr>
             <a:r>
@@ -3789,7 +3497,7 @@
           <a:bodyPr wrap="square" lIns="0" tIns="0" rIns="0" bIns="0" rtlCol="0" anchor="ctr"/>
           <a:lstStyle/>
           <a:p>
-            <a:pPr algn="ctr" indent="0" marL="0">
+            <a:pPr marL="0" indent="0" algn="ctr">
               <a:buNone/>
             </a:pPr>
             <a:r>
@@ -3828,7 +3536,7 @@
           <a:bodyPr wrap="square" lIns="0" tIns="0" rIns="0" bIns="0" rtlCol="0" anchor="t"/>
           <a:lstStyle/>
           <a:p>
-            <a:pPr indent="0" marL="0">
+            <a:pPr marL="0" indent="0">
               <a:buNone/>
             </a:pPr>
             <a:r>
@@ -3867,7 +3575,7 @@
           <a:bodyPr wrap="square" lIns="0" tIns="0" rIns="0" bIns="0" rtlCol="0" anchor="t"/>
           <a:lstStyle/>
           <a:p>
-            <a:pPr indent="0" marL="0">
+            <a:pPr marL="0" indent="0">
               <a:buNone/>
             </a:pPr>
             <a:r>
@@ -3931,7 +3639,7 @@
           <a:bodyPr wrap="square" lIns="0" tIns="0" rIns="0" bIns="0" rtlCol="0" anchor="ctr"/>
           <a:lstStyle/>
           <a:p>
-            <a:pPr algn="ctr" indent="0" marL="0">
+            <a:pPr marL="0" indent="0" algn="ctr">
               <a:buNone/>
             </a:pPr>
             <a:r>
@@ -3970,7 +3678,7 @@
           <a:bodyPr wrap="square" lIns="0" tIns="0" rIns="0" bIns="0" rtlCol="0" anchor="t"/>
           <a:lstStyle/>
           <a:p>
-            <a:pPr indent="0" marL="0">
+            <a:pPr marL="0" indent="0">
               <a:buNone/>
             </a:pPr>
             <a:r>
@@ -4009,7 +3717,7 @@
           <a:bodyPr wrap="square" lIns="0" tIns="0" rIns="0" bIns="0" rtlCol="0" anchor="t"/>
           <a:lstStyle/>
           <a:p>
-            <a:pPr indent="0" marL="0">
+            <a:pPr marL="0" indent="0">
               <a:buNone/>
             </a:pPr>
             <a:r>
@@ -4075,7 +3783,7 @@
           <a:bodyPr wrap="square" lIns="0" tIns="0" rIns="0" bIns="0" rtlCol="0" anchor="ctr"/>
           <a:lstStyle/>
           <a:p>
-            <a:pPr indent="0" marL="0">
+            <a:pPr marL="0" indent="0">
               <a:buNone/>
             </a:pPr>
             <a:r>
@@ -4113,7 +3821,7 @@
           </a:prstGeom>
           <a:extLst>
             <a:ext uri="{C572A759-6A51-4108-AA02-DFA0A04FC94B}">
-              <ma14:wrappingTextBoxFlag xmlns:ma14="http://schemas.microsoft.com/office/mac/drawingml/2011/main" val="0"/>
+              <ma14:wrappingTextBoxFlag xmlns:ma14="http://schemas.microsoft.com/office/mac/drawingml/2011/main" xmlns="" val="0"/>
             </a:ext>
           </a:extLst>
         </p:spPr>
@@ -4134,7 +3842,7 @@
           <a:p>
             <a:pPr algn="r"/>
             <a:fld id="{F7021451-1387-4CA6-816F-3879F97B5CBC}" type="slidenum">
-              <a:rPr b="0" lang="en-US"/>
+              <a:rPr lang="en-US" b="0"/>
               <a:t>11</a:t>
             </a:fld>
             <a:endParaRPr lang="en-US"/>
@@ -4169,9 +3877,11 @@
       <p:sp>
         <p:nvSpPr>
           <p:cNvPr id="2" name="Text 1"/>
-          <p:cNvSpPr/>
+          <p:cNvSpPr>
+            <a:spLocks noGrp="1"/>
+          </p:cNvSpPr>
           <p:nvPr>
-            <p:ph idx="101" type="title" hasCustomPrompt="1"/>
+            <p:ph type="title" idx="101" hasCustomPrompt="1"/>
           </p:nvPr>
         </p:nvSpPr>
         <p:spPr>
@@ -4189,19 +3899,12 @@
           <a:bodyPr wrap="square" lIns="0" tIns="0" rIns="0" bIns="0" rtlCol="0" anchor="ctr"/>
           <a:lstStyle/>
           <a:p>
-            <a:pPr algn="l" indent="0" marL="0">
+            <a:pPr marL="0" indent="0" algn="l">
               <a:buNone/>
             </a:pPr>
             <a:r>
-              <a:rPr lang="en-US" sz="2800" b="1" dirty="0">
-                <a:solidFill>
-                  <a:srgbClr val="2B2118"/>
-                </a:solidFill>
-                <a:latin typeface="Batang" pitchFamily="34" charset="0"/>
-                <a:ea typeface="Batang" pitchFamily="34" charset="-122"/>
-                <a:cs typeface="Batang" pitchFamily="34" charset="-120"/>
-              </a:rPr>
-              <a:t>한눈에 보는 게임</a:t>
+              <a:rPr lang="ko-KR" altLang="en-US" dirty="0"/>
+              <a:t>개요</a:t>
             </a:r>
             <a:endParaRPr lang="en-US" sz="2800" dirty="0"/>
           </a:p>
@@ -4255,7 +3958,7 @@
           <a:bodyPr wrap="square" lIns="0" tIns="0" rIns="0" bIns="0" rtlCol="0" anchor="t"/>
           <a:lstStyle/>
           <a:p>
-            <a:pPr indent="0" marL="0">
+            <a:pPr marL="0" indent="0">
               <a:buNone/>
             </a:pPr>
             <a:r>
@@ -4294,7 +3997,7 @@
           <a:bodyPr wrap="square" lIns="0" tIns="0" rIns="0" bIns="0" rtlCol="0" anchor="t"/>
           <a:lstStyle/>
           <a:p>
-            <a:pPr indent="0" marL="0">
+            <a:pPr marL="0" indent="0">
               <a:buNone/>
             </a:pPr>
             <a:r>
@@ -4314,37 +4017,49 @@
       </p:sp>
       <p:graphicFrame>
         <p:nvGraphicFramePr>
-          <p:cNvPr id="3" name="Table 0"/>
+          <p:cNvPr id="6" name="Table 0"/>
           <p:cNvGraphicFramePr>
             <a:graphicFrameLocks noGrp="1"/>
           </p:cNvGraphicFramePr>
           <p:nvPr>
             <p:extLst>
               <p:ext uri="{D42A27DB-BD31-4B8C-83A1-F6EECF244321}">
-                <p14:modId xmlns:p14="http://schemas.microsoft.com/office/powerpoint/2010/main" val="1579011935"/>
+                <p14:modId xmlns:p14="http://schemas.microsoft.com/office/powerpoint/2010/main" val="3266759977"/>
               </p:ext>
             </p:extLst>
           </p:nvPr>
         </p:nvGraphicFramePr>
         <p:xfrm>
-          <a:off x="548640" y="2331720"/>
-          <a:ext cx="6035040" cy="914400"/>
+          <a:off x="222687" y="2286000"/>
+          <a:ext cx="5593742" cy="2792896"/>
         </p:xfrm>
         <a:graphic>
           <a:graphicData uri="http://schemas.openxmlformats.org/drawingml/2006/table">
             <a:tbl>
               <a:tblPr/>
               <a:tblGrid>
-                <a:gridCol w="1097280"/>
-                <a:gridCol w="4937760"/>
+                <a:gridCol w="1017045">
+                  <a:extLst>
+                    <a:ext uri="{9D8B030D-6E8A-4147-A177-3AD203B41FA5}">
+                      <a16:colId xmlns:a16="http://schemas.microsoft.com/office/drawing/2014/main" val="20000"/>
+                    </a:ext>
+                  </a:extLst>
+                </a:gridCol>
+                <a:gridCol w="4576697">
+                  <a:extLst>
+                    <a:ext uri="{9D8B030D-6E8A-4147-A177-3AD203B41FA5}">
+                      <a16:colId xmlns:a16="http://schemas.microsoft.com/office/drawing/2014/main" val="20001"/>
+                    </a:ext>
+                  </a:extLst>
+                </a:gridCol>
               </a:tblGrid>
-              <a:tr h="548640">
+              <a:tr h="556687">
                 <a:tc>
                   <a:txBody>
                     <a:bodyPr/>
                     <a:lstStyle/>
                     <a:p>
-                      <a:pPr indent="0" marL="0">
+                      <a:pPr marL="0" indent="0">
                         <a:buNone/>
                       </a:pPr>
                       <a:r>
@@ -4365,7 +4080,7 @@
                       </a:endParaRPr>
                     </a:p>
                   </a:txBody>
-                  <a:tcPr marL="91440" marR="91440" marT="36576" marB="36576" anchor="ctr">
+                  <a:tcPr marT="36576" marB="36576" anchor="ctr">
                     <a:lnL w="9525" cap="flat" cmpd="sng" algn="ctr">
                       <a:solidFill>
                         <a:srgbClr val="D8C8A4"/>
@@ -4412,7 +4127,7 @@
                     <a:bodyPr/>
                     <a:lstStyle/>
                     <a:p>
-                      <a:pPr indent="0" marL="0">
+                      <a:pPr marL="0" indent="0">
                         <a:buNone/>
                       </a:pPr>
                       <a:r>
@@ -4433,7 +4148,7 @@
                       </a:endParaRPr>
                     </a:p>
                   </a:txBody>
-                  <a:tcPr marL="91440" marR="91440" marT="36576" marB="36576" anchor="ctr">
+                  <a:tcPr marT="36576" marB="36576" anchor="ctr">
                     <a:lnL w="9525" cap="flat" cmpd="sng" algn="ctr">
                       <a:solidFill>
                         <a:srgbClr val="D8C8A4"/>
@@ -4472,14 +4187,19 @@
                     </a:lnB>
                   </a:tcPr>
                 </a:tc>
+                <a:extLst>
+                  <a:ext uri="{0D108BD9-81ED-4DB2-BD59-A6C34878D82A}">
+                    <a16:rowId xmlns:a16="http://schemas.microsoft.com/office/drawing/2014/main" val="10000"/>
+                  </a:ext>
+                </a:extLst>
               </a:tr>
-              <a:tr h="548640">
+              <a:tr h="556687">
                 <a:tc>
                   <a:txBody>
                     <a:bodyPr/>
                     <a:lstStyle/>
                     <a:p>
-                      <a:pPr indent="0" marL="0">
+                      <a:pPr marL="0" indent="0">
                         <a:buNone/>
                       </a:pPr>
                       <a:r>
@@ -4500,7 +4220,7 @@
                       </a:endParaRPr>
                     </a:p>
                   </a:txBody>
-                  <a:tcPr marL="91440" marR="91440" marT="36576" marB="36576" anchor="ctr">
+                  <a:tcPr marT="36576" marB="36576" anchor="ctr">
                     <a:lnL w="9525" cap="flat" cmpd="sng" algn="ctr">
                       <a:solidFill>
                         <a:srgbClr val="D8C8A4"/>
@@ -4547,7 +4267,7 @@
                     <a:bodyPr/>
                     <a:lstStyle/>
                     <a:p>
-                      <a:pPr indent="0" marL="0">
+                      <a:pPr marL="0" indent="0">
                         <a:buNone/>
                       </a:pPr>
                       <a:r>
@@ -4559,7 +4279,62 @@
                           <a:ea typeface="Malgun Gothic" pitchFamily="34" charset="-122"/>
                           <a:cs typeface="Malgun Gothic" pitchFamily="34" charset="-120"/>
                         </a:rPr>
-                        <a:t>그림으로만 길을 만든다. 물방울은 스스로 걷고 벽에서 뒤로 돈다</a:t>
+                        <a:t>그림으로만 길을 만든다. 물방울은 스스로 </a:t>
+                      </a:r>
+                      <a:r>
+                        <a:rPr lang="en-US" sz="1200" dirty="0" err="1">
+                          <a:solidFill>
+                            <a:srgbClr val="2B2118"/>
+                          </a:solidFill>
+                          <a:latin typeface="Malgun Gothic" pitchFamily="34" charset="0"/>
+                          <a:ea typeface="Malgun Gothic" pitchFamily="34" charset="-122"/>
+                          <a:cs typeface="Malgun Gothic" pitchFamily="34" charset="-120"/>
+                        </a:rPr>
+                        <a:t>걷고</a:t>
+                      </a:r>
+                      <a:r>
+                        <a:rPr lang="en-US" sz="1200" dirty="0">
+                          <a:solidFill>
+                            <a:srgbClr val="2B2118"/>
+                          </a:solidFill>
+                          <a:latin typeface="Malgun Gothic" pitchFamily="34" charset="0"/>
+                          <a:ea typeface="Malgun Gothic" pitchFamily="34" charset="-122"/>
+                          <a:cs typeface="Malgun Gothic" pitchFamily="34" charset="-120"/>
+                        </a:rPr>
+                        <a:t> </a:t>
+                      </a:r>
+                      <a:r>
+                        <a:rPr lang="en-US" sz="1200" dirty="0" err="1">
+                          <a:solidFill>
+                            <a:srgbClr val="2B2118"/>
+                          </a:solidFill>
+                          <a:latin typeface="Malgun Gothic" pitchFamily="34" charset="0"/>
+                          <a:ea typeface="Malgun Gothic" pitchFamily="34" charset="-122"/>
+                          <a:cs typeface="Malgun Gothic" pitchFamily="34" charset="-120"/>
+                        </a:rPr>
+                        <a:t>벽에</a:t>
+                      </a:r>
+                      <a:r>
+                        <a:rPr lang="en-US" sz="1200" dirty="0">
+                          <a:solidFill>
+                            <a:srgbClr val="2B2118"/>
+                          </a:solidFill>
+                          <a:latin typeface="Malgun Gothic" pitchFamily="34" charset="0"/>
+                          <a:ea typeface="Malgun Gothic" pitchFamily="34" charset="-122"/>
+                          <a:cs typeface="Malgun Gothic" pitchFamily="34" charset="-120"/>
+                        </a:rPr>
+                        <a:t> </a:t>
+                      </a:r>
+                      <a:r>
+                        <a:rPr lang="ko-KR" altLang="en-US" sz="1200" dirty="0">
+                          <a:solidFill>
+                            <a:srgbClr val="2B2118"/>
+                          </a:solidFill>
+                          <a:latin typeface="Malgun Gothic" pitchFamily="34" charset="0"/>
+                          <a:ea typeface="Malgun Gothic" pitchFamily="34" charset="-122"/>
+                          <a:cs typeface="Malgun Gothic" pitchFamily="34" charset="-120"/>
+                        </a:rPr>
+                        <a:t>도달하면 뒤로 돈다</a:t>
                       </a:r>
                       <a:endParaRPr lang="en-US" sz="1200" dirty="0">
                         <a:latin typeface="Malgun Gothic" charset="0"/>
@@ -4568,7 +4343,7 @@
                       </a:endParaRPr>
                     </a:p>
                   </a:txBody>
-                  <a:tcPr marL="91440" marR="91440" marT="36576" marB="36576" anchor="ctr">
+                  <a:tcPr marT="36576" marB="36576" anchor="ctr">
                     <a:lnL w="9525" cap="flat" cmpd="sng" algn="ctr">
                       <a:solidFill>
                         <a:srgbClr val="D8C8A4"/>
@@ -4607,14 +4382,19 @@
                     </a:lnB>
                   </a:tcPr>
                 </a:tc>
+                <a:extLst>
+                  <a:ext uri="{0D108BD9-81ED-4DB2-BD59-A6C34878D82A}">
+                    <a16:rowId xmlns:a16="http://schemas.microsoft.com/office/drawing/2014/main" val="10001"/>
+                  </a:ext>
+                </a:extLst>
               </a:tr>
-              <a:tr h="548640">
+              <a:tr h="556687">
                 <a:tc>
                   <a:txBody>
                     <a:bodyPr/>
                     <a:lstStyle/>
                     <a:p>
-                      <a:pPr indent="0" marL="0">
+                      <a:pPr marL="0" indent="0">
                         <a:buNone/>
                       </a:pPr>
                       <a:r>
@@ -4635,7 +4415,7 @@
                       </a:endParaRPr>
                     </a:p>
                   </a:txBody>
-                  <a:tcPr marL="91440" marR="91440" marT="36576" marB="36576" anchor="ctr">
+                  <a:tcPr marT="36576" marB="36576" anchor="ctr">
                     <a:lnL w="9525" cap="flat" cmpd="sng" algn="ctr">
                       <a:solidFill>
                         <a:srgbClr val="D8C8A4"/>
@@ -4682,7 +4462,7 @@
                     <a:bodyPr/>
                     <a:lstStyle/>
                     <a:p>
-                      <a:pPr indent="0" marL="0">
+                      <a:pPr marL="0" indent="0">
                         <a:buNone/>
                       </a:pPr>
                       <a:r>
@@ -4703,7 +4483,7 @@
                       </a:endParaRPr>
                     </a:p>
                   </a:txBody>
-                  <a:tcPr marL="91440" marR="91440" marT="36576" marB="36576" anchor="ctr">
+                  <a:tcPr marT="36576" marB="36576" anchor="ctr">
                     <a:lnL w="9525" cap="flat" cmpd="sng" algn="ctr">
                       <a:solidFill>
                         <a:srgbClr val="D8C8A4"/>
@@ -4742,14 +4522,19 @@
                     </a:lnB>
                   </a:tcPr>
                 </a:tc>
+                <a:extLst>
+                  <a:ext uri="{0D108BD9-81ED-4DB2-BD59-A6C34878D82A}">
+                    <a16:rowId xmlns:a16="http://schemas.microsoft.com/office/drawing/2014/main" val="10002"/>
+                  </a:ext>
+                </a:extLst>
               </a:tr>
-              <a:tr h="548640">
+              <a:tr h="556687">
                 <a:tc>
                   <a:txBody>
                     <a:bodyPr/>
                     <a:lstStyle/>
                     <a:p>
-                      <a:pPr indent="0" marL="0">
+                      <a:pPr marL="0" indent="0">
                         <a:buNone/>
                       </a:pPr>
                       <a:r>
@@ -4770,7 +4555,7 @@
                       </a:endParaRPr>
                     </a:p>
                   </a:txBody>
-                  <a:tcPr marL="91440" marR="91440" marT="36576" marB="36576" anchor="ctr">
+                  <a:tcPr marT="36576" marB="36576" anchor="ctr">
                     <a:lnL w="9525" cap="flat" cmpd="sng" algn="ctr">
                       <a:solidFill>
                         <a:srgbClr val="D8C8A4"/>
@@ -4817,7 +4602,7 @@
                     <a:bodyPr/>
                     <a:lstStyle/>
                     <a:p>
-                      <a:pPr indent="0" marL="0">
+                      <a:pPr marL="0" indent="0">
                         <a:buNone/>
                       </a:pPr>
                       <a:r>
@@ -4829,7 +4614,73 @@
                           <a:ea typeface="Malgun Gothic" pitchFamily="34" charset="-122"/>
                           <a:cs typeface="Malgun Gothic" pitchFamily="34" charset="-120"/>
                         </a:rPr>
-                        <a:t>드래그 = 그리기 · 스페이스 = 시간 정지 · 우클릭 = 선 빨아들이기 · 1~5 = 물감</a:t>
+                        <a:t>드래그 = </a:t>
+                      </a:r>
+                      <a:r>
+                        <a:rPr lang="en-US" sz="1200" dirty="0" err="1">
+                          <a:solidFill>
+                            <a:srgbClr val="2B2118"/>
+                          </a:solidFill>
+                          <a:latin typeface="Malgun Gothic" pitchFamily="34" charset="0"/>
+                          <a:ea typeface="Malgun Gothic" pitchFamily="34" charset="-122"/>
+                          <a:cs typeface="Malgun Gothic" pitchFamily="34" charset="-120"/>
+                        </a:rPr>
+                        <a:t>그리기</a:t>
+                      </a:r>
+                      <a:r>
+                        <a:rPr lang="en-US" sz="1200" dirty="0">
+                          <a:solidFill>
+                            <a:srgbClr val="2B2118"/>
+                          </a:solidFill>
+                          <a:latin typeface="Malgun Gothic" pitchFamily="34" charset="0"/>
+                          <a:ea typeface="Malgun Gothic" pitchFamily="34" charset="-122"/>
+                          <a:cs typeface="Malgun Gothic" pitchFamily="34" charset="-120"/>
+                        </a:rPr>
+                        <a:t> / 스페이스 = 시간 </a:t>
+                      </a:r>
+                      <a:r>
+                        <a:rPr lang="en-US" sz="1200" dirty="0" err="1">
+                          <a:solidFill>
+                            <a:srgbClr val="2B2118"/>
+                          </a:solidFill>
+                          <a:latin typeface="Malgun Gothic" pitchFamily="34" charset="0"/>
+                          <a:ea typeface="Malgun Gothic" pitchFamily="34" charset="-122"/>
+                          <a:cs typeface="Malgun Gothic" pitchFamily="34" charset="-120"/>
+                        </a:rPr>
+                        <a:t>정지</a:t>
+                      </a:r>
+                      <a:r>
+                        <a:rPr lang="en-US" sz="1200" dirty="0">
+                          <a:solidFill>
+                            <a:srgbClr val="2B2118"/>
+                          </a:solidFill>
+                          <a:latin typeface="Malgun Gothic" pitchFamily="34" charset="0"/>
+                          <a:ea typeface="Malgun Gothic" pitchFamily="34" charset="-122"/>
+                          <a:cs typeface="Malgun Gothic" pitchFamily="34" charset="-120"/>
+                        </a:rPr>
+                        <a:t> / 우클릭 = 선 </a:t>
+                      </a:r>
+                      <a:r>
+                        <a:rPr lang="en-US" sz="1200" dirty="0" err="1">
+                          <a:solidFill>
+                            <a:srgbClr val="2B2118"/>
+                          </a:solidFill>
+                          <a:latin typeface="Malgun Gothic" pitchFamily="34" charset="0"/>
+                          <a:ea typeface="Malgun Gothic" pitchFamily="34" charset="-122"/>
+                          <a:cs typeface="Malgun Gothic" pitchFamily="34" charset="-120"/>
+                        </a:rPr>
+                        <a:t>빨아들이기</a:t>
+                      </a:r>
+                      <a:r>
+                        <a:rPr lang="en-US" sz="1200" dirty="0">
+                          <a:solidFill>
+                            <a:srgbClr val="2B2118"/>
+                          </a:solidFill>
+                          <a:latin typeface="Malgun Gothic" pitchFamily="34" charset="0"/>
+                          <a:ea typeface="Malgun Gothic" pitchFamily="34" charset="-122"/>
+                          <a:cs typeface="Malgun Gothic" pitchFamily="34" charset="-120"/>
+                        </a:rPr>
+                        <a:t> / 1~5 = 물감</a:t>
                       </a:r>
                       <a:endParaRPr lang="en-US" sz="1200" dirty="0">
                         <a:latin typeface="Malgun Gothic" charset="0"/>
@@ -4838,7 +4689,7 @@
                       </a:endParaRPr>
                     </a:p>
                   </a:txBody>
-                  <a:tcPr marL="91440" marR="91440" marT="36576" marB="36576" anchor="ctr">
+                  <a:tcPr marT="36576" marB="36576" anchor="ctr">
                     <a:lnL w="9525" cap="flat" cmpd="sng" algn="ctr">
                       <a:solidFill>
                         <a:srgbClr val="D8C8A4"/>
@@ -4877,14 +4728,19 @@
                     </a:lnB>
                   </a:tcPr>
                 </a:tc>
+                <a:extLst>
+                  <a:ext uri="{0D108BD9-81ED-4DB2-BD59-A6C34878D82A}">
+                    <a16:rowId xmlns:a16="http://schemas.microsoft.com/office/drawing/2014/main" val="10003"/>
+                  </a:ext>
+                </a:extLst>
               </a:tr>
-              <a:tr h="548640">
+              <a:tr h="566148">
                 <a:tc>
                   <a:txBody>
                     <a:bodyPr/>
                     <a:lstStyle/>
                     <a:p>
-                      <a:pPr indent="0" marL="0">
+                      <a:pPr marL="0" indent="0">
                         <a:buNone/>
                       </a:pPr>
                       <a:r>
@@ -4905,7 +4761,7 @@
                       </a:endParaRPr>
                     </a:p>
                   </a:txBody>
-                  <a:tcPr marL="91440" marR="91440" marT="36576" marB="36576" anchor="ctr">
+                  <a:tcPr marT="36576" marB="36576" anchor="ctr">
                     <a:lnL w="9525" cap="flat" cmpd="sng" algn="ctr">
                       <a:solidFill>
                         <a:srgbClr val="D8C8A4"/>
@@ -4952,7 +4808,7 @@
                     <a:bodyPr/>
                     <a:lstStyle/>
                     <a:p>
-                      <a:pPr indent="0" marL="0">
+                      <a:pPr marL="0" indent="0">
                         <a:buNone/>
                       </a:pPr>
                       <a:r>
@@ -4964,7 +4820,29 @@
                           <a:ea typeface="Malgun Gothic" pitchFamily="34" charset="-122"/>
                           <a:cs typeface="Malgun Gothic" pitchFamily="34" charset="-120"/>
                         </a:rPr>
-                        <a:t>PC 웹 (HTML 한 파일, 설치 없음). 정식 플랫폼·가격은 미정</a:t>
+                        <a:t>PC 웹 (HTML 한 파일, 설치 </a:t>
+                      </a:r>
+                      <a:r>
+                        <a:rPr lang="en-US" sz="1200" dirty="0" err="1">
+                          <a:solidFill>
+                            <a:srgbClr val="2B2118"/>
+                          </a:solidFill>
+                          <a:latin typeface="Malgun Gothic" pitchFamily="34" charset="0"/>
+                          <a:ea typeface="Malgun Gothic" pitchFamily="34" charset="-122"/>
+                          <a:cs typeface="Malgun Gothic" pitchFamily="34" charset="-120"/>
+                        </a:rPr>
+                        <a:t>없음</a:t>
+                      </a:r>
+                      <a:r>
+                        <a:rPr lang="en-US" sz="1200" dirty="0">
+                          <a:solidFill>
+                            <a:srgbClr val="2B2118"/>
+                          </a:solidFill>
+                          <a:latin typeface="Malgun Gothic" pitchFamily="34" charset="0"/>
+                          <a:ea typeface="Malgun Gothic" pitchFamily="34" charset="-122"/>
+                          <a:cs typeface="Malgun Gothic" pitchFamily="34" charset="-120"/>
+                        </a:rPr>
+                        <a:t>)</a:t>
                       </a:r>
                       <a:endParaRPr lang="en-US" sz="1200" dirty="0">
                         <a:latin typeface="Malgun Gothic" charset="0"/>
@@ -4973,7 +4851,7 @@
                       </a:endParaRPr>
                     </a:p>
                   </a:txBody>
-                  <a:tcPr marL="91440" marR="91440" marT="36576" marB="36576" anchor="ctr">
+                  <a:tcPr marT="36576" marB="36576" anchor="ctr">
                     <a:lnL w="9525" cap="flat" cmpd="sng" algn="ctr">
                       <a:solidFill>
                         <a:srgbClr val="D8C8A4"/>
@@ -5012,35 +4890,321 @@
                     </a:lnB>
                   </a:tcPr>
                 </a:tc>
+                <a:extLst>
+                  <a:ext uri="{0D108BD9-81ED-4DB2-BD59-A6C34878D82A}">
+                    <a16:rowId xmlns:a16="http://schemas.microsoft.com/office/drawing/2014/main" val="10004"/>
+                  </a:ext>
+                </a:extLst>
               </a:tr>
-              <a:tr h="548640">
+            </a:tbl>
+          </a:graphicData>
+        </a:graphic>
+      </p:graphicFrame>
+      <p:sp>
+        <p:nvSpPr>
+          <p:cNvPr id="9" name="Text 5"/>
+          <p:cNvSpPr txBox="1"/>
+          <p:nvPr/>
+        </p:nvSpPr>
+        <p:spPr>
+          <a:xfrm>
+            <a:off x="6004357" y="5669280"/>
+            <a:ext cx="4736592" cy="256032"/>
+          </a:xfrm>
+          <a:prstGeom prst="rect">
+            <a:avLst/>
+          </a:prstGeom>
+          <a:noFill/>
+          <a:ln/>
+        </p:spPr>
+        <p:txBody>
+          <a:bodyPr wrap="square" lIns="0" tIns="0" rIns="0" bIns="0" rtlCol="0" anchor="t"/>
+          <a:lstStyle/>
+          <a:p>
+            <a:pPr marL="0" indent="0">
+              <a:buNone/>
+            </a:pPr>
+            <a:r>
+              <a:rPr lang="en-US" sz="1000" dirty="0" err="1">
+                <a:solidFill>
+                  <a:srgbClr val="7B6B57"/>
+                </a:solidFill>
+                <a:latin typeface="Malgun Gothic" pitchFamily="34" charset="0"/>
+                <a:ea typeface="Malgun Gothic" pitchFamily="34" charset="-122"/>
+                <a:cs typeface="Malgun Gothic" pitchFamily="34" charset="-120"/>
+              </a:rPr>
+              <a:t>시간을</a:t>
+            </a:r>
+            <a:r>
+              <a:rPr lang="en-US" sz="1000" dirty="0">
+                <a:solidFill>
+                  <a:srgbClr val="7B6B57"/>
+                </a:solidFill>
+                <a:latin typeface="Malgun Gothic" pitchFamily="34" charset="0"/>
+                <a:ea typeface="Malgun Gothic" pitchFamily="34" charset="-122"/>
+                <a:cs typeface="Malgun Gothic" pitchFamily="34" charset="-120"/>
+              </a:rPr>
+              <a:t> 멈추고(파란 테두리) </a:t>
+            </a:r>
+            <a:r>
+              <a:rPr lang="ko-KR" altLang="en-US" sz="1000" dirty="0">
+                <a:solidFill>
+                  <a:srgbClr val="7B6B57"/>
+                </a:solidFill>
+                <a:latin typeface="Malgun Gothic" pitchFamily="34" charset="0"/>
+                <a:ea typeface="Malgun Gothic" pitchFamily="34" charset="-122"/>
+                <a:cs typeface="Malgun Gothic" pitchFamily="34" charset="-120"/>
+              </a:rPr>
+              <a:t>빨간 선을 그리는 장면</a:t>
+            </a:r>
+            <a:endParaRPr lang="en-US" sz="1000" dirty="0"/>
+          </a:p>
+        </p:txBody>
+      </p:sp>
+      <p:sp>
+        <p:nvSpPr>
+          <p:cNvPr id="25" name="Slide Number Placeholder 0"/>
+          <p:cNvSpPr>
+            <a:spLocks noGrp="1"/>
+          </p:cNvSpPr>
+          <p:nvPr>
+            <p:ph type="sldNum" sz="quarter" idx="4294967295"/>
+          </p:nvPr>
+        </p:nvSpPr>
+        <p:spPr>
+          <a:xfrm>
+            <a:off x="11185855" y="6473952"/>
+            <a:ext cx="457200" cy="274320"/>
+          </a:xfrm>
+          <a:prstGeom prst="rect">
+            <a:avLst/>
+          </a:prstGeom>
+          <a:extLst>
+            <a:ext uri="{C572A759-6A51-4108-AA02-DFA0A04FC94B}">
+              <ma14:wrappingTextBoxFlag xmlns:ma14="http://schemas.microsoft.com/office/mac/drawingml/2011/main" xmlns="" val="0"/>
+            </a:ext>
+          </a:extLst>
+        </p:spPr>
+        <p:txBody>
+          <a:bodyPr/>
+          <a:lstStyle>
+            <a:lvl1pPr>
+              <a:defRPr sz="900">
+                <a:solidFill>
+                  <a:srgbClr val="7B6B57"/>
+                </a:solidFill>
+                <a:latin typeface="Malgun Gothic"/>
+                <a:ea typeface="Malgun Gothic"/>
+                <a:cs typeface="Malgun Gothic"/>
+              </a:defRPr>
+            </a:lvl1pPr>
+          </a:lstStyle>
+          <a:p>
+            <a:pPr algn="r"/>
+            <a:fld id="{F7021451-1387-4CA6-816F-3879F97B5CBC}" type="slidenum">
+              <a:rPr lang="en-US" b="0"/>
+              <a:t>2</a:t>
+            </a:fld>
+            <a:endParaRPr lang="en-US"/>
+          </a:p>
+        </p:txBody>
+      </p:sp>
+      <p:pic>
+        <p:nvPicPr>
+          <p:cNvPr id="11" name="그림 10">
+            <a:extLst>
+              <a:ext uri="{FF2B5EF4-FFF2-40B4-BE49-F238E27FC236}">
+                <a16:creationId xmlns:a16="http://schemas.microsoft.com/office/drawing/2014/main" id="{E73A5EB9-7ED5-4B98-902B-E5076AEC175F}"/>
+              </a:ext>
+            </a:extLst>
+          </p:cNvPr>
+          <p:cNvPicPr>
+            <a:picLocks noChangeAspect="1"/>
+          </p:cNvPicPr>
+          <p:nvPr/>
+        </p:nvPicPr>
+        <p:blipFill>
+          <a:blip r:embed="rId3"/>
+          <a:stretch>
+            <a:fillRect/>
+          </a:stretch>
+        </p:blipFill>
+        <p:spPr>
+          <a:xfrm>
+            <a:off x="6004357" y="2286000"/>
+            <a:ext cx="5964956" cy="3328021"/>
+          </a:xfrm>
+          <a:prstGeom prst="rect">
+            <a:avLst/>
+          </a:prstGeom>
+        </p:spPr>
+      </p:pic>
+    </p:spTree>
+  </p:cSld>
+  <p:clrMapOvr>
+    <a:masterClrMapping/>
+  </p:clrMapOvr>
+</p:sld>
+</file>
+
+<file path=ppt/slides/slide3.xml><?xml version="1.0" encoding="utf-8"?>
+<p:sld xmlns:a="http://schemas.openxmlformats.org/drawingml/2006/main" xmlns:r="http://schemas.openxmlformats.org/officeDocument/2006/relationships" xmlns:p="http://schemas.openxmlformats.org/presentationml/2006/main">
+  <p:cSld name="Slide 3">
+    <p:spTree>
+      <p:nvGrpSpPr>
+        <p:cNvPr id="1" name=""/>
+        <p:cNvGrpSpPr/>
+        <p:nvPr/>
+      </p:nvGrpSpPr>
+      <p:grpSpPr>
+        <a:xfrm>
+          <a:off x="0" y="0"/>
+          <a:ext cx="0" cy="0"/>
+          <a:chOff x="0" y="0"/>
+          <a:chExt cx="0" cy="0"/>
+        </a:xfrm>
+      </p:grpSpPr>
+      <p:sp>
+        <p:nvSpPr>
+          <p:cNvPr id="2" name="Text 1"/>
+          <p:cNvSpPr>
+            <a:spLocks noGrp="1"/>
+          </p:cNvSpPr>
+          <p:nvPr>
+            <p:ph type="title" idx="101" hasCustomPrompt="1"/>
+          </p:nvPr>
+        </p:nvSpPr>
+        <p:spPr>
+          <a:xfrm>
+            <a:off x="548640" y="292608"/>
+            <a:ext cx="11094415" cy="685800"/>
+          </a:xfrm>
+          <a:prstGeom prst="rect">
+            <a:avLst/>
+          </a:prstGeom>
+          <a:noFill/>
+          <a:ln/>
+        </p:spPr>
+        <p:txBody>
+          <a:bodyPr wrap="square" lIns="0" tIns="0" rIns="0" bIns="0" rtlCol="0" anchor="ctr"/>
+          <a:lstStyle/>
+          <a:p>
+            <a:pPr marL="0" indent="0" algn="l">
+              <a:buNone/>
+            </a:pPr>
+            <a:r>
+              <a:rPr lang="en-US" sz="2800" b="1" dirty="0" err="1">
+                <a:solidFill>
+                  <a:srgbClr val="2B2118"/>
+                </a:solidFill>
+                <a:latin typeface="Batang" pitchFamily="34" charset="0"/>
+                <a:ea typeface="Batang" pitchFamily="34" charset="-122"/>
+                <a:cs typeface="Batang" pitchFamily="34" charset="-120"/>
+              </a:rPr>
+              <a:t>레퍼런스</a:t>
+            </a:r>
+            <a:r>
+              <a:rPr lang="en-US" sz="2800" b="1" dirty="0">
+                <a:solidFill>
+                  <a:srgbClr val="2B2118"/>
+                </a:solidFill>
+                <a:latin typeface="Batang" pitchFamily="34" charset="0"/>
+                <a:ea typeface="Batang" pitchFamily="34" charset="-122"/>
+                <a:cs typeface="Batang" pitchFamily="34" charset="-120"/>
+              </a:rPr>
+              <a:t> </a:t>
+            </a:r>
+            <a:r>
+              <a:rPr lang="ko-KR" altLang="en-US" sz="2800" b="1" dirty="0">
+                <a:solidFill>
+                  <a:srgbClr val="2B2118"/>
+                </a:solidFill>
+                <a:latin typeface="Batang" pitchFamily="34" charset="0"/>
+                <a:ea typeface="Batang" pitchFamily="34" charset="-122"/>
+                <a:cs typeface="Batang" pitchFamily="34" charset="-120"/>
+              </a:rPr>
+              <a:t>게임</a:t>
+            </a:r>
+            <a:endParaRPr lang="en-US" sz="2800" dirty="0"/>
+          </a:p>
+        </p:txBody>
+      </p:sp>
+      <p:graphicFrame>
+        <p:nvGraphicFramePr>
+          <p:cNvPr id="4" name="Table 0"/>
+          <p:cNvGraphicFramePr>
+            <a:graphicFrameLocks noGrp="1"/>
+          </p:cNvGraphicFramePr>
+          <p:nvPr>
+            <p:extLst>
+              <p:ext uri="{D42A27DB-BD31-4B8C-83A1-F6EECF244321}">
+                <p14:modId xmlns:p14="http://schemas.microsoft.com/office/powerpoint/2010/main" val="1579011935"/>
+              </p:ext>
+            </p:extLst>
+          </p:nvPr>
+        </p:nvGraphicFramePr>
+        <p:xfrm>
+          <a:off x="548640" y="1234440"/>
+          <a:ext cx="11091672" cy="3054096"/>
+        </p:xfrm>
+        <a:graphic>
+          <a:graphicData uri="http://schemas.openxmlformats.org/drawingml/2006/table">
+            <a:tbl>
+              <a:tblPr/>
+              <a:tblGrid>
+                <a:gridCol w="1143000">
+                  <a:extLst>
+                    <a:ext uri="{9D8B030D-6E8A-4147-A177-3AD203B41FA5}">
+                      <a16:colId xmlns:a16="http://schemas.microsoft.com/office/drawing/2014/main" val="20000"/>
+                    </a:ext>
+                  </a:extLst>
+                </a:gridCol>
+                <a:gridCol w="2240280">
+                  <a:extLst>
+                    <a:ext uri="{9D8B030D-6E8A-4147-A177-3AD203B41FA5}">
+                      <a16:colId xmlns:a16="http://schemas.microsoft.com/office/drawing/2014/main" val="20001"/>
+                    </a:ext>
+                  </a:extLst>
+                </a:gridCol>
+                <a:gridCol w="2240280">
+                  <a:extLst>
+                    <a:ext uri="{9D8B030D-6E8A-4147-A177-3AD203B41FA5}">
+                      <a16:colId xmlns:a16="http://schemas.microsoft.com/office/drawing/2014/main" val="20002"/>
+                    </a:ext>
+                  </a:extLst>
+                </a:gridCol>
+                <a:gridCol w="2240280">
+                  <a:extLst>
+                    <a:ext uri="{9D8B030D-6E8A-4147-A177-3AD203B41FA5}">
+                      <a16:colId xmlns:a16="http://schemas.microsoft.com/office/drawing/2014/main" val="20003"/>
+                    </a:ext>
+                  </a:extLst>
+                </a:gridCol>
+                <a:gridCol w="3227832">
+                  <a:extLst>
+                    <a:ext uri="{9D8B030D-6E8A-4147-A177-3AD203B41FA5}">
+                      <a16:colId xmlns:a16="http://schemas.microsoft.com/office/drawing/2014/main" val="20004"/>
+                    </a:ext>
+                  </a:extLst>
+                </a:gridCol>
+              </a:tblGrid>
+              <a:tr h="566928">
                 <a:tc>
                   <a:txBody>
                     <a:bodyPr/>
                     <a:lstStyle/>
                     <a:p>
-                      <a:pPr indent="0" marL="0">
+                      <a:pPr marL="0" indent="0" algn="ctr">
                         <a:buNone/>
                       </a:pPr>
-                      <a:r>
-                        <a:rPr lang="en-US" sz="1200" b="1" dirty="0">
-                          <a:solidFill>
-                            <a:srgbClr val="1F6FE0"/>
-                          </a:solidFill>
-                          <a:latin typeface="Malgun Gothic" pitchFamily="34" charset="0"/>
-                          <a:ea typeface="Malgun Gothic" pitchFamily="34" charset="-122"/>
-                          <a:cs typeface="Malgun Gothic" pitchFamily="34" charset="-120"/>
-                        </a:rPr>
-                        <a:t>데모</a:t>
-                      </a:r>
-                      <a:endParaRPr lang="en-US" sz="1200" dirty="0">
+                      <a:endParaRPr lang="en-US" sz="1100" dirty="0">
                         <a:latin typeface="Malgun Gothic" charset="0"/>
                         <a:ea typeface="Malgun Gothic" charset="0"/>
                         <a:cs typeface="Malgun Gothic" charset="0"/>
                       </a:endParaRPr>
                     </a:p>
                   </a:txBody>
-                  <a:tcPr marL="91440" marR="91440" marT="36576" marB="36576" anchor="ctr">
+                  <a:tcPr marT="36576" marB="36576" anchor="ctr">
                     <a:lnL w="9525" cap="flat" cmpd="sng" algn="ctr">
                       <a:solidFill>
                         <a:srgbClr val="D8C8A4"/>
@@ -5087,11 +5251,11 @@
                     <a:bodyPr/>
                     <a:lstStyle/>
                     <a:p>
-                      <a:pPr indent="0" marL="0">
+                      <a:pPr marL="0" indent="0" algn="ctr">
                         <a:buNone/>
                       </a:pPr>
                       <a:r>
-                        <a:rPr lang="en-US" sz="1200" dirty="0">
+                        <a:rPr lang="en-US" sz="1100" b="1" dirty="0">
                           <a:solidFill>
                             <a:srgbClr val="2B2118"/>
                           </a:solidFill>
@@ -5099,296 +5263,29 @@
                           <a:ea typeface="Malgun Gothic" pitchFamily="34" charset="-122"/>
                           <a:cs typeface="Malgun Gothic" pitchFamily="34" charset="-120"/>
                         </a:rPr>
-                        <a:t>스테이지 3개 · 물감 5색 · 발사기·가시·결정 막대 · 레벨 툴로 제작</a:t>
+                        <a:t>커비 캔버스 커스</a:t>
                       </a:r>
-                      <a:endParaRPr lang="en-US" sz="1200" dirty="0">
+                      <a:endParaRPr lang="en-US" sz="1100" dirty="0">
                         <a:latin typeface="Malgun Gothic" charset="0"/>
                         <a:ea typeface="Malgun Gothic" charset="0"/>
                         <a:cs typeface="Malgun Gothic" charset="0"/>
                       </a:endParaRPr>
                     </a:p>
-                  </a:txBody>
-                  <a:tcPr marL="91440" marR="91440" marT="36576" marB="36576" anchor="ctr">
-                    <a:lnL w="9525" cap="flat" cmpd="sng" algn="ctr">
-                      <a:solidFill>
-                        <a:srgbClr val="D8C8A4"/>
-                      </a:solidFill>
-                      <a:prstDash val="solid"/>
-                      <a:round/>
-                      <a:headEnd type="none" w="med" len="med"/>
-                      <a:tailEnd type="none" w="med" len="med"/>
-                    </a:lnL>
-                    <a:lnR w="9525" cap="flat" cmpd="sng" algn="ctr">
-                      <a:solidFill>
-                        <a:srgbClr val="D8C8A4"/>
-                      </a:solidFill>
-                      <a:prstDash val="solid"/>
-                      <a:round/>
-                      <a:headEnd type="none" w="med" len="med"/>
-                      <a:tailEnd type="none" w="med" len="med"/>
-                    </a:lnR>
-                    <a:lnT w="9525" cap="flat" cmpd="sng" algn="ctr">
-                      <a:solidFill>
-                        <a:srgbClr val="D8C8A4"/>
-                      </a:solidFill>
-                      <a:prstDash val="solid"/>
-                      <a:round/>
-                      <a:headEnd type="none" w="med" len="med"/>
-                      <a:tailEnd type="none" w="med" len="med"/>
-                    </a:lnT>
-                    <a:lnB w="9525" cap="flat" cmpd="sng" algn="ctr">
-                      <a:solidFill>
-                        <a:srgbClr val="D8C8A4"/>
-                      </a:solidFill>
-                      <a:prstDash val="solid"/>
-                      <a:round/>
-                      <a:headEnd type="none" w="med" len="med"/>
-                      <a:tailEnd type="none" w="med" len="med"/>
-                    </a:lnB>
-                  </a:tcPr>
-                </a:tc>
-              </a:tr>
-            </a:tbl>
-          </a:graphicData>
-        </a:graphic>
-      </p:graphicFrame>
-      <p:pic>
-        <p:nvPicPr>
-          <p:cNvPr id="7" name="Image 0" descr="D:\stopsketch\데모제출\2_대표이미지\01_시간정지_색골라그리기.png">    </p:cNvPr>
-          <p:cNvPicPr>
-            <a:picLocks noChangeAspect="1"/>
-          </p:cNvPicPr>
-          <p:nvPr/>
-        </p:nvPicPr>
-        <p:blipFill>
-          <a:blip r:embed="rId1"/>
-          <a:stretch>
-            <a:fillRect/>
-          </a:stretch>
-        </p:blipFill>
-        <p:spPr>
-          <a:xfrm>
-            <a:off x="6903720" y="2331720"/>
-            <a:ext cx="4736592" cy="2664333"/>
-          </a:xfrm>
-          <a:prstGeom prst="rect">
-            <a:avLst/>
-          </a:prstGeom>
-        </p:spPr>
-      </p:pic>
-      <p:sp>
-        <p:nvSpPr>
-          <p:cNvPr id="8" name="Shape 4"/>
-          <p:cNvSpPr/>
-          <p:nvPr/>
-        </p:nvSpPr>
-        <p:spPr>
-          <a:xfrm>
-            <a:off x="6903720" y="2331720"/>
-            <a:ext cx="4736592" cy="2664333"/>
-          </a:xfrm>
-          <a:prstGeom prst="rect">
-            <a:avLst/>
-          </a:prstGeom>
-          <a:ln w="12700">
-            <a:solidFill>
-              <a:srgbClr val="D8C8A4"/>
-            </a:solidFill>
-            <a:prstDash val="solid"/>
-          </a:ln>
-        </p:spPr>
-      </p:sp>
-      <p:sp>
-        <p:nvSpPr>
-          <p:cNvPr id="9" name="Text 5"/>
-          <p:cNvSpPr txBox="1"/>
-          <p:nvPr/>
-        </p:nvSpPr>
-        <p:spPr>
-          <a:xfrm>
-            <a:off x="6903720" y="5050917"/>
-            <a:ext cx="4736592" cy="256032"/>
-          </a:xfrm>
-          <a:prstGeom prst="rect">
-            <a:avLst/>
-          </a:prstGeom>
-          <a:noFill/>
-          <a:ln/>
-        </p:spPr>
-        <p:txBody>
-          <a:bodyPr wrap="square" lIns="0" tIns="0" rIns="0" bIns="0" rtlCol="0" anchor="t"/>
-          <a:lstStyle/>
-          <a:p>
-            <a:pPr indent="0" marL="0">
-              <a:buNone/>
-            </a:pPr>
-            <a:r>
-              <a:rPr lang="en-US" sz="1000" dirty="0">
-                <a:solidFill>
-                  <a:srgbClr val="7B6B57"/>
-                </a:solidFill>
-                <a:latin typeface="Malgun Gothic" pitchFamily="34" charset="0"/>
-                <a:ea typeface="Malgun Gothic" pitchFamily="34" charset="-122"/>
-                <a:cs typeface="Malgun Gothic" pitchFamily="34" charset="-120"/>
-              </a:rPr>
-              <a:t>실제 데모 화면 · 시간을 멈추고(파란 테두리) 발사기 앞에 빨강·검정을 그려 둔 순간</a:t>
-            </a:r>
-            <a:endParaRPr lang="en-US" sz="1000" dirty="0"/>
-          </a:p>
-        </p:txBody>
-      </p:sp>
-      <p:sp>
-        <p:nvSpPr>
-          <p:cNvPr id="25" name="Slide Number Placeholder 0"/>
-          <p:cNvSpPr>
-            <a:spLocks noGrp="1"/>
-          </p:cNvSpPr>
-          <p:nvPr>
-            <p:ph type="sldNum" sz="quarter" idx="4294967295"/>
-          </p:nvPr>
-        </p:nvSpPr>
-        <p:spPr>
-          <a:xfrm>
-            <a:off x="11185855" y="6473952"/>
-            <a:ext cx="457200" cy="274320"/>
-          </a:xfrm>
-          <a:prstGeom prst="rect">
-            <a:avLst/>
-          </a:prstGeom>
-          <a:extLst>
-            <a:ext uri="{C572A759-6A51-4108-AA02-DFA0A04FC94B}">
-              <ma14:wrappingTextBoxFlag xmlns:ma14="http://schemas.microsoft.com/office/mac/drawingml/2011/main" val="0"/>
-            </a:ext>
-          </a:extLst>
-        </p:spPr>
-        <p:txBody>
-          <a:bodyPr/>
-          <a:lstStyle>
-            <a:lvl1pPr>
-              <a:defRPr sz="900">
-                <a:solidFill>
-                  <a:srgbClr val="7B6B57"/>
-                </a:solidFill>
-                <a:latin typeface="Malgun Gothic"/>
-                <a:ea typeface="Malgun Gothic"/>
-                <a:cs typeface="Malgun Gothic"/>
-              </a:defRPr>
-            </a:lvl1pPr>
-          </a:lstStyle>
-          <a:p>
-            <a:pPr algn="r"/>
-            <a:fld id="{F7021451-1387-4CA6-816F-3879F97B5CBC}" type="slidenum">
-              <a:rPr b="0" lang="en-US"/>
-              <a:t>2</a:t>
-            </a:fld>
-            <a:endParaRPr lang="en-US"/>
-          </a:p>
-        </p:txBody>
-      </p:sp>
-    </p:spTree>
-  </p:cSld>
-  <p:clrMapOvr>
-    <a:masterClrMapping/>
-  </p:clrMapOvr>
-</p:sld>
-</file>
-
-<file path=ppt/slides/slide3.xml><?xml version="1.0" encoding="utf-8"?>
-<p:sld xmlns:a="http://schemas.openxmlformats.org/drawingml/2006/main" xmlns:r="http://schemas.openxmlformats.org/officeDocument/2006/relationships" xmlns:p="http://schemas.openxmlformats.org/presentationml/2006/main">
-  <p:cSld name="Slide 3">
-    <p:spTree>
-      <p:nvGrpSpPr>
-        <p:cNvPr id="1" name=""/>
-        <p:cNvGrpSpPr/>
-        <p:nvPr/>
-      </p:nvGrpSpPr>
-      <p:grpSpPr>
-        <a:xfrm>
-          <a:off x="0" y="0"/>
-          <a:ext cx="0" cy="0"/>
-          <a:chOff x="0" y="0"/>
-          <a:chExt cx="0" cy="0"/>
-        </a:xfrm>
-      </p:grpSpPr>
-      <p:sp>
-        <p:nvSpPr>
-          <p:cNvPr id="2" name="Text 1"/>
-          <p:cNvSpPr/>
-          <p:nvPr>
-            <p:ph idx="101" type="title" hasCustomPrompt="1"/>
-          </p:nvPr>
-        </p:nvSpPr>
-        <p:spPr>
-          <a:xfrm>
-            <a:off x="548640" y="292608"/>
-            <a:ext cx="11094415" cy="685800"/>
-          </a:xfrm>
-          <a:prstGeom prst="rect">
-            <a:avLst/>
-          </a:prstGeom>
-          <a:noFill/>
-          <a:ln/>
-        </p:spPr>
-        <p:txBody>
-          <a:bodyPr wrap="square" lIns="0" tIns="0" rIns="0" bIns="0" rtlCol="0" anchor="ctr"/>
-          <a:lstStyle/>
-          <a:p>
-            <a:pPr algn="l" indent="0" marL="0">
-              <a:buNone/>
-            </a:pPr>
-            <a:r>
-              <a:rPr lang="en-US" sz="2800" b="1" dirty="0">
-                <a:solidFill>
-                  <a:srgbClr val="2B2118"/>
-                </a:solidFill>
-                <a:latin typeface="Batang" pitchFamily="34" charset="0"/>
-                <a:ea typeface="Batang" pitchFamily="34" charset="-122"/>
-                <a:cs typeface="Batang" pitchFamily="34" charset="-120"/>
-              </a:rPr>
-              <a:t>레퍼런스: 그린 대로 움직이는 게임, 그리고 우리가 다른 점</a:t>
-            </a:r>
-            <a:endParaRPr lang="en-US" sz="2800" dirty="0"/>
-          </a:p>
-        </p:txBody>
-      </p:sp>
-      <p:graphicFrame>
-        <p:nvGraphicFramePr>
-          <p:cNvPr id="4" name="Table 0"/>
-          <p:cNvGraphicFramePr>
-            <a:graphicFrameLocks noGrp="1"/>
-          </p:cNvGraphicFramePr>
-          <p:nvPr>
-            <p:extLst>
-              <p:ext uri="{D42A27DB-BD31-4B8C-83A1-F6EECF244321}">
-                <p14:modId xmlns:p14="http://schemas.microsoft.com/office/powerpoint/2010/main" val="1579011935"/>
-              </p:ext>
-            </p:extLst>
-          </p:nvPr>
-        </p:nvGraphicFramePr>
-        <p:xfrm>
-          <a:off x="548640" y="1234440"/>
-          <a:ext cx="11094415" cy="914400"/>
-        </p:xfrm>
-        <a:graphic>
-          <a:graphicData uri="http://schemas.openxmlformats.org/drawingml/2006/table">
-            <a:tbl>
-              <a:tblPr/>
-              <a:tblGrid>
-                <a:gridCol w="1143000"/>
-                <a:gridCol w="2240280"/>
-                <a:gridCol w="2240280"/>
-                <a:gridCol w="2240280"/>
-                <a:gridCol w="3227832"/>
-              </a:tblGrid>
-              <a:tr h="566928">
-                <a:tc>
-                  <a:txBody>
-                    <a:bodyPr/>
-                    <a:lstStyle/>
                     <a:p>
-                      <a:pPr algn="ctr" indent="0" marL="0">
+                      <a:pPr marL="0" indent="0" algn="ctr">
                         <a:buNone/>
                       </a:pPr>
+                      <a:r>
+                        <a:rPr lang="en-US" sz="1100" b="1" dirty="0">
+                          <a:solidFill>
+                            <a:srgbClr val="2B2118"/>
+                          </a:solidFill>
+                          <a:latin typeface="Malgun Gothic" pitchFamily="34" charset="0"/>
+                          <a:ea typeface="Malgun Gothic" pitchFamily="34" charset="-122"/>
+                          <a:cs typeface="Malgun Gothic" pitchFamily="34" charset="-120"/>
+                        </a:rPr>
+                        <a:t>(DS, 2005)</a:t>
+                      </a:r>
                       <a:endParaRPr lang="en-US" sz="1100" dirty="0">
                         <a:latin typeface="Malgun Gothic" charset="0"/>
                         <a:ea typeface="Malgun Gothic" charset="0"/>
@@ -5396,7 +5293,7 @@
                       </a:endParaRPr>
                     </a:p>
                   </a:txBody>
-                  <a:tcPr marL="91440" marR="91440" marT="36576" marB="36576" anchor="ctr">
+                  <a:tcPr marT="36576" marB="36576" anchor="ctr">
                     <a:lnL w="9525" cap="flat" cmpd="sng" algn="ctr">
                       <a:solidFill>
                         <a:srgbClr val="D8C8A4"/>
@@ -5443,7 +5340,7 @@
                     <a:bodyPr/>
                     <a:lstStyle/>
                     <a:p>
-                      <a:pPr algn="ctr" indent="0" marL="0">
+                      <a:pPr marL="0" indent="0" algn="ctr">
                         <a:buNone/>
                       </a:pPr>
                       <a:r>
@@ -5455,7 +5352,7 @@
                           <a:ea typeface="Malgun Gothic" pitchFamily="34" charset="-122"/>
                           <a:cs typeface="Malgun Gothic" pitchFamily="34" charset="-120"/>
                         </a:rPr>
-                        <a:t>커비 캔버스 커스</a:t>
+                        <a:t>Lineguard</a:t>
                       </a:r>
                       <a:endParaRPr lang="en-US" sz="1100" dirty="0">
                         <a:latin typeface="Malgun Gothic" charset="0"/>
@@ -5464,7 +5361,7 @@
                       </a:endParaRPr>
                     </a:p>
                     <a:p>
-                      <a:pPr algn="ctr" indent="0" marL="0">
+                      <a:pPr marL="0" indent="0" algn="ctr">
                         <a:buNone/>
                       </a:pPr>
                       <a:r>
@@ -5476,7 +5373,7 @@
                           <a:ea typeface="Malgun Gothic" pitchFamily="34" charset="-122"/>
                           <a:cs typeface="Malgun Gothic" pitchFamily="34" charset="-120"/>
                         </a:rPr>
-                        <a:t>(DS, 2005)</a:t>
+                        <a:t>(웹, 2026 공개)</a:t>
                       </a:r>
                       <a:endParaRPr lang="en-US" sz="1100" dirty="0">
                         <a:latin typeface="Malgun Gothic" charset="0"/>
@@ -5485,7 +5382,7 @@
                       </a:endParaRPr>
                     </a:p>
                   </a:txBody>
-                  <a:tcPr marL="91440" marR="91440" marT="36576" marB="36576" anchor="ctr">
+                  <a:tcPr marT="36576" marB="36576" anchor="ctr">
                     <a:lnL w="9525" cap="flat" cmpd="sng" algn="ctr">
                       <a:solidFill>
                         <a:srgbClr val="D8C8A4"/>
@@ -5532,7 +5429,7 @@
                     <a:bodyPr/>
                     <a:lstStyle/>
                     <a:p>
-                      <a:pPr algn="ctr" indent="0" marL="0">
+                      <a:pPr marL="0" indent="0" algn="ctr">
                         <a:buNone/>
                       </a:pPr>
                       <a:r>
@@ -5544,7 +5441,7 @@
                           <a:ea typeface="Malgun Gothic" pitchFamily="34" charset="-122"/>
                           <a:cs typeface="Malgun Gothic" pitchFamily="34" charset="-120"/>
                         </a:rPr>
-                        <a:t>Lineguard</a:t>
+                        <a:t>맥스 앤 더 매직 마커</a:t>
                       </a:r>
                       <a:endParaRPr lang="en-US" sz="1100" dirty="0">
                         <a:latin typeface="Malgun Gothic" charset="0"/>
@@ -5553,7 +5450,7 @@
                       </a:endParaRPr>
                     </a:p>
                     <a:p>
-                      <a:pPr algn="ctr" indent="0" marL="0">
+                      <a:pPr marL="0" indent="0" algn="ctr">
                         <a:buNone/>
                       </a:pPr>
                       <a:r>
@@ -5565,7 +5462,7 @@
                           <a:ea typeface="Malgun Gothic" pitchFamily="34" charset="-122"/>
                           <a:cs typeface="Malgun Gothic" pitchFamily="34" charset="-120"/>
                         </a:rPr>
-                        <a:t>(웹, 2026 공개)</a:t>
+                        <a:t>(PC, 2010)</a:t>
                       </a:r>
                       <a:endParaRPr lang="en-US" sz="1100" dirty="0">
                         <a:latin typeface="Malgun Gothic" charset="0"/>
@@ -5574,7 +5471,7 @@
                       </a:endParaRPr>
                     </a:p>
                   </a:txBody>
-                  <a:tcPr marL="91440" marR="91440" marT="36576" marB="36576" anchor="ctr">
+                  <a:tcPr marT="36576" marB="36576" anchor="ctr">
                     <a:lnL w="9525" cap="flat" cmpd="sng" algn="ctr">
                       <a:solidFill>
                         <a:srgbClr val="D8C8A4"/>
@@ -5621,40 +5518,19 @@
                     <a:bodyPr/>
                     <a:lstStyle/>
                     <a:p>
-                      <a:pPr algn="ctr" indent="0" marL="0">
+                      <a:pPr marL="0" indent="0" algn="ctr">
                         <a:buNone/>
                       </a:pPr>
                       <a:r>
                         <a:rPr lang="en-US" sz="1100" b="1" dirty="0">
                           <a:solidFill>
-                            <a:srgbClr val="2B2118"/>
+                            <a:srgbClr val="FFFFFF"/>
                           </a:solidFill>
                           <a:latin typeface="Malgun Gothic" pitchFamily="34" charset="0"/>
                           <a:ea typeface="Malgun Gothic" pitchFamily="34" charset="-122"/>
                           <a:cs typeface="Malgun Gothic" pitchFamily="34" charset="-120"/>
                         </a:rPr>
-                        <a:t>맥스 앤 더 매직 마커</a:t>
-                      </a:r>
-                      <a:endParaRPr lang="en-US" sz="1100" dirty="0">
-                        <a:latin typeface="Malgun Gothic" charset="0"/>
-                        <a:ea typeface="Malgun Gothic" charset="0"/>
-                        <a:cs typeface="Malgun Gothic" charset="0"/>
-                      </a:endParaRPr>
-                    </a:p>
-                    <a:p>
-                      <a:pPr algn="ctr" indent="0" marL="0">
-                        <a:buNone/>
-                      </a:pPr>
-                      <a:r>
-                        <a:rPr lang="en-US" sz="1100" b="1" dirty="0">
-                          <a:solidFill>
-                            <a:srgbClr val="2B2118"/>
-                          </a:solidFill>
-                          <a:latin typeface="Malgun Gothic" pitchFamily="34" charset="0"/>
-                          <a:ea typeface="Malgun Gothic" pitchFamily="34" charset="-122"/>
-                          <a:cs typeface="Malgun Gothic" pitchFamily="34" charset="-120"/>
-                        </a:rPr>
-                        <a:t>(PC, 2010)</a:t>
+                        <a:t>스톱 앤 스케치</a:t>
                       </a:r>
                       <a:endParaRPr lang="en-US" sz="1100" dirty="0">
                         <a:latin typeface="Malgun Gothic" charset="0"/>
@@ -5663,7 +5539,82 @@
                       </a:endParaRPr>
                     </a:p>
                   </a:txBody>
-                  <a:tcPr marL="91440" marR="91440" marT="36576" marB="36576" anchor="ctr">
+                  <a:tcPr marT="36576" marB="36576" anchor="ctr">
+                    <a:lnL w="9525" cap="flat" cmpd="sng" algn="ctr">
+                      <a:solidFill>
+                        <a:srgbClr val="D8C8A4"/>
+                      </a:solidFill>
+                      <a:prstDash val="solid"/>
+                      <a:round/>
+                      <a:headEnd type="none" w="med" len="med"/>
+                      <a:tailEnd type="none" w="med" len="med"/>
+                    </a:lnL>
+                    <a:lnR w="9525" cap="flat" cmpd="sng" algn="ctr">
+                      <a:solidFill>
+                        <a:srgbClr val="D8C8A4"/>
+                      </a:solidFill>
+                      <a:prstDash val="solid"/>
+                      <a:round/>
+                      <a:headEnd type="none" w="med" len="med"/>
+                      <a:tailEnd type="none" w="med" len="med"/>
+                    </a:lnR>
+                    <a:lnT w="9525" cap="flat" cmpd="sng" algn="ctr">
+                      <a:solidFill>
+                        <a:srgbClr val="D8C8A4"/>
+                      </a:solidFill>
+                      <a:prstDash val="solid"/>
+                      <a:round/>
+                      <a:headEnd type="none" w="med" len="med"/>
+                      <a:tailEnd type="none" w="med" len="med"/>
+                    </a:lnT>
+                    <a:lnB w="9525" cap="flat" cmpd="sng" algn="ctr">
+                      <a:solidFill>
+                        <a:srgbClr val="D8C8A4"/>
+                      </a:solidFill>
+                      <a:prstDash val="solid"/>
+                      <a:round/>
+                      <a:headEnd type="none" w="med" len="med"/>
+                      <a:tailEnd type="none" w="med" len="med"/>
+                    </a:lnB>
+                    <a:solidFill>
+                      <a:srgbClr val="1F6FE0"/>
+                    </a:solidFill>
+                  </a:tcPr>
+                </a:tc>
+                <a:extLst>
+                  <a:ext uri="{0D108BD9-81ED-4DB2-BD59-A6C34878D82A}">
+                    <a16:rowId xmlns:a16="http://schemas.microsoft.com/office/drawing/2014/main" val="10000"/>
+                  </a:ext>
+                </a:extLst>
+              </a:tr>
+              <a:tr h="621792">
+                <a:tc>
+                  <a:txBody>
+                    <a:bodyPr/>
+                    <a:lstStyle/>
+                    <a:p>
+                      <a:pPr marL="0" indent="0">
+                        <a:buNone/>
+                      </a:pPr>
+                      <a:r>
+                        <a:rPr lang="en-US" sz="1100" b="1" dirty="0">
+                          <a:solidFill>
+                            <a:srgbClr val="1F6FE0"/>
+                          </a:solidFill>
+                          <a:latin typeface="Malgun Gothic" pitchFamily="34" charset="0"/>
+                          <a:ea typeface="Malgun Gothic" pitchFamily="34" charset="-122"/>
+                          <a:cs typeface="Malgun Gothic" pitchFamily="34" charset="-120"/>
+                        </a:rPr>
+                        <a:t>캐릭터</a:t>
+                      </a:r>
+                      <a:endParaRPr lang="en-US" sz="1100" dirty="0">
+                        <a:latin typeface="Malgun Gothic" charset="0"/>
+                        <a:ea typeface="Malgun Gothic" charset="0"/>
+                        <a:cs typeface="Malgun Gothic" charset="0"/>
+                      </a:endParaRPr>
+                    </a:p>
+                  </a:txBody>
+                  <a:tcPr marT="36576" marB="36576" anchor="ctr">
                     <a:lnL w="9525" cap="flat" cmpd="sng" algn="ctr">
                       <a:solidFill>
                         <a:srgbClr val="D8C8A4"/>
@@ -5710,19 +5661,19 @@
                     <a:bodyPr/>
                     <a:lstStyle/>
                     <a:p>
-                      <a:pPr algn="ctr" indent="0" marL="0">
+                      <a:pPr marL="0" indent="0">
                         <a:buNone/>
                       </a:pPr>
                       <a:r>
-                        <a:rPr lang="en-US" sz="1100" b="1" dirty="0">
+                        <a:rPr lang="en-US" sz="1100" dirty="0">
                           <a:solidFill>
-                            <a:srgbClr val="FFFFFF"/>
+                            <a:srgbClr val="2B2118"/>
                           </a:solidFill>
                           <a:latin typeface="Malgun Gothic" pitchFamily="34" charset="0"/>
                           <a:ea typeface="Malgun Gothic" pitchFamily="34" charset="-122"/>
                           <a:cs typeface="Malgun Gothic" pitchFamily="34" charset="-120"/>
                         </a:rPr>
-                        <a:t>스톱 앤 스케치</a:t>
+                        <a:t>자동 이동 1명</a:t>
                       </a:r>
                       <a:endParaRPr lang="en-US" sz="1100" dirty="0">
                         <a:latin typeface="Malgun Gothic" charset="0"/>
@@ -5731,7 +5682,7 @@
                       </a:endParaRPr>
                     </a:p>
                   </a:txBody>
-                  <a:tcPr marL="91440" marR="91440" marT="36576" marB="36576" anchor="ctr">
+                  <a:tcPr marT="36576" marB="36576" anchor="ctr">
                     <a:lnL w="9525" cap="flat" cmpd="sng" algn="ctr">
                       <a:solidFill>
                         <a:srgbClr val="D8C8A4"/>
@@ -5769,10 +5720,219 @@
                       <a:tailEnd type="none" w="med" len="med"/>
                     </a:lnB>
                     <a:solidFill>
-                      <a:srgbClr val="1F6FE0"/>
+                      <a:srgbClr val="FFFFFF"/>
                     </a:solidFill>
                   </a:tcPr>
                 </a:tc>
+                <a:tc>
+                  <a:txBody>
+                    <a:bodyPr/>
+                    <a:lstStyle/>
+                    <a:p>
+                      <a:pPr marL="0" indent="0">
+                        <a:buNone/>
+                      </a:pPr>
+                      <a:r>
+                        <a:rPr lang="en-US" sz="1100" dirty="0">
+                          <a:solidFill>
+                            <a:srgbClr val="2B2118"/>
+                          </a:solidFill>
+                          <a:latin typeface="Malgun Gothic" pitchFamily="34" charset="0"/>
+                          <a:ea typeface="Malgun Gothic" pitchFamily="34" charset="-122"/>
+                          <a:cs typeface="Malgun Gothic" pitchFamily="34" charset="-120"/>
+                        </a:rPr>
+                        <a:t>자동 달리기 1명</a:t>
+                      </a:r>
+                      <a:endParaRPr lang="en-US" sz="1100" dirty="0">
+                        <a:latin typeface="Malgun Gothic" charset="0"/>
+                        <a:ea typeface="Malgun Gothic" charset="0"/>
+                        <a:cs typeface="Malgun Gothic" charset="0"/>
+                      </a:endParaRPr>
+                    </a:p>
+                  </a:txBody>
+                  <a:tcPr marT="36576" marB="36576" anchor="ctr">
+                    <a:lnL w="9525" cap="flat" cmpd="sng" algn="ctr">
+                      <a:solidFill>
+                        <a:srgbClr val="D8C8A4"/>
+                      </a:solidFill>
+                      <a:prstDash val="solid"/>
+                      <a:round/>
+                      <a:headEnd type="none" w="med" len="med"/>
+                      <a:tailEnd type="none" w="med" len="med"/>
+                    </a:lnL>
+                    <a:lnR w="9525" cap="flat" cmpd="sng" algn="ctr">
+                      <a:solidFill>
+                        <a:srgbClr val="D8C8A4"/>
+                      </a:solidFill>
+                      <a:prstDash val="solid"/>
+                      <a:round/>
+                      <a:headEnd type="none" w="med" len="med"/>
+                      <a:tailEnd type="none" w="med" len="med"/>
+                    </a:lnR>
+                    <a:lnT w="9525" cap="flat" cmpd="sng" algn="ctr">
+                      <a:solidFill>
+                        <a:srgbClr val="D8C8A4"/>
+                      </a:solidFill>
+                      <a:prstDash val="solid"/>
+                      <a:round/>
+                      <a:headEnd type="none" w="med" len="med"/>
+                      <a:tailEnd type="none" w="med" len="med"/>
+                    </a:lnT>
+                    <a:lnB w="9525" cap="flat" cmpd="sng" algn="ctr">
+                      <a:solidFill>
+                        <a:srgbClr val="D8C8A4"/>
+                      </a:solidFill>
+                      <a:prstDash val="solid"/>
+                      <a:round/>
+                      <a:headEnd type="none" w="med" len="med"/>
+                      <a:tailEnd type="none" w="med" len="med"/>
+                    </a:lnB>
+                    <a:solidFill>
+                      <a:srgbClr val="FFFFFF"/>
+                    </a:solidFill>
+                  </a:tcPr>
+                </a:tc>
+                <a:tc>
+                  <a:txBody>
+                    <a:bodyPr/>
+                    <a:lstStyle/>
+                    <a:p>
+                      <a:pPr marL="0" indent="0">
+                        <a:buNone/>
+                      </a:pPr>
+                      <a:r>
+                        <a:rPr lang="en-US" sz="1100" dirty="0">
+                          <a:solidFill>
+                            <a:srgbClr val="2B2118"/>
+                          </a:solidFill>
+                          <a:latin typeface="Malgun Gothic" pitchFamily="34" charset="0"/>
+                          <a:ea typeface="Malgun Gothic" pitchFamily="34" charset="-122"/>
+                          <a:cs typeface="Malgun Gothic" pitchFamily="34" charset="-120"/>
+                        </a:rPr>
+                        <a:t>직접 조종 1명</a:t>
+                      </a:r>
+                      <a:endParaRPr lang="en-US" sz="1100" dirty="0">
+                        <a:latin typeface="Malgun Gothic" charset="0"/>
+                        <a:ea typeface="Malgun Gothic" charset="0"/>
+                        <a:cs typeface="Malgun Gothic" charset="0"/>
+                      </a:endParaRPr>
+                    </a:p>
+                  </a:txBody>
+                  <a:tcPr marT="36576" marB="36576" anchor="ctr">
+                    <a:lnL w="9525" cap="flat" cmpd="sng" algn="ctr">
+                      <a:solidFill>
+                        <a:srgbClr val="D8C8A4"/>
+                      </a:solidFill>
+                      <a:prstDash val="solid"/>
+                      <a:round/>
+                      <a:headEnd type="none" w="med" len="med"/>
+                      <a:tailEnd type="none" w="med" len="med"/>
+                    </a:lnL>
+                    <a:lnR w="9525" cap="flat" cmpd="sng" algn="ctr">
+                      <a:solidFill>
+                        <a:srgbClr val="D8C8A4"/>
+                      </a:solidFill>
+                      <a:prstDash val="solid"/>
+                      <a:round/>
+                      <a:headEnd type="none" w="med" len="med"/>
+                      <a:tailEnd type="none" w="med" len="med"/>
+                    </a:lnR>
+                    <a:lnT w="9525" cap="flat" cmpd="sng" algn="ctr">
+                      <a:solidFill>
+                        <a:srgbClr val="D8C8A4"/>
+                      </a:solidFill>
+                      <a:prstDash val="solid"/>
+                      <a:round/>
+                      <a:headEnd type="none" w="med" len="med"/>
+                      <a:tailEnd type="none" w="med" len="med"/>
+                    </a:lnT>
+                    <a:lnB w="9525" cap="flat" cmpd="sng" algn="ctr">
+                      <a:solidFill>
+                        <a:srgbClr val="D8C8A4"/>
+                      </a:solidFill>
+                      <a:prstDash val="solid"/>
+                      <a:round/>
+                      <a:headEnd type="none" w="med" len="med"/>
+                      <a:tailEnd type="none" w="med" len="med"/>
+                    </a:lnB>
+                    <a:solidFill>
+                      <a:srgbClr val="FFFFFF"/>
+                    </a:solidFill>
+                  </a:tcPr>
+                </a:tc>
+                <a:tc>
+                  <a:txBody>
+                    <a:bodyPr/>
+                    <a:lstStyle/>
+                    <a:p>
+                      <a:pPr marL="0" indent="0">
+                        <a:buNone/>
+                      </a:pPr>
+                      <a:r>
+                        <a:rPr lang="en-US" sz="1100" b="1" dirty="0">
+                          <a:solidFill>
+                            <a:srgbClr val="2B2118"/>
+                          </a:solidFill>
+                          <a:latin typeface="Malgun Gothic" pitchFamily="34" charset="0"/>
+                          <a:ea typeface="Malgun Gothic" pitchFamily="34" charset="-122"/>
+                          <a:cs typeface="Malgun Gothic" pitchFamily="34" charset="-120"/>
+                        </a:rPr>
+                        <a:t>스스로 걷는 무리 (주인공 + 따라오는 물방울)</a:t>
+                      </a:r>
+                      <a:endParaRPr lang="en-US" sz="1100" dirty="0">
+                        <a:latin typeface="Malgun Gothic" charset="0"/>
+                        <a:ea typeface="Malgun Gothic" charset="0"/>
+                        <a:cs typeface="Malgun Gothic" charset="0"/>
+                      </a:endParaRPr>
+                    </a:p>
+                  </a:txBody>
+                  <a:tcPr marT="36576" marB="36576" anchor="ctr">
+                    <a:lnL w="9525" cap="flat" cmpd="sng" algn="ctr">
+                      <a:solidFill>
+                        <a:srgbClr val="D8C8A4"/>
+                      </a:solidFill>
+                      <a:prstDash val="solid"/>
+                      <a:round/>
+                      <a:headEnd type="none" w="med" len="med"/>
+                      <a:tailEnd type="none" w="med" len="med"/>
+                    </a:lnL>
+                    <a:lnR w="9525" cap="flat" cmpd="sng" algn="ctr">
+                      <a:solidFill>
+                        <a:srgbClr val="D8C8A4"/>
+                      </a:solidFill>
+                      <a:prstDash val="solid"/>
+                      <a:round/>
+                      <a:headEnd type="none" w="med" len="med"/>
+                      <a:tailEnd type="none" w="med" len="med"/>
+                    </a:lnR>
+                    <a:lnT w="9525" cap="flat" cmpd="sng" algn="ctr">
+                      <a:solidFill>
+                        <a:srgbClr val="D8C8A4"/>
+                      </a:solidFill>
+                      <a:prstDash val="solid"/>
+                      <a:round/>
+                      <a:headEnd type="none" w="med" len="med"/>
+                      <a:tailEnd type="none" w="med" len="med"/>
+                    </a:lnT>
+                    <a:lnB w="9525" cap="flat" cmpd="sng" algn="ctr">
+                      <a:solidFill>
+                        <a:srgbClr val="D8C8A4"/>
+                      </a:solidFill>
+                      <a:prstDash val="solid"/>
+                      <a:round/>
+                      <a:headEnd type="none" w="med" len="med"/>
+                      <a:tailEnd type="none" w="med" len="med"/>
+                    </a:lnB>
+                    <a:solidFill>
+                      <a:srgbClr val="EAF3FD"/>
+                    </a:solidFill>
+                  </a:tcPr>
+                </a:tc>
+                <a:extLst>
+                  <a:ext uri="{0D108BD9-81ED-4DB2-BD59-A6C34878D82A}">
+                    <a16:rowId xmlns:a16="http://schemas.microsoft.com/office/drawing/2014/main" val="10001"/>
+                  </a:ext>
+                </a:extLst>
               </a:tr>
               <a:tr h="621792">
                 <a:tc>
@@ -5780,7 +5940,7 @@
                     <a:bodyPr/>
                     <a:lstStyle/>
                     <a:p>
-                      <a:pPr indent="0" marL="0">
+                      <a:pPr marL="0" indent="0">
                         <a:buNone/>
                       </a:pPr>
                       <a:r>
@@ -5792,7 +5952,7 @@
                           <a:ea typeface="Malgun Gothic" pitchFamily="34" charset="-122"/>
                           <a:cs typeface="Malgun Gothic" pitchFamily="34" charset="-120"/>
                         </a:rPr>
-                        <a:t>캐릭터</a:t>
+                        <a:t>시간</a:t>
                       </a:r>
                       <a:endParaRPr lang="en-US" sz="1100" dirty="0">
                         <a:latin typeface="Malgun Gothic" charset="0"/>
@@ -5801,7 +5961,7 @@
                       </a:endParaRPr>
                     </a:p>
                   </a:txBody>
-                  <a:tcPr marL="91440" marR="91440" marT="36576" marB="36576" anchor="ctr">
+                  <a:tcPr marT="36576" marB="36576" anchor="ctr">
                     <a:lnL w="9525" cap="flat" cmpd="sng" algn="ctr">
                       <a:solidFill>
                         <a:srgbClr val="D8C8A4"/>
@@ -5848,7 +6008,7 @@
                     <a:bodyPr/>
                     <a:lstStyle/>
                     <a:p>
-                      <a:pPr indent="0" marL="0">
+                      <a:pPr marL="0" indent="0">
                         <a:buNone/>
                       </a:pPr>
                       <a:r>
@@ -5860,7 +6020,7 @@
                           <a:ea typeface="Malgun Gothic" pitchFamily="34" charset="-122"/>
                           <a:cs typeface="Malgun Gothic" pitchFamily="34" charset="-120"/>
                         </a:rPr>
-                        <a:t>자동 이동 1명</a:t>
+                        <a:t>그리는 동안 흐름</a:t>
                       </a:r>
                       <a:endParaRPr lang="en-US" sz="1100" dirty="0">
                         <a:latin typeface="Malgun Gothic" charset="0"/>
@@ -5869,7 +6029,7 @@
                       </a:endParaRPr>
                     </a:p>
                   </a:txBody>
-                  <a:tcPr marL="91440" marR="91440" marT="36576" marB="36576" anchor="ctr">
+                  <a:tcPr marT="36576" marB="36576" anchor="ctr">
                     <a:lnL w="9525" cap="flat" cmpd="sng" algn="ctr">
                       <a:solidFill>
                         <a:srgbClr val="D8C8A4"/>
@@ -5916,7 +6076,7 @@
                     <a:bodyPr/>
                     <a:lstStyle/>
                     <a:p>
-                      <a:pPr indent="0" marL="0">
+                      <a:pPr marL="0" indent="0">
                         <a:buNone/>
                       </a:pPr>
                       <a:r>
@@ -5928,7 +6088,7 @@
                           <a:ea typeface="Malgun Gothic" pitchFamily="34" charset="-122"/>
                           <a:cs typeface="Malgun Gothic" pitchFamily="34" charset="-120"/>
                         </a:rPr>
-                        <a:t>자동 달리기 1명</a:t>
+                        <a:t>그리는 동안 느려짐</a:t>
                       </a:r>
                       <a:endParaRPr lang="en-US" sz="1100" dirty="0">
                         <a:latin typeface="Malgun Gothic" charset="0"/>
@@ -5937,7 +6097,7 @@
                       </a:endParaRPr>
                     </a:p>
                   </a:txBody>
-                  <a:tcPr marL="91440" marR="91440" marT="36576" marB="36576" anchor="ctr">
+                  <a:tcPr marT="36576" marB="36576" anchor="ctr">
                     <a:lnL w="9525" cap="flat" cmpd="sng" algn="ctr">
                       <a:solidFill>
                         <a:srgbClr val="D8C8A4"/>
@@ -5984,7 +6144,7 @@
                     <a:bodyPr/>
                     <a:lstStyle/>
                     <a:p>
-                      <a:pPr indent="0" marL="0">
+                      <a:pPr marL="0" indent="0">
                         <a:buNone/>
                       </a:pPr>
                       <a:r>
@@ -5996,7 +6156,7 @@
                           <a:ea typeface="Malgun Gothic" pitchFamily="34" charset="-122"/>
                           <a:cs typeface="Malgun Gothic" pitchFamily="34" charset="-120"/>
                         </a:rPr>
-                        <a:t>직접 조종 1명</a:t>
+                        <a:t>멈춤 (횟수 제한 없음)</a:t>
                       </a:r>
                       <a:endParaRPr lang="en-US" sz="1100" dirty="0">
                         <a:latin typeface="Malgun Gothic" charset="0"/>
@@ -6005,7 +6165,7 @@
                       </a:endParaRPr>
                     </a:p>
                   </a:txBody>
-                  <a:tcPr marL="91440" marR="91440" marT="36576" marB="36576" anchor="ctr">
+                  <a:tcPr marT="36576" marB="36576" anchor="ctr">
                     <a:lnL w="9525" cap="flat" cmpd="sng" algn="ctr">
                       <a:solidFill>
                         <a:srgbClr val="D8C8A4"/>
@@ -6052,7 +6212,7 @@
                     <a:bodyPr/>
                     <a:lstStyle/>
                     <a:p>
-                      <a:pPr indent="0" marL="0">
+                      <a:pPr marL="0" indent="0">
                         <a:buNone/>
                       </a:pPr>
                       <a:r>
@@ -6064,7 +6224,7 @@
                           <a:ea typeface="Malgun Gothic" pitchFamily="34" charset="-122"/>
                           <a:cs typeface="Malgun Gothic" pitchFamily="34" charset="-120"/>
                         </a:rPr>
-                        <a:t>스스로 걷는 무리 (주인공 + 따라오는 물방울)</a:t>
+                        <a:t>완전히 멈춤 · 스테이지당 횟수 제한</a:t>
                       </a:r>
                       <a:endParaRPr lang="en-US" sz="1100" dirty="0">
                         <a:latin typeface="Malgun Gothic" charset="0"/>
@@ -6073,7 +6233,7 @@
                       </a:endParaRPr>
                     </a:p>
                   </a:txBody>
-                  <a:tcPr marL="91440" marR="91440" marT="36576" marB="36576" anchor="ctr">
+                  <a:tcPr marT="36576" marB="36576" anchor="ctr">
                     <a:lnL w="9525" cap="flat" cmpd="sng" algn="ctr">
                       <a:solidFill>
                         <a:srgbClr val="D8C8A4"/>
@@ -6115,6 +6275,11 @@
                     </a:solidFill>
                   </a:tcPr>
                 </a:tc>
+                <a:extLst>
+                  <a:ext uri="{0D108BD9-81ED-4DB2-BD59-A6C34878D82A}">
+                    <a16:rowId xmlns:a16="http://schemas.microsoft.com/office/drawing/2014/main" val="10002"/>
+                  </a:ext>
+                </a:extLst>
               </a:tr>
               <a:tr h="621792">
                 <a:tc>
@@ -6122,7 +6287,7 @@
                     <a:bodyPr/>
                     <a:lstStyle/>
                     <a:p>
-                      <a:pPr indent="0" marL="0">
+                      <a:pPr marL="0" indent="0">
                         <a:buNone/>
                       </a:pPr>
                       <a:r>
@@ -6134,7 +6299,7 @@
                           <a:ea typeface="Malgun Gothic" pitchFamily="34" charset="-122"/>
                           <a:cs typeface="Malgun Gothic" pitchFamily="34" charset="-120"/>
                         </a:rPr>
-                        <a:t>시간</a:t>
+                        <a:t>선·물감</a:t>
                       </a:r>
                       <a:endParaRPr lang="en-US" sz="1100" dirty="0">
                         <a:latin typeface="Malgun Gothic" charset="0"/>
@@ -6143,7 +6308,7 @@
                       </a:endParaRPr>
                     </a:p>
                   </a:txBody>
-                  <a:tcPr marL="91440" marR="91440" marT="36576" marB="36576" anchor="ctr">
+                  <a:tcPr marT="36576" marB="36576" anchor="ctr">
                     <a:lnL w="9525" cap="flat" cmpd="sng" algn="ctr">
                       <a:solidFill>
                         <a:srgbClr val="D8C8A4"/>
@@ -6190,7 +6355,7 @@
                     <a:bodyPr/>
                     <a:lstStyle/>
                     <a:p>
-                      <a:pPr indent="0" marL="0">
+                      <a:pPr marL="0" indent="0">
                         <a:buNone/>
                       </a:pPr>
                       <a:r>
@@ -6202,7 +6367,7 @@
                           <a:ea typeface="Malgun Gothic" pitchFamily="34" charset="-122"/>
                           <a:cs typeface="Malgun Gothic" pitchFamily="34" charset="-120"/>
                         </a:rPr>
-                        <a:t>그리는 동안 흐름</a:t>
+                        <a:t>1종, 곧 사라짐</a:t>
                       </a:r>
                       <a:endParaRPr lang="en-US" sz="1100" dirty="0">
                         <a:latin typeface="Malgun Gothic" charset="0"/>
@@ -6211,7 +6376,7 @@
                       </a:endParaRPr>
                     </a:p>
                   </a:txBody>
-                  <a:tcPr marL="91440" marR="91440" marT="36576" marB="36576" anchor="ctr">
+                  <a:tcPr marT="36576" marB="36576" anchor="ctr">
                     <a:lnL w="9525" cap="flat" cmpd="sng" algn="ctr">
                       <a:solidFill>
                         <a:srgbClr val="D8C8A4"/>
@@ -6258,7 +6423,7 @@
                     <a:bodyPr/>
                     <a:lstStyle/>
                     <a:p>
-                      <a:pPr indent="0" marL="0">
+                      <a:pPr marL="0" indent="0">
                         <a:buNone/>
                       </a:pPr>
                       <a:r>
@@ -6270,7 +6435,7 @@
                           <a:ea typeface="Malgun Gothic" pitchFamily="34" charset="-122"/>
                           <a:cs typeface="Malgun Gothic" pitchFamily="34" charset="-120"/>
                         </a:rPr>
-                        <a:t>그리는 동안 느려짐</a:t>
+                        <a:t>5종 물리 성질, 몇 초</a:t>
                       </a:r>
                       <a:endParaRPr lang="en-US" sz="1100" dirty="0">
                         <a:latin typeface="Malgun Gothic" charset="0"/>
@@ -6279,7 +6444,7 @@
                       </a:endParaRPr>
                     </a:p>
                   </a:txBody>
-                  <a:tcPr marL="91440" marR="91440" marT="36576" marB="36576" anchor="ctr">
+                  <a:tcPr marT="36576" marB="36576" anchor="ctr">
                     <a:lnL w="9525" cap="flat" cmpd="sng" algn="ctr">
                       <a:solidFill>
                         <a:srgbClr val="D8C8A4"/>
@@ -6326,7 +6491,7 @@
                     <a:bodyPr/>
                     <a:lstStyle/>
                     <a:p>
-                      <a:pPr indent="0" marL="0">
+                      <a:pPr marL="0" indent="0">
                         <a:buNone/>
                       </a:pPr>
                       <a:r>
@@ -6338,7 +6503,7 @@
                           <a:ea typeface="Malgun Gothic" pitchFamily="34" charset="-122"/>
                           <a:cs typeface="Malgun Gothic" pitchFamily="34" charset="-120"/>
                         </a:rPr>
-                        <a:t>멈춤 (횟수 제한 없음)</a:t>
+                        <a:t>1종, 그린 물체에 중력</a:t>
                       </a:r>
                       <a:endParaRPr lang="en-US" sz="1100" dirty="0">
                         <a:latin typeface="Malgun Gothic" charset="0"/>
@@ -6347,7 +6512,7 @@
                       </a:endParaRPr>
                     </a:p>
                   </a:txBody>
-                  <a:tcPr marL="91440" marR="91440" marT="36576" marB="36576" anchor="ctr">
+                  <a:tcPr marT="36576" marB="36576" anchor="ctr">
                     <a:lnL w="9525" cap="flat" cmpd="sng" algn="ctr">
                       <a:solidFill>
                         <a:srgbClr val="D8C8A4"/>
@@ -6394,7 +6559,7 @@
                     <a:bodyPr/>
                     <a:lstStyle/>
                     <a:p>
-                      <a:pPr indent="0" marL="0">
+                      <a:pPr marL="0" indent="0">
                         <a:buNone/>
                       </a:pPr>
                       <a:r>
@@ -6406,7 +6571,7 @@
                           <a:ea typeface="Malgun Gothic" pitchFamily="34" charset="-122"/>
                           <a:cs typeface="Malgun Gothic" pitchFamily="34" charset="-120"/>
                         </a:rPr>
-                        <a:t>완전히 멈춤 · 스테이지당 횟수 제한</a:t>
+                        <a:t>5색 물리 성질 · 떨어지는 물체 · 빨아들여 회수</a:t>
                       </a:r>
                       <a:endParaRPr lang="en-US" sz="1100" dirty="0">
                         <a:latin typeface="Malgun Gothic" charset="0"/>
@@ -6415,7 +6580,7 @@
                       </a:endParaRPr>
                     </a:p>
                   </a:txBody>
-                  <a:tcPr marL="91440" marR="91440" marT="36576" marB="36576" anchor="ctr">
+                  <a:tcPr marT="36576" marB="36576" anchor="ctr">
                     <a:lnL w="9525" cap="flat" cmpd="sng" algn="ctr">
                       <a:solidFill>
                         <a:srgbClr val="D8C8A4"/>
@@ -6457,6 +6622,11 @@
                     </a:solidFill>
                   </a:tcPr>
                 </a:tc>
+                <a:extLst>
+                  <a:ext uri="{0D108BD9-81ED-4DB2-BD59-A6C34878D82A}">
+                    <a16:rowId xmlns:a16="http://schemas.microsoft.com/office/drawing/2014/main" val="10003"/>
+                  </a:ext>
+                </a:extLst>
               </a:tr>
               <a:tr h="621792">
                 <a:tc>
@@ -6464,7 +6634,7 @@
                     <a:bodyPr/>
                     <a:lstStyle/>
                     <a:p>
-                      <a:pPr indent="0" marL="0">
+                      <a:pPr marL="0" indent="0">
                         <a:buNone/>
                       </a:pPr>
                       <a:r>
@@ -6476,7 +6646,7 @@
                           <a:ea typeface="Malgun Gothic" pitchFamily="34" charset="-122"/>
                           <a:cs typeface="Malgun Gothic" pitchFamily="34" charset="-120"/>
                         </a:rPr>
-                        <a:t>선·물감</a:t>
+                        <a:t>결과</a:t>
                       </a:r>
                       <a:endParaRPr lang="en-US" sz="1100" dirty="0">
                         <a:latin typeface="Malgun Gothic" charset="0"/>
@@ -6485,7 +6655,7 @@
                       </a:endParaRPr>
                     </a:p>
                   </a:txBody>
-                  <a:tcPr marL="91440" marR="91440" marT="36576" marB="36576" anchor="ctr">
+                  <a:tcPr marT="36576" marB="36576" anchor="ctr">
                     <a:lnL w="9525" cap="flat" cmpd="sng" algn="ctr">
                       <a:solidFill>
                         <a:srgbClr val="D8C8A4"/>
@@ -6532,7 +6702,7 @@
                     <a:bodyPr/>
                     <a:lstStyle/>
                     <a:p>
-                      <a:pPr indent="0" marL="0">
+                      <a:pPr marL="0" indent="0">
                         <a:buNone/>
                       </a:pPr>
                       <a:r>
@@ -6544,7 +6714,7 @@
                           <a:ea typeface="Malgun Gothic" pitchFamily="34" charset="-122"/>
                           <a:cs typeface="Malgun Gothic" pitchFamily="34" charset="-120"/>
                         </a:rPr>
-                        <a:t>1종, 곧 사라짐</a:t>
+                        <a:t>도착</a:t>
                       </a:r>
                       <a:endParaRPr lang="en-US" sz="1100" dirty="0">
                         <a:latin typeface="Malgun Gothic" charset="0"/>
@@ -6553,7 +6723,7 @@
                       </a:endParaRPr>
                     </a:p>
                   </a:txBody>
-                  <a:tcPr marL="91440" marR="91440" marT="36576" marB="36576" anchor="ctr">
+                  <a:tcPr marT="36576" marB="36576" anchor="ctr">
                     <a:lnL w="9525" cap="flat" cmpd="sng" algn="ctr">
                       <a:solidFill>
                         <a:srgbClr val="D8C8A4"/>
@@ -6600,7 +6770,7 @@
                     <a:bodyPr/>
                     <a:lstStyle/>
                     <a:p>
-                      <a:pPr indent="0" marL="0">
+                      <a:pPr marL="0" indent="0">
                         <a:buNone/>
                       </a:pPr>
                       <a:r>
@@ -6612,7 +6782,7 @@
                           <a:ea typeface="Malgun Gothic" pitchFamily="34" charset="-122"/>
                           <a:cs typeface="Malgun Gothic" pitchFamily="34" charset="-120"/>
                         </a:rPr>
-                        <a:t>5종 물리 성질, 몇 초</a:t>
+                        <a:t>도착 · 별</a:t>
                       </a:r>
                       <a:endParaRPr lang="en-US" sz="1100" dirty="0">
                         <a:latin typeface="Malgun Gothic" charset="0"/>
@@ -6621,7 +6791,7 @@
                       </a:endParaRPr>
                     </a:p>
                   </a:txBody>
-                  <a:tcPr marL="91440" marR="91440" marT="36576" marB="36576" anchor="ctr">
+                  <a:tcPr marT="36576" marB="36576" anchor="ctr">
                     <a:lnL w="9525" cap="flat" cmpd="sng" algn="ctr">
                       <a:solidFill>
                         <a:srgbClr val="D8C8A4"/>
@@ -6668,7 +6838,7 @@
                     <a:bodyPr/>
                     <a:lstStyle/>
                     <a:p>
-                      <a:pPr indent="0" marL="0">
+                      <a:pPr marL="0" indent="0">
                         <a:buNone/>
                       </a:pPr>
                       <a:r>
@@ -6680,7 +6850,7 @@
                           <a:ea typeface="Malgun Gothic" pitchFamily="34" charset="-122"/>
                           <a:cs typeface="Malgun Gothic" pitchFamily="34" charset="-120"/>
                         </a:rPr>
-                        <a:t>1종, 그린 물체에 중력</a:t>
+                        <a:t>도착</a:t>
                       </a:r>
                       <a:endParaRPr lang="en-US" sz="1100" dirty="0">
                         <a:latin typeface="Malgun Gothic" charset="0"/>
@@ -6689,7 +6859,7 @@
                       </a:endParaRPr>
                     </a:p>
                   </a:txBody>
-                  <a:tcPr marL="91440" marR="91440" marT="36576" marB="36576" anchor="ctr">
+                  <a:tcPr marT="36576" marB="36576" anchor="ctr">
                     <a:lnL w="9525" cap="flat" cmpd="sng" algn="ctr">
                       <a:solidFill>
                         <a:srgbClr val="D8C8A4"/>
@@ -6736,7 +6906,7 @@
                     <a:bodyPr/>
                     <a:lstStyle/>
                     <a:p>
-                      <a:pPr indent="0" marL="0">
+                      <a:pPr marL="0" indent="0">
                         <a:buNone/>
                       </a:pPr>
                       <a:r>
@@ -6748,7 +6918,7 @@
                           <a:ea typeface="Malgun Gothic" pitchFamily="34" charset="-122"/>
                           <a:cs typeface="Malgun Gothic" pitchFamily="34" charset="-120"/>
                         </a:rPr>
-                        <a:t>5색 물리 성질 · 떨어지는 물체 · 빨아들여 회수</a:t>
+                        <a:t>데려간 비율만큼 잉크병이 맑아짐 (정화 %) · 별</a:t>
                       </a:r>
                       <a:endParaRPr lang="en-US" sz="1100" dirty="0">
                         <a:latin typeface="Malgun Gothic" charset="0"/>
@@ -6757,7 +6927,7 @@
                       </a:endParaRPr>
                     </a:p>
                   </a:txBody>
-                  <a:tcPr marL="91440" marR="91440" marT="36576" marB="36576" anchor="ctr">
+                  <a:tcPr marT="36576" marB="36576" anchor="ctr">
                     <a:lnL w="9525" cap="flat" cmpd="sng" algn="ctr">
                       <a:solidFill>
                         <a:srgbClr val="D8C8A4"/>
@@ -6799,348 +6969,11 @@
                     </a:solidFill>
                   </a:tcPr>
                 </a:tc>
-              </a:tr>
-              <a:tr h="621792">
-                <a:tc>
-                  <a:txBody>
-                    <a:bodyPr/>
-                    <a:lstStyle/>
-                    <a:p>
-                      <a:pPr indent="0" marL="0">
-                        <a:buNone/>
-                      </a:pPr>
-                      <a:r>
-                        <a:rPr lang="en-US" sz="1100" b="1" dirty="0">
-                          <a:solidFill>
-                            <a:srgbClr val="1F6FE0"/>
-                          </a:solidFill>
-                          <a:latin typeface="Malgun Gothic" pitchFamily="34" charset="0"/>
-                          <a:ea typeface="Malgun Gothic" pitchFamily="34" charset="-122"/>
-                          <a:cs typeface="Malgun Gothic" pitchFamily="34" charset="-120"/>
-                        </a:rPr>
-                        <a:t>결과</a:t>
-                      </a:r>
-                      <a:endParaRPr lang="en-US" sz="1100" dirty="0">
-                        <a:latin typeface="Malgun Gothic" charset="0"/>
-                        <a:ea typeface="Malgun Gothic" charset="0"/>
-                        <a:cs typeface="Malgun Gothic" charset="0"/>
-                      </a:endParaRPr>
-                    </a:p>
-                  </a:txBody>
-                  <a:tcPr marL="91440" marR="91440" marT="36576" marB="36576" anchor="ctr">
-                    <a:lnL w="9525" cap="flat" cmpd="sng" algn="ctr">
-                      <a:solidFill>
-                        <a:srgbClr val="D8C8A4"/>
-                      </a:solidFill>
-                      <a:prstDash val="solid"/>
-                      <a:round/>
-                      <a:headEnd type="none" w="med" len="med"/>
-                      <a:tailEnd type="none" w="med" len="med"/>
-                    </a:lnL>
-                    <a:lnR w="9525" cap="flat" cmpd="sng" algn="ctr">
-                      <a:solidFill>
-                        <a:srgbClr val="D8C8A4"/>
-                      </a:solidFill>
-                      <a:prstDash val="solid"/>
-                      <a:round/>
-                      <a:headEnd type="none" w="med" len="med"/>
-                      <a:tailEnd type="none" w="med" len="med"/>
-                    </a:lnR>
-                    <a:lnT w="9525" cap="flat" cmpd="sng" algn="ctr">
-                      <a:solidFill>
-                        <a:srgbClr val="D8C8A4"/>
-                      </a:solidFill>
-                      <a:prstDash val="solid"/>
-                      <a:round/>
-                      <a:headEnd type="none" w="med" len="med"/>
-                      <a:tailEnd type="none" w="med" len="med"/>
-                    </a:lnT>
-                    <a:lnB w="9525" cap="flat" cmpd="sng" algn="ctr">
-                      <a:solidFill>
-                        <a:srgbClr val="D8C8A4"/>
-                      </a:solidFill>
-                      <a:prstDash val="solid"/>
-                      <a:round/>
-                      <a:headEnd type="none" w="med" len="med"/>
-                      <a:tailEnd type="none" w="med" len="med"/>
-                    </a:lnB>
-                    <a:solidFill>
-                      <a:srgbClr val="FAF6EC"/>
-                    </a:solidFill>
-                  </a:tcPr>
-                </a:tc>
-                <a:tc>
-                  <a:txBody>
-                    <a:bodyPr/>
-                    <a:lstStyle/>
-                    <a:p>
-                      <a:pPr indent="0" marL="0">
-                        <a:buNone/>
-                      </a:pPr>
-                      <a:r>
-                        <a:rPr lang="en-US" sz="1100" dirty="0">
-                          <a:solidFill>
-                            <a:srgbClr val="2B2118"/>
-                          </a:solidFill>
-                          <a:latin typeface="Malgun Gothic" pitchFamily="34" charset="0"/>
-                          <a:ea typeface="Malgun Gothic" pitchFamily="34" charset="-122"/>
-                          <a:cs typeface="Malgun Gothic" pitchFamily="34" charset="-120"/>
-                        </a:rPr>
-                        <a:t>도착</a:t>
-                      </a:r>
-                      <a:endParaRPr lang="en-US" sz="1100" dirty="0">
-                        <a:latin typeface="Malgun Gothic" charset="0"/>
-                        <a:ea typeface="Malgun Gothic" charset="0"/>
-                        <a:cs typeface="Malgun Gothic" charset="0"/>
-                      </a:endParaRPr>
-                    </a:p>
-                  </a:txBody>
-                  <a:tcPr marL="91440" marR="91440" marT="36576" marB="36576" anchor="ctr">
-                    <a:lnL w="9525" cap="flat" cmpd="sng" algn="ctr">
-                      <a:solidFill>
-                        <a:srgbClr val="D8C8A4"/>
-                      </a:solidFill>
-                      <a:prstDash val="solid"/>
-                      <a:round/>
-                      <a:headEnd type="none" w="med" len="med"/>
-                      <a:tailEnd type="none" w="med" len="med"/>
-                    </a:lnL>
-                    <a:lnR w="9525" cap="flat" cmpd="sng" algn="ctr">
-                      <a:solidFill>
-                        <a:srgbClr val="D8C8A4"/>
-                      </a:solidFill>
-                      <a:prstDash val="solid"/>
-                      <a:round/>
-                      <a:headEnd type="none" w="med" len="med"/>
-                      <a:tailEnd type="none" w="med" len="med"/>
-                    </a:lnR>
-                    <a:lnT w="9525" cap="flat" cmpd="sng" algn="ctr">
-                      <a:solidFill>
-                        <a:srgbClr val="D8C8A4"/>
-                      </a:solidFill>
-                      <a:prstDash val="solid"/>
-                      <a:round/>
-                      <a:headEnd type="none" w="med" len="med"/>
-                      <a:tailEnd type="none" w="med" len="med"/>
-                    </a:lnT>
-                    <a:lnB w="9525" cap="flat" cmpd="sng" algn="ctr">
-                      <a:solidFill>
-                        <a:srgbClr val="D8C8A4"/>
-                      </a:solidFill>
-                      <a:prstDash val="solid"/>
-                      <a:round/>
-                      <a:headEnd type="none" w="med" len="med"/>
-                      <a:tailEnd type="none" w="med" len="med"/>
-                    </a:lnB>
-                    <a:solidFill>
-                      <a:srgbClr val="FFFFFF"/>
-                    </a:solidFill>
-                  </a:tcPr>
-                </a:tc>
-                <a:tc>
-                  <a:txBody>
-                    <a:bodyPr/>
-                    <a:lstStyle/>
-                    <a:p>
-                      <a:pPr indent="0" marL="0">
-                        <a:buNone/>
-                      </a:pPr>
-                      <a:r>
-                        <a:rPr lang="en-US" sz="1100" dirty="0">
-                          <a:solidFill>
-                            <a:srgbClr val="2B2118"/>
-                          </a:solidFill>
-                          <a:latin typeface="Malgun Gothic" pitchFamily="34" charset="0"/>
-                          <a:ea typeface="Malgun Gothic" pitchFamily="34" charset="-122"/>
-                          <a:cs typeface="Malgun Gothic" pitchFamily="34" charset="-120"/>
-                        </a:rPr>
-                        <a:t>도착 · 별</a:t>
-                      </a:r>
-                      <a:endParaRPr lang="en-US" sz="1100" dirty="0">
-                        <a:latin typeface="Malgun Gothic" charset="0"/>
-                        <a:ea typeface="Malgun Gothic" charset="0"/>
-                        <a:cs typeface="Malgun Gothic" charset="0"/>
-                      </a:endParaRPr>
-                    </a:p>
-                  </a:txBody>
-                  <a:tcPr marL="91440" marR="91440" marT="36576" marB="36576" anchor="ctr">
-                    <a:lnL w="9525" cap="flat" cmpd="sng" algn="ctr">
-                      <a:solidFill>
-                        <a:srgbClr val="D8C8A4"/>
-                      </a:solidFill>
-                      <a:prstDash val="solid"/>
-                      <a:round/>
-                      <a:headEnd type="none" w="med" len="med"/>
-                      <a:tailEnd type="none" w="med" len="med"/>
-                    </a:lnL>
-                    <a:lnR w="9525" cap="flat" cmpd="sng" algn="ctr">
-                      <a:solidFill>
-                        <a:srgbClr val="D8C8A4"/>
-                      </a:solidFill>
-                      <a:prstDash val="solid"/>
-                      <a:round/>
-                      <a:headEnd type="none" w="med" len="med"/>
-                      <a:tailEnd type="none" w="med" len="med"/>
-                    </a:lnR>
-                    <a:lnT w="9525" cap="flat" cmpd="sng" algn="ctr">
-                      <a:solidFill>
-                        <a:srgbClr val="D8C8A4"/>
-                      </a:solidFill>
-                      <a:prstDash val="solid"/>
-                      <a:round/>
-                      <a:headEnd type="none" w="med" len="med"/>
-                      <a:tailEnd type="none" w="med" len="med"/>
-                    </a:lnT>
-                    <a:lnB w="9525" cap="flat" cmpd="sng" algn="ctr">
-                      <a:solidFill>
-                        <a:srgbClr val="D8C8A4"/>
-                      </a:solidFill>
-                      <a:prstDash val="solid"/>
-                      <a:round/>
-                      <a:headEnd type="none" w="med" len="med"/>
-                      <a:tailEnd type="none" w="med" len="med"/>
-                    </a:lnB>
-                    <a:solidFill>
-                      <a:srgbClr val="FFFFFF"/>
-                    </a:solidFill>
-                  </a:tcPr>
-                </a:tc>
-                <a:tc>
-                  <a:txBody>
-                    <a:bodyPr/>
-                    <a:lstStyle/>
-                    <a:p>
-                      <a:pPr indent="0" marL="0">
-                        <a:buNone/>
-                      </a:pPr>
-                      <a:r>
-                        <a:rPr lang="en-US" sz="1100" dirty="0">
-                          <a:solidFill>
-                            <a:srgbClr val="2B2118"/>
-                          </a:solidFill>
-                          <a:latin typeface="Malgun Gothic" pitchFamily="34" charset="0"/>
-                          <a:ea typeface="Malgun Gothic" pitchFamily="34" charset="-122"/>
-                          <a:cs typeface="Malgun Gothic" pitchFamily="34" charset="-120"/>
-                        </a:rPr>
-                        <a:t>도착</a:t>
-                      </a:r>
-                      <a:endParaRPr lang="en-US" sz="1100" dirty="0">
-                        <a:latin typeface="Malgun Gothic" charset="0"/>
-                        <a:ea typeface="Malgun Gothic" charset="0"/>
-                        <a:cs typeface="Malgun Gothic" charset="0"/>
-                      </a:endParaRPr>
-                    </a:p>
-                  </a:txBody>
-                  <a:tcPr marL="91440" marR="91440" marT="36576" marB="36576" anchor="ctr">
-                    <a:lnL w="9525" cap="flat" cmpd="sng" algn="ctr">
-                      <a:solidFill>
-                        <a:srgbClr val="D8C8A4"/>
-                      </a:solidFill>
-                      <a:prstDash val="solid"/>
-                      <a:round/>
-                      <a:headEnd type="none" w="med" len="med"/>
-                      <a:tailEnd type="none" w="med" len="med"/>
-                    </a:lnL>
-                    <a:lnR w="9525" cap="flat" cmpd="sng" algn="ctr">
-                      <a:solidFill>
-                        <a:srgbClr val="D8C8A4"/>
-                      </a:solidFill>
-                      <a:prstDash val="solid"/>
-                      <a:round/>
-                      <a:headEnd type="none" w="med" len="med"/>
-                      <a:tailEnd type="none" w="med" len="med"/>
-                    </a:lnR>
-                    <a:lnT w="9525" cap="flat" cmpd="sng" algn="ctr">
-                      <a:solidFill>
-                        <a:srgbClr val="D8C8A4"/>
-                      </a:solidFill>
-                      <a:prstDash val="solid"/>
-                      <a:round/>
-                      <a:headEnd type="none" w="med" len="med"/>
-                      <a:tailEnd type="none" w="med" len="med"/>
-                    </a:lnT>
-                    <a:lnB w="9525" cap="flat" cmpd="sng" algn="ctr">
-                      <a:solidFill>
-                        <a:srgbClr val="D8C8A4"/>
-                      </a:solidFill>
-                      <a:prstDash val="solid"/>
-                      <a:round/>
-                      <a:headEnd type="none" w="med" len="med"/>
-                      <a:tailEnd type="none" w="med" len="med"/>
-                    </a:lnB>
-                    <a:solidFill>
-                      <a:srgbClr val="FFFFFF"/>
-                    </a:solidFill>
-                  </a:tcPr>
-                </a:tc>
-                <a:tc>
-                  <a:txBody>
-                    <a:bodyPr/>
-                    <a:lstStyle/>
-                    <a:p>
-                      <a:pPr indent="0" marL="0">
-                        <a:buNone/>
-                      </a:pPr>
-                      <a:r>
-                        <a:rPr lang="en-US" sz="1100" b="1" dirty="0">
-                          <a:solidFill>
-                            <a:srgbClr val="2B2118"/>
-                          </a:solidFill>
-                          <a:latin typeface="Malgun Gothic" pitchFamily="34" charset="0"/>
-                          <a:ea typeface="Malgun Gothic" pitchFamily="34" charset="-122"/>
-                          <a:cs typeface="Malgun Gothic" pitchFamily="34" charset="-120"/>
-                        </a:rPr>
-                        <a:t>데려간 비율만큼 잉크병이 맑아짐 (정화 %) · 별</a:t>
-                      </a:r>
-                      <a:endParaRPr lang="en-US" sz="1100" dirty="0">
-                        <a:latin typeface="Malgun Gothic" charset="0"/>
-                        <a:ea typeface="Malgun Gothic" charset="0"/>
-                        <a:cs typeface="Malgun Gothic" charset="0"/>
-                      </a:endParaRPr>
-                    </a:p>
-                  </a:txBody>
-                  <a:tcPr marL="91440" marR="91440" marT="36576" marB="36576" anchor="ctr">
-                    <a:lnL w="9525" cap="flat" cmpd="sng" algn="ctr">
-                      <a:solidFill>
-                        <a:srgbClr val="D8C8A4"/>
-                      </a:solidFill>
-                      <a:prstDash val="solid"/>
-                      <a:round/>
-                      <a:headEnd type="none" w="med" len="med"/>
-                      <a:tailEnd type="none" w="med" len="med"/>
-                    </a:lnL>
-                    <a:lnR w="9525" cap="flat" cmpd="sng" algn="ctr">
-                      <a:solidFill>
-                        <a:srgbClr val="D8C8A4"/>
-                      </a:solidFill>
-                      <a:prstDash val="solid"/>
-                      <a:round/>
-                      <a:headEnd type="none" w="med" len="med"/>
-                      <a:tailEnd type="none" w="med" len="med"/>
-                    </a:lnR>
-                    <a:lnT w="9525" cap="flat" cmpd="sng" algn="ctr">
-                      <a:solidFill>
-                        <a:srgbClr val="D8C8A4"/>
-                      </a:solidFill>
-                      <a:prstDash val="solid"/>
-                      <a:round/>
-                      <a:headEnd type="none" w="med" len="med"/>
-                      <a:tailEnd type="none" w="med" len="med"/>
-                    </a:lnT>
-                    <a:lnB w="9525" cap="flat" cmpd="sng" algn="ctr">
-                      <a:solidFill>
-                        <a:srgbClr val="D8C8A4"/>
-                      </a:solidFill>
-                      <a:prstDash val="solid"/>
-                      <a:round/>
-                      <a:headEnd type="none" w="med" len="med"/>
-                      <a:tailEnd type="none" w="med" len="med"/>
-                    </a:lnB>
-                    <a:solidFill>
-                      <a:srgbClr val="EAF3FD"/>
-                    </a:solidFill>
-                  </a:tcPr>
-                </a:tc>
+                <a:extLst>
+                  <a:ext uri="{0D108BD9-81ED-4DB2-BD59-A6C34878D82A}">
+                    <a16:rowId xmlns:a16="http://schemas.microsoft.com/office/drawing/2014/main" val="10004"/>
+                  </a:ext>
+                </a:extLst>
               </a:tr>
             </a:tbl>
           </a:graphicData>
@@ -7148,7 +6981,7 @@
       </p:graphicFrame>
       <p:sp>
         <p:nvSpPr>
-          <p:cNvPr id="4" name="Shape 1"/>
+          <p:cNvPr id="3" name="Shape 1"/>
           <p:cNvSpPr/>
           <p:nvPr/>
         </p:nvSpPr>
@@ -7194,7 +7027,7 @@
           <a:bodyPr wrap="square" lIns="0" tIns="0" rIns="0" bIns="0" rtlCol="0" anchor="t"/>
           <a:lstStyle/>
           <a:p>
-            <a:pPr indent="0" marL="0">
+            <a:pPr marL="0" indent="0">
               <a:buNone/>
             </a:pPr>
             <a:r>
@@ -7233,7 +7066,7 @@
           <a:bodyPr wrap="square" lIns="0" tIns="0" rIns="0" bIns="0" rtlCol="0" anchor="t"/>
           <a:lstStyle/>
           <a:p>
-            <a:pPr indent="0" marL="0">
+            <a:pPr marL="0" indent="0">
               <a:buNone/>
             </a:pPr>
             <a:r>
@@ -7247,9 +7080,6 @@
               </a:rPr>
               <a:t>"그린 대로 움직인다"는 익숙한 재미 위에 </a:t>
             </a:r>
-            <a:pPr indent="0" marL="0">
-              <a:buNone/>
-            </a:pPr>
             <a:r>
               <a:rPr lang="en-US" sz="1400" b="1" dirty="0">
                 <a:solidFill>
@@ -7261,9 +7091,6 @@
               </a:rPr>
               <a:t>① 완전히 멈출 수 있는 횟수</a:t>
             </a:r>
-            <a:pPr indent="0" marL="0">
-              <a:buNone/>
-            </a:pPr>
             <a:r>
               <a:rPr lang="en-US" sz="1400" dirty="0">
                 <a:solidFill>
@@ -7275,9 +7102,6 @@
               </a:rPr>
               <a:t>와 </a:t>
             </a:r>
-            <a:pPr indent="0" marL="0">
-              <a:buNone/>
-            </a:pPr>
             <a:r>
               <a:rPr lang="en-US" sz="1400" b="1" dirty="0">
                 <a:solidFill>
@@ -7289,9 +7113,6 @@
               </a:rPr>
               <a:t>② 색마다 다른 물리 성질</a:t>
             </a:r>
-            <a:pPr indent="0" marL="0">
-              <a:buNone/>
-            </a:pPr>
             <a:r>
               <a:rPr lang="en-US" sz="1400" dirty="0">
                 <a:solidFill>
@@ -7303,9 +7124,6 @@
               </a:rPr>
               <a:t>을 얹고, 한 마리가 아니라 </a:t>
             </a:r>
-            <a:pPr indent="0" marL="0">
-              <a:buNone/>
-            </a:pPr>
             <a:r>
               <a:rPr lang="en-US" sz="1400" b="1" dirty="0">
                 <a:solidFill>
@@ -7317,9 +7135,6 @@
               </a:rPr>
               <a:t>③ 따라오는 무리</a:t>
             </a:r>
-            <a:pPr indent="0" marL="0">
-              <a:buNone/>
-            </a:pPr>
             <a:r>
               <a:rPr lang="en-US" sz="1400" dirty="0">
                 <a:solidFill>
@@ -7355,7 +7170,7 @@
           </a:prstGeom>
           <a:extLst>
             <a:ext uri="{C572A759-6A51-4108-AA02-DFA0A04FC94B}">
-              <ma14:wrappingTextBoxFlag xmlns:ma14="http://schemas.microsoft.com/office/mac/drawingml/2011/main" val="0"/>
+              <ma14:wrappingTextBoxFlag xmlns:ma14="http://schemas.microsoft.com/office/mac/drawingml/2011/main" xmlns="" val="0"/>
             </a:ext>
           </a:extLst>
         </p:spPr>
@@ -7376,7 +7191,7 @@
           <a:p>
             <a:pPr algn="r"/>
             <a:fld id="{F7021451-1387-4CA6-816F-3879F97B5CBC}" type="slidenum">
-              <a:rPr b="0" lang="en-US"/>
+              <a:rPr lang="en-US" b="0"/>
               <a:t>3</a:t>
             </a:fld>
             <a:endParaRPr lang="en-US"/>
@@ -7411,9 +7226,11 @@
       <p:sp>
         <p:nvSpPr>
           <p:cNvPr id="2" name="Text 1"/>
-          <p:cNvSpPr/>
+          <p:cNvSpPr>
+            <a:spLocks noGrp="1"/>
+          </p:cNvSpPr>
           <p:nvPr>
-            <p:ph idx="101" type="title" hasCustomPrompt="1"/>
+            <p:ph type="title" idx="101" hasCustomPrompt="1"/>
           </p:nvPr>
         </p:nvSpPr>
         <p:spPr>
@@ -7431,7 +7248,7 @@
           <a:bodyPr wrap="square" lIns="0" tIns="0" rIns="0" bIns="0" rtlCol="0" anchor="ctr"/>
           <a:lstStyle/>
           <a:p>
-            <a:pPr algn="l" indent="0" marL="0">
+            <a:pPr marL="0" indent="0" algn="l">
               <a:buNone/>
             </a:pPr>
             <a:r>
@@ -7497,7 +7314,7 @@
           <a:bodyPr wrap="square" lIns="0" tIns="0" rIns="0" bIns="0" rtlCol="0" anchor="t"/>
           <a:lstStyle/>
           <a:p>
-            <a:pPr indent="0" marL="0">
+            <a:pPr marL="0" indent="0">
               <a:buNone/>
             </a:pPr>
             <a:r>
@@ -7536,7 +7353,7 @@
           <a:bodyPr wrap="square" lIns="0" tIns="0" rIns="0" bIns="0" rtlCol="0" anchor="t"/>
           <a:lstStyle/>
           <a:p>
-            <a:pPr indent="0" marL="0">
+            <a:pPr marL="0" indent="0">
               <a:buNone/>
             </a:pPr>
             <a:r>
@@ -7575,7 +7392,7 @@
           <a:bodyPr wrap="square" lIns="0" tIns="0" rIns="0" bIns="0" rtlCol="0" anchor="t"/>
           <a:lstStyle/>
           <a:p>
-            <a:pPr indent="0" marL="0">
+            <a:pPr marL="0" indent="0">
               <a:buNone/>
             </a:pPr>
             <a:r>
@@ -7641,7 +7458,7 @@
           <a:bodyPr wrap="square" lIns="0" tIns="0" rIns="0" bIns="0" rtlCol="0" anchor="t"/>
           <a:lstStyle/>
           <a:p>
-            <a:pPr indent="0" marL="0">
+            <a:pPr marL="0" indent="0">
               <a:buNone/>
             </a:pPr>
             <a:r>
@@ -7680,7 +7497,7 @@
           <a:bodyPr wrap="square" lIns="0" tIns="0" rIns="0" bIns="0" rtlCol="0" anchor="t"/>
           <a:lstStyle/>
           <a:p>
-            <a:pPr indent="0" marL="0">
+            <a:pPr marL="0" indent="0">
               <a:buNone/>
             </a:pPr>
             <a:r>
@@ -7719,7 +7536,7 @@
           <a:bodyPr wrap="square" lIns="0" tIns="0" rIns="0" bIns="0" rtlCol="0" anchor="t"/>
           <a:lstStyle/>
           <a:p>
-            <a:pPr indent="0" marL="0">
+            <a:pPr marL="0" indent="0">
               <a:buNone/>
             </a:pPr>
             <a:r>
@@ -7785,7 +7602,7 @@
           <a:bodyPr wrap="square" lIns="0" tIns="0" rIns="0" bIns="0" rtlCol="0" anchor="t"/>
           <a:lstStyle/>
           <a:p>
-            <a:pPr indent="0" marL="0">
+            <a:pPr marL="0" indent="0">
               <a:buNone/>
             </a:pPr>
             <a:r>
@@ -7824,7 +7641,7 @@
           <a:bodyPr wrap="square" lIns="0" tIns="0" rIns="0" bIns="0" rtlCol="0" anchor="t"/>
           <a:lstStyle/>
           <a:p>
-            <a:pPr indent="0" marL="0">
+            <a:pPr marL="0" indent="0">
               <a:buNone/>
             </a:pPr>
             <a:r>
@@ -7863,7 +7680,7 @@
           <a:bodyPr wrap="square" lIns="0" tIns="0" rIns="0" bIns="0" rtlCol="0" anchor="t"/>
           <a:lstStyle/>
           <a:p>
-            <a:pPr indent="0" marL="0">
+            <a:pPr marL="0" indent="0">
               <a:buNone/>
             </a:pPr>
             <a:r>
@@ -7929,7 +7746,7 @@
           <a:bodyPr wrap="square" lIns="0" tIns="0" rIns="0" bIns="0" rtlCol="0" anchor="t"/>
           <a:lstStyle/>
           <a:p>
-            <a:pPr indent="0" marL="0">
+            <a:pPr marL="0" indent="0">
               <a:buNone/>
             </a:pPr>
             <a:r>
@@ -7968,7 +7785,7 @@
           <a:bodyPr wrap="square" lIns="0" tIns="0" rIns="0" bIns="0" rtlCol="0" anchor="t"/>
           <a:lstStyle/>
           <a:p>
-            <a:pPr indent="0" marL="0">
+            <a:pPr marL="0" indent="0">
               <a:buNone/>
             </a:pPr>
             <a:r>
@@ -8007,7 +7824,7 @@
           <a:bodyPr wrap="square" lIns="0" tIns="0" rIns="0" bIns="0" rtlCol="0" anchor="t"/>
           <a:lstStyle/>
           <a:p>
-            <a:pPr indent="0" marL="0">
+            <a:pPr marL="0" indent="0">
               <a:buNone/>
             </a:pPr>
             <a:r>
@@ -8073,7 +7890,7 @@
           <a:bodyPr wrap="square" lIns="0" tIns="0" rIns="0" bIns="0" rtlCol="0" anchor="t"/>
           <a:lstStyle/>
           <a:p>
-            <a:pPr indent="0" marL="0">
+            <a:pPr marL="0" indent="0">
               <a:buNone/>
             </a:pPr>
             <a:r>
@@ -8112,7 +7929,7 @@
           <a:bodyPr wrap="square" lIns="0" tIns="0" rIns="0" bIns="0" rtlCol="0" anchor="t"/>
           <a:lstStyle/>
           <a:p>
-            <a:pPr indent="0" marL="0">
+            <a:pPr marL="0" indent="0">
               <a:buNone/>
             </a:pPr>
             <a:r>
@@ -8178,7 +7995,7 @@
           <a:bodyPr wrap="square" lIns="0" tIns="0" rIns="0" bIns="0" rtlCol="0" anchor="t"/>
           <a:lstStyle/>
           <a:p>
-            <a:pPr indent="0" marL="0">
+            <a:pPr marL="0" indent="0">
               <a:buNone/>
             </a:pPr>
             <a:r>
@@ -8302,7 +8119,7 @@
           <a:bodyPr wrap="square" lIns="0" tIns="0" rIns="0" bIns="0" rtlCol="0" anchor="t"/>
           <a:lstStyle/>
           <a:p>
-            <a:pPr indent="0" marL="0">
+            <a:pPr marL="0" indent="0">
               <a:buNone/>
             </a:pPr>
             <a:r>
@@ -8322,7 +8139,7 @@
       </p:sp>
       <p:sp>
         <p:nvSpPr>
-          <p:cNvPr id="25" name="Slide Number Placeholder 0"/>
+          <p:cNvPr id="26" name="Slide Number Placeholder 0"/>
           <p:cNvSpPr>
             <a:spLocks noGrp="1"/>
           </p:cNvSpPr>
@@ -8340,7 +8157,7 @@
           </a:prstGeom>
           <a:extLst>
             <a:ext uri="{C572A759-6A51-4108-AA02-DFA0A04FC94B}">
-              <ma14:wrappingTextBoxFlag xmlns:ma14="http://schemas.microsoft.com/office/mac/drawingml/2011/main" val="0"/>
+              <ma14:wrappingTextBoxFlag xmlns:ma14="http://schemas.microsoft.com/office/mac/drawingml/2011/main" xmlns="" val="0"/>
             </a:ext>
           </a:extLst>
         </p:spPr>
@@ -8361,7 +8178,7 @@
           <a:p>
             <a:pPr algn="r"/>
             <a:fld id="{F7021451-1387-4CA6-816F-3879F97B5CBC}" type="slidenum">
-              <a:rPr b="0" lang="en-US"/>
+              <a:rPr lang="en-US" b="0"/>
               <a:t>4</a:t>
             </a:fld>
             <a:endParaRPr lang="en-US"/>
@@ -8396,9 +8213,11 @@
       <p:sp>
         <p:nvSpPr>
           <p:cNvPr id="2" name="Text 1"/>
-          <p:cNvSpPr/>
+          <p:cNvSpPr>
+            <a:spLocks noGrp="1"/>
+          </p:cNvSpPr>
           <p:nvPr>
-            <p:ph idx="101" type="title" hasCustomPrompt="1"/>
+            <p:ph type="title" idx="101" hasCustomPrompt="1"/>
           </p:nvPr>
         </p:nvSpPr>
         <p:spPr>
@@ -8416,7 +8235,7 @@
           <a:bodyPr wrap="square" lIns="0" tIns="0" rIns="0" bIns="0" rtlCol="0" anchor="ctr"/>
           <a:lstStyle/>
           <a:p>
-            <a:pPr algn="l" indent="0" marL="0">
+            <a:pPr marL="0" indent="0" algn="l">
               <a:buNone/>
             </a:pPr>
             <a:r>
@@ -8507,7 +8326,7 @@
           <a:bodyPr wrap="square" lIns="0" tIns="0" rIns="0" bIns="0" rtlCol="0" anchor="ctr"/>
           <a:lstStyle/>
           <a:p>
-            <a:pPr algn="ctr" indent="0" marL="0">
+            <a:pPr marL="0" indent="0" algn="ctr">
               <a:buNone/>
             </a:pPr>
             <a:r>
@@ -8546,7 +8365,7 @@
           <a:bodyPr wrap="square" lIns="0" tIns="0" rIns="0" bIns="0" rtlCol="0" anchor="t"/>
           <a:lstStyle/>
           <a:p>
-            <a:pPr indent="0" marL="0">
+            <a:pPr marL="0" indent="0">
               <a:buNone/>
             </a:pPr>
             <a:r>
@@ -8585,7 +8404,7 @@
           <a:bodyPr wrap="square" lIns="0" tIns="0" rIns="0" bIns="0" rtlCol="0" anchor="t"/>
           <a:lstStyle/>
           <a:p>
-            <a:pPr indent="0" marL="0">
+            <a:pPr marL="0" indent="0">
               <a:buNone/>
             </a:pPr>
             <a:r>
@@ -8676,7 +8495,7 @@
           <a:bodyPr wrap="square" lIns="0" tIns="0" rIns="0" bIns="0" rtlCol="0" anchor="ctr"/>
           <a:lstStyle/>
           <a:p>
-            <a:pPr algn="ctr" indent="0" marL="0">
+            <a:pPr marL="0" indent="0" algn="ctr">
               <a:buNone/>
             </a:pPr>
             <a:r>
@@ -8715,7 +8534,7 @@
           <a:bodyPr wrap="square" lIns="0" tIns="0" rIns="0" bIns="0" rtlCol="0" anchor="t"/>
           <a:lstStyle/>
           <a:p>
-            <a:pPr indent="0" marL="0">
+            <a:pPr marL="0" indent="0">
               <a:buNone/>
             </a:pPr>
             <a:r>
@@ -8754,7 +8573,7 @@
           <a:bodyPr wrap="square" lIns="0" tIns="0" rIns="0" bIns="0" rtlCol="0" anchor="t"/>
           <a:lstStyle/>
           <a:p>
-            <a:pPr indent="0" marL="0">
+            <a:pPr marL="0" indent="0">
               <a:buNone/>
             </a:pPr>
             <a:r>
@@ -8845,7 +8664,7 @@
           <a:bodyPr wrap="square" lIns="0" tIns="0" rIns="0" bIns="0" rtlCol="0" anchor="ctr"/>
           <a:lstStyle/>
           <a:p>
-            <a:pPr algn="ctr" indent="0" marL="0">
+            <a:pPr marL="0" indent="0" algn="ctr">
               <a:buNone/>
             </a:pPr>
             <a:r>
@@ -8884,7 +8703,7 @@
           <a:bodyPr wrap="square" lIns="0" tIns="0" rIns="0" bIns="0" rtlCol="0" anchor="t"/>
           <a:lstStyle/>
           <a:p>
-            <a:pPr indent="0" marL="0">
+            <a:pPr marL="0" indent="0">
               <a:buNone/>
             </a:pPr>
             <a:r>
@@ -8923,7 +8742,7 @@
           <a:bodyPr wrap="square" lIns="0" tIns="0" rIns="0" bIns="0" rtlCol="0" anchor="t"/>
           <a:lstStyle/>
           <a:p>
-            <a:pPr indent="0" marL="0">
+            <a:pPr marL="0" indent="0">
               <a:buNone/>
             </a:pPr>
             <a:r>
@@ -9014,7 +8833,7 @@
           <a:bodyPr wrap="square" lIns="0" tIns="0" rIns="0" bIns="0" rtlCol="0" anchor="ctr"/>
           <a:lstStyle/>
           <a:p>
-            <a:pPr algn="ctr" indent="0" marL="0">
+            <a:pPr marL="0" indent="0" algn="ctr">
               <a:buNone/>
             </a:pPr>
             <a:r>
@@ -9053,7 +8872,7 @@
           <a:bodyPr wrap="square" lIns="0" tIns="0" rIns="0" bIns="0" rtlCol="0" anchor="t"/>
           <a:lstStyle/>
           <a:p>
-            <a:pPr indent="0" marL="0">
+            <a:pPr marL="0" indent="0">
               <a:buNone/>
             </a:pPr>
             <a:r>
@@ -9092,7 +8911,7 @@
           <a:bodyPr wrap="square" lIns="0" tIns="0" rIns="0" bIns="0" rtlCol="0" anchor="t"/>
           <a:lstStyle/>
           <a:p>
-            <a:pPr indent="0" marL="0">
+            <a:pPr marL="0" indent="0">
               <a:buNone/>
             </a:pPr>
             <a:r>
@@ -9158,7 +8977,7 @@
           <a:bodyPr wrap="square" lIns="0" tIns="0" rIns="0" bIns="0" rtlCol="0" anchor="ctr"/>
           <a:lstStyle/>
           <a:p>
-            <a:pPr indent="0" marL="0">
+            <a:pPr marL="0" indent="0">
               <a:buNone/>
             </a:pPr>
             <a:r>
@@ -9172,9 +8991,6 @@
               </a:rPr>
               <a:t>한 줄로   </a:t>
             </a:r>
-            <a:pPr indent="0" marL="0">
-              <a:buNone/>
-            </a:pPr>
             <a:r>
               <a:rPr lang="en-US" sz="1700" dirty="0">
                 <a:solidFill>
@@ -9210,7 +9026,7 @@
           </a:prstGeom>
           <a:extLst>
             <a:ext uri="{C572A759-6A51-4108-AA02-DFA0A04FC94B}">
-              <ma14:wrappingTextBoxFlag xmlns:ma14="http://schemas.microsoft.com/office/mac/drawingml/2011/main" val="0"/>
+              <ma14:wrappingTextBoxFlag xmlns:ma14="http://schemas.microsoft.com/office/mac/drawingml/2011/main" xmlns="" val="0"/>
             </a:ext>
           </a:extLst>
         </p:spPr>
@@ -9231,7 +9047,7 @@
           <a:p>
             <a:pPr algn="r"/>
             <a:fld id="{F7021451-1387-4CA6-816F-3879F97B5CBC}" type="slidenum">
-              <a:rPr b="0" lang="en-US"/>
+              <a:rPr lang="en-US" b="0"/>
               <a:t>5</a:t>
             </a:fld>
             <a:endParaRPr lang="en-US"/>
@@ -9266,9 +9082,11 @@
       <p:sp>
         <p:nvSpPr>
           <p:cNvPr id="2" name="Text 1"/>
-          <p:cNvSpPr/>
+          <p:cNvSpPr>
+            <a:spLocks noGrp="1"/>
+          </p:cNvSpPr>
           <p:nvPr>
-            <p:ph idx="101" type="title" hasCustomPrompt="1"/>
+            <p:ph type="title" idx="101" hasCustomPrompt="1"/>
           </p:nvPr>
         </p:nvSpPr>
         <p:spPr>
@@ -9286,7 +9104,7 @@
           <a:bodyPr wrap="square" lIns="0" tIns="0" rIns="0" bIns="0" rtlCol="0" anchor="ctr"/>
           <a:lstStyle/>
           <a:p>
-            <a:pPr algn="l" indent="0" marL="0">
+            <a:pPr marL="0" indent="0" algn="l">
               <a:buNone/>
             </a:pPr>
             <a:r>
@@ -9350,7 +9168,7 @@
           <a:bodyPr wrap="square" lIns="0" tIns="0" rIns="0" bIns="0" rtlCol="0" anchor="ctr"/>
           <a:lstStyle/>
           <a:p>
-            <a:pPr algn="ctr" indent="0" marL="0">
+            <a:pPr marL="0" indent="0" algn="ctr">
               <a:buNone/>
             </a:pPr>
             <a:r>
@@ -9389,7 +9207,7 @@
           <a:bodyPr wrap="square" lIns="0" tIns="0" rIns="0" bIns="0" rtlCol="0" anchor="t"/>
           <a:lstStyle/>
           <a:p>
-            <a:pPr indent="0" marL="0">
+            <a:pPr marL="0" indent="0">
               <a:buNone/>
             </a:pPr>
             <a:r>
@@ -9409,14 +9227,14 @@
       </p:sp>
       <p:pic>
         <p:nvPicPr>
-          <p:cNvPr id="6" name="Image 0" descr="D:\stopsketch\데모제출\2_대표이미지\01_시간정지_색골라그리기.png">    </p:cNvPr>
+          <p:cNvPr id="6" name="Image 0" descr="D:\stopsketch\데모제출\2_대표이미지\01_시간정지_색골라그리기.png"/>
           <p:cNvPicPr>
             <a:picLocks noChangeAspect="1"/>
           </p:cNvPicPr>
           <p:nvPr/>
         </p:nvPicPr>
         <p:blipFill>
-          <a:blip r:embed="rId1"/>
+          <a:blip r:embed="rId3"/>
           <a:stretch>
             <a:fillRect/>
           </a:stretch>
@@ -9474,7 +9292,7 @@
           <a:bodyPr wrap="square" lIns="0" tIns="0" rIns="0" bIns="0" rtlCol="0" anchor="t"/>
           <a:lstStyle/>
           <a:p>
-            <a:pPr indent="0" marL="0">
+            <a:pPr marL="0" indent="0">
               <a:buNone/>
             </a:pPr>
             <a:r>
@@ -9540,7 +9358,7 @@
           <a:bodyPr wrap="square" lIns="0" tIns="0" rIns="0" bIns="0" rtlCol="0" anchor="ctr"/>
           <a:lstStyle/>
           <a:p>
-            <a:pPr algn="ctr" indent="0" marL="0">
+            <a:pPr marL="0" indent="0" algn="ctr">
               <a:buNone/>
             </a:pPr>
             <a:r>
@@ -9604,7 +9422,7 @@
           <a:bodyPr wrap="square" lIns="0" tIns="0" rIns="0" bIns="0" rtlCol="0" anchor="ctr"/>
           <a:lstStyle/>
           <a:p>
-            <a:pPr algn="ctr" indent="0" marL="0">
+            <a:pPr marL="0" indent="0" algn="ctr">
               <a:buNone/>
             </a:pPr>
             <a:r>
@@ -9643,7 +9461,7 @@
           <a:bodyPr wrap="square" lIns="0" tIns="0" rIns="0" bIns="0" rtlCol="0" anchor="t"/>
           <a:lstStyle/>
           <a:p>
-            <a:pPr indent="0" marL="0">
+            <a:pPr marL="0" indent="0">
               <a:buNone/>
             </a:pPr>
             <a:r>
@@ -9663,14 +9481,14 @@
       </p:sp>
       <p:pic>
         <p:nvPicPr>
-          <p:cNvPr id="14" name="Image 1" descr="D:\stopsketch\데모제출\2_대표이미지\06_줄지어_튕겨올라_공중물방울_깨우기.png">    </p:cNvPr>
+          <p:cNvPr id="14" name="Image 1" descr="D:\stopsketch\데모제출\2_대표이미지\06_줄지어_튕겨올라_공중물방울_깨우기.png"/>
           <p:cNvPicPr>
             <a:picLocks noChangeAspect="1"/>
           </p:cNvPicPr>
           <p:nvPr/>
         </p:nvPicPr>
         <p:blipFill>
-          <a:blip r:embed="rId2"/>
+          <a:blip r:embed="rId4"/>
           <a:stretch>
             <a:fillRect/>
           </a:stretch>
@@ -9728,7 +9546,7 @@
           <a:bodyPr wrap="square" lIns="0" tIns="0" rIns="0" bIns="0" rtlCol="0" anchor="t"/>
           <a:lstStyle/>
           <a:p>
-            <a:pPr indent="0" marL="0">
+            <a:pPr marL="0" indent="0">
               <a:buNone/>
             </a:pPr>
             <a:r>
@@ -9794,7 +9612,7 @@
           <a:bodyPr wrap="square" lIns="0" tIns="0" rIns="0" bIns="0" rtlCol="0" anchor="ctr"/>
           <a:lstStyle/>
           <a:p>
-            <a:pPr algn="ctr" indent="0" marL="0">
+            <a:pPr marL="0" indent="0" algn="ctr">
               <a:buNone/>
             </a:pPr>
             <a:r>
@@ -9858,7 +9676,7 @@
           <a:bodyPr wrap="square" lIns="0" tIns="0" rIns="0" bIns="0" rtlCol="0" anchor="ctr"/>
           <a:lstStyle/>
           <a:p>
-            <a:pPr algn="ctr" indent="0" marL="0">
+            <a:pPr marL="0" indent="0" algn="ctr">
               <a:buNone/>
             </a:pPr>
             <a:r>
@@ -9897,7 +9715,7 @@
           <a:bodyPr wrap="square" lIns="0" tIns="0" rIns="0" bIns="0" rtlCol="0" anchor="t"/>
           <a:lstStyle/>
           <a:p>
-            <a:pPr indent="0" marL="0">
+            <a:pPr marL="0" indent="0">
               <a:buNone/>
             </a:pPr>
             <a:r>
@@ -9917,14 +9735,14 @@
       </p:sp>
       <p:pic>
         <p:nvPicPr>
-          <p:cNvPr id="22" name="Image 2" descr="D:\stopsketch\데모제출\2_대표이미지\07_검은잉크병_정화.png">    </p:cNvPr>
+          <p:cNvPr id="22" name="Image 2" descr="D:\stopsketch\데모제출\2_대표이미지\07_검은잉크병_정화.png"/>
           <p:cNvPicPr>
             <a:picLocks noChangeAspect="1"/>
           </p:cNvPicPr>
           <p:nvPr/>
         </p:nvPicPr>
         <p:blipFill>
-          <a:blip r:embed="rId3"/>
+          <a:blip r:embed="rId5"/>
           <a:stretch>
             <a:fillRect/>
           </a:stretch>
@@ -9982,7 +9800,7 @@
           <a:bodyPr wrap="square" lIns="0" tIns="0" rIns="0" bIns="0" rtlCol="0" anchor="t"/>
           <a:lstStyle/>
           <a:p>
-            <a:pPr indent="0" marL="0">
+            <a:pPr marL="0" indent="0">
               <a:buNone/>
             </a:pPr>
             <a:r>
@@ -10048,7 +9866,7 @@
           <a:bodyPr wrap="square" lIns="0" tIns="0" rIns="0" bIns="0" rtlCol="0" anchor="ctr"/>
           <a:lstStyle/>
           <a:p>
-            <a:pPr algn="ctr" indent="0" marL="0">
+            <a:pPr marL="0" indent="0" algn="ctr">
               <a:buNone/>
             </a:pPr>
             <a:r>
@@ -10112,7 +9930,7 @@
           <a:bodyPr wrap="square" lIns="0" tIns="0" rIns="0" bIns="0" rtlCol="0" anchor="ctr"/>
           <a:lstStyle/>
           <a:p>
-            <a:pPr algn="ctr" indent="0" marL="0">
+            <a:pPr marL="0" indent="0" algn="ctr">
               <a:buNone/>
             </a:pPr>
             <a:r>
@@ -10151,7 +9969,7 @@
           <a:bodyPr wrap="square" lIns="0" tIns="0" rIns="0" bIns="0" rtlCol="0" anchor="t"/>
           <a:lstStyle/>
           <a:p>
-            <a:pPr indent="0" marL="0">
+            <a:pPr marL="0" indent="0">
               <a:buNone/>
             </a:pPr>
             <a:r>
@@ -10171,14 +9989,14 @@
       </p:sp>
       <p:pic>
         <p:nvPicPr>
-          <p:cNvPr id="30" name="Image 3" descr="D:\stopsketch\데모제출\2_대표이미지\08_결과창_별3_정화100.png">    </p:cNvPr>
+          <p:cNvPr id="30" name="Image 3" descr="D:\stopsketch\데모제출\2_대표이미지\08_결과창_별3_정화100.png"/>
           <p:cNvPicPr>
             <a:picLocks noChangeAspect="1"/>
           </p:cNvPicPr>
           <p:nvPr/>
         </p:nvPicPr>
         <p:blipFill>
-          <a:blip r:embed="rId4"/>
+          <a:blip r:embed="rId6"/>
           <a:stretch>
             <a:fillRect/>
           </a:stretch>
@@ -10236,7 +10054,7 @@
           <a:bodyPr wrap="square" lIns="0" tIns="0" rIns="0" bIns="0" rtlCol="0" anchor="t"/>
           <a:lstStyle/>
           <a:p>
-            <a:pPr indent="0" marL="0">
+            <a:pPr marL="0" indent="0">
               <a:buNone/>
             </a:pPr>
             <a:r>
@@ -10302,7 +10120,7 @@
           <a:bodyPr wrap="square" lIns="0" tIns="0" rIns="0" bIns="0" rtlCol="0" anchor="ctr"/>
           <a:lstStyle/>
           <a:p>
-            <a:pPr algn="ctr" indent="0" marL="0">
+            <a:pPr marL="0" indent="0" algn="ctr">
               <a:buNone/>
             </a:pPr>
             <a:r>
@@ -10341,7 +10159,7 @@
           <a:bodyPr wrap="square" lIns="0" tIns="0" rIns="0" bIns="0" rtlCol="0" anchor="t"/>
           <a:lstStyle/>
           <a:p>
-            <a:pPr indent="0" marL="0">
+            <a:pPr marL="0" indent="0">
               <a:buNone/>
             </a:pPr>
             <a:r>
@@ -10361,7 +10179,7 @@
       </p:sp>
       <p:sp>
         <p:nvSpPr>
-          <p:cNvPr id="25" name="Slide Number Placeholder 0"/>
+          <p:cNvPr id="36" name="Slide Number Placeholder 0"/>
           <p:cNvSpPr>
             <a:spLocks noGrp="1"/>
           </p:cNvSpPr>
@@ -10379,7 +10197,7 @@
           </a:prstGeom>
           <a:extLst>
             <a:ext uri="{C572A759-6A51-4108-AA02-DFA0A04FC94B}">
-              <ma14:wrappingTextBoxFlag xmlns:ma14="http://schemas.microsoft.com/office/mac/drawingml/2011/main" val="0"/>
+              <ma14:wrappingTextBoxFlag xmlns:ma14="http://schemas.microsoft.com/office/mac/drawingml/2011/main" xmlns="" val="0"/>
             </a:ext>
           </a:extLst>
         </p:spPr>
@@ -10400,7 +10218,7 @@
           <a:p>
             <a:pPr algn="r"/>
             <a:fld id="{F7021451-1387-4CA6-816F-3879F97B5CBC}" type="slidenum">
-              <a:rPr b="0" lang="en-US"/>
+              <a:rPr lang="en-US" b="0"/>
               <a:t>6</a:t>
             </a:fld>
             <a:endParaRPr lang="en-US"/>
@@ -10435,9 +10253,11 @@
       <p:sp>
         <p:nvSpPr>
           <p:cNvPr id="2" name="Text 1"/>
-          <p:cNvSpPr/>
+          <p:cNvSpPr>
+            <a:spLocks noGrp="1"/>
+          </p:cNvSpPr>
           <p:nvPr>
-            <p:ph idx="101" type="title" hasCustomPrompt="1"/>
+            <p:ph type="title" idx="101" hasCustomPrompt="1"/>
           </p:nvPr>
         </p:nvSpPr>
         <p:spPr>
@@ -10455,7 +10275,7 @@
           <a:bodyPr wrap="square" lIns="0" tIns="0" rIns="0" bIns="0" rtlCol="0" anchor="ctr"/>
           <a:lstStyle/>
           <a:p>
-            <a:pPr algn="l" indent="0" marL="0">
+            <a:pPr marL="0" indent="0" algn="l">
               <a:buNone/>
             </a:pPr>
             <a:r>
@@ -10502,14 +10322,14 @@
       </p:sp>
       <p:pic>
         <p:nvPicPr>
-          <p:cNvPr id="4" name="Image 0" descr="D:\stopsketch\stopsketch\assets\ink_black.png">    </p:cNvPr>
+          <p:cNvPr id="4" name="Image 0" descr="D:\stopsketch\stopsketch\assets\ink_black.png"/>
           <p:cNvPicPr>
             <a:picLocks noChangeAspect="1"/>
           </p:cNvPicPr>
           <p:nvPr/>
         </p:nvPicPr>
         <p:blipFill>
-          <a:blip r:embed="rId1"/>
+          <a:blip r:embed="rId3"/>
           <a:stretch>
             <a:fillRect/>
           </a:stretch>
@@ -10570,7 +10390,7 @@
           <a:bodyPr wrap="square" lIns="0" tIns="0" rIns="0" bIns="0" rtlCol="0" anchor="ctr"/>
           <a:lstStyle/>
           <a:p>
-            <a:pPr algn="ctr" indent="0" marL="0">
+            <a:pPr marL="0" indent="0" algn="ctr">
               <a:buNone/>
             </a:pPr>
             <a:r>
@@ -10609,7 +10429,7 @@
           <a:bodyPr wrap="square" lIns="0" tIns="0" rIns="0" bIns="0" rtlCol="0" anchor="t"/>
           <a:lstStyle/>
           <a:p>
-            <a:pPr algn="ctr" indent="0" marL="0">
+            <a:pPr marL="0" indent="0" algn="ctr">
               <a:buNone/>
             </a:pPr>
             <a:r>
@@ -10623,9 +10443,6 @@
               </a:rPr>
               <a:t>검정</a:t>
             </a:r>
-            <a:pPr algn="ctr" indent="0" marL="0">
-              <a:buNone/>
-            </a:pPr>
             <a:r>
               <a:rPr lang="en-US" sz="1800" dirty="0">
                 <a:solidFill>
@@ -10662,7 +10479,7 @@
           <a:bodyPr wrap="square" lIns="0" tIns="0" rIns="0" bIns="0" rtlCol="0" anchor="t"/>
           <a:lstStyle/>
           <a:p>
-            <a:pPr indent="0" marL="0">
+            <a:pPr marL="0" indent="0">
               <a:buNone/>
             </a:pPr>
             <a:r>
@@ -10709,14 +10526,14 @@
       </p:sp>
       <p:pic>
         <p:nvPicPr>
-          <p:cNvPr id="10" name="Image 1" descr="D:\stopsketch\stopsketch\assets\ink_red.png">    </p:cNvPr>
+          <p:cNvPr id="10" name="Image 1" descr="D:\stopsketch\stopsketch\assets\ink_red.png"/>
           <p:cNvPicPr>
             <a:picLocks noChangeAspect="1"/>
           </p:cNvPicPr>
           <p:nvPr/>
         </p:nvPicPr>
         <p:blipFill>
-          <a:blip r:embed="rId2"/>
+          <a:blip r:embed="rId4"/>
           <a:stretch>
             <a:fillRect/>
           </a:stretch>
@@ -10777,7 +10594,7 @@
           <a:bodyPr wrap="square" lIns="0" tIns="0" rIns="0" bIns="0" rtlCol="0" anchor="ctr"/>
           <a:lstStyle/>
           <a:p>
-            <a:pPr algn="ctr" indent="0" marL="0">
+            <a:pPr marL="0" indent="0" algn="ctr">
               <a:buNone/>
             </a:pPr>
             <a:r>
@@ -10816,7 +10633,7 @@
           <a:bodyPr wrap="square" lIns="0" tIns="0" rIns="0" bIns="0" rtlCol="0" anchor="t"/>
           <a:lstStyle/>
           <a:p>
-            <a:pPr algn="ctr" indent="0" marL="0">
+            <a:pPr marL="0" indent="0" algn="ctr">
               <a:buNone/>
             </a:pPr>
             <a:r>
@@ -10830,9 +10647,6 @@
               </a:rPr>
               <a:t>빨강</a:t>
             </a:r>
-            <a:pPr algn="ctr" indent="0" marL="0">
-              <a:buNone/>
-            </a:pPr>
             <a:r>
               <a:rPr lang="en-US" sz="1800" dirty="0">
                 <a:solidFill>
@@ -10869,7 +10683,7 @@
           <a:bodyPr wrap="square" lIns="0" tIns="0" rIns="0" bIns="0" rtlCol="0" anchor="t"/>
           <a:lstStyle/>
           <a:p>
-            <a:pPr indent="0" marL="0">
+            <a:pPr marL="0" indent="0">
               <a:buNone/>
             </a:pPr>
             <a:r>
@@ -10916,14 +10730,14 @@
       </p:sp>
       <p:pic>
         <p:nvPicPr>
-          <p:cNvPr id="16" name="Image 2" descr="D:\stopsketch\stopsketch\assets\ink_blue.png">    </p:cNvPr>
+          <p:cNvPr id="16" name="Image 2" descr="D:\stopsketch\stopsketch\assets\ink_blue.png"/>
           <p:cNvPicPr>
             <a:picLocks noChangeAspect="1"/>
           </p:cNvPicPr>
           <p:nvPr/>
         </p:nvPicPr>
         <p:blipFill>
-          <a:blip r:embed="rId3"/>
+          <a:blip r:embed="rId5"/>
           <a:stretch>
             <a:fillRect/>
           </a:stretch>
@@ -10984,7 +10798,7 @@
           <a:bodyPr wrap="square" lIns="0" tIns="0" rIns="0" bIns="0" rtlCol="0" anchor="ctr"/>
           <a:lstStyle/>
           <a:p>
-            <a:pPr algn="ctr" indent="0" marL="0">
+            <a:pPr marL="0" indent="0" algn="ctr">
               <a:buNone/>
             </a:pPr>
             <a:r>
@@ -11023,7 +10837,7 @@
           <a:bodyPr wrap="square" lIns="0" tIns="0" rIns="0" bIns="0" rtlCol="0" anchor="t"/>
           <a:lstStyle/>
           <a:p>
-            <a:pPr algn="ctr" indent="0" marL="0">
+            <a:pPr marL="0" indent="0" algn="ctr">
               <a:buNone/>
             </a:pPr>
             <a:r>
@@ -11037,9 +10851,6 @@
               </a:rPr>
               <a:t>파랑</a:t>
             </a:r>
-            <a:pPr algn="ctr" indent="0" marL="0">
-              <a:buNone/>
-            </a:pPr>
             <a:r>
               <a:rPr lang="en-US" sz="1800" dirty="0">
                 <a:solidFill>
@@ -11076,7 +10887,7 @@
           <a:bodyPr wrap="square" lIns="0" tIns="0" rIns="0" bIns="0" rtlCol="0" anchor="t"/>
           <a:lstStyle/>
           <a:p>
-            <a:pPr indent="0" marL="0">
+            <a:pPr marL="0" indent="0">
               <a:buNone/>
             </a:pPr>
             <a:r>
@@ -11123,14 +10934,14 @@
       </p:sp>
       <p:pic>
         <p:nvPicPr>
-          <p:cNvPr id="22" name="Image 3" descr="D:\stopsketch\stopsketch\assets\ink_green.png">    </p:cNvPr>
+          <p:cNvPr id="22" name="Image 3" descr="D:\stopsketch\stopsketch\assets\ink_green.png"/>
           <p:cNvPicPr>
             <a:picLocks noChangeAspect="1"/>
           </p:cNvPicPr>
           <p:nvPr/>
         </p:nvPicPr>
         <p:blipFill>
-          <a:blip r:embed="rId4"/>
+          <a:blip r:embed="rId6"/>
           <a:stretch>
             <a:fillRect/>
           </a:stretch>
@@ -11191,7 +11002,7 @@
           <a:bodyPr wrap="square" lIns="0" tIns="0" rIns="0" bIns="0" rtlCol="0" anchor="ctr"/>
           <a:lstStyle/>
           <a:p>
-            <a:pPr algn="ctr" indent="0" marL="0">
+            <a:pPr marL="0" indent="0" algn="ctr">
               <a:buNone/>
             </a:pPr>
             <a:r>
@@ -11230,7 +11041,7 @@
           <a:bodyPr wrap="square" lIns="0" tIns="0" rIns="0" bIns="0" rtlCol="0" anchor="t"/>
           <a:lstStyle/>
           <a:p>
-            <a:pPr algn="ctr" indent="0" marL="0">
+            <a:pPr marL="0" indent="0" algn="ctr">
               <a:buNone/>
             </a:pPr>
             <a:r>
@@ -11244,9 +11055,6 @@
               </a:rPr>
               <a:t>초록</a:t>
             </a:r>
-            <a:pPr algn="ctr" indent="0" marL="0">
-              <a:buNone/>
-            </a:pPr>
             <a:r>
               <a:rPr lang="en-US" sz="1800" dirty="0">
                 <a:solidFill>
@@ -11283,7 +11091,7 @@
           <a:bodyPr wrap="square" lIns="0" tIns="0" rIns="0" bIns="0" rtlCol="0" anchor="t"/>
           <a:lstStyle/>
           <a:p>
-            <a:pPr indent="0" marL="0">
+            <a:pPr marL="0" indent="0">
               <a:buNone/>
             </a:pPr>
             <a:r>
@@ -11330,14 +11138,14 @@
       </p:sp>
       <p:pic>
         <p:nvPicPr>
-          <p:cNvPr id="28" name="Image 4" descr="D:\stopsketch\stopsketch\assets\ink_yellow.png">    </p:cNvPr>
+          <p:cNvPr id="28" name="Image 4" descr="D:\stopsketch\stopsketch\assets\ink_yellow.png"/>
           <p:cNvPicPr>
             <a:picLocks noChangeAspect="1"/>
           </p:cNvPicPr>
           <p:nvPr/>
         </p:nvPicPr>
         <p:blipFill>
-          <a:blip r:embed="rId5"/>
+          <a:blip r:embed="rId7"/>
           <a:stretch>
             <a:fillRect/>
           </a:stretch>
@@ -11398,7 +11206,7 @@
           <a:bodyPr wrap="square" lIns="0" tIns="0" rIns="0" bIns="0" rtlCol="0" anchor="ctr"/>
           <a:lstStyle/>
           <a:p>
-            <a:pPr algn="ctr" indent="0" marL="0">
+            <a:pPr marL="0" indent="0" algn="ctr">
               <a:buNone/>
             </a:pPr>
             <a:r>
@@ -11437,7 +11245,7 @@
           <a:bodyPr wrap="square" lIns="0" tIns="0" rIns="0" bIns="0" rtlCol="0" anchor="t"/>
           <a:lstStyle/>
           <a:p>
-            <a:pPr algn="ctr" indent="0" marL="0">
+            <a:pPr marL="0" indent="0" algn="ctr">
               <a:buNone/>
             </a:pPr>
             <a:r>
@@ -11451,9 +11259,6 @@
               </a:rPr>
               <a:t>노랑</a:t>
             </a:r>
-            <a:pPr algn="ctr" indent="0" marL="0">
-              <a:buNone/>
-            </a:pPr>
             <a:r>
               <a:rPr lang="en-US" sz="1800" dirty="0">
                 <a:solidFill>
@@ -11490,7 +11295,7 @@
           <a:bodyPr wrap="square" lIns="0" tIns="0" rIns="0" bIns="0" rtlCol="0" anchor="t"/>
           <a:lstStyle/>
           <a:p>
-            <a:pPr indent="0" marL="0">
+            <a:pPr marL="0" indent="0">
               <a:buNone/>
             </a:pPr>
             <a:r>
@@ -11556,7 +11361,7 @@
           <a:bodyPr wrap="square" lIns="0" tIns="0" rIns="0" bIns="0" rtlCol="0" anchor="ctr"/>
           <a:lstStyle/>
           <a:p>
-            <a:pPr algn="ctr" indent="0" marL="0">
+            <a:pPr marL="0" indent="0" algn="ctr">
               <a:buNone/>
             </a:pPr>
             <a:r>
@@ -11576,7 +11381,7 @@
       </p:sp>
       <p:sp>
         <p:nvSpPr>
-          <p:cNvPr id="25" name="Slide Number Placeholder 0"/>
+          <p:cNvPr id="35" name="Slide Number Placeholder 0"/>
           <p:cNvSpPr>
             <a:spLocks noGrp="1"/>
           </p:cNvSpPr>
@@ -11594,7 +11399,7 @@
           </a:prstGeom>
           <a:extLst>
             <a:ext uri="{C572A759-6A51-4108-AA02-DFA0A04FC94B}">
-              <ma14:wrappingTextBoxFlag xmlns:ma14="http://schemas.microsoft.com/office/mac/drawingml/2011/main" val="0"/>
+              <ma14:wrappingTextBoxFlag xmlns:ma14="http://schemas.microsoft.com/office/mac/drawingml/2011/main" xmlns="" val="0"/>
             </a:ext>
           </a:extLst>
         </p:spPr>
@@ -11615,7 +11420,7 @@
           <a:p>
             <a:pPr algn="r"/>
             <a:fld id="{F7021451-1387-4CA6-816F-3879F97B5CBC}" type="slidenum">
-              <a:rPr b="0" lang="en-US"/>
+              <a:rPr lang="en-US" b="0"/>
               <a:t>7</a:t>
             </a:fld>
             <a:endParaRPr lang="en-US"/>
@@ -11650,9 +11455,11 @@
       <p:sp>
         <p:nvSpPr>
           <p:cNvPr id="2" name="Text 1"/>
-          <p:cNvSpPr/>
+          <p:cNvSpPr>
+            <a:spLocks noGrp="1"/>
+          </p:cNvSpPr>
           <p:nvPr>
-            <p:ph idx="101" type="title" hasCustomPrompt="1"/>
+            <p:ph type="title" idx="101" hasCustomPrompt="1"/>
           </p:nvPr>
         </p:nvSpPr>
         <p:spPr>
@@ -11670,7 +11477,7 @@
           <a:bodyPr wrap="square" lIns="0" tIns="0" rIns="0" bIns="0" rtlCol="0" anchor="ctr"/>
           <a:lstStyle/>
           <a:p>
-            <a:pPr algn="l" indent="0" marL="0">
+            <a:pPr marL="0" indent="0" algn="l">
               <a:buNone/>
             </a:pPr>
             <a:r>
@@ -11690,14 +11497,14 @@
       </p:sp>
       <p:pic>
         <p:nvPicPr>
-          <p:cNvPr id="3" name="Image 0" descr="D:\stopsketch\데모제출\2_대표이미지\05_같은색_빨강으로_포탄막고_튕겨나오기.png">    </p:cNvPr>
+          <p:cNvPr id="3" name="Image 0" descr="D:\stopsketch\데모제출\2_대표이미지\05_같은색_빨강으로_포탄막고_튕겨나오기.png"/>
           <p:cNvPicPr>
             <a:picLocks noChangeAspect="1"/>
           </p:cNvPicPr>
           <p:nvPr/>
         </p:nvPicPr>
         <p:blipFill>
-          <a:blip r:embed="rId1"/>
+          <a:blip r:embed="rId3"/>
           <a:stretch>
             <a:fillRect/>
           </a:stretch>
@@ -11755,7 +11562,7 @@
           <a:bodyPr wrap="square" lIns="0" tIns="0" rIns="0" bIns="0" rtlCol="0" anchor="t"/>
           <a:lstStyle/>
           <a:p>
-            <a:pPr indent="0" marL="0">
+            <a:pPr marL="0" indent="0">
               <a:buNone/>
             </a:pPr>
             <a:r>
@@ -11846,7 +11653,7 @@
           <a:bodyPr wrap="square" lIns="0" tIns="0" rIns="0" bIns="0" rtlCol="0" anchor="t"/>
           <a:lstStyle/>
           <a:p>
-            <a:pPr indent="0" marL="0">
+            <a:pPr marL="0" indent="0">
               <a:buNone/>
             </a:pPr>
             <a:r>
@@ -11885,7 +11692,7 @@
           <a:bodyPr wrap="square" lIns="0" tIns="0" rIns="0" bIns="0" rtlCol="0" anchor="t"/>
           <a:lstStyle/>
           <a:p>
-            <a:pPr indent="0" marL="0">
+            <a:pPr marL="0" indent="0">
               <a:buNone/>
             </a:pPr>
             <a:r>
@@ -11976,7 +11783,7 @@
           <a:bodyPr wrap="square" lIns="0" tIns="0" rIns="0" bIns="0" rtlCol="0" anchor="t"/>
           <a:lstStyle/>
           <a:p>
-            <a:pPr indent="0" marL="0">
+            <a:pPr marL="0" indent="0">
               <a:buNone/>
             </a:pPr>
             <a:r>
@@ -12015,7 +11822,7 @@
           <a:bodyPr wrap="square" lIns="0" tIns="0" rIns="0" bIns="0" rtlCol="0" anchor="t"/>
           <a:lstStyle/>
           <a:p>
-            <a:pPr indent="0" marL="0">
+            <a:pPr marL="0" indent="0">
               <a:buNone/>
             </a:pPr>
             <a:r>
@@ -12106,7 +11913,7 @@
           <a:bodyPr wrap="square" lIns="0" tIns="0" rIns="0" bIns="0" rtlCol="0" anchor="t"/>
           <a:lstStyle/>
           <a:p>
-            <a:pPr indent="0" marL="0">
+            <a:pPr marL="0" indent="0">
               <a:buNone/>
             </a:pPr>
             <a:r>
@@ -12145,7 +11952,7 @@
           <a:bodyPr wrap="square" lIns="0" tIns="0" rIns="0" bIns="0" rtlCol="0" anchor="t"/>
           <a:lstStyle/>
           <a:p>
-            <a:pPr indent="0" marL="0">
+            <a:pPr marL="0" indent="0">
               <a:buNone/>
             </a:pPr>
             <a:r>
@@ -12236,7 +12043,7 @@
           <a:bodyPr wrap="square" lIns="0" tIns="0" rIns="0" bIns="0" rtlCol="0" anchor="t"/>
           <a:lstStyle/>
           <a:p>
-            <a:pPr indent="0" marL="0">
+            <a:pPr marL="0" indent="0">
               <a:buNone/>
             </a:pPr>
             <a:r>
@@ -12275,7 +12082,7 @@
           <a:bodyPr wrap="square" lIns="0" tIns="0" rIns="0" bIns="0" rtlCol="0" anchor="t"/>
           <a:lstStyle/>
           <a:p>
-            <a:pPr indent="0" marL="0">
+            <a:pPr marL="0" indent="0">
               <a:buNone/>
             </a:pPr>
             <a:r>
@@ -12366,7 +12173,7 @@
           <a:bodyPr wrap="square" lIns="0" tIns="0" rIns="0" bIns="0" rtlCol="0" anchor="t"/>
           <a:lstStyle/>
           <a:p>
-            <a:pPr indent="0" marL="0">
+            <a:pPr marL="0" indent="0">
               <a:buNone/>
             </a:pPr>
             <a:r>
@@ -12405,7 +12212,7 @@
           <a:bodyPr wrap="square" lIns="0" tIns="0" rIns="0" bIns="0" rtlCol="0" anchor="t"/>
           <a:lstStyle/>
           <a:p>
-            <a:pPr indent="0" marL="0">
+            <a:pPr marL="0" indent="0">
               <a:buNone/>
             </a:pPr>
             <a:r>
@@ -12425,7 +12232,7 @@
       </p:sp>
       <p:sp>
         <p:nvSpPr>
-          <p:cNvPr id="25" name="Slide Number Placeholder 0"/>
+          <p:cNvPr id="26" name="Slide Number Placeholder 0"/>
           <p:cNvSpPr>
             <a:spLocks noGrp="1"/>
           </p:cNvSpPr>
@@ -12443,7 +12250,7 @@
           </a:prstGeom>
           <a:extLst>
             <a:ext uri="{C572A759-6A51-4108-AA02-DFA0A04FC94B}">
-              <ma14:wrappingTextBoxFlag xmlns:ma14="http://schemas.microsoft.com/office/mac/drawingml/2011/main" val="0"/>
+              <ma14:wrappingTextBoxFlag xmlns:ma14="http://schemas.microsoft.com/office/mac/drawingml/2011/main" xmlns="" val="0"/>
             </a:ext>
           </a:extLst>
         </p:spPr>
@@ -12464,7 +12271,7 @@
           <a:p>
             <a:pPr algn="r"/>
             <a:fld id="{F7021451-1387-4CA6-816F-3879F97B5CBC}" type="slidenum">
-              <a:rPr b="0" lang="en-US"/>
+              <a:rPr lang="en-US" b="0"/>
               <a:t>8</a:t>
             </a:fld>
             <a:endParaRPr lang="en-US"/>
@@ -12499,9 +12306,11 @@
       <p:sp>
         <p:nvSpPr>
           <p:cNvPr id="2" name="Text 1"/>
-          <p:cNvSpPr/>
+          <p:cNvSpPr>
+            <a:spLocks noGrp="1"/>
+          </p:cNvSpPr>
           <p:nvPr>
-            <p:ph idx="101" type="title" hasCustomPrompt="1"/>
+            <p:ph type="title" idx="101" hasCustomPrompt="1"/>
           </p:nvPr>
         </p:nvSpPr>
         <p:spPr>
@@ -12519,7 +12328,7 @@
           <a:bodyPr wrap="square" lIns="0" tIns="0" rIns="0" bIns="0" rtlCol="0" anchor="ctr"/>
           <a:lstStyle/>
           <a:p>
-            <a:pPr algn="l" indent="0" marL="0">
+            <a:pPr marL="0" indent="0" algn="l">
               <a:buNone/>
             </a:pPr>
             <a:r>
@@ -12610,7 +12419,7 @@
           <a:bodyPr wrap="square" lIns="0" tIns="0" rIns="0" bIns="0" rtlCol="0" anchor="ctr"/>
           <a:lstStyle/>
           <a:p>
-            <a:pPr algn="ctr" indent="0" marL="0">
+            <a:pPr marL="0" indent="0" algn="ctr">
               <a:buNone/>
             </a:pPr>
             <a:r>
@@ -12649,7 +12458,7 @@
           <a:bodyPr wrap="square" lIns="0" tIns="0" rIns="0" bIns="0" rtlCol="0" anchor="ctr"/>
           <a:lstStyle/>
           <a:p>
-            <a:pPr indent="0" marL="0">
+            <a:pPr marL="0" indent="0">
               <a:buNone/>
             </a:pPr>
             <a:r>
@@ -12763,7 +12572,7 @@
           <a:bodyPr wrap="square" lIns="0" tIns="0" rIns="0" bIns="0" rtlCol="0" anchor="t"/>
           <a:lstStyle/>
           <a:p>
-            <a:pPr indent="0" marL="0">
+            <a:pPr marL="0" indent="0">
               <a:buNone/>
             </a:pPr>
             <a:r>
@@ -12908,7 +12717,7 @@
           <a:bodyPr wrap="square" lIns="0" tIns="0" rIns="0" bIns="0" rtlCol="0" anchor="t"/>
           <a:lstStyle/>
           <a:p>
-            <a:pPr indent="0" marL="0">
+            <a:pPr marL="0" indent="0">
               <a:buNone/>
             </a:pPr>
             <a:r>
@@ -12999,7 +12808,7 @@
           <a:bodyPr wrap="square" lIns="0" tIns="0" rIns="0" bIns="0" rtlCol="0" anchor="ctr"/>
           <a:lstStyle/>
           <a:p>
-            <a:pPr algn="ctr" indent="0" marL="0">
+            <a:pPr marL="0" indent="0" algn="ctr">
               <a:buNone/>
             </a:pPr>
             <a:r>
@@ -13038,7 +12847,7 @@
           <a:bodyPr wrap="square" lIns="0" tIns="0" rIns="0" bIns="0" rtlCol="0" anchor="ctr"/>
           <a:lstStyle/>
           <a:p>
-            <a:pPr indent="0" marL="0">
+            <a:pPr marL="0" indent="0">
               <a:buNone/>
             </a:pPr>
             <a:r>
@@ -13152,7 +12961,7 @@
           <a:bodyPr wrap="square" lIns="0" tIns="0" rIns="0" bIns="0" rtlCol="0" anchor="t"/>
           <a:lstStyle/>
           <a:p>
-            <a:pPr indent="0" marL="0">
+            <a:pPr marL="0" indent="0">
               <a:buNone/>
             </a:pPr>
             <a:r>
@@ -13297,7 +13106,7 @@
           <a:bodyPr wrap="square" lIns="0" tIns="0" rIns="0" bIns="0" rtlCol="0" anchor="t"/>
           <a:lstStyle/>
           <a:p>
-            <a:pPr indent="0" marL="0">
+            <a:pPr marL="0" indent="0">
               <a:buNone/>
             </a:pPr>
             <a:r>
@@ -13388,7 +13197,7 @@
           <a:bodyPr wrap="square" lIns="0" tIns="0" rIns="0" bIns="0" rtlCol="0" anchor="ctr"/>
           <a:lstStyle/>
           <a:p>
-            <a:pPr algn="ctr" indent="0" marL="0">
+            <a:pPr marL="0" indent="0" algn="ctr">
               <a:buNone/>
             </a:pPr>
             <a:r>
@@ -13427,7 +13236,7 @@
           <a:bodyPr wrap="square" lIns="0" tIns="0" rIns="0" bIns="0" rtlCol="0" anchor="ctr"/>
           <a:lstStyle/>
           <a:p>
-            <a:pPr indent="0" marL="0">
+            <a:pPr marL="0" indent="0">
               <a:buNone/>
             </a:pPr>
             <a:r>
@@ -13591,7 +13400,7 @@
           <a:bodyPr wrap="square" lIns="0" tIns="0" rIns="0" bIns="0" rtlCol="0" anchor="t"/>
           <a:lstStyle/>
           <a:p>
-            <a:pPr indent="0" marL="0">
+            <a:pPr marL="0" indent="0">
               <a:buNone/>
             </a:pPr>
             <a:r>
@@ -13736,7 +13545,7 @@
           <a:bodyPr wrap="square" lIns="0" tIns="0" rIns="0" bIns="0" rtlCol="0" anchor="t"/>
           <a:lstStyle/>
           <a:p>
-            <a:pPr indent="0" marL="0">
+            <a:pPr marL="0" indent="0">
               <a:buNone/>
             </a:pPr>
             <a:r>
@@ -13775,7 +13584,7 @@
           <a:bodyPr wrap="square" lIns="0" tIns="0" rIns="0" bIns="0" rtlCol="0" anchor="t"/>
           <a:lstStyle/>
           <a:p>
-            <a:pPr indent="0" marL="0">
+            <a:pPr marL="0" indent="0">
               <a:buNone/>
             </a:pPr>
             <a:r>
@@ -13795,7 +13604,7 @@
       </p:sp>
       <p:sp>
         <p:nvSpPr>
-          <p:cNvPr id="25" name="Slide Number Placeholder 0"/>
+          <p:cNvPr id="36" name="Slide Number Placeholder 0"/>
           <p:cNvSpPr>
             <a:spLocks noGrp="1"/>
           </p:cNvSpPr>
@@ -13813,7 +13622,7 @@
           </a:prstGeom>
           <a:extLst>
             <a:ext uri="{C572A759-6A51-4108-AA02-DFA0A04FC94B}">
-              <ma14:wrappingTextBoxFlag xmlns:ma14="http://schemas.microsoft.com/office/mac/drawingml/2011/main" val="0"/>
+              <ma14:wrappingTextBoxFlag xmlns:ma14="http://schemas.microsoft.com/office/mac/drawingml/2011/main" xmlns="" val="0"/>
             </a:ext>
           </a:extLst>
         </p:spPr>
@@ -13834,7 +13643,7 @@
           <a:p>
             <a:pPr algn="r"/>
             <a:fld id="{F7021451-1387-4CA6-816F-3879F97B5CBC}" type="slidenum">
-              <a:rPr b="0" lang="en-US"/>
+              <a:rPr lang="en-US" b="0"/>
               <a:t>9</a:t>
             </a:fld>
             <a:endParaRPr lang="en-US"/>
@@ -14142,4 +13951,299 @@
     </a:ext>
   </a:extLst>
 </a:theme>
+</file>
+
+<file path=ppt/theme/theme2.xml><?xml version="1.0" encoding="utf-8"?>
+<a:theme xmlns:a="http://schemas.openxmlformats.org/drawingml/2006/main" name="Office 테마">
+  <a:themeElements>
+    <a:clrScheme name="Office">
+      <a:dk1>
+        <a:sysClr val="windowText" lastClr="000000"/>
+      </a:dk1>
+      <a:lt1>
+        <a:sysClr val="window" lastClr="FFFFFF"/>
+      </a:lt1>
+      <a:dk2>
+        <a:srgbClr val="44546A"/>
+      </a:dk2>
+      <a:lt2>
+        <a:srgbClr val="E7E6E6"/>
+      </a:lt2>
+      <a:accent1>
+        <a:srgbClr val="4472C4"/>
+      </a:accent1>
+      <a:accent2>
+        <a:srgbClr val="ED7D31"/>
+      </a:accent2>
+      <a:accent3>
+        <a:srgbClr val="A5A5A5"/>
+      </a:accent3>
+      <a:accent4>
+        <a:srgbClr val="FFC000"/>
+      </a:accent4>
+      <a:accent5>
+        <a:srgbClr val="5B9BD5"/>
+      </a:accent5>
+      <a:accent6>
+        <a:srgbClr val="70AD47"/>
+      </a:accent6>
+      <a:hlink>
+        <a:srgbClr val="0563C1"/>
+      </a:hlink>
+      <a:folHlink>
+        <a:srgbClr val="954F72"/>
+      </a:folHlink>
+    </a:clrScheme>
+    <a:fontScheme name="Office">
+      <a:majorFont>
+        <a:latin typeface="맑은 고딕" panose="020F0302020204030204"/>
+        <a:ea typeface=""/>
+        <a:cs typeface=""/>
+        <a:font script="Jpan" typeface="游ゴシック Light"/>
+        <a:font script="Hang" typeface="맑은 고딕"/>
+        <a:font script="Hans" typeface="等线 Light"/>
+        <a:font script="Hant" typeface="新細明體"/>
+        <a:font script="Arab" typeface="Times New Roman"/>
+        <a:font script="Hebr" typeface="Times New Roman"/>
+        <a:font script="Thai" typeface="Angsana New"/>
+        <a:font script="Ethi" typeface="Nyala"/>
+        <a:font script="Beng" typeface="Vrinda"/>
+        <a:font script="Gujr" typeface="Shruti"/>
+        <a:font script="Khmr" typeface="MoolBoran"/>
+        <a:font script="Knda" typeface="Tunga"/>
+        <a:font script="Guru" typeface="Raavi"/>
+        <a:font script="Cans" typeface="Euphemia"/>
+        <a:font script="Cher" typeface="Plantagenet Cherokee"/>
+        <a:font script="Yiii" typeface="Microsoft Yi Baiti"/>
+        <a:font script="Tibt" typeface="Microsoft Himalaya"/>
+        <a:font script="Thaa" typeface="MV Boli"/>
+        <a:font script="Deva" typeface="Mangal"/>
+        <a:font script="Telu" typeface="Gautami"/>
+        <a:font script="Taml" typeface="Latha"/>
+        <a:font script="Syrc" typeface="Estrangelo Edessa"/>
+        <a:font script="Orya" typeface="Kalinga"/>
+        <a:font script="Mlym" typeface="Kartika"/>
+        <a:font script="Laoo" typeface="DokChampa"/>
+        <a:font script="Sinh" typeface="Iskoola Pota"/>
+        <a:font script="Mong" typeface="Mongolian Baiti"/>
+        <a:font script="Viet" typeface="Times New Roman"/>
+        <a:font script="Uigh" typeface="Microsoft Uighur"/>
+        <a:font script="Geor" typeface="Sylfaen"/>
+        <a:font script="Armn" typeface="Arial"/>
+        <a:font script="Bugi" typeface="Leelawadee UI"/>
+        <a:font script="Bopo" typeface="Microsoft JhengHei"/>
+        <a:font script="Java" typeface="Javanese Text"/>
+        <a:font script="Lisu" typeface="Segoe UI"/>
+        <a:font script="Mymr" typeface="Myanmar Text"/>
+        <a:font script="Nkoo" typeface="Ebrima"/>
+        <a:font script="Olck" typeface="Nirmala UI"/>
+        <a:font script="Osma" typeface="Ebrima"/>
+        <a:font script="Phag" typeface="Phagspa"/>
+        <a:font script="Syrn" typeface="Estrangelo Edessa"/>
+        <a:font script="Syrj" typeface="Estrangelo Edessa"/>
+        <a:font script="Syre" typeface="Estrangelo Edessa"/>
+        <a:font script="Sora" typeface="Nirmala UI"/>
+        <a:font script="Tale" typeface="Microsoft Tai Le"/>
+        <a:font script="Talu" typeface="Microsoft New Tai Lue"/>
+        <a:font script="Tfng" typeface="Ebrima"/>
+      </a:majorFont>
+      <a:minorFont>
+        <a:latin typeface="맑은 고딕" panose="020F0502020204030204"/>
+        <a:ea typeface=""/>
+        <a:cs typeface=""/>
+        <a:font script="Jpan" typeface="游ゴシック"/>
+        <a:font script="Hang" typeface="맑은 고딕"/>
+        <a:font script="Hans" typeface="等线"/>
+        <a:font script="Hant" typeface="新細明體"/>
+        <a:font script="Arab" typeface="Arial"/>
+        <a:font script="Hebr" typeface="Arial"/>
+        <a:font script="Thai" typeface="Cordia New"/>
+        <a:font script="Ethi" typeface="Nyala"/>
+        <a:font script="Beng" typeface="Vrinda"/>
+        <a:font script="Gujr" typeface="Shruti"/>
+        <a:font script="Khmr" typeface="DaunPenh"/>
+        <a:font script="Knda" typeface="Tunga"/>
+        <a:font script="Guru" typeface="Raavi"/>
+        <a:font script="Cans" typeface="Euphemia"/>
+        <a:font script="Cher" typeface="Plantagenet Cherokee"/>
+        <a:font script="Yiii" typeface="Microsoft Yi Baiti"/>
+        <a:font script="Tibt" typeface="Microsoft Himalaya"/>
+        <a:font script="Thaa" typeface="MV Boli"/>
+        <a:font script="Deva" typeface="Mangal"/>
+        <a:font script="Telu" typeface="Gautami"/>
+        <a:font script="Taml" typeface="Latha"/>
+        <a:font script="Syrc" typeface="Estrangelo Edessa"/>
+        <a:font script="Orya" typeface="Kalinga"/>
+        <a:font script="Mlym" typeface="Kartika"/>
+        <a:font script="Laoo" typeface="DokChampa"/>
+        <a:font script="Sinh" typeface="Iskoola Pota"/>
+        <a:font script="Mong" typeface="Mongolian Baiti"/>
+        <a:font script="Viet" typeface="Arial"/>
+        <a:font script="Uigh" typeface="Microsoft Uighur"/>
+        <a:font script="Geor" typeface="Sylfaen"/>
+        <a:font script="Armn" typeface="Arial"/>
+        <a:font script="Bugi" typeface="Leelawadee UI"/>
+        <a:font script="Bopo" typeface="Microsoft JhengHei"/>
+        <a:font script="Java" typeface="Javanese Text"/>
+        <a:font script="Lisu" typeface="Segoe UI"/>
+        <a:font script="Mymr" typeface="Myanmar Text"/>
+        <a:font script="Nkoo" typeface="Ebrima"/>
+        <a:font script="Olck" typeface="Nirmala UI"/>
+        <a:font script="Osma" typeface="Ebrima"/>
+        <a:font script="Phag" typeface="Phagspa"/>
+        <a:font script="Syrn" typeface="Estrangelo Edessa"/>
+        <a:font script="Syrj" typeface="Estrangelo Edessa"/>
+        <a:font script="Syre" typeface="Estrangelo Edessa"/>
+        <a:font script="Sora" typeface="Nirmala UI"/>
+        <a:font script="Tale" typeface="Microsoft Tai Le"/>
+        <a:font script="Talu" typeface="Microsoft New Tai Lue"/>
+        <a:font script="Tfng" typeface="Ebrima"/>
+      </a:minorFont>
+    </a:fontScheme>
+    <a:fmtScheme name="Office">
+      <a:fillStyleLst>
+        <a:solidFill>
+          <a:schemeClr val="phClr"/>
+        </a:solidFill>
+        <a:gradFill rotWithShape="1">
+          <a:gsLst>
+            <a:gs pos="0">
+              <a:schemeClr val="phClr">
+                <a:lumMod val="110000"/>
+                <a:satMod val="105000"/>
+                <a:tint val="67000"/>
+              </a:schemeClr>
+            </a:gs>
+            <a:gs pos="50000">
+              <a:schemeClr val="phClr">
+                <a:lumMod val="105000"/>
+                <a:satMod val="103000"/>
+                <a:tint val="73000"/>
+              </a:schemeClr>
+            </a:gs>
+            <a:gs pos="100000">
+              <a:schemeClr val="phClr">
+                <a:lumMod val="105000"/>
+                <a:satMod val="109000"/>
+                <a:tint val="81000"/>
+              </a:schemeClr>
+            </a:gs>
+          </a:gsLst>
+          <a:lin ang="5400000" scaled="0"/>
+        </a:gradFill>
+        <a:gradFill rotWithShape="1">
+          <a:gsLst>
+            <a:gs pos="0">
+              <a:schemeClr val="phClr">
+                <a:satMod val="103000"/>
+                <a:lumMod val="102000"/>
+                <a:tint val="94000"/>
+              </a:schemeClr>
+            </a:gs>
+            <a:gs pos="50000">
+              <a:schemeClr val="phClr">
+                <a:satMod val="110000"/>
+                <a:lumMod val="100000"/>
+                <a:shade val="100000"/>
+              </a:schemeClr>
+            </a:gs>
+            <a:gs pos="100000">
+              <a:schemeClr val="phClr">
+                <a:lumMod val="99000"/>
+                <a:satMod val="120000"/>
+                <a:shade val="78000"/>
+              </a:schemeClr>
+            </a:gs>
+          </a:gsLst>
+          <a:lin ang="5400000" scaled="0"/>
+        </a:gradFill>
+      </a:fillStyleLst>
+      <a:lnStyleLst>
+        <a:ln w="6350" cap="flat" cmpd="sng" algn="ctr">
+          <a:solidFill>
+            <a:schemeClr val="phClr"/>
+          </a:solidFill>
+          <a:prstDash val="solid"/>
+          <a:miter lim="800000"/>
+        </a:ln>
+        <a:ln w="12700" cap="flat" cmpd="sng" algn="ctr">
+          <a:solidFill>
+            <a:schemeClr val="phClr"/>
+          </a:solidFill>
+          <a:prstDash val="solid"/>
+          <a:miter lim="800000"/>
+        </a:ln>
+        <a:ln w="19050" cap="flat" cmpd="sng" algn="ctr">
+          <a:solidFill>
+            <a:schemeClr val="phClr"/>
+          </a:solidFill>
+          <a:prstDash val="solid"/>
+          <a:miter lim="800000"/>
+        </a:ln>
+      </a:lnStyleLst>
+      <a:effectStyleLst>
+        <a:effectStyle>
+          <a:effectLst/>
+        </a:effectStyle>
+        <a:effectStyle>
+          <a:effectLst/>
+        </a:effectStyle>
+        <a:effectStyle>
+          <a:effectLst>
+            <a:outerShdw blurRad="57150" dist="19050" dir="5400000" algn="ctr" rotWithShape="0">
+              <a:srgbClr val="000000">
+                <a:alpha val="63000"/>
+              </a:srgbClr>
+            </a:outerShdw>
+          </a:effectLst>
+        </a:effectStyle>
+      </a:effectStyleLst>
+      <a:bgFillStyleLst>
+        <a:solidFill>
+          <a:schemeClr val="phClr"/>
+        </a:solidFill>
+        <a:solidFill>
+          <a:schemeClr val="phClr">
+            <a:tint val="95000"/>
+            <a:satMod val="170000"/>
+          </a:schemeClr>
+        </a:solidFill>
+        <a:gradFill rotWithShape="1">
+          <a:gsLst>
+            <a:gs pos="0">
+              <a:schemeClr val="phClr">
+                <a:tint val="93000"/>
+                <a:satMod val="150000"/>
+                <a:shade val="98000"/>
+                <a:lumMod val="102000"/>
+              </a:schemeClr>
+            </a:gs>
+            <a:gs pos="50000">
+              <a:schemeClr val="phClr">
+                <a:tint val="98000"/>
+                <a:satMod val="130000"/>
+                <a:shade val="90000"/>
+                <a:lumMod val="103000"/>
+              </a:schemeClr>
+            </a:gs>
+            <a:gs pos="100000">
+              <a:schemeClr val="phClr">
+                <a:shade val="63000"/>
+                <a:satMod val="120000"/>
+              </a:schemeClr>
+            </a:gs>
+          </a:gsLst>
+          <a:lin ang="5400000" scaled="0"/>
+        </a:gradFill>
+      </a:bgFillStyleLst>
+    </a:fmtScheme>
+  </a:themeElements>
+  <a:objectDefaults/>
+  <a:extraClrSchemeLst/>
+  <a:extLst>
+    <a:ext uri="{05A4C25C-085E-4340-85A3-A5531E510DB2}">
+      <thm15:themeFamily xmlns:thm15="http://schemas.microsoft.com/office/thememl/2012/main" name="Office Theme" id="{62F939B6-93AF-4DB8-9C6B-D6C7DFDC589F}" vid="{4A3C46E8-61CC-4603-A589-7422A47A8E4A}"/>
+    </a:ext>
+  </a:extLst>
+</a:theme>
 </file>
--- a/스톱앤스케치_제안서.pptx
+++ b/스톱앤스케치_제안서.pptx
@@ -5138,7 +5138,7 @@
           <p:nvPr>
             <p:extLst>
               <p:ext uri="{D42A27DB-BD31-4B8C-83A1-F6EECF244321}">
-                <p14:modId xmlns:p14="http://schemas.microsoft.com/office/powerpoint/2010/main" val="1579011935"/>
+                <p14:modId xmlns:p14="http://schemas.microsoft.com/office/powerpoint/2010/main" val="494161014"/>
               </p:ext>
             </p:extLst>
           </p:nvPr>
@@ -5263,7 +5263,18 @@
                           <a:ea typeface="Malgun Gothic" pitchFamily="34" charset="-122"/>
                           <a:cs typeface="Malgun Gothic" pitchFamily="34" charset="-120"/>
                         </a:rPr>
-                        <a:t>커비 캔버스 커스</a:t>
+                        <a:t>커비 </a:t>
+                      </a:r>
+                      <a:r>
+                        <a:rPr lang="ko-KR" altLang="en-US" sz="1100" b="1" dirty="0">
+                          <a:solidFill>
+                            <a:srgbClr val="2B2118"/>
+                          </a:solidFill>
+                          <a:latin typeface="Malgun Gothic" pitchFamily="34" charset="0"/>
+                          <a:ea typeface="Malgun Gothic" pitchFamily="34" charset="-122"/>
+                          <a:cs typeface="Malgun Gothic" pitchFamily="34" charset="-120"/>
+                        </a:rPr>
+                        <a:t>슈퍼 레인보우</a:t>
                       </a:r>
                       <a:endParaRPr lang="en-US" sz="1100" dirty="0">
                         <a:latin typeface="Malgun Gothic" charset="0"/>
@@ -5284,7 +5295,7 @@
                           <a:ea typeface="Malgun Gothic" pitchFamily="34" charset="-122"/>
                           <a:cs typeface="Malgun Gothic" pitchFamily="34" charset="-120"/>
                         </a:rPr>
-                        <a:t>(DS, 2005)</a:t>
+                        <a:t>(Wii, 2015)</a:t>
                       </a:r>
                       <a:endParaRPr lang="en-US" sz="1100" dirty="0">
                         <a:latin typeface="Malgun Gothic" charset="0"/>
@@ -5433,6 +5444,17 @@
                         <a:buNone/>
                       </a:pPr>
                       <a:r>
+                        <a:rPr lang="en-US" sz="1100" b="1" dirty="0" err="1">
+                          <a:solidFill>
+                            <a:srgbClr val="2B2118"/>
+                          </a:solidFill>
+                          <a:latin typeface="Malgun Gothic" pitchFamily="34" charset="0"/>
+                          <a:ea typeface="Malgun Gothic" pitchFamily="34" charset="-122"/>
+                          <a:cs typeface="Malgun Gothic" pitchFamily="34" charset="-120"/>
+                        </a:rPr>
+                        <a:t>맥스</a:t>
+                      </a:r>
+                      <a:r>
                         <a:rPr lang="en-US" sz="1100" b="1" dirty="0">
                           <a:solidFill>
                             <a:srgbClr val="2B2118"/>
@@ -5441,7 +5463,40 @@
                           <a:ea typeface="Malgun Gothic" pitchFamily="34" charset="-122"/>
                           <a:cs typeface="Malgun Gothic" pitchFamily="34" charset="-120"/>
                         </a:rPr>
-                        <a:t>맥스 앤 더 매직 마커</a:t>
+                        <a:t> 앤 </a:t>
+                      </a:r>
+                      <a:r>
+                        <a:rPr lang="ko-KR" altLang="en-US" sz="1100" b="1" dirty="0">
+                          <a:solidFill>
+                            <a:srgbClr val="2B2118"/>
+                          </a:solidFill>
+                          <a:latin typeface="Malgun Gothic" pitchFamily="34" charset="0"/>
+                          <a:ea typeface="Malgun Gothic" pitchFamily="34" charset="-122"/>
+                          <a:cs typeface="Malgun Gothic" pitchFamily="34" charset="-120"/>
+                        </a:rPr>
+                        <a:t>더 </a:t>
+                      </a:r>
+                      <a:r>
+                        <a:rPr lang="en-US" sz="1100" b="1" dirty="0" err="1">
+                          <a:solidFill>
+                            <a:srgbClr val="2B2118"/>
+                          </a:solidFill>
+                          <a:latin typeface="Malgun Gothic" pitchFamily="34" charset="0"/>
+                          <a:ea typeface="Malgun Gothic" pitchFamily="34" charset="-122"/>
+                          <a:cs typeface="Malgun Gothic" pitchFamily="34" charset="-120"/>
+                        </a:rPr>
+                        <a:t>매직</a:t>
+                      </a:r>
+                      <a:r>
+                        <a:rPr lang="en-US" sz="1100" b="1" dirty="0">
+                          <a:solidFill>
+                            <a:srgbClr val="2B2118"/>
+                          </a:solidFill>
+                          <a:latin typeface="Malgun Gothic" pitchFamily="34" charset="0"/>
+                          <a:ea typeface="Malgun Gothic" pitchFamily="34" charset="-122"/>
+                          <a:cs typeface="Malgun Gothic" pitchFamily="34" charset="-120"/>
+                        </a:rPr>
+                        <a:t> 마커</a:t>
                       </a:r>
                       <a:endParaRPr lang="en-US" sz="1100" dirty="0">
                         <a:latin typeface="Malgun Gothic" charset="0"/>
@@ -5869,6 +5924,39 @@
                         <a:buNone/>
                       </a:pPr>
                       <a:r>
+                        <a:rPr lang="ko-KR" altLang="en-US" sz="1100" b="1" dirty="0">
+                          <a:solidFill>
+                            <a:srgbClr val="2B2118"/>
+                          </a:solidFill>
+                          <a:latin typeface="Malgun Gothic" pitchFamily="34" charset="0"/>
+                          <a:ea typeface="Malgun Gothic" pitchFamily="34" charset="-122"/>
+                          <a:cs typeface="Malgun Gothic" pitchFamily="34" charset="-120"/>
+                        </a:rPr>
+                        <a:t>자동 이동 </a:t>
+                      </a:r>
+                      <a:r>
+                        <a:rPr lang="en-US" altLang="ko-KR" sz="1100" b="1" dirty="0">
+                          <a:solidFill>
+                            <a:srgbClr val="2B2118"/>
+                          </a:solidFill>
+                          <a:latin typeface="Malgun Gothic" pitchFamily="34" charset="0"/>
+                          <a:ea typeface="Malgun Gothic" pitchFamily="34" charset="-122"/>
+                          <a:cs typeface="Malgun Gothic" pitchFamily="34" charset="-120"/>
+                        </a:rPr>
+                        <a:t>n</a:t>
+                      </a:r>
+                      <a:r>
+                        <a:rPr lang="ko-KR" altLang="en-US" sz="1100" b="1" dirty="0">
+                          <a:solidFill>
+                            <a:srgbClr val="2B2118"/>
+                          </a:solidFill>
+                          <a:latin typeface="Malgun Gothic" pitchFamily="34" charset="0"/>
+                          <a:ea typeface="Malgun Gothic" pitchFamily="34" charset="-122"/>
+                          <a:cs typeface="Malgun Gothic" pitchFamily="34" charset="-120"/>
+                        </a:rPr>
+                        <a:t>명 </a:t>
+                      </a:r>
+                      <a:r>
                         <a:rPr lang="en-US" sz="1100" b="1" dirty="0">
                           <a:solidFill>
                             <a:srgbClr val="2B2118"/>
@@ -5877,7 +5965,7 @@
                           <a:ea typeface="Malgun Gothic" pitchFamily="34" charset="-122"/>
                           <a:cs typeface="Malgun Gothic" pitchFamily="34" charset="-120"/>
                         </a:rPr>
-                        <a:t>스스로 걷는 무리 (주인공 + 따라오는 물방울)</a:t>
+                        <a:t>(주인공 + 따라오는 물방울)</a:t>
                       </a:r>
                       <a:endParaRPr lang="en-US" sz="1100" dirty="0">
                         <a:latin typeface="Malgun Gothic" charset="0"/>
@@ -6020,7 +6108,73 @@
                           <a:ea typeface="Malgun Gothic" pitchFamily="34" charset="-122"/>
                           <a:cs typeface="Malgun Gothic" pitchFamily="34" charset="-120"/>
                         </a:rPr>
-                        <a:t>그리는 동안 흐름</a:t>
+                        <a:t>그리는 </a:t>
+                      </a:r>
+                      <a:r>
+                        <a:rPr lang="en-US" sz="1100" dirty="0" err="1">
+                          <a:solidFill>
+                            <a:srgbClr val="2B2118"/>
+                          </a:solidFill>
+                          <a:latin typeface="Malgun Gothic" pitchFamily="34" charset="0"/>
+                          <a:ea typeface="Malgun Gothic" pitchFamily="34" charset="-122"/>
+                          <a:cs typeface="Malgun Gothic" pitchFamily="34" charset="-120"/>
+                        </a:rPr>
+                        <a:t>동안</a:t>
+                      </a:r>
+                      <a:r>
+                        <a:rPr lang="en-US" sz="1100" dirty="0">
+                          <a:solidFill>
+                            <a:srgbClr val="2B2118"/>
+                          </a:solidFill>
+                          <a:latin typeface="Malgun Gothic" pitchFamily="34" charset="0"/>
+                          <a:ea typeface="Malgun Gothic" pitchFamily="34" charset="-122"/>
+                          <a:cs typeface="Malgun Gothic" pitchFamily="34" charset="-120"/>
+                        </a:rPr>
+                        <a:t> </a:t>
+                      </a:r>
+                      <a:r>
+                        <a:rPr lang="en-US" sz="1100" dirty="0" err="1">
+                          <a:solidFill>
+                            <a:srgbClr val="2B2118"/>
+                          </a:solidFill>
+                          <a:latin typeface="Malgun Gothic" pitchFamily="34" charset="0"/>
+                          <a:ea typeface="Malgun Gothic" pitchFamily="34" charset="-122"/>
+                          <a:cs typeface="Malgun Gothic" pitchFamily="34" charset="-120"/>
+                        </a:rPr>
+                        <a:t>흐름</a:t>
+                      </a:r>
+                      <a:r>
+                        <a:rPr lang="en-US" sz="1100" dirty="0">
+                          <a:solidFill>
+                            <a:srgbClr val="2B2118"/>
+                          </a:solidFill>
+                          <a:latin typeface="Malgun Gothic" pitchFamily="34" charset="0"/>
+                          <a:ea typeface="Malgun Gothic" pitchFamily="34" charset="-122"/>
+                          <a:cs typeface="Malgun Gothic" pitchFamily="34" charset="-120"/>
+                        </a:rPr>
+                        <a:t> (</a:t>
+                      </a:r>
+                      <a:r>
+                        <a:rPr lang="ko-KR" altLang="en-US" sz="1100" dirty="0">
+                          <a:solidFill>
+                            <a:srgbClr val="2B2118"/>
+                          </a:solidFill>
+                          <a:latin typeface="Malgun Gothic" pitchFamily="34" charset="0"/>
+                          <a:ea typeface="Malgun Gothic" pitchFamily="34" charset="-122"/>
+                          <a:cs typeface="Malgun Gothic" pitchFamily="34" charset="-120"/>
+                        </a:rPr>
+                        <a:t>실시간</a:t>
+                      </a:r>
+                      <a:r>
+                        <a:rPr lang="en-US" altLang="ko-KR" sz="1100" dirty="0">
+                          <a:solidFill>
+                            <a:srgbClr val="2B2118"/>
+                          </a:solidFill>
+                          <a:latin typeface="Malgun Gothic" pitchFamily="34" charset="0"/>
+                          <a:ea typeface="Malgun Gothic" pitchFamily="34" charset="-122"/>
+                          <a:cs typeface="Malgun Gothic" pitchFamily="34" charset="-120"/>
+                        </a:rPr>
+                        <a:t>)</a:t>
                       </a:r>
                       <a:endParaRPr lang="en-US" sz="1100" dirty="0">
                         <a:latin typeface="Malgun Gothic" charset="0"/>
@@ -6148,6 +6302,28 @@
                         <a:buNone/>
                       </a:pPr>
                       <a:r>
+                        <a:rPr lang="ko-KR" altLang="en-US" sz="1100" dirty="0">
+                          <a:solidFill>
+                            <a:srgbClr val="2B2118"/>
+                          </a:solidFill>
+                          <a:latin typeface="Malgun Gothic" pitchFamily="34" charset="0"/>
+                          <a:ea typeface="Malgun Gothic" pitchFamily="34" charset="-122"/>
+                          <a:cs typeface="Malgun Gothic" pitchFamily="34" charset="-120"/>
+                        </a:rPr>
+                        <a:t>완전히 </a:t>
+                      </a:r>
+                      <a:r>
+                        <a:rPr lang="en-US" sz="1100" dirty="0" err="1">
+                          <a:solidFill>
+                            <a:srgbClr val="2B2118"/>
+                          </a:solidFill>
+                          <a:latin typeface="Malgun Gothic" pitchFamily="34" charset="0"/>
+                          <a:ea typeface="Malgun Gothic" pitchFamily="34" charset="-122"/>
+                          <a:cs typeface="Malgun Gothic" pitchFamily="34" charset="-120"/>
+                        </a:rPr>
+                        <a:t>멈춤</a:t>
+                      </a:r>
+                      <a:r>
                         <a:rPr lang="en-US" sz="1100" dirty="0">
                           <a:solidFill>
                             <a:srgbClr val="2B2118"/>
@@ -6156,7 +6332,7 @@
                           <a:ea typeface="Malgun Gothic" pitchFamily="34" charset="-122"/>
                           <a:cs typeface="Malgun Gothic" pitchFamily="34" charset="-120"/>
                         </a:rPr>
-                        <a:t>멈춤 (횟수 제한 없음)</a:t>
+                        <a:t> (횟수 제한 없음)</a:t>
                       </a:r>
                       <a:endParaRPr lang="en-US" sz="1100" dirty="0">
                         <a:latin typeface="Malgun Gothic" charset="0"/>
@@ -6435,7 +6611,18 @@
                           <a:ea typeface="Malgun Gothic" pitchFamily="34" charset="-122"/>
                           <a:cs typeface="Malgun Gothic" pitchFamily="34" charset="-120"/>
                         </a:rPr>
-                        <a:t>5종 물리 성질, 몇 초</a:t>
+                        <a:t>5종 물리 성질, 몇 초 </a:t>
+                      </a:r>
+                      <a:r>
+                        <a:rPr lang="ko-KR" altLang="en-US" sz="1100" dirty="0">
+                          <a:solidFill>
+                            <a:srgbClr val="2B2118"/>
+                          </a:solidFill>
+                          <a:latin typeface="Malgun Gothic" pitchFamily="34" charset="0"/>
+                          <a:ea typeface="Malgun Gothic" pitchFamily="34" charset="-122"/>
+                          <a:cs typeface="Malgun Gothic" pitchFamily="34" charset="-120"/>
+                        </a:rPr>
+                        <a:t>지속</a:t>
                       </a:r>
                       <a:endParaRPr lang="en-US" sz="1100" dirty="0">
                         <a:latin typeface="Malgun Gothic" charset="0"/>
@@ -6503,7 +6690,62 @@
                           <a:ea typeface="Malgun Gothic" pitchFamily="34" charset="-122"/>
                           <a:cs typeface="Malgun Gothic" pitchFamily="34" charset="-120"/>
                         </a:rPr>
-                        <a:t>1종, 그린 물체에 중력</a:t>
+                        <a:t>1종, 그린 </a:t>
+                      </a:r>
+                      <a:r>
+                        <a:rPr lang="en-US" sz="1100" dirty="0" err="1">
+                          <a:solidFill>
+                            <a:srgbClr val="2B2118"/>
+                          </a:solidFill>
+                          <a:latin typeface="Malgun Gothic" pitchFamily="34" charset="0"/>
+                          <a:ea typeface="Malgun Gothic" pitchFamily="34" charset="-122"/>
+                          <a:cs typeface="Malgun Gothic" pitchFamily="34" charset="-120"/>
+                        </a:rPr>
+                        <a:t>물체에</a:t>
+                      </a:r>
+                      <a:r>
+                        <a:rPr lang="en-US" sz="1100" dirty="0">
+                          <a:solidFill>
+                            <a:srgbClr val="2B2118"/>
+                          </a:solidFill>
+                          <a:latin typeface="Malgun Gothic" pitchFamily="34" charset="0"/>
+                          <a:ea typeface="Malgun Gothic" pitchFamily="34" charset="-122"/>
+                          <a:cs typeface="Malgun Gothic" pitchFamily="34" charset="-120"/>
+                        </a:rPr>
+                        <a:t> </a:t>
+                      </a:r>
+                      <a:r>
+                        <a:rPr lang="en-US" sz="1100" dirty="0" err="1">
+                          <a:solidFill>
+                            <a:srgbClr val="2B2118"/>
+                          </a:solidFill>
+                          <a:latin typeface="Malgun Gothic" pitchFamily="34" charset="0"/>
+                          <a:ea typeface="Malgun Gothic" pitchFamily="34" charset="-122"/>
+                          <a:cs typeface="Malgun Gothic" pitchFamily="34" charset="-120"/>
+                        </a:rPr>
+                        <a:t>중력</a:t>
+                      </a:r>
+                      <a:r>
+                        <a:rPr lang="en-US" sz="1100" dirty="0">
+                          <a:solidFill>
+                            <a:srgbClr val="2B2118"/>
+                          </a:solidFill>
+                          <a:latin typeface="Malgun Gothic" pitchFamily="34" charset="0"/>
+                          <a:ea typeface="Malgun Gothic" pitchFamily="34" charset="-122"/>
+                          <a:cs typeface="Malgun Gothic" pitchFamily="34" charset="-120"/>
+                        </a:rPr>
+                        <a:t>, </a:t>
+                      </a:r>
+                      <a:r>
+                        <a:rPr lang="ko-KR" altLang="en-US" sz="1100" dirty="0">
+                          <a:solidFill>
+                            <a:srgbClr val="2B2118"/>
+                          </a:solidFill>
+                          <a:latin typeface="Malgun Gothic" pitchFamily="34" charset="0"/>
+                          <a:ea typeface="Malgun Gothic" pitchFamily="34" charset="-122"/>
+                          <a:cs typeface="Malgun Gothic" pitchFamily="34" charset="-120"/>
+                        </a:rPr>
+                        <a:t>회수</a:t>
                       </a:r>
                       <a:endParaRPr lang="en-US" sz="1100" dirty="0">
                         <a:latin typeface="Malgun Gothic" charset="0"/>
@@ -6706,6 +6948,17 @@
                         <a:buNone/>
                       </a:pPr>
                       <a:r>
+                        <a:rPr lang="en-US" sz="1100" dirty="0" err="1">
+                          <a:solidFill>
+                            <a:srgbClr val="2B2118"/>
+                          </a:solidFill>
+                          <a:latin typeface="Malgun Gothic" pitchFamily="34" charset="0"/>
+                          <a:ea typeface="Malgun Gothic" pitchFamily="34" charset="-122"/>
+                          <a:cs typeface="Malgun Gothic" pitchFamily="34" charset="-120"/>
+                        </a:rPr>
+                        <a:t>도착</a:t>
+                      </a:r>
+                      <a:r>
                         <a:rPr lang="en-US" sz="1100" dirty="0">
                           <a:solidFill>
                             <a:srgbClr val="2B2118"/>
@@ -6714,7 +6967,62 @@
                           <a:ea typeface="Malgun Gothic" pitchFamily="34" charset="-122"/>
                           <a:cs typeface="Malgun Gothic" pitchFamily="34" charset="-120"/>
                         </a:rPr>
-                        <a:t>도착</a:t>
+                        <a:t> </a:t>
+                      </a:r>
+                      <a:r>
+                        <a:rPr lang="en-US" altLang="ko-KR" sz="1100" dirty="0">
+                          <a:solidFill>
+                            <a:srgbClr val="2B2118"/>
+                          </a:solidFill>
+                          <a:latin typeface="Malgun Gothic" pitchFamily="34" charset="0"/>
+                          <a:ea typeface="Malgun Gothic" pitchFamily="34" charset="-122"/>
+                          <a:cs typeface="Malgun Gothic" pitchFamily="34" charset="-120"/>
+                        </a:rPr>
+                        <a:t>· </a:t>
+                      </a:r>
+                      <a:r>
+                        <a:rPr lang="ko-KR" altLang="en-US" sz="1100" dirty="0">
+                          <a:solidFill>
+                            <a:srgbClr val="2B2118"/>
+                          </a:solidFill>
+                          <a:latin typeface="Malgun Gothic" pitchFamily="34" charset="0"/>
+                          <a:ea typeface="Malgun Gothic" pitchFamily="34" charset="-122"/>
+                          <a:cs typeface="Malgun Gothic" pitchFamily="34" charset="-120"/>
+                        </a:rPr>
+                        <a:t>수집품</a:t>
+                      </a:r>
+                      <a:r>
+                        <a:rPr lang="en-US" altLang="ko-KR" sz="1100" dirty="0">
+                          <a:solidFill>
+                            <a:srgbClr val="2B2118"/>
+                          </a:solidFill>
+                          <a:latin typeface="Malgun Gothic" pitchFamily="34" charset="0"/>
+                          <a:ea typeface="Malgun Gothic" pitchFamily="34" charset="-122"/>
+                          <a:cs typeface="Malgun Gothic" pitchFamily="34" charset="-120"/>
+                        </a:rPr>
+                        <a:t>(</a:t>
+                      </a:r>
+                      <a:r>
+                        <a:rPr lang="ko-KR" altLang="en-US" sz="1100" dirty="0">
+                          <a:solidFill>
+                            <a:srgbClr val="2B2118"/>
+                          </a:solidFill>
+                          <a:latin typeface="Malgun Gothic" pitchFamily="34" charset="0"/>
+                          <a:ea typeface="Malgun Gothic" pitchFamily="34" charset="-122"/>
+                          <a:cs typeface="Malgun Gothic" pitchFamily="34" charset="-120"/>
+                        </a:rPr>
+                        <a:t>코인</a:t>
+                      </a:r>
+                      <a:r>
+                        <a:rPr lang="en-US" altLang="ko-KR" sz="1100" dirty="0">
+                          <a:solidFill>
+                            <a:srgbClr val="2B2118"/>
+                          </a:solidFill>
+                          <a:latin typeface="Malgun Gothic" pitchFamily="34" charset="0"/>
+                          <a:ea typeface="Malgun Gothic" pitchFamily="34" charset="-122"/>
+                          <a:cs typeface="Malgun Gothic" pitchFamily="34" charset="-120"/>
+                        </a:rPr>
+                        <a:t>)</a:t>
                       </a:r>
                       <a:endParaRPr lang="en-US" sz="1100" dirty="0">
                         <a:latin typeface="Malgun Gothic" charset="0"/>
@@ -6782,7 +7090,18 @@
                           <a:ea typeface="Malgun Gothic" pitchFamily="34" charset="-122"/>
                           <a:cs typeface="Malgun Gothic" pitchFamily="34" charset="-120"/>
                         </a:rPr>
-                        <a:t>도착 · 별</a:t>
+                        <a:t>도착 · </a:t>
+                      </a:r>
+                      <a:r>
+                        <a:rPr lang="ko-KR" altLang="en-US" sz="1100" dirty="0">
+                          <a:solidFill>
+                            <a:srgbClr val="2B2118"/>
+                          </a:solidFill>
+                          <a:latin typeface="Malgun Gothic" pitchFamily="34" charset="0"/>
+                          <a:ea typeface="Malgun Gothic" pitchFamily="34" charset="-122"/>
+                          <a:cs typeface="Malgun Gothic" pitchFamily="34" charset="-120"/>
+                        </a:rPr>
+                        <a:t>도달 거리</a:t>
                       </a:r>
                       <a:endParaRPr lang="en-US" sz="1100" dirty="0">
                         <a:latin typeface="Malgun Gothic" charset="0"/>
@@ -6842,7 +7161,7 @@
                         <a:buNone/>
                       </a:pPr>
                       <a:r>
-                        <a:rPr lang="en-US" sz="1100" dirty="0">
+                        <a:rPr lang="en-US" sz="1100" dirty="0" err="1">
                           <a:solidFill>
                             <a:srgbClr val="2B2118"/>
                           </a:solidFill>
@@ -6851,6 +7170,94 @@
                           <a:cs typeface="Malgun Gothic" pitchFamily="34" charset="-120"/>
                         </a:rPr>
                         <a:t>도착</a:t>
+                      </a:r>
+                      <a:r>
+                        <a:rPr lang="en-US" altLang="ko-KR" sz="1100" dirty="0">
+                          <a:solidFill>
+                            <a:srgbClr val="2B2118"/>
+                          </a:solidFill>
+                          <a:latin typeface="Malgun Gothic" pitchFamily="34" charset="0"/>
+                          <a:ea typeface="Malgun Gothic" pitchFamily="34" charset="-122"/>
+                          <a:cs typeface="Malgun Gothic" pitchFamily="34" charset="-120"/>
+                        </a:rPr>
+                        <a:t> · </a:t>
+                      </a:r>
+                      <a:r>
+                        <a:rPr lang="ko-KR" altLang="en-US" sz="1100" dirty="0">
+                          <a:solidFill>
+                            <a:srgbClr val="2B2118"/>
+                          </a:solidFill>
+                          <a:latin typeface="Malgun Gothic" pitchFamily="34" charset="0"/>
+                          <a:ea typeface="Malgun Gothic" pitchFamily="34" charset="-122"/>
+                          <a:cs typeface="Malgun Gothic" pitchFamily="34" charset="-120"/>
+                        </a:rPr>
+                        <a:t>수집품</a:t>
+                      </a:r>
+                      <a:r>
+                        <a:rPr lang="en-US" altLang="ko-KR" sz="1100" dirty="0">
+                          <a:solidFill>
+                            <a:srgbClr val="2B2118"/>
+                          </a:solidFill>
+                          <a:latin typeface="Malgun Gothic" pitchFamily="34" charset="0"/>
+                          <a:ea typeface="Malgun Gothic" pitchFamily="34" charset="-122"/>
+                          <a:cs typeface="Malgun Gothic" pitchFamily="34" charset="-120"/>
+                        </a:rPr>
+                        <a:t>(</a:t>
+                      </a:r>
+                      <a:r>
+                        <a:rPr lang="ko-KR" altLang="en-US" sz="1100" dirty="0">
+                          <a:solidFill>
+                            <a:srgbClr val="2B2118"/>
+                          </a:solidFill>
+                          <a:latin typeface="Malgun Gothic" pitchFamily="34" charset="0"/>
+                          <a:ea typeface="Malgun Gothic" pitchFamily="34" charset="-122"/>
+                          <a:cs typeface="Malgun Gothic" pitchFamily="34" charset="-120"/>
+                        </a:rPr>
+                        <a:t>검은색 구</a:t>
+                      </a:r>
+                      <a:r>
+                        <a:rPr lang="en-US" altLang="ko-KR" sz="1100" dirty="0">
+                          <a:solidFill>
+                            <a:srgbClr val="2B2118"/>
+                          </a:solidFill>
+                          <a:latin typeface="Malgun Gothic" pitchFamily="34" charset="0"/>
+                          <a:ea typeface="Malgun Gothic" pitchFamily="34" charset="-122"/>
+                          <a:cs typeface="Malgun Gothic" pitchFamily="34" charset="-120"/>
+                        </a:rPr>
+                        <a:t>)</a:t>
+                      </a:r>
+                      <a:r>
+                        <a:rPr lang="ko-KR" altLang="en-US" sz="1100" dirty="0">
+                          <a:solidFill>
+                            <a:srgbClr val="2B2118"/>
+                          </a:solidFill>
+                          <a:latin typeface="Malgun Gothic" pitchFamily="34" charset="0"/>
+                          <a:ea typeface="Malgun Gothic" pitchFamily="34" charset="-122"/>
+                          <a:cs typeface="Malgun Gothic" pitchFamily="34" charset="-120"/>
+                        </a:rPr>
+                        <a:t> </a:t>
+                      </a:r>
+                      <a:r>
+                        <a:rPr lang="en-US" altLang="ko-KR" sz="1100" dirty="0">
+                          <a:solidFill>
+                            <a:srgbClr val="2B2118"/>
+                          </a:solidFill>
+                          <a:latin typeface="Malgun Gothic" pitchFamily="34" charset="0"/>
+                          <a:ea typeface="Malgun Gothic" pitchFamily="34" charset="-122"/>
+                          <a:cs typeface="Malgun Gothic" pitchFamily="34" charset="-120"/>
+                        </a:rPr>
+                        <a:t>· </a:t>
+                      </a:r>
+                      <a:r>
+                        <a:rPr lang="ko-KR" altLang="en-US" sz="1100" dirty="0">
+                          <a:solidFill>
+                            <a:srgbClr val="2B2118"/>
+                          </a:solidFill>
+                          <a:latin typeface="Malgun Gothic" pitchFamily="34" charset="0"/>
+                          <a:ea typeface="Malgun Gothic" pitchFamily="34" charset="-122"/>
+                          <a:cs typeface="Malgun Gothic" pitchFamily="34" charset="-120"/>
+                        </a:rPr>
+                        <a:t>시간</a:t>
                       </a:r>
                       <a:endParaRPr lang="en-US" sz="1100" dirty="0">
                         <a:latin typeface="Malgun Gothic" charset="0"/>

--- a/스톱앤스케치_제안서.pptx
+++ b/스톱앤스케치_제안서.pptx
@@ -5138,7 +5138,7 @@
           <p:nvPr>
             <p:extLst>
               <p:ext uri="{D42A27DB-BD31-4B8C-83A1-F6EECF244321}">
-                <p14:modId xmlns:p14="http://schemas.microsoft.com/office/powerpoint/2010/main" val="494161014"/>
+                <p14:modId xmlns:p14="http://schemas.microsoft.com/office/powerpoint/2010/main" val="3516679667"/>
               </p:ext>
             </p:extLst>
           </p:nvPr>
@@ -7317,6 +7317,39 @@
                         <a:buNone/>
                       </a:pPr>
                       <a:r>
+                        <a:rPr lang="ko-KR" altLang="en-US" sz="1100" b="1" dirty="0">
+                          <a:solidFill>
+                            <a:srgbClr val="2B2118"/>
+                          </a:solidFill>
+                          <a:latin typeface="Malgun Gothic" pitchFamily="34" charset="0"/>
+                          <a:ea typeface="Malgun Gothic" pitchFamily="34" charset="-122"/>
+                          <a:cs typeface="Malgun Gothic" pitchFamily="34" charset="-120"/>
+                        </a:rPr>
+                        <a:t>도착 </a:t>
+                      </a:r>
+                      <a:r>
+                        <a:rPr lang="en-US" altLang="ko-KR" sz="1100" dirty="0">
+                          <a:solidFill>
+                            <a:srgbClr val="2B2118"/>
+                          </a:solidFill>
+                          <a:latin typeface="Malgun Gothic" pitchFamily="34" charset="0"/>
+                          <a:ea typeface="Malgun Gothic" pitchFamily="34" charset="-122"/>
+                          <a:cs typeface="Malgun Gothic" pitchFamily="34" charset="-120"/>
+                        </a:rPr>
+                        <a:t>· </a:t>
+                      </a:r>
+                      <a:r>
+                        <a:rPr lang="ko-KR" altLang="en-US" sz="1100" b="1" dirty="0">
+                          <a:solidFill>
+                            <a:srgbClr val="2B2118"/>
+                          </a:solidFill>
+                          <a:latin typeface="Malgun Gothic" pitchFamily="34" charset="0"/>
+                          <a:ea typeface="Malgun Gothic" pitchFamily="34" charset="-122"/>
+                          <a:cs typeface="Malgun Gothic" pitchFamily="34" charset="-120"/>
+                        </a:rPr>
+                        <a:t>물방울 수</a:t>
+                      </a:r>
+                      <a:r>
                         <a:rPr lang="en-US" sz="1100" b="1" dirty="0">
                           <a:solidFill>
                             <a:srgbClr val="2B2118"/>
@@ -7325,7 +7358,7 @@
                           <a:ea typeface="Malgun Gothic" pitchFamily="34" charset="-122"/>
                           <a:cs typeface="Malgun Gothic" pitchFamily="34" charset="-120"/>
                         </a:rPr>
-                        <a:t>데려간 비율만큼 잉크병이 맑아짐 (정화 %) · 별</a:t>
+                        <a:t> · 별</a:t>
                       </a:r>
                       <a:endParaRPr lang="en-US" sz="1100" dirty="0">
                         <a:latin typeface="Malgun Gothic" charset="0"/>
@@ -7421,7 +7454,7 @@
         </p:nvSpPr>
         <p:spPr>
           <a:xfrm>
-            <a:off x="822960" y="4709160"/>
+            <a:off x="822960" y="4758855"/>
             <a:ext cx="2743200" cy="274320"/>
           </a:xfrm>
           <a:prstGeom prst="rect">
@@ -7438,7 +7471,7 @@
               <a:buNone/>
             </a:pPr>
             <a:r>
-              <a:rPr lang="en-US" sz="1200" b="1" dirty="0">
+              <a:rPr lang="en-US" sz="1200" b="1" dirty="0" err="1">
                 <a:solidFill>
                   <a:srgbClr val="1F6FE0"/>
                 </a:solidFill>
@@ -7446,7 +7479,7 @@
                 <a:ea typeface="Malgun Gothic" pitchFamily="34" charset="-122"/>
                 <a:cs typeface="Malgun Gothic" pitchFamily="34" charset="-120"/>
               </a:rPr>
-              <a:t>차별성의 핵심</a:t>
+              <a:t>차별성</a:t>
             </a:r>
             <a:endParaRPr lang="en-US" sz="1200" dirty="0"/>
           </a:p>
@@ -7485,7 +7518,40 @@
                 <a:ea typeface="Malgun Gothic" pitchFamily="34" charset="-122"/>
                 <a:cs typeface="Malgun Gothic" pitchFamily="34" charset="-120"/>
               </a:rPr>
-              <a:t>"그린 대로 움직인다"는 익숙한 재미 위에 </a:t>
+              <a:t>"그린 대로 움직인다"는 익숙한 재미 </a:t>
+            </a:r>
+            <a:r>
+              <a:rPr lang="en-US" sz="1400" dirty="0" err="1">
+                <a:solidFill>
+                  <a:srgbClr val="2B2118"/>
+                </a:solidFill>
+                <a:latin typeface="Malgun Gothic" pitchFamily="34" charset="0"/>
+                <a:ea typeface="Malgun Gothic" pitchFamily="34" charset="-122"/>
+                <a:cs typeface="Malgun Gothic" pitchFamily="34" charset="-120"/>
+              </a:rPr>
+              <a:t>위에</a:t>
+            </a:r>
+            <a:r>
+              <a:rPr lang="en-US" sz="1400" dirty="0">
+                <a:solidFill>
+                  <a:srgbClr val="2B2118"/>
+                </a:solidFill>
+                <a:latin typeface="Malgun Gothic" pitchFamily="34" charset="0"/>
+                <a:ea typeface="Malgun Gothic" pitchFamily="34" charset="-122"/>
+                <a:cs typeface="Malgun Gothic" pitchFamily="34" charset="-120"/>
+              </a:rPr>
+              <a:t> </a:t>
+            </a:r>
+            <a:r>
+              <a:rPr lang="en-US" sz="1400" b="1" dirty="0" err="1">
+                <a:solidFill>
+                  <a:srgbClr val="2B2118"/>
+                </a:solidFill>
+                <a:latin typeface="Malgun Gothic" pitchFamily="34" charset="0"/>
+                <a:ea typeface="Malgun Gothic" pitchFamily="34" charset="-122"/>
+                <a:cs typeface="Malgun Gothic" pitchFamily="34" charset="-120"/>
+              </a:rPr>
+              <a:t>완전히</a:t>
             </a:r>
             <a:r>
               <a:rPr lang="en-US" sz="1400" b="1" dirty="0">
@@ -7496,7 +7562,29 @@
                 <a:ea typeface="Malgun Gothic" pitchFamily="34" charset="-122"/>
                 <a:cs typeface="Malgun Gothic" pitchFamily="34" charset="-120"/>
               </a:rPr>
-              <a:t>① 완전히 멈출 수 있는 횟수</a:t>
+              <a:t> 멈출 수 있는 </a:t>
+            </a:r>
+            <a:r>
+              <a:rPr lang="en-US" sz="1400" b="1" dirty="0" err="1">
+                <a:solidFill>
+                  <a:srgbClr val="2B2118"/>
+                </a:solidFill>
+                <a:latin typeface="Malgun Gothic" pitchFamily="34" charset="0"/>
+                <a:ea typeface="Malgun Gothic" pitchFamily="34" charset="-122"/>
+                <a:cs typeface="Malgun Gothic" pitchFamily="34" charset="-120"/>
+              </a:rPr>
+              <a:t>횟수</a:t>
+            </a:r>
+            <a:r>
+              <a:rPr lang="en-US" sz="1400" dirty="0" err="1">
+                <a:solidFill>
+                  <a:srgbClr val="2B2118"/>
+                </a:solidFill>
+                <a:latin typeface="Malgun Gothic" pitchFamily="34" charset="0"/>
+                <a:ea typeface="Malgun Gothic" pitchFamily="34" charset="-122"/>
+                <a:cs typeface="Malgun Gothic" pitchFamily="34" charset="-120"/>
+              </a:rPr>
+              <a:t>와</a:t>
             </a:r>
             <a:r>
               <a:rPr lang="en-US" sz="1400" dirty="0">
@@ -7507,7 +7595,18 @@
                 <a:ea typeface="Malgun Gothic" pitchFamily="34" charset="-122"/>
                 <a:cs typeface="Malgun Gothic" pitchFamily="34" charset="-120"/>
               </a:rPr>
-              <a:t>와 </a:t>
+              <a:t> </a:t>
+            </a:r>
+            <a:r>
+              <a:rPr lang="en-US" sz="1400" b="1" dirty="0" err="1">
+                <a:solidFill>
+                  <a:srgbClr val="2B2118"/>
+                </a:solidFill>
+                <a:latin typeface="Malgun Gothic" pitchFamily="34" charset="0"/>
+                <a:ea typeface="Malgun Gothic" pitchFamily="34" charset="-122"/>
+                <a:cs typeface="Malgun Gothic" pitchFamily="34" charset="-120"/>
+              </a:rPr>
+              <a:t>색마다</a:t>
             </a:r>
             <a:r>
               <a:rPr lang="en-US" sz="1400" b="1" dirty="0">
@@ -7518,7 +7617,7 @@
                 <a:ea typeface="Malgun Gothic" pitchFamily="34" charset="-122"/>
                 <a:cs typeface="Malgun Gothic" pitchFamily="34" charset="-120"/>
               </a:rPr>
-              <a:t>② 색마다 다른 물리 성질</a:t>
+              <a:t> 다른 물리 성질</a:t>
             </a:r>
             <a:r>
               <a:rPr lang="en-US" sz="1400" dirty="0">
@@ -7529,7 +7628,40 @@
                 <a:ea typeface="Malgun Gothic" pitchFamily="34" charset="-122"/>
                 <a:cs typeface="Malgun Gothic" pitchFamily="34" charset="-120"/>
               </a:rPr>
-              <a:t>을 얹고, 한 마리가 아니라 </a:t>
+              <a:t>을 얹고, 한 마리가 </a:t>
+            </a:r>
+            <a:r>
+              <a:rPr lang="en-US" sz="1400" dirty="0" err="1">
+                <a:solidFill>
+                  <a:srgbClr val="2B2118"/>
+                </a:solidFill>
+                <a:latin typeface="Malgun Gothic" pitchFamily="34" charset="0"/>
+                <a:ea typeface="Malgun Gothic" pitchFamily="34" charset="-122"/>
+                <a:cs typeface="Malgun Gothic" pitchFamily="34" charset="-120"/>
+              </a:rPr>
+              <a:t>아니라</a:t>
+            </a:r>
+            <a:r>
+              <a:rPr lang="en-US" sz="1400" dirty="0">
+                <a:solidFill>
+                  <a:srgbClr val="2B2118"/>
+                </a:solidFill>
+                <a:latin typeface="Malgun Gothic" pitchFamily="34" charset="0"/>
+                <a:ea typeface="Malgun Gothic" pitchFamily="34" charset="-122"/>
+                <a:cs typeface="Malgun Gothic" pitchFamily="34" charset="-120"/>
+              </a:rPr>
+              <a:t> </a:t>
+            </a:r>
+            <a:r>
+              <a:rPr lang="en-US" sz="1400" b="1" dirty="0" err="1">
+                <a:solidFill>
+                  <a:srgbClr val="2B2118"/>
+                </a:solidFill>
+                <a:latin typeface="Malgun Gothic" pitchFamily="34" charset="0"/>
+                <a:ea typeface="Malgun Gothic" pitchFamily="34" charset="-122"/>
+                <a:cs typeface="Malgun Gothic" pitchFamily="34" charset="-120"/>
+              </a:rPr>
+              <a:t>따라오는</a:t>
             </a:r>
             <a:r>
               <a:rPr lang="en-US" sz="1400" b="1" dirty="0">
@@ -7540,7 +7672,18 @@
                 <a:ea typeface="Malgun Gothic" pitchFamily="34" charset="-122"/>
                 <a:cs typeface="Malgun Gothic" pitchFamily="34" charset="-120"/>
               </a:rPr>
-              <a:t>③ 따라오는 무리</a:t>
+              <a:t> </a:t>
+            </a:r>
+            <a:r>
+              <a:rPr lang="ko-KR" altLang="en-US" sz="1400" b="1" dirty="0">
+                <a:solidFill>
+                  <a:srgbClr val="2B2118"/>
+                </a:solidFill>
+                <a:latin typeface="Malgun Gothic" pitchFamily="34" charset="0"/>
+                <a:ea typeface="Malgun Gothic" pitchFamily="34" charset="-122"/>
+                <a:cs typeface="Malgun Gothic" pitchFamily="34" charset="-120"/>
+              </a:rPr>
+              <a:t>물방울들을</a:t>
             </a:r>
             <a:r>
               <a:rPr lang="en-US" sz="1400" dirty="0">
@@ -7551,7 +7694,139 @@
                 <a:ea typeface="Malgun Gothic" pitchFamily="34" charset="-122"/>
                 <a:cs typeface="Malgun Gothic" pitchFamily="34" charset="-120"/>
               </a:rPr>
-              <a:t>를 데려가게 했다. 멈춘 순간 어떤 색을 어디에 걸칠지가 곧 무리 전체의 운명이 된다.</a:t>
+              <a:t> </a:t>
+            </a:r>
+            <a:r>
+              <a:rPr lang="en-US" sz="1400" dirty="0" err="1">
+                <a:solidFill>
+                  <a:srgbClr val="2B2118"/>
+                </a:solidFill>
+                <a:latin typeface="Malgun Gothic" pitchFamily="34" charset="0"/>
+                <a:ea typeface="Malgun Gothic" pitchFamily="34" charset="-122"/>
+                <a:cs typeface="Malgun Gothic" pitchFamily="34" charset="-120"/>
+              </a:rPr>
+              <a:t>데려</a:t>
+            </a:r>
+            <a:r>
+              <a:rPr lang="ko-KR" altLang="en-US" sz="1400" dirty="0">
+                <a:solidFill>
+                  <a:srgbClr val="2B2118"/>
+                </a:solidFill>
+                <a:latin typeface="Malgun Gothic" pitchFamily="34" charset="0"/>
+                <a:ea typeface="Malgun Gothic" pitchFamily="34" charset="-122"/>
+                <a:cs typeface="Malgun Gothic" pitchFamily="34" charset="-120"/>
+              </a:rPr>
+              <a:t>감</a:t>
+            </a:r>
+            <a:r>
+              <a:rPr lang="en-US" sz="1400" dirty="0">
+                <a:solidFill>
+                  <a:srgbClr val="2B2118"/>
+                </a:solidFill>
+                <a:latin typeface="Malgun Gothic" pitchFamily="34" charset="0"/>
+                <a:ea typeface="Malgun Gothic" pitchFamily="34" charset="-122"/>
+                <a:cs typeface="Malgun Gothic" pitchFamily="34" charset="-120"/>
+              </a:rPr>
+              <a:t>. 멈춘 순간 어떤 색을 </a:t>
+            </a:r>
+            <a:r>
+              <a:rPr lang="en-US" sz="1400" dirty="0" err="1">
+                <a:solidFill>
+                  <a:srgbClr val="2B2118"/>
+                </a:solidFill>
+                <a:latin typeface="Malgun Gothic" pitchFamily="34" charset="0"/>
+                <a:ea typeface="Malgun Gothic" pitchFamily="34" charset="-122"/>
+                <a:cs typeface="Malgun Gothic" pitchFamily="34" charset="-120"/>
+              </a:rPr>
+              <a:t>어디에</a:t>
+            </a:r>
+            <a:r>
+              <a:rPr lang="en-US" sz="1400" dirty="0">
+                <a:solidFill>
+                  <a:srgbClr val="2B2118"/>
+                </a:solidFill>
+                <a:latin typeface="Malgun Gothic" pitchFamily="34" charset="0"/>
+                <a:ea typeface="Malgun Gothic" pitchFamily="34" charset="-122"/>
+                <a:cs typeface="Malgun Gothic" pitchFamily="34" charset="-120"/>
+              </a:rPr>
+              <a:t> </a:t>
+            </a:r>
+            <a:r>
+              <a:rPr lang="ko-KR" altLang="en-US" sz="1400" dirty="0">
+                <a:solidFill>
+                  <a:srgbClr val="2B2118"/>
+                </a:solidFill>
+                <a:latin typeface="Malgun Gothic" pitchFamily="34" charset="0"/>
+                <a:ea typeface="Malgun Gothic" pitchFamily="34" charset="-122"/>
+                <a:cs typeface="Malgun Gothic" pitchFamily="34" charset="-120"/>
+              </a:rPr>
+              <a:t>그릴</a:t>
+            </a:r>
+            <a:r>
+              <a:rPr lang="en-US" sz="1400" dirty="0" err="1">
+                <a:solidFill>
+                  <a:srgbClr val="2B2118"/>
+                </a:solidFill>
+                <a:latin typeface="Malgun Gothic" pitchFamily="34" charset="0"/>
+                <a:ea typeface="Malgun Gothic" pitchFamily="34" charset="-122"/>
+                <a:cs typeface="Malgun Gothic" pitchFamily="34" charset="-120"/>
+              </a:rPr>
+              <a:t>지가</a:t>
+            </a:r>
+            <a:r>
+              <a:rPr lang="en-US" sz="1400" dirty="0">
+                <a:solidFill>
+                  <a:srgbClr val="2B2118"/>
+                </a:solidFill>
+                <a:latin typeface="Malgun Gothic" pitchFamily="34" charset="0"/>
+                <a:ea typeface="Malgun Gothic" pitchFamily="34" charset="-122"/>
+                <a:cs typeface="Malgun Gothic" pitchFamily="34" charset="-120"/>
+              </a:rPr>
+              <a:t> 곧 </a:t>
+            </a:r>
+            <a:r>
+              <a:rPr lang="ko-KR" altLang="en-US" sz="1400" dirty="0">
+                <a:solidFill>
+                  <a:srgbClr val="2B2118"/>
+                </a:solidFill>
+                <a:latin typeface="Malgun Gothic" pitchFamily="34" charset="0"/>
+                <a:ea typeface="Malgun Gothic" pitchFamily="34" charset="-122"/>
+                <a:cs typeface="Malgun Gothic" pitchFamily="34" charset="-120"/>
+              </a:rPr>
+              <a:t>물방울들의</a:t>
+            </a:r>
+            <a:r>
+              <a:rPr lang="en-US" sz="1400" dirty="0">
+                <a:solidFill>
+                  <a:srgbClr val="2B2118"/>
+                </a:solidFill>
+                <a:latin typeface="Malgun Gothic" pitchFamily="34" charset="0"/>
+                <a:ea typeface="Malgun Gothic" pitchFamily="34" charset="-122"/>
+                <a:cs typeface="Malgun Gothic" pitchFamily="34" charset="-120"/>
+              </a:rPr>
+              <a:t> </a:t>
+            </a:r>
+            <a:r>
+              <a:rPr lang="en-US" sz="1400" dirty="0" err="1">
+                <a:solidFill>
+                  <a:srgbClr val="2B2118"/>
+                </a:solidFill>
+                <a:latin typeface="Malgun Gothic" pitchFamily="34" charset="0"/>
+                <a:ea typeface="Malgun Gothic" pitchFamily="34" charset="-122"/>
+                <a:cs typeface="Malgun Gothic" pitchFamily="34" charset="-120"/>
+              </a:rPr>
+              <a:t>운명이</a:t>
+            </a:r>
+            <a:r>
+              <a:rPr lang="en-US" sz="1400" dirty="0">
+                <a:solidFill>
+                  <a:srgbClr val="2B2118"/>
+                </a:solidFill>
+                <a:latin typeface="Malgun Gothic" pitchFamily="34" charset="0"/>
+                <a:ea typeface="Malgun Gothic" pitchFamily="34" charset="-122"/>
+                <a:cs typeface="Malgun Gothic" pitchFamily="34" charset="-120"/>
+              </a:rPr>
+              <a:t> 된다.</a:t>
             </a:r>
             <a:endParaRPr lang="en-US" sz="1400" dirty="0"/>
           </a:p>
@@ -7659,7 +7934,7 @@
               <a:buNone/>
             </a:pPr>
             <a:r>
-              <a:rPr lang="en-US" sz="2800" b="1" dirty="0">
+              <a:rPr lang="en-US" sz="2800" b="1" dirty="0" err="1">
                 <a:solidFill>
                   <a:srgbClr val="2B2118"/>
                 </a:solidFill>
@@ -7667,7 +7942,51 @@
                 <a:ea typeface="Batang" pitchFamily="34" charset="-122"/>
                 <a:cs typeface="Batang" pitchFamily="34" charset="-120"/>
               </a:rPr>
-              <a:t>시장: 그린 선이 물리로 움직이는 게임은 꾸준히 팔렸다</a:t>
+              <a:t>시장</a:t>
+            </a:r>
+            <a:r>
+              <a:rPr lang="en-US" sz="2800" b="1" dirty="0">
+                <a:solidFill>
+                  <a:srgbClr val="2B2118"/>
+                </a:solidFill>
+                <a:latin typeface="Batang" pitchFamily="34" charset="0"/>
+                <a:ea typeface="Batang" pitchFamily="34" charset="-122"/>
+                <a:cs typeface="Batang" pitchFamily="34" charset="-120"/>
+              </a:rPr>
+              <a:t> : </a:t>
+            </a:r>
+            <a:r>
+              <a:rPr lang="ko-KR" altLang="en-US" sz="2800" b="1" dirty="0">
+                <a:solidFill>
+                  <a:srgbClr val="2B2118"/>
+                </a:solidFill>
+                <a:latin typeface="Batang" pitchFamily="34" charset="0"/>
+                <a:ea typeface="Batang" pitchFamily="34" charset="-122"/>
+                <a:cs typeface="Batang" pitchFamily="34" charset="-120"/>
+              </a:rPr>
+              <a:t>선을 그리고 </a:t>
+            </a:r>
+            <a:r>
+              <a:rPr lang="en-US" sz="2800" b="1" dirty="0" err="1">
+                <a:solidFill>
+                  <a:srgbClr val="2B2118"/>
+                </a:solidFill>
+                <a:latin typeface="Batang" pitchFamily="34" charset="0"/>
+                <a:ea typeface="Batang" pitchFamily="34" charset="-122"/>
+                <a:cs typeface="Batang" pitchFamily="34" charset="-120"/>
+              </a:rPr>
+              <a:t>물리로</a:t>
+            </a:r>
+            <a:r>
+              <a:rPr lang="en-US" sz="2800" b="1" dirty="0">
+                <a:solidFill>
+                  <a:srgbClr val="2B2118"/>
+                </a:solidFill>
+                <a:latin typeface="Batang" pitchFamily="34" charset="0"/>
+                <a:ea typeface="Batang" pitchFamily="34" charset="-122"/>
+                <a:cs typeface="Batang" pitchFamily="34" charset="-120"/>
+              </a:rPr>
+              <a:t> 움직이는 게임은 꾸준히 팔렸다</a:t>
             </a:r>
             <a:endParaRPr lang="en-US" sz="2800" dirty="0"/>
           </a:p>
@@ -8301,15 +8620,14 @@
               <a:buNone/>
             </a:pPr>
             <a:r>
-              <a:rPr lang="en-US" sz="1200" b="1" dirty="0">
+              <a:rPr lang="ko-KR" altLang="en-US" sz="1200" b="1" dirty="0">
                 <a:solidFill>
                   <a:srgbClr val="1F6FE0"/>
                 </a:solidFill>
                 <a:latin typeface="Malgun Gothic" pitchFamily="34" charset="0"/>
                 <a:ea typeface="Malgun Gothic" pitchFamily="34" charset="-122"/>
-                <a:cs typeface="Malgun Gothic" pitchFamily="34" charset="-120"/>
-              </a:rPr>
-              <a:t>우리 위치</a:t>
+              </a:rPr>
+              <a:t>전략</a:t>
             </a:r>
             <a:endParaRPr lang="en-US" sz="1200" dirty="0"/>
           </a:p>
@@ -8457,7 +8775,51 @@
                 <a:ea typeface="Malgun Gothic" pitchFamily="34" charset="-122"/>
                 <a:cs typeface="Malgun Gothic" pitchFamily="34" charset="-120"/>
               </a:rPr>
-              <a:t>큰 성과는 2005~2012년 작품과 닌텐도 IP·모바일 무료 시장의 것</a:t>
+              <a:t>큰 성과는 2005~2012년 작품과 닌텐도 </a:t>
+            </a:r>
+            <a:r>
+              <a:rPr lang="en-US" sz="1300" dirty="0" err="1">
+                <a:solidFill>
+                  <a:srgbClr val="2B2118"/>
+                </a:solidFill>
+                <a:latin typeface="Malgun Gothic" pitchFamily="34" charset="0"/>
+                <a:ea typeface="Malgun Gothic" pitchFamily="34" charset="-122"/>
+                <a:cs typeface="Malgun Gothic" pitchFamily="34" charset="-120"/>
+              </a:rPr>
+              <a:t>IP·모바일</a:t>
+            </a:r>
+            <a:r>
+              <a:rPr lang="en-US" sz="1300" dirty="0">
+                <a:solidFill>
+                  <a:srgbClr val="2B2118"/>
+                </a:solidFill>
+                <a:latin typeface="Malgun Gothic" pitchFamily="34" charset="0"/>
+                <a:ea typeface="Malgun Gothic" pitchFamily="34" charset="-122"/>
+                <a:cs typeface="Malgun Gothic" pitchFamily="34" charset="-120"/>
+              </a:rPr>
+              <a:t> </a:t>
+            </a:r>
+            <a:r>
+              <a:rPr lang="en-US" sz="1300" dirty="0" err="1">
+                <a:solidFill>
+                  <a:srgbClr val="2B2118"/>
+                </a:solidFill>
+                <a:latin typeface="Malgun Gothic" pitchFamily="34" charset="0"/>
+                <a:ea typeface="Malgun Gothic" pitchFamily="34" charset="-122"/>
+                <a:cs typeface="Malgun Gothic" pitchFamily="34" charset="-120"/>
+              </a:rPr>
+              <a:t>시장의</a:t>
+            </a:r>
+            <a:r>
+              <a:rPr lang="en-US" sz="1300" dirty="0">
+                <a:solidFill>
+                  <a:srgbClr val="2B2118"/>
+                </a:solidFill>
+                <a:latin typeface="Malgun Gothic" pitchFamily="34" charset="0"/>
+                <a:ea typeface="Malgun Gothic" pitchFamily="34" charset="-122"/>
+                <a:cs typeface="Malgun Gothic" pitchFamily="34" charset="-120"/>
+              </a:rPr>
+              <a:t> 것</a:t>
             </a:r>
             <a:endParaRPr lang="en-US" sz="1300" dirty="0"/>
           </a:p>
@@ -8478,7 +8840,51 @@
                 <a:ea typeface="Malgun Gothic" pitchFamily="34" charset="-122"/>
                 <a:cs typeface="Malgun Gothic" pitchFamily="34" charset="-120"/>
               </a:rPr>
-              <a:t>최근 PC·웹 신작(Draw · Inkrunner · Lineguard)은 평가는 좋지만 규모가 작거나 아직 모름</a:t>
+              <a:t>최근 PC·웹 신작(Draw · Inkrunner · Lineguard)은 평가는 좋지만 </a:t>
+            </a:r>
+            <a:r>
+              <a:rPr lang="en-US" sz="1300" dirty="0" err="1">
+                <a:solidFill>
+                  <a:srgbClr val="2B2118"/>
+                </a:solidFill>
+                <a:latin typeface="Malgun Gothic" pitchFamily="34" charset="0"/>
+                <a:ea typeface="Malgun Gothic" pitchFamily="34" charset="-122"/>
+                <a:cs typeface="Malgun Gothic" pitchFamily="34" charset="-120"/>
+              </a:rPr>
+              <a:t>규모가</a:t>
+            </a:r>
+            <a:r>
+              <a:rPr lang="en-US" sz="1300" dirty="0">
+                <a:solidFill>
+                  <a:srgbClr val="2B2118"/>
+                </a:solidFill>
+                <a:latin typeface="Malgun Gothic" pitchFamily="34" charset="0"/>
+                <a:ea typeface="Malgun Gothic" pitchFamily="34" charset="-122"/>
+                <a:cs typeface="Malgun Gothic" pitchFamily="34" charset="-120"/>
+              </a:rPr>
+              <a:t> 작</a:t>
+            </a:r>
+            <a:r>
+              <a:rPr lang="ko-KR" altLang="en-US" sz="1300" dirty="0">
+                <a:solidFill>
+                  <a:srgbClr val="2B2118"/>
+                </a:solidFill>
+                <a:latin typeface="Malgun Gothic" pitchFamily="34" charset="0"/>
+                <a:ea typeface="Malgun Gothic" pitchFamily="34" charset="-122"/>
+                <a:cs typeface="Malgun Gothic" pitchFamily="34" charset="-120"/>
+              </a:rPr>
+              <a:t>음</a:t>
+            </a:r>
+            <a:r>
+              <a:rPr lang="en-US" sz="1300" dirty="0">
+                <a:solidFill>
+                  <a:srgbClr val="2B2118"/>
+                </a:solidFill>
+                <a:latin typeface="Malgun Gothic" pitchFamily="34" charset="0"/>
+                <a:ea typeface="Malgun Gothic" pitchFamily="34" charset="-122"/>
+                <a:cs typeface="Malgun Gothic" pitchFamily="34" charset="-120"/>
+              </a:rPr>
+              <a:t> </a:t>
             </a:r>
             <a:endParaRPr lang="en-US" sz="1300" dirty="0"/>
           </a:p>
@@ -8491,6 +8897,28 @@
               <a:buChar char="•"/>
             </a:pPr>
             <a:r>
+              <a:rPr lang="en-US" sz="1300" dirty="0" err="1">
+                <a:solidFill>
+                  <a:srgbClr val="2B2118"/>
+                </a:solidFill>
+                <a:latin typeface="Malgun Gothic" pitchFamily="34" charset="0"/>
+                <a:ea typeface="Malgun Gothic" pitchFamily="34" charset="-122"/>
+                <a:cs typeface="Malgun Gothic" pitchFamily="34" charset="-120"/>
+              </a:rPr>
+              <a:t>최근작</a:t>
+            </a:r>
+            <a:r>
+              <a:rPr lang="ko-KR" altLang="en-US" sz="1300" dirty="0">
+                <a:solidFill>
+                  <a:srgbClr val="2B2118"/>
+                </a:solidFill>
+                <a:latin typeface="Malgun Gothic" pitchFamily="34" charset="0"/>
+                <a:ea typeface="Malgun Gothic" pitchFamily="34" charset="-122"/>
+                <a:cs typeface="Malgun Gothic" pitchFamily="34" charset="-120"/>
+              </a:rPr>
+              <a:t>들의</a:t>
+            </a:r>
+            <a:r>
               <a:rPr lang="en-US" sz="1300" dirty="0">
                 <a:solidFill>
                   <a:srgbClr val="2B2118"/>
@@ -8499,48 +8927,97 @@
                 <a:ea typeface="Malgun Gothic" pitchFamily="34" charset="-122"/>
                 <a:cs typeface="Malgun Gothic" pitchFamily="34" charset="-120"/>
               </a:rPr>
-              <a:t>최근작의 약점은 단조로움 → 스테이지마다 새 색·장치를 하나씩</a:t>
+              <a:t> </a:t>
+            </a:r>
+            <a:r>
+              <a:rPr lang="en-US" sz="1300" dirty="0" err="1">
+                <a:solidFill>
+                  <a:srgbClr val="2B2118"/>
+                </a:solidFill>
+                <a:latin typeface="Malgun Gothic" pitchFamily="34" charset="0"/>
+                <a:ea typeface="Malgun Gothic" pitchFamily="34" charset="-122"/>
+                <a:cs typeface="Malgun Gothic" pitchFamily="34" charset="-120"/>
+              </a:rPr>
+              <a:t>약점은</a:t>
+            </a:r>
+            <a:r>
+              <a:rPr lang="en-US" sz="1300" dirty="0">
+                <a:solidFill>
+                  <a:srgbClr val="2B2118"/>
+                </a:solidFill>
+                <a:latin typeface="Malgun Gothic" pitchFamily="34" charset="0"/>
+                <a:ea typeface="Malgun Gothic" pitchFamily="34" charset="-122"/>
+                <a:cs typeface="Malgun Gothic" pitchFamily="34" charset="-120"/>
+              </a:rPr>
+              <a:t> </a:t>
+            </a:r>
+            <a:r>
+              <a:rPr lang="en-US" sz="1300" dirty="0" err="1">
+                <a:solidFill>
+                  <a:srgbClr val="2B2118"/>
+                </a:solidFill>
+                <a:latin typeface="Malgun Gothic" pitchFamily="34" charset="0"/>
+                <a:ea typeface="Malgun Gothic" pitchFamily="34" charset="-122"/>
+                <a:cs typeface="Malgun Gothic" pitchFamily="34" charset="-120"/>
+              </a:rPr>
+              <a:t>단조로움</a:t>
+            </a:r>
+            <a:r>
+              <a:rPr lang="en-US" sz="1300" dirty="0">
+                <a:solidFill>
+                  <a:srgbClr val="2B2118"/>
+                </a:solidFill>
+                <a:latin typeface="Malgun Gothic" pitchFamily="34" charset="0"/>
+                <a:ea typeface="Malgun Gothic" pitchFamily="34" charset="-122"/>
+                <a:cs typeface="Malgun Gothic" pitchFamily="34" charset="-120"/>
+              </a:rPr>
+              <a:t> → </a:t>
+            </a:r>
+            <a:r>
+              <a:rPr lang="ko-KR" altLang="en-US" sz="1300" dirty="0">
+                <a:solidFill>
+                  <a:srgbClr val="2B2118"/>
+                </a:solidFill>
+                <a:latin typeface="Malgun Gothic" pitchFamily="34" charset="0"/>
+                <a:ea typeface="Malgun Gothic" pitchFamily="34" charset="-122"/>
+                <a:cs typeface="Malgun Gothic" pitchFamily="34" charset="-120"/>
+              </a:rPr>
+              <a:t>짧은 </a:t>
+            </a:r>
+            <a:r>
+              <a:rPr lang="en-US" sz="1300" dirty="0" err="1">
+                <a:solidFill>
+                  <a:srgbClr val="2B2118"/>
+                </a:solidFill>
+                <a:latin typeface="Malgun Gothic" pitchFamily="34" charset="0"/>
+                <a:ea typeface="Malgun Gothic" pitchFamily="34" charset="-122"/>
+                <a:cs typeface="Malgun Gothic" pitchFamily="34" charset="-120"/>
+              </a:rPr>
+              <a:t>스테이지마다</a:t>
+            </a:r>
+            <a:r>
+              <a:rPr lang="en-US" sz="1300" dirty="0">
+                <a:solidFill>
+                  <a:srgbClr val="2B2118"/>
+                </a:solidFill>
+                <a:latin typeface="Malgun Gothic" pitchFamily="34" charset="0"/>
+                <a:ea typeface="Malgun Gothic" pitchFamily="34" charset="-122"/>
+                <a:cs typeface="Malgun Gothic" pitchFamily="34" charset="-120"/>
+              </a:rPr>
+              <a:t> 새</a:t>
+            </a:r>
+            <a:r>
+              <a:rPr lang="ko-KR" altLang="en-US" sz="1300" dirty="0">
+                <a:solidFill>
+                  <a:srgbClr val="2B2118"/>
+                </a:solidFill>
+                <a:latin typeface="Malgun Gothic" pitchFamily="34" charset="0"/>
+                <a:ea typeface="Malgun Gothic" pitchFamily="34" charset="-122"/>
+                <a:cs typeface="Malgun Gothic" pitchFamily="34" charset="-120"/>
+              </a:rPr>
+              <a:t>로운 색과 장치들을 조합</a:t>
             </a:r>
             <a:endParaRPr lang="en-US" sz="1300" dirty="0"/>
-          </a:p>
-        </p:txBody>
-      </p:sp>
-      <p:sp>
-        <p:nvSpPr>
-          <p:cNvPr id="25" name="Text 23"/>
-          <p:cNvSpPr txBox="1"/>
-          <p:nvPr/>
-        </p:nvSpPr>
-        <p:spPr>
-          <a:xfrm>
-            <a:off x="548640" y="5760720"/>
-            <a:ext cx="5852160" cy="274320"/>
-          </a:xfrm>
-          <a:prstGeom prst="rect">
-            <a:avLst/>
-          </a:prstGeom>
-          <a:noFill/>
-          <a:ln/>
-        </p:spPr>
-        <p:txBody>
-          <a:bodyPr wrap="square" lIns="0" tIns="0" rIns="0" bIns="0" rtlCol="0" anchor="t"/>
-          <a:lstStyle/>
-          <a:p>
-            <a:pPr marL="0" indent="0">
-              <a:buNone/>
-            </a:pPr>
-            <a:r>
-              <a:rPr lang="en-US" sz="900" dirty="0">
-                <a:solidFill>
-                  <a:srgbClr val="7B6B57"/>
-                </a:solidFill>
-                <a:latin typeface="Malgun Gothic" pitchFamily="34" charset="0"/>
-                <a:ea typeface="Malgun Gothic" pitchFamily="34" charset="-122"/>
-                <a:cs typeface="Malgun Gothic" pitchFamily="34" charset="-120"/>
-              </a:rPr>
-              <a:t>판매량은 추정치가 섞여 있음 (조사 2026-10-19, 첨부 레퍼런스 성과 조사표)</a:t>
-            </a:r>
-            <a:endParaRPr lang="en-US" sz="900" dirty="0"/>
           </a:p>
         </p:txBody>
       </p:sp>
@@ -9515,7 +9992,7 @@
               <a:buNone/>
             </a:pPr>
             <a:r>
-              <a:rPr lang="en-US" sz="2800" b="1" dirty="0">
+              <a:rPr lang="ko-KR" altLang="en-US" sz="2800" b="1" dirty="0">
                 <a:solidFill>
                   <a:srgbClr val="2B2118"/>
                 </a:solidFill>
@@ -9523,7 +10000,7 @@
                 <a:ea typeface="Batang" pitchFamily="34" charset="-122"/>
                 <a:cs typeface="Batang" pitchFamily="34" charset="-120"/>
               </a:rPr>
-              <a:t>한 판의 흐름: 읽고, 멈춰 그리고, 지켜보고, 데려간다</a:t>
+              <a:t>진행 흐름</a:t>
             </a:r>
             <a:endParaRPr lang="en-US" sz="2800" dirty="0"/>
           </a:p>

--- a/스톱앤스케치_제안서.pptx
+++ b/스톱앤스케치_제안서.pptx
@@ -1329,7 +1329,7 @@
           </a:prstGeom>
           <a:extLst>
             <a:ext uri="{C572A759-6A51-4108-AA02-DFA0A04FC94B}">
-              <ma14:wrappingTextBoxFlag xmlns:ma14="http://schemas.microsoft.com/office/mac/drawingml/2011/main" xmlns="" val="0"/>
+              <ma14:wrappingTextBoxFlag xmlns="" xmlns:ma14="http://schemas.microsoft.com/office/mac/drawingml/2011/main" val="0"/>
             </a:ext>
           </a:extLst>
         </p:spPr>
@@ -1407,7 +1407,7 @@
           </a:prstGeom>
           <a:extLst>
             <a:ext uri="{C572A759-6A51-4108-AA02-DFA0A04FC94B}">
-              <ma14:wrappingTextBoxFlag xmlns:ma14="http://schemas.microsoft.com/office/mac/drawingml/2011/main" xmlns="" val="0"/>
+              <ma14:wrappingTextBoxFlag xmlns="" xmlns:ma14="http://schemas.microsoft.com/office/mac/drawingml/2011/main" val="0"/>
             </a:ext>
           </a:extLst>
         </p:spPr>
@@ -3128,7 +3128,7 @@
           </a:prstGeom>
           <a:extLst>
             <a:ext uri="{C572A759-6A51-4108-AA02-DFA0A04FC94B}">
-              <ma14:wrappingTextBoxFlag xmlns:ma14="http://schemas.microsoft.com/office/mac/drawingml/2011/main" xmlns="" val="0"/>
+              <ma14:wrappingTextBoxFlag xmlns="" xmlns:ma14="http://schemas.microsoft.com/office/mac/drawingml/2011/main" val="0"/>
             </a:ext>
           </a:extLst>
         </p:spPr>
@@ -3821,7 +3821,7 @@
           </a:prstGeom>
           <a:extLst>
             <a:ext uri="{C572A759-6A51-4108-AA02-DFA0A04FC94B}">
-              <ma14:wrappingTextBoxFlag xmlns:ma14="http://schemas.microsoft.com/office/mac/drawingml/2011/main" xmlns="" val="0"/>
+              <ma14:wrappingTextBoxFlag xmlns="" xmlns:ma14="http://schemas.microsoft.com/office/mac/drawingml/2011/main" val="0"/>
             </a:ext>
           </a:extLst>
         </p:spPr>
@@ -4024,7 +4024,7 @@
           <p:nvPr>
             <p:extLst>
               <p:ext uri="{D42A27DB-BD31-4B8C-83A1-F6EECF244321}">
-                <p14:modId xmlns:p14="http://schemas.microsoft.com/office/powerpoint/2010/main" val="3266759977"/>
+                <p14:modId xmlns:p14="http://schemas.microsoft.com/office/powerpoint/2010/main" val="3330955448"/>
               </p:ext>
             </p:extLst>
           </p:nvPr>
@@ -4271,6 +4271,17 @@
                         <a:buNone/>
                       </a:pPr>
                       <a:r>
+                        <a:rPr lang="en-US" sz="1200" dirty="0" err="1">
+                          <a:solidFill>
+                            <a:srgbClr val="2B2118"/>
+                          </a:solidFill>
+                          <a:latin typeface="Malgun Gothic" pitchFamily="34" charset="0"/>
+                          <a:ea typeface="Malgun Gothic" pitchFamily="34" charset="-122"/>
+                          <a:cs typeface="Malgun Gothic" pitchFamily="34" charset="-120"/>
+                        </a:rPr>
+                        <a:t>그림으로</a:t>
+                      </a:r>
+                      <a:r>
                         <a:rPr lang="en-US" sz="1200" dirty="0">
                           <a:solidFill>
                             <a:srgbClr val="2B2118"/>
@@ -4279,7 +4290,34 @@
                           <a:ea typeface="Malgun Gothic" pitchFamily="34" charset="-122"/>
                           <a:cs typeface="Malgun Gothic" pitchFamily="34" charset="-120"/>
                         </a:rPr>
-                        <a:t>그림으로만 길을 만든다. 물방울은 스스로 </a:t>
+                        <a:t> 길을 만든다. </a:t>
+                      </a:r>
+                    </a:p>
+                    <a:p>
+                      <a:pPr marL="0" indent="0">
+                        <a:buNone/>
+                      </a:pPr>
+                      <a:r>
+                        <a:rPr lang="en-US" sz="1200" dirty="0" err="1">
+                          <a:solidFill>
+                            <a:srgbClr val="2B2118"/>
+                          </a:solidFill>
+                          <a:latin typeface="Malgun Gothic" pitchFamily="34" charset="0"/>
+                          <a:ea typeface="Malgun Gothic" pitchFamily="34" charset="-122"/>
+                          <a:cs typeface="Malgun Gothic" pitchFamily="34" charset="-120"/>
+                        </a:rPr>
+                        <a:t>물방울은</a:t>
+                      </a:r>
+                      <a:r>
+                        <a:rPr lang="en-US" sz="1200" dirty="0">
+                          <a:solidFill>
+                            <a:srgbClr val="2B2118"/>
+                          </a:solidFill>
+                          <a:latin typeface="Malgun Gothic" pitchFamily="34" charset="0"/>
+                          <a:ea typeface="Malgun Gothic" pitchFamily="34" charset="-122"/>
+                          <a:cs typeface="Malgun Gothic" pitchFamily="34" charset="-120"/>
+                        </a:rPr>
+                        <a:t> 스스로 </a:t>
                       </a:r>
                       <a:r>
                         <a:rPr lang="en-US" sz="1200" dirty="0" err="1">
@@ -4335,6 +4373,17 @@
                           <a:cs typeface="Malgun Gothic" pitchFamily="34" charset="-120"/>
                         </a:rPr>
                         <a:t>도달하면 뒤로 돈다</a:t>
+                      </a:r>
+                      <a:r>
+                        <a:rPr lang="en-US" altLang="ko-KR" sz="1200" dirty="0">
+                          <a:solidFill>
+                            <a:srgbClr val="2B2118"/>
+                          </a:solidFill>
+                          <a:latin typeface="Malgun Gothic" pitchFamily="34" charset="0"/>
+                          <a:ea typeface="Malgun Gothic" pitchFamily="34" charset="-122"/>
+                          <a:cs typeface="Malgun Gothic" pitchFamily="34" charset="-120"/>
+                        </a:rPr>
+                        <a:t>.</a:t>
                       </a:r>
                       <a:endParaRPr lang="en-US" sz="1200" dirty="0">
                         <a:latin typeface="Malgun Gothic" charset="0"/>
@@ -4474,7 +4523,119 @@
                           <a:ea typeface="Malgun Gothic" pitchFamily="34" charset="-122"/>
                           <a:cs typeface="Malgun Gothic" pitchFamily="34" charset="-120"/>
                         </a:rPr>
-                        <a:t>주인공이 깨운 작은 물방울들을 최대한 많이 검은 잉크병에 데려가 정화한다</a:t>
+                        <a:t>주인공이 깨운 작은 물방울들을 </a:t>
+                      </a:r>
+                      <a:r>
+                        <a:rPr lang="en-US" sz="1200" dirty="0" err="1">
+                          <a:solidFill>
+                            <a:srgbClr val="2B2118"/>
+                          </a:solidFill>
+                          <a:latin typeface="Malgun Gothic" pitchFamily="34" charset="0"/>
+                          <a:ea typeface="Malgun Gothic" pitchFamily="34" charset="-122"/>
+                          <a:cs typeface="Malgun Gothic" pitchFamily="34" charset="-120"/>
+                        </a:rPr>
+                        <a:t>최대한</a:t>
+                      </a:r>
+                      <a:r>
+                        <a:rPr lang="en-US" sz="1200" dirty="0">
+                          <a:solidFill>
+                            <a:srgbClr val="2B2118"/>
+                          </a:solidFill>
+                          <a:latin typeface="Malgun Gothic" pitchFamily="34" charset="0"/>
+                          <a:ea typeface="Malgun Gothic" pitchFamily="34" charset="-122"/>
+                          <a:cs typeface="Malgun Gothic" pitchFamily="34" charset="-120"/>
+                        </a:rPr>
+                        <a:t> </a:t>
+                      </a:r>
+                      <a:r>
+                        <a:rPr lang="en-US" sz="1200" dirty="0" err="1">
+                          <a:solidFill>
+                            <a:srgbClr val="2B2118"/>
+                          </a:solidFill>
+                          <a:latin typeface="Malgun Gothic" pitchFamily="34" charset="0"/>
+                          <a:ea typeface="Malgun Gothic" pitchFamily="34" charset="-122"/>
+                          <a:cs typeface="Malgun Gothic" pitchFamily="34" charset="-120"/>
+                        </a:rPr>
+                        <a:t>많이</a:t>
+                      </a:r>
+                      <a:endParaRPr lang="en-US" sz="1200" dirty="0">
+                        <a:solidFill>
+                          <a:srgbClr val="2B2118"/>
+                        </a:solidFill>
+                        <a:latin typeface="Malgun Gothic" pitchFamily="34" charset="0"/>
+                        <a:ea typeface="Malgun Gothic" pitchFamily="34" charset="-122"/>
+                        <a:cs typeface="Malgun Gothic" pitchFamily="34" charset="-120"/>
+                      </a:endParaRPr>
+                    </a:p>
+                    <a:p>
+                      <a:pPr marL="0" indent="0">
+                        <a:buNone/>
+                      </a:pPr>
+                      <a:r>
+                        <a:rPr lang="en-US" sz="1200" dirty="0" err="1">
+                          <a:solidFill>
+                            <a:srgbClr val="2B2118"/>
+                          </a:solidFill>
+                          <a:latin typeface="Malgun Gothic" pitchFamily="34" charset="0"/>
+                          <a:ea typeface="Malgun Gothic" pitchFamily="34" charset="-122"/>
+                          <a:cs typeface="Malgun Gothic" pitchFamily="34" charset="-120"/>
+                        </a:rPr>
+                        <a:t>검은</a:t>
+                      </a:r>
+                      <a:r>
+                        <a:rPr lang="en-US" sz="1200" dirty="0">
+                          <a:solidFill>
+                            <a:srgbClr val="2B2118"/>
+                          </a:solidFill>
+                          <a:latin typeface="Malgun Gothic" pitchFamily="34" charset="0"/>
+                          <a:ea typeface="Malgun Gothic" pitchFamily="34" charset="-122"/>
+                          <a:cs typeface="Malgun Gothic" pitchFamily="34" charset="-120"/>
+                        </a:rPr>
+                        <a:t> 잉크병에 </a:t>
+                      </a:r>
+                      <a:r>
+                        <a:rPr lang="en-US" sz="1200" dirty="0" err="1">
+                          <a:solidFill>
+                            <a:srgbClr val="2B2118"/>
+                          </a:solidFill>
+                          <a:latin typeface="Malgun Gothic" pitchFamily="34" charset="0"/>
+                          <a:ea typeface="Malgun Gothic" pitchFamily="34" charset="-122"/>
+                          <a:cs typeface="Malgun Gothic" pitchFamily="34" charset="-120"/>
+                        </a:rPr>
+                        <a:t>데려가</a:t>
+                      </a:r>
+                      <a:r>
+                        <a:rPr lang="en-US" sz="1200" dirty="0">
+                          <a:solidFill>
+                            <a:srgbClr val="2B2118"/>
+                          </a:solidFill>
+                          <a:latin typeface="Malgun Gothic" pitchFamily="34" charset="0"/>
+                          <a:ea typeface="Malgun Gothic" pitchFamily="34" charset="-122"/>
+                          <a:cs typeface="Malgun Gothic" pitchFamily="34" charset="-120"/>
+                        </a:rPr>
+                        <a:t> </a:t>
+                      </a:r>
+                      <a:r>
+                        <a:rPr lang="en-US" sz="1200" dirty="0" err="1">
+                          <a:solidFill>
+                            <a:srgbClr val="2B2118"/>
+                          </a:solidFill>
+                          <a:latin typeface="Malgun Gothic" pitchFamily="34" charset="0"/>
+                          <a:ea typeface="Malgun Gothic" pitchFamily="34" charset="-122"/>
+                          <a:cs typeface="Malgun Gothic" pitchFamily="34" charset="-120"/>
+                        </a:rPr>
+                        <a:t>정화한다</a:t>
+                      </a:r>
+                      <a:r>
+                        <a:rPr lang="en-US" sz="1200" dirty="0">
+                          <a:solidFill>
+                            <a:srgbClr val="2B2118"/>
+                          </a:solidFill>
+                          <a:latin typeface="Malgun Gothic" pitchFamily="34" charset="0"/>
+                          <a:ea typeface="Malgun Gothic" pitchFamily="34" charset="-122"/>
+                          <a:cs typeface="Malgun Gothic" pitchFamily="34" charset="-120"/>
+                        </a:rPr>
+                        <a:t>.</a:t>
                       </a:r>
                       <a:endParaRPr lang="en-US" sz="1200" dirty="0">
                         <a:latin typeface="Malgun Gothic" charset="0"/>
@@ -4981,7 +5142,7 @@
           </a:prstGeom>
           <a:extLst>
             <a:ext uri="{C572A759-6A51-4108-AA02-DFA0A04FC94B}">
-              <ma14:wrappingTextBoxFlag xmlns:ma14="http://schemas.microsoft.com/office/mac/drawingml/2011/main" xmlns="" val="0"/>
+              <ma14:wrappingTextBoxFlag xmlns="" xmlns:ma14="http://schemas.microsoft.com/office/mac/drawingml/2011/main" val="0"/>
             </a:ext>
           </a:extLst>
         </p:spPr>
@@ -7852,7 +8013,7 @@
           </a:prstGeom>
           <a:extLst>
             <a:ext uri="{C572A759-6A51-4108-AA02-DFA0A04FC94B}">
-              <ma14:wrappingTextBoxFlag xmlns:ma14="http://schemas.microsoft.com/office/mac/drawingml/2011/main" xmlns="" val="0"/>
+              <ma14:wrappingTextBoxFlag xmlns="" xmlns:ma14="http://schemas.microsoft.com/office/mac/drawingml/2011/main" val="0"/>
             </a:ext>
           </a:extLst>
         </p:spPr>
@@ -9041,7 +9202,7 @@
           </a:prstGeom>
           <a:extLst>
             <a:ext uri="{C572A759-6A51-4108-AA02-DFA0A04FC94B}">
-              <ma14:wrappingTextBoxFlag xmlns:ma14="http://schemas.microsoft.com/office/mac/drawingml/2011/main" xmlns="" val="0"/>
+              <ma14:wrappingTextBoxFlag xmlns="" xmlns:ma14="http://schemas.microsoft.com/office/mac/drawingml/2011/main" val="0"/>
             </a:ext>
           </a:extLst>
         </p:spPr>
@@ -9300,7 +9461,29 @@
                 <a:ea typeface="Malgun Gothic" pitchFamily="34" charset="-122"/>
                 <a:cs typeface="Malgun Gothic" pitchFamily="34" charset="-120"/>
               </a:rPr>
-              <a:t>시간을 완전히 멈출 수 있는 횟수가 정해져 있다. 걸으며 그릴 곳과 멈춰서 설계할 곳을 고르는 것이 전략</a:t>
+              <a:t>시간을 완전히 멈출 수 있는 횟수가 정해져 있다. </a:t>
+            </a:r>
+            <a:r>
+              <a:rPr lang="ko-KR" altLang="en-US" sz="1400" dirty="0">
+                <a:solidFill>
+                  <a:srgbClr val="2B2118"/>
+                </a:solidFill>
+                <a:latin typeface="Malgun Gothic" pitchFamily="34" charset="0"/>
+                <a:ea typeface="Malgun Gothic" pitchFamily="34" charset="-122"/>
+                <a:cs typeface="Malgun Gothic" pitchFamily="34" charset="-120"/>
+              </a:rPr>
+              <a:t>진행하다 멈춰서 설계하는 전략</a:t>
+            </a:r>
+            <a:r>
+              <a:rPr lang="en-US" altLang="ko-KR" sz="1400" dirty="0">
+                <a:solidFill>
+                  <a:srgbClr val="2B2118"/>
+                </a:solidFill>
+                <a:latin typeface="Malgun Gothic" pitchFamily="34" charset="0"/>
+                <a:ea typeface="Malgun Gothic" pitchFamily="34" charset="-122"/>
+                <a:cs typeface="Malgun Gothic" pitchFamily="34" charset="-120"/>
+              </a:rPr>
+              <a:t>.</a:t>
             </a:r>
             <a:endParaRPr lang="en-US" sz="1400" dirty="0"/>
           </a:p>
@@ -9591,7 +9774,7 @@
               <a:buNone/>
             </a:pPr>
             <a:r>
-              <a:rPr lang="en-US" sz="1800" b="1" dirty="0">
+              <a:rPr lang="en-US" sz="1800" b="1" dirty="0" err="1">
                 <a:solidFill>
                   <a:srgbClr val="2B2118"/>
                 </a:solidFill>
@@ -9599,7 +9782,29 @@
                 <a:ea typeface="Batang" pitchFamily="34" charset="-122"/>
                 <a:cs typeface="Batang" pitchFamily="34" charset="-120"/>
               </a:rPr>
-              <a:t>그린 선이 진짜 물체</a:t>
+              <a:t>그린</a:t>
+            </a:r>
+            <a:r>
+              <a:rPr lang="en-US" sz="1800" b="1" dirty="0">
+                <a:solidFill>
+                  <a:srgbClr val="2B2118"/>
+                </a:solidFill>
+                <a:latin typeface="Batang" pitchFamily="34" charset="0"/>
+                <a:ea typeface="Batang" pitchFamily="34" charset="-122"/>
+                <a:cs typeface="Batang" pitchFamily="34" charset="-120"/>
+              </a:rPr>
+              <a:t> 선</a:t>
+            </a:r>
+            <a:r>
+              <a:rPr lang="ko-KR" altLang="en-US" sz="1800" b="1" dirty="0">
+                <a:solidFill>
+                  <a:srgbClr val="2B2118"/>
+                </a:solidFill>
+                <a:latin typeface="Batang" pitchFamily="34" charset="0"/>
+                <a:ea typeface="Batang" pitchFamily="34" charset="-122"/>
+                <a:cs typeface="Batang" pitchFamily="34" charset="-120"/>
+              </a:rPr>
+              <a:t>의 물리 반응</a:t>
             </a:r>
             <a:endParaRPr lang="en-US" sz="1800" dirty="0"/>
           </a:p>
@@ -9807,7 +10012,106 @@
                 <a:ea typeface="Malgun Gothic" pitchFamily="34" charset="-122"/>
                 <a:cs typeface="Malgun Gothic" pitchFamily="34" charset="-120"/>
               </a:rPr>
-              <a:t>주인공만 도착해도 클리어. 하지만 많이 데려갈수록 잉크병이 맑아진다. 함께 튕겨 오르는 장면이 보상</a:t>
+              <a:t>주인공만 </a:t>
+            </a:r>
+            <a:r>
+              <a:rPr lang="en-US" sz="1400" dirty="0" err="1">
+                <a:solidFill>
+                  <a:srgbClr val="2B2118"/>
+                </a:solidFill>
+                <a:latin typeface="Malgun Gothic" pitchFamily="34" charset="0"/>
+                <a:ea typeface="Malgun Gothic" pitchFamily="34" charset="-122"/>
+                <a:cs typeface="Malgun Gothic" pitchFamily="34" charset="-120"/>
+              </a:rPr>
+              <a:t>도착해도</a:t>
+            </a:r>
+            <a:r>
+              <a:rPr lang="en-US" sz="1400" dirty="0">
+                <a:solidFill>
+                  <a:srgbClr val="2B2118"/>
+                </a:solidFill>
+                <a:latin typeface="Malgun Gothic" pitchFamily="34" charset="0"/>
+                <a:ea typeface="Malgun Gothic" pitchFamily="34" charset="-122"/>
+                <a:cs typeface="Malgun Gothic" pitchFamily="34" charset="-120"/>
+              </a:rPr>
+              <a:t> </a:t>
+            </a:r>
+            <a:r>
+              <a:rPr lang="en-US" sz="1400" dirty="0" err="1">
+                <a:solidFill>
+                  <a:srgbClr val="2B2118"/>
+                </a:solidFill>
+                <a:latin typeface="Malgun Gothic" pitchFamily="34" charset="0"/>
+                <a:ea typeface="Malgun Gothic" pitchFamily="34" charset="-122"/>
+                <a:cs typeface="Malgun Gothic" pitchFamily="34" charset="-120"/>
+              </a:rPr>
+              <a:t>클리어</a:t>
+            </a:r>
+            <a:r>
+              <a:rPr lang="en-US" sz="1400" dirty="0">
+                <a:solidFill>
+                  <a:srgbClr val="2B2118"/>
+                </a:solidFill>
+                <a:latin typeface="Malgun Gothic" pitchFamily="34" charset="0"/>
+                <a:ea typeface="Malgun Gothic" pitchFamily="34" charset="-122"/>
+                <a:cs typeface="Malgun Gothic" pitchFamily="34" charset="-120"/>
+              </a:rPr>
+              <a:t> 하지만 많이 데려갈수록 </a:t>
+            </a:r>
+            <a:r>
+              <a:rPr lang="en-US" sz="1400" dirty="0" err="1">
+                <a:solidFill>
+                  <a:srgbClr val="2B2118"/>
+                </a:solidFill>
+                <a:latin typeface="Malgun Gothic" pitchFamily="34" charset="0"/>
+                <a:ea typeface="Malgun Gothic" pitchFamily="34" charset="-122"/>
+                <a:cs typeface="Malgun Gothic" pitchFamily="34" charset="-120"/>
+              </a:rPr>
+              <a:t>잉크병이</a:t>
+            </a:r>
+            <a:r>
+              <a:rPr lang="en-US" sz="1400" dirty="0">
+                <a:solidFill>
+                  <a:srgbClr val="2B2118"/>
+                </a:solidFill>
+                <a:latin typeface="Malgun Gothic" pitchFamily="34" charset="0"/>
+                <a:ea typeface="Malgun Gothic" pitchFamily="34" charset="-122"/>
+                <a:cs typeface="Malgun Gothic" pitchFamily="34" charset="-120"/>
+              </a:rPr>
+              <a:t> 맑</a:t>
+            </a:r>
+            <a:r>
+              <a:rPr lang="ko-KR" altLang="en-US" sz="1400" dirty="0" err="1">
+                <a:solidFill>
+                  <a:srgbClr val="2B2118"/>
+                </a:solidFill>
+                <a:latin typeface="Malgun Gothic" pitchFamily="34" charset="0"/>
+                <a:ea typeface="Malgun Gothic" pitchFamily="34" charset="-122"/>
+                <a:cs typeface="Malgun Gothic" pitchFamily="34" charset="-120"/>
+              </a:rPr>
+              <a:t>아지고</a:t>
+            </a:r>
+            <a:r>
+              <a:rPr lang="en-US" sz="1400" dirty="0">
+                <a:solidFill>
+                  <a:srgbClr val="2B2118"/>
+                </a:solidFill>
+                <a:latin typeface="Malgun Gothic" pitchFamily="34" charset="0"/>
+                <a:ea typeface="Malgun Gothic" pitchFamily="34" charset="-122"/>
+                <a:cs typeface="Malgun Gothic" pitchFamily="34" charset="-120"/>
+              </a:rPr>
+              <a:t> </a:t>
+            </a:r>
+            <a:r>
+              <a:rPr lang="ko-KR" altLang="en-US" sz="1400" dirty="0">
+                <a:solidFill>
+                  <a:srgbClr val="2B2118"/>
+                </a:solidFill>
+                <a:latin typeface="Malgun Gothic" pitchFamily="34" charset="0"/>
+                <a:ea typeface="Malgun Gothic" pitchFamily="34" charset="-122"/>
+                <a:cs typeface="Malgun Gothic" pitchFamily="34" charset="-120"/>
+              </a:rPr>
+              <a:t>클리어 보상이 늘어난다</a:t>
             </a:r>
             <a:endParaRPr lang="en-US" sz="1400" dirty="0"/>
           </a:p>
@@ -9848,7 +10152,7 @@
         </p:nvSpPr>
         <p:spPr>
           <a:xfrm>
-            <a:off x="822960" y="4526280"/>
+            <a:off x="822960" y="4536219"/>
             <a:ext cx="10545775" cy="868680"/>
           </a:xfrm>
           <a:prstGeom prst="rect">
@@ -9865,6 +10169,17 @@
               <a:buNone/>
             </a:pPr>
             <a:r>
+              <a:rPr lang="ko-KR" altLang="en-US" sz="1700" b="1" dirty="0">
+                <a:solidFill>
+                  <a:srgbClr val="1F6FE0"/>
+                </a:solidFill>
+                <a:latin typeface="Malgun Gothic" pitchFamily="34" charset="0"/>
+                <a:ea typeface="Malgun Gothic" pitchFamily="34" charset="-122"/>
+                <a:cs typeface="Malgun Gothic" pitchFamily="34" charset="-120"/>
+              </a:rPr>
+              <a:t>요약</a:t>
+            </a:r>
+            <a:r>
               <a:rPr lang="en-US" sz="1700" b="1" dirty="0">
                 <a:solidFill>
                   <a:srgbClr val="1F6FE0"/>
@@ -9873,7 +10188,7 @@
                 <a:ea typeface="Malgun Gothic" pitchFamily="34" charset="-122"/>
                 <a:cs typeface="Malgun Gothic" pitchFamily="34" charset="-120"/>
               </a:rPr>
-              <a:t>한 줄로   </a:t>
+              <a:t>   </a:t>
             </a:r>
             <a:r>
               <a:rPr lang="en-US" sz="1700" dirty="0">
@@ -9884,7 +10199,29 @@
                 <a:ea typeface="Batang" pitchFamily="34" charset="-122"/>
                 <a:cs typeface="Batang" pitchFamily="34" charset="-120"/>
               </a:rPr>
-              <a:t>멈추고, 색을 골라 그린 길로, 스스로 걷는 물방울 무리를 최대한 많이 데려간다.</a:t>
+              <a:t>멈추고, 색을 골라 그린 길로, </a:t>
+            </a:r>
+            <a:r>
+              <a:rPr lang="en-US" sz="1700" dirty="0" err="1">
+                <a:solidFill>
+                  <a:srgbClr val="2B2118"/>
+                </a:solidFill>
+                <a:latin typeface="Batang" pitchFamily="34" charset="0"/>
+                <a:ea typeface="Batang" pitchFamily="34" charset="-122"/>
+                <a:cs typeface="Batang" pitchFamily="34" charset="-120"/>
+              </a:rPr>
+              <a:t>물방울</a:t>
+            </a:r>
+            <a:r>
+              <a:rPr lang="en-US" sz="1700" dirty="0">
+                <a:solidFill>
+                  <a:srgbClr val="2B2118"/>
+                </a:solidFill>
+                <a:latin typeface="Batang" pitchFamily="34" charset="0"/>
+                <a:ea typeface="Batang" pitchFamily="34" charset="-122"/>
+                <a:cs typeface="Batang" pitchFamily="34" charset="-120"/>
+              </a:rPr>
+              <a:t> 무리를 최대한 많이 데려간다.</a:t>
             </a:r>
             <a:endParaRPr lang="en-US" sz="1700" dirty="0"/>
           </a:p>
@@ -9910,7 +10247,7 @@
           </a:prstGeom>
           <a:extLst>
             <a:ext uri="{C572A759-6A51-4108-AA02-DFA0A04FC94B}">
-              <ma14:wrappingTextBoxFlag xmlns:ma14="http://schemas.microsoft.com/office/mac/drawingml/2011/main" xmlns="" val="0"/>
+              <ma14:wrappingTextBoxFlag xmlns="" xmlns:ma14="http://schemas.microsoft.com/office/mac/drawingml/2011/main" val="0"/>
             </a:ext>
           </a:extLst>
         </p:spPr>
@@ -11081,7 +11418,7 @@
           </a:prstGeom>
           <a:extLst>
             <a:ext uri="{C572A759-6A51-4108-AA02-DFA0A04FC94B}">
-              <ma14:wrappingTextBoxFlag xmlns:ma14="http://schemas.microsoft.com/office/mac/drawingml/2011/main" xmlns="" val="0"/>
+              <ma14:wrappingTextBoxFlag xmlns="" xmlns:ma14="http://schemas.microsoft.com/office/mac/drawingml/2011/main" val="0"/>
             </a:ext>
           </a:extLst>
         </p:spPr>
@@ -12283,7 +12620,7 @@
           </a:prstGeom>
           <a:extLst>
             <a:ext uri="{C572A759-6A51-4108-AA02-DFA0A04FC94B}">
-              <ma14:wrappingTextBoxFlag xmlns:ma14="http://schemas.microsoft.com/office/mac/drawingml/2011/main" xmlns="" val="0"/>
+              <ma14:wrappingTextBoxFlag xmlns="" xmlns:ma14="http://schemas.microsoft.com/office/mac/drawingml/2011/main" val="0"/>
             </a:ext>
           </a:extLst>
         </p:spPr>
@@ -13134,7 +13471,7 @@
           </a:prstGeom>
           <a:extLst>
             <a:ext uri="{C572A759-6A51-4108-AA02-DFA0A04FC94B}">
-              <ma14:wrappingTextBoxFlag xmlns:ma14="http://schemas.microsoft.com/office/mac/drawingml/2011/main" xmlns="" val="0"/>
+              <ma14:wrappingTextBoxFlag xmlns="" xmlns:ma14="http://schemas.microsoft.com/office/mac/drawingml/2011/main" val="0"/>
             </a:ext>
           </a:extLst>
         </p:spPr>
@@ -14506,7 +14843,7 @@
           </a:prstGeom>
           <a:extLst>
             <a:ext uri="{C572A759-6A51-4108-AA02-DFA0A04FC94B}">
-              <ma14:wrappingTextBoxFlag xmlns:ma14="http://schemas.microsoft.com/office/mac/drawingml/2011/main" xmlns="" val="0"/>
+              <ma14:wrappingTextBoxFlag xmlns="" xmlns:ma14="http://schemas.microsoft.com/office/mac/drawingml/2011/main" val="0"/>
             </a:ext>
           </a:extLst>
         </p:spPr>

--- a/스톱앤스케치_제안서.pptx
+++ b/스톱앤스케치_제안서.pptx
@@ -5,20 +5,17 @@
     <p:sldMasterId id="2147483648" r:id="rId1"/>
   </p:sldMasterIdLst>
   <p:notesMasterIdLst>
-    <p:notesMasterId r:id="rId13"/>
+    <p:notesMasterId r:id="rId10"/>
   </p:notesMasterIdLst>
   <p:sldIdLst>
     <p:sldId id="256" r:id="rId2"/>
     <p:sldId id="257" r:id="rId3"/>
     <p:sldId id="258" r:id="rId4"/>
     <p:sldId id="259" r:id="rId5"/>
-    <p:sldId id="260" r:id="rId6"/>
-    <p:sldId id="261" r:id="rId7"/>
-    <p:sldId id="262" r:id="rId8"/>
-    <p:sldId id="263" r:id="rId9"/>
-    <p:sldId id="264" r:id="rId10"/>
-    <p:sldId id="265" r:id="rId11"/>
-    <p:sldId id="266" r:id="rId12"/>
+    <p:sldId id="261" r:id="rId6"/>
+    <p:sldId id="260" r:id="rId7"/>
+    <p:sldId id="264" r:id="rId8"/>
+    <p:sldId id="265" r:id="rId9"/>
   </p:sldIdLst>
   <p:sldSz cx="12192000" cy="6858000"/>
   <p:notesSz cx="6858000" cy="12192000"/>
@@ -331,174 +328,6 @@
 </p:notes>
 </file>
 
-<file path=ppt/notesSlides/notesSlide10.xml><?xml version="1.0" encoding="utf-8"?>
-<p:notes xmlns:a="http://schemas.openxmlformats.org/drawingml/2006/main" xmlns:r="http://schemas.openxmlformats.org/officeDocument/2006/relationships" xmlns:p="http://schemas.openxmlformats.org/presentationml/2006/main">
-  <p:cSld>
-    <p:spTree>
-      <p:nvGrpSpPr>
-        <p:cNvPr id="1" name=""/>
-        <p:cNvGrpSpPr/>
-        <p:nvPr/>
-      </p:nvGrpSpPr>
-      <p:grpSpPr>
-        <a:xfrm>
-          <a:off x="0" y="0"/>
-          <a:ext cx="0" cy="0"/>
-          <a:chOff x="0" y="0"/>
-          <a:chExt cx="0" cy="0"/>
-        </a:xfrm>
-      </p:grpSpPr>
-      <p:sp>
-        <p:nvSpPr>
-          <p:cNvPr id="2" name="Slide Image Placeholder 1"/>
-          <p:cNvSpPr>
-            <a:spLocks noGrp="1" noRot="1" noChangeAspect="1"/>
-          </p:cNvSpPr>
-          <p:nvPr>
-            <p:ph type="sldImg"/>
-          </p:nvPr>
-        </p:nvSpPr>
-        <p:spPr/>
-      </p:sp>
-      <p:sp>
-        <p:nvSpPr>
-          <p:cNvPr id="3" name="Notes Placeholder 2"/>
-          <p:cNvSpPr>
-            <a:spLocks noGrp="1"/>
-          </p:cNvSpPr>
-          <p:nvPr>
-            <p:ph type="body" idx="1"/>
-          </p:nvPr>
-        </p:nvSpPr>
-        <p:spPr/>
-        <p:txBody>
-          <a:bodyPr/>
-          <a:lstStyle/>
-          <a:p>
-            <a:endParaRPr lang="en-US" dirty="0"/>
-          </a:p>
-        </p:txBody>
-      </p:sp>
-      <p:sp>
-        <p:nvSpPr>
-          <p:cNvPr id="4" name="Slide Number Placeholder 3"/>
-          <p:cNvSpPr>
-            <a:spLocks noGrp="1"/>
-          </p:cNvSpPr>
-          <p:nvPr>
-            <p:ph type="sldNum" sz="quarter" idx="10"/>
-          </p:nvPr>
-        </p:nvSpPr>
-        <p:spPr/>
-        <p:txBody>
-          <a:bodyPr/>
-          <a:lstStyle/>
-          <a:p>
-            <a:fld id="{F7021451-1387-4CA6-816F-3879F97B5CBC}" type="slidenum">
-              <a:rPr lang="en-US"/>
-              <a:t>10</a:t>
-            </a:fld>
-            <a:endParaRPr lang="en-US"/>
-          </a:p>
-        </p:txBody>
-      </p:sp>
-    </p:spTree>
-    <p:extLst>
-      <p:ext uri="{BB962C8B-B14F-4D97-AF65-F5344CB8AC3E}">
-        <p14:creationId xmlns:p14="http://schemas.microsoft.com/office/powerpoint/2010/main" val="1024086991"/>
-      </p:ext>
-    </p:extLst>
-  </p:cSld>
-  <p:clrMapOvr>
-    <a:masterClrMapping/>
-  </p:clrMapOvr>
-</p:notes>
-</file>
-
-<file path=ppt/notesSlides/notesSlide11.xml><?xml version="1.0" encoding="utf-8"?>
-<p:notes xmlns:a="http://schemas.openxmlformats.org/drawingml/2006/main" xmlns:r="http://schemas.openxmlformats.org/officeDocument/2006/relationships" xmlns:p="http://schemas.openxmlformats.org/presentationml/2006/main">
-  <p:cSld>
-    <p:spTree>
-      <p:nvGrpSpPr>
-        <p:cNvPr id="1" name=""/>
-        <p:cNvGrpSpPr/>
-        <p:nvPr/>
-      </p:nvGrpSpPr>
-      <p:grpSpPr>
-        <a:xfrm>
-          <a:off x="0" y="0"/>
-          <a:ext cx="0" cy="0"/>
-          <a:chOff x="0" y="0"/>
-          <a:chExt cx="0" cy="0"/>
-        </a:xfrm>
-      </p:grpSpPr>
-      <p:sp>
-        <p:nvSpPr>
-          <p:cNvPr id="2" name="Slide Image Placeholder 1"/>
-          <p:cNvSpPr>
-            <a:spLocks noGrp="1" noRot="1" noChangeAspect="1"/>
-          </p:cNvSpPr>
-          <p:nvPr>
-            <p:ph type="sldImg"/>
-          </p:nvPr>
-        </p:nvSpPr>
-        <p:spPr/>
-      </p:sp>
-      <p:sp>
-        <p:nvSpPr>
-          <p:cNvPr id="3" name="Notes Placeholder 2"/>
-          <p:cNvSpPr>
-            <a:spLocks noGrp="1"/>
-          </p:cNvSpPr>
-          <p:nvPr>
-            <p:ph type="body" idx="1"/>
-          </p:nvPr>
-        </p:nvSpPr>
-        <p:spPr/>
-        <p:txBody>
-          <a:bodyPr/>
-          <a:lstStyle/>
-          <a:p>
-            <a:endParaRPr lang="en-US" dirty="0"/>
-          </a:p>
-        </p:txBody>
-      </p:sp>
-      <p:sp>
-        <p:nvSpPr>
-          <p:cNvPr id="4" name="Slide Number Placeholder 3"/>
-          <p:cNvSpPr>
-            <a:spLocks noGrp="1"/>
-          </p:cNvSpPr>
-          <p:nvPr>
-            <p:ph type="sldNum" sz="quarter" idx="10"/>
-          </p:nvPr>
-        </p:nvSpPr>
-        <p:spPr/>
-        <p:txBody>
-          <a:bodyPr/>
-          <a:lstStyle/>
-          <a:p>
-            <a:fld id="{F7021451-1387-4CA6-816F-3879F97B5CBC}" type="slidenum">
-              <a:rPr lang="en-US"/>
-              <a:t>11</a:t>
-            </a:fld>
-            <a:endParaRPr lang="en-US"/>
-          </a:p>
-        </p:txBody>
-      </p:sp>
-    </p:spTree>
-    <p:extLst>
-      <p:ext uri="{BB962C8B-B14F-4D97-AF65-F5344CB8AC3E}">
-        <p14:creationId xmlns:p14="http://schemas.microsoft.com/office/powerpoint/2010/main" val="1024086991"/>
-      </p:ext>
-    </p:extLst>
-  </p:cSld>
-  <p:clrMapOvr>
-    <a:masterClrMapping/>
-  </p:clrMapOvr>
-</p:notes>
-</file>
-
 <file path=ppt/notesSlides/notesSlide2.xml><?xml version="1.0" encoding="utf-8"?>
 <p:notes xmlns:a="http://schemas.openxmlformats.org/drawingml/2006/main" xmlns:r="http://schemas.openxmlformats.org/officeDocument/2006/relationships" xmlns:p="http://schemas.openxmlformats.org/presentationml/2006/main">
   <p:cSld>
@@ -1069,90 +898,6 @@
             <a:fld id="{F7021451-1387-4CA6-816F-3879F97B5CBC}" type="slidenum">
               <a:rPr lang="en-US"/>
               <a:t>8</a:t>
-            </a:fld>
-            <a:endParaRPr lang="en-US"/>
-          </a:p>
-        </p:txBody>
-      </p:sp>
-    </p:spTree>
-    <p:extLst>
-      <p:ext uri="{BB962C8B-B14F-4D97-AF65-F5344CB8AC3E}">
-        <p14:creationId xmlns:p14="http://schemas.microsoft.com/office/powerpoint/2010/main" val="1024086991"/>
-      </p:ext>
-    </p:extLst>
-  </p:cSld>
-  <p:clrMapOvr>
-    <a:masterClrMapping/>
-  </p:clrMapOvr>
-</p:notes>
-</file>
-
-<file path=ppt/notesSlides/notesSlide9.xml><?xml version="1.0" encoding="utf-8"?>
-<p:notes xmlns:a="http://schemas.openxmlformats.org/drawingml/2006/main" xmlns:r="http://schemas.openxmlformats.org/officeDocument/2006/relationships" xmlns:p="http://schemas.openxmlformats.org/presentationml/2006/main">
-  <p:cSld>
-    <p:spTree>
-      <p:nvGrpSpPr>
-        <p:cNvPr id="1" name=""/>
-        <p:cNvGrpSpPr/>
-        <p:nvPr/>
-      </p:nvGrpSpPr>
-      <p:grpSpPr>
-        <a:xfrm>
-          <a:off x="0" y="0"/>
-          <a:ext cx="0" cy="0"/>
-          <a:chOff x="0" y="0"/>
-          <a:chExt cx="0" cy="0"/>
-        </a:xfrm>
-      </p:grpSpPr>
-      <p:sp>
-        <p:nvSpPr>
-          <p:cNvPr id="2" name="Slide Image Placeholder 1"/>
-          <p:cNvSpPr>
-            <a:spLocks noGrp="1" noRot="1" noChangeAspect="1"/>
-          </p:cNvSpPr>
-          <p:nvPr>
-            <p:ph type="sldImg"/>
-          </p:nvPr>
-        </p:nvSpPr>
-        <p:spPr/>
-      </p:sp>
-      <p:sp>
-        <p:nvSpPr>
-          <p:cNvPr id="3" name="Notes Placeholder 2"/>
-          <p:cNvSpPr>
-            <a:spLocks noGrp="1"/>
-          </p:cNvSpPr>
-          <p:nvPr>
-            <p:ph type="body" idx="1"/>
-          </p:nvPr>
-        </p:nvSpPr>
-        <p:spPr/>
-        <p:txBody>
-          <a:bodyPr/>
-          <a:lstStyle/>
-          <a:p>
-            <a:endParaRPr lang="en-US" dirty="0"/>
-          </a:p>
-        </p:txBody>
-      </p:sp>
-      <p:sp>
-        <p:nvSpPr>
-          <p:cNvPr id="4" name="Slide Number Placeholder 3"/>
-          <p:cNvSpPr>
-            <a:spLocks noGrp="1"/>
-          </p:cNvSpPr>
-          <p:nvPr>
-            <p:ph type="sldNum" sz="quarter" idx="10"/>
-          </p:nvPr>
-        </p:nvSpPr>
-        <p:spPr/>
-        <p:txBody>
-          <a:bodyPr/>
-          <a:lstStyle/>
-          <a:p>
-            <a:fld id="{F7021451-1387-4CA6-816F-3879F97B5CBC}" type="slidenum">
-              <a:rPr lang="en-US"/>
-              <a:t>9</a:t>
             </a:fld>
             <a:endParaRPr lang="en-US"/>
           </a:p>
@@ -1988,1875 +1733,6 @@
 </p:sld>
 </file>
 
-<file path=ppt/slides/slide10.xml><?xml version="1.0" encoding="utf-8"?>
-<p:sld xmlns:a="http://schemas.openxmlformats.org/drawingml/2006/main" xmlns:r="http://schemas.openxmlformats.org/officeDocument/2006/relationships" xmlns:p="http://schemas.openxmlformats.org/presentationml/2006/main">
-  <p:cSld name="Slide 10">
-    <p:spTree>
-      <p:nvGrpSpPr>
-        <p:cNvPr id="1" name=""/>
-        <p:cNvGrpSpPr/>
-        <p:nvPr/>
-      </p:nvGrpSpPr>
-      <p:grpSpPr>
-        <a:xfrm>
-          <a:off x="0" y="0"/>
-          <a:ext cx="0" cy="0"/>
-          <a:chOff x="0" y="0"/>
-          <a:chExt cx="0" cy="0"/>
-        </a:xfrm>
-      </p:grpSpPr>
-      <p:sp>
-        <p:nvSpPr>
-          <p:cNvPr id="2" name="Text 1"/>
-          <p:cNvSpPr>
-            <a:spLocks noGrp="1"/>
-          </p:cNvSpPr>
-          <p:nvPr>
-            <p:ph type="title" idx="101" hasCustomPrompt="1"/>
-          </p:nvPr>
-        </p:nvSpPr>
-        <p:spPr>
-          <a:xfrm>
-            <a:off x="548640" y="292608"/>
-            <a:ext cx="11094415" cy="685800"/>
-          </a:xfrm>
-          <a:prstGeom prst="rect">
-            <a:avLst/>
-          </a:prstGeom>
-          <a:noFill/>
-          <a:ln/>
-        </p:spPr>
-        <p:txBody>
-          <a:bodyPr wrap="square" lIns="0" tIns="0" rIns="0" bIns="0" rtlCol="0" anchor="ctr"/>
-          <a:lstStyle/>
-          <a:p>
-            <a:pPr marL="0" indent="0" algn="l">
-              <a:buNone/>
-            </a:pPr>
-            <a:r>
-              <a:rPr lang="en-US" sz="2800" b="1" dirty="0">
-                <a:solidFill>
-                  <a:srgbClr val="2B2118"/>
-                </a:solidFill>
-                <a:latin typeface="Batang" pitchFamily="34" charset="0"/>
-                <a:ea typeface="Batang" pitchFamily="34" charset="-122"/>
-                <a:cs typeface="Batang" pitchFamily="34" charset="-120"/>
-              </a:rPr>
-              <a:t>개발 현황과 앞으로 필요한 것</a:t>
-            </a:r>
-            <a:endParaRPr lang="en-US" sz="2800" dirty="0"/>
-          </a:p>
-        </p:txBody>
-      </p:sp>
-      <p:sp>
-        <p:nvSpPr>
-          <p:cNvPr id="3" name="Shape 1"/>
-          <p:cNvSpPr/>
-          <p:nvPr/>
-        </p:nvSpPr>
-        <p:spPr>
-          <a:xfrm>
-            <a:off x="548640" y="1234440"/>
-            <a:ext cx="5669280" cy="4572000"/>
-          </a:xfrm>
-          <a:prstGeom prst="roundRect">
-            <a:avLst>
-              <a:gd name="adj" fmla="val 1600"/>
-            </a:avLst>
-          </a:prstGeom>
-          <a:solidFill>
-            <a:srgbClr val="FAF6EC"/>
-          </a:solidFill>
-          <a:ln w="12700">
-            <a:solidFill>
-              <a:srgbClr val="D8C8A4"/>
-            </a:solidFill>
-            <a:prstDash val="solid"/>
-          </a:ln>
-        </p:spPr>
-      </p:sp>
-      <p:sp>
-        <p:nvSpPr>
-          <p:cNvPr id="4" name="Text 2"/>
-          <p:cNvSpPr txBox="1"/>
-          <p:nvPr/>
-        </p:nvSpPr>
-        <p:spPr>
-          <a:xfrm>
-            <a:off x="822960" y="1371600"/>
-            <a:ext cx="5120640" cy="292608"/>
-          </a:xfrm>
-          <a:prstGeom prst="rect">
-            <a:avLst/>
-          </a:prstGeom>
-          <a:noFill/>
-          <a:ln/>
-        </p:spPr>
-        <p:txBody>
-          <a:bodyPr wrap="square" lIns="0" tIns="0" rIns="0" bIns="0" rtlCol="0" anchor="t"/>
-          <a:lstStyle/>
-          <a:p>
-            <a:pPr marL="0" indent="0">
-              <a:buNone/>
-            </a:pPr>
-            <a:r>
-              <a:rPr lang="en-US" sz="1300" b="1" dirty="0">
-                <a:solidFill>
-                  <a:srgbClr val="1F6FE0"/>
-                </a:solidFill>
-                <a:latin typeface="Malgun Gothic" pitchFamily="34" charset="0"/>
-                <a:ea typeface="Malgun Gothic" pitchFamily="34" charset="-122"/>
-                <a:cs typeface="Malgun Gothic" pitchFamily="34" charset="-120"/>
-              </a:rPr>
-              <a:t>프로토타입 4일 (2026-10-19 ~ 22)</a:t>
-            </a:r>
-            <a:endParaRPr lang="en-US" sz="1300" dirty="0"/>
-          </a:p>
-        </p:txBody>
-      </p:sp>
-      <p:sp>
-        <p:nvSpPr>
-          <p:cNvPr id="5" name="Shape 3"/>
-          <p:cNvSpPr/>
-          <p:nvPr/>
-        </p:nvSpPr>
-        <p:spPr>
-          <a:xfrm>
-            <a:off x="1024128" y="1965960"/>
-            <a:ext cx="0" cy="3291840"/>
-          </a:xfrm>
-          <a:prstGeom prst="line">
-            <a:avLst/>
-          </a:prstGeom>
-          <a:noFill/>
-          <a:ln w="25400">
-            <a:solidFill>
-              <a:srgbClr val="D8C8A4"/>
-            </a:solidFill>
-            <a:prstDash val="solid"/>
-          </a:ln>
-        </p:spPr>
-      </p:sp>
-      <p:sp>
-        <p:nvSpPr>
-          <p:cNvPr id="6" name="Shape 4"/>
-          <p:cNvSpPr/>
-          <p:nvPr/>
-        </p:nvSpPr>
-        <p:spPr>
-          <a:xfrm>
-            <a:off x="914400" y="1874520"/>
-            <a:ext cx="219456" cy="219456"/>
-          </a:xfrm>
-          <a:prstGeom prst="ellipse">
-            <a:avLst/>
-          </a:prstGeom>
-          <a:solidFill>
-            <a:srgbClr val="FFFFFF"/>
-          </a:solidFill>
-          <a:ln w="19050">
-            <a:solidFill>
-              <a:srgbClr val="1F6FE0"/>
-            </a:solidFill>
-            <a:prstDash val="solid"/>
-          </a:ln>
-        </p:spPr>
-      </p:sp>
-      <p:sp>
-        <p:nvSpPr>
-          <p:cNvPr id="7" name="Text 5"/>
-          <p:cNvSpPr txBox="1"/>
-          <p:nvPr/>
-        </p:nvSpPr>
-        <p:spPr>
-          <a:xfrm>
-            <a:off x="1325880" y="1828800"/>
-            <a:ext cx="731520" cy="292608"/>
-          </a:xfrm>
-          <a:prstGeom prst="rect">
-            <a:avLst/>
-          </a:prstGeom>
-          <a:noFill/>
-          <a:ln/>
-        </p:spPr>
-        <p:txBody>
-          <a:bodyPr wrap="square" lIns="0" tIns="0" rIns="0" bIns="0" rtlCol="0" anchor="t"/>
-          <a:lstStyle/>
-          <a:p>
-            <a:pPr marL="0" indent="0">
-              <a:buNone/>
-            </a:pPr>
-            <a:r>
-              <a:rPr lang="en-US" sz="1200" b="1" dirty="0">
-                <a:solidFill>
-                  <a:srgbClr val="2B2118"/>
-                </a:solidFill>
-                <a:latin typeface="Malgun Gothic" pitchFamily="34" charset="0"/>
-                <a:ea typeface="Malgun Gothic" pitchFamily="34" charset="-122"/>
-                <a:cs typeface="Malgun Gothic" pitchFamily="34" charset="-120"/>
-              </a:rPr>
-              <a:t>10-19</a:t>
-            </a:r>
-            <a:endParaRPr lang="en-US" sz="1200" dirty="0"/>
-          </a:p>
-        </p:txBody>
-      </p:sp>
-      <p:sp>
-        <p:nvSpPr>
-          <p:cNvPr id="8" name="Text 6"/>
-          <p:cNvSpPr txBox="1"/>
-          <p:nvPr/>
-        </p:nvSpPr>
-        <p:spPr>
-          <a:xfrm>
-            <a:off x="2057400" y="1828800"/>
-            <a:ext cx="4023360" cy="731520"/>
-          </a:xfrm>
-          <a:prstGeom prst="rect">
-            <a:avLst/>
-          </a:prstGeom>
-          <a:noFill/>
-          <a:ln/>
-        </p:spPr>
-        <p:txBody>
-          <a:bodyPr wrap="square" lIns="0" tIns="0" rIns="0" bIns="0" rtlCol="0" anchor="t"/>
-          <a:lstStyle/>
-          <a:p>
-            <a:pPr marL="0" indent="0">
-              <a:buNone/>
-            </a:pPr>
-            <a:r>
-              <a:rPr lang="en-US" sz="1200" dirty="0">
-                <a:solidFill>
-                  <a:srgbClr val="2B2118"/>
-                </a:solidFill>
-                <a:latin typeface="Malgun Gothic" pitchFamily="34" charset="0"/>
-                <a:ea typeface="Malgun Gothic" pitchFamily="34" charset="-122"/>
-                <a:cs typeface="Malgun Gothic" pitchFamily="34" charset="-120"/>
-              </a:rPr>
-              <a:t>한 마리 버전: 자동 달리기 · 선 물리 · 완전 정지 · 색 3종 · 레벨 툴</a:t>
-            </a:r>
-            <a:endParaRPr lang="en-US" sz="1200" dirty="0"/>
-          </a:p>
-        </p:txBody>
-      </p:sp>
-      <p:sp>
-        <p:nvSpPr>
-          <p:cNvPr id="9" name="Shape 7"/>
-          <p:cNvSpPr/>
-          <p:nvPr/>
-        </p:nvSpPr>
-        <p:spPr>
-          <a:xfrm>
-            <a:off x="914400" y="2788920"/>
-            <a:ext cx="219456" cy="219456"/>
-          </a:xfrm>
-          <a:prstGeom prst="ellipse">
-            <a:avLst/>
-          </a:prstGeom>
-          <a:solidFill>
-            <a:srgbClr val="FFFFFF"/>
-          </a:solidFill>
-          <a:ln w="19050">
-            <a:solidFill>
-              <a:srgbClr val="1F6FE0"/>
-            </a:solidFill>
-            <a:prstDash val="solid"/>
-          </a:ln>
-        </p:spPr>
-      </p:sp>
-      <p:sp>
-        <p:nvSpPr>
-          <p:cNvPr id="10" name="Text 8"/>
-          <p:cNvSpPr txBox="1"/>
-          <p:nvPr/>
-        </p:nvSpPr>
-        <p:spPr>
-          <a:xfrm>
-            <a:off x="1325880" y="2743200"/>
-            <a:ext cx="731520" cy="292608"/>
-          </a:xfrm>
-          <a:prstGeom prst="rect">
-            <a:avLst/>
-          </a:prstGeom>
-          <a:noFill/>
-          <a:ln/>
-        </p:spPr>
-        <p:txBody>
-          <a:bodyPr wrap="square" lIns="0" tIns="0" rIns="0" bIns="0" rtlCol="0" anchor="t"/>
-          <a:lstStyle/>
-          <a:p>
-            <a:pPr marL="0" indent="0">
-              <a:buNone/>
-            </a:pPr>
-            <a:r>
-              <a:rPr lang="en-US" sz="1200" b="1" dirty="0">
-                <a:solidFill>
-                  <a:srgbClr val="2B2118"/>
-                </a:solidFill>
-                <a:latin typeface="Malgun Gothic" pitchFamily="34" charset="0"/>
-                <a:ea typeface="Malgun Gothic" pitchFamily="34" charset="-122"/>
-                <a:cs typeface="Malgun Gothic" pitchFamily="34" charset="-120"/>
-              </a:rPr>
-              <a:t>10-20</a:t>
-            </a:r>
-            <a:endParaRPr lang="en-US" sz="1200" dirty="0"/>
-          </a:p>
-        </p:txBody>
-      </p:sp>
-      <p:sp>
-        <p:nvSpPr>
-          <p:cNvPr id="11" name="Text 9"/>
-          <p:cNvSpPr txBox="1"/>
-          <p:nvPr/>
-        </p:nvSpPr>
-        <p:spPr>
-          <a:xfrm>
-            <a:off x="2057400" y="2743200"/>
-            <a:ext cx="4023360" cy="731520"/>
-          </a:xfrm>
-          <a:prstGeom prst="rect">
-            <a:avLst/>
-          </a:prstGeom>
-          <a:noFill/>
-          <a:ln/>
-        </p:spPr>
-        <p:txBody>
-          <a:bodyPr wrap="square" lIns="0" tIns="0" rIns="0" bIns="0" rtlCol="0" anchor="t"/>
-          <a:lstStyle/>
-          <a:p>
-            <a:pPr marL="0" indent="0">
-              <a:buNone/>
-            </a:pPr>
-            <a:r>
-              <a:rPr lang="en-US" sz="1200" dirty="0">
-                <a:solidFill>
-                  <a:srgbClr val="2B2118"/>
-                </a:solidFill>
-                <a:latin typeface="Malgun Gothic" pitchFamily="34" charset="0"/>
-                <a:ea typeface="Malgun Gothic" pitchFamily="34" charset="-122"/>
-                <a:cs typeface="Malgun Gothic" pitchFamily="34" charset="-120"/>
-              </a:rPr>
-              <a:t>물방울 무리 방식으로 전환: 떨어지는 선 · 빨아들이기 · 5색 · 대열 · 정화</a:t>
-            </a:r>
-            <a:endParaRPr lang="en-US" sz="1200" dirty="0"/>
-          </a:p>
-        </p:txBody>
-      </p:sp>
-      <p:sp>
-        <p:nvSpPr>
-          <p:cNvPr id="12" name="Shape 10"/>
-          <p:cNvSpPr/>
-          <p:nvPr/>
-        </p:nvSpPr>
-        <p:spPr>
-          <a:xfrm>
-            <a:off x="914400" y="3703320"/>
-            <a:ext cx="219456" cy="219456"/>
-          </a:xfrm>
-          <a:prstGeom prst="ellipse">
-            <a:avLst/>
-          </a:prstGeom>
-          <a:solidFill>
-            <a:srgbClr val="FFFFFF"/>
-          </a:solidFill>
-          <a:ln w="19050">
-            <a:solidFill>
-              <a:srgbClr val="1F6FE0"/>
-            </a:solidFill>
-            <a:prstDash val="solid"/>
-          </a:ln>
-        </p:spPr>
-      </p:sp>
-      <p:sp>
-        <p:nvSpPr>
-          <p:cNvPr id="13" name="Text 11"/>
-          <p:cNvSpPr txBox="1"/>
-          <p:nvPr/>
-        </p:nvSpPr>
-        <p:spPr>
-          <a:xfrm>
-            <a:off x="1325880" y="3657600"/>
-            <a:ext cx="731520" cy="292608"/>
-          </a:xfrm>
-          <a:prstGeom prst="rect">
-            <a:avLst/>
-          </a:prstGeom>
-          <a:noFill/>
-          <a:ln/>
-        </p:spPr>
-        <p:txBody>
-          <a:bodyPr wrap="square" lIns="0" tIns="0" rIns="0" bIns="0" rtlCol="0" anchor="t"/>
-          <a:lstStyle/>
-          <a:p>
-            <a:pPr marL="0" indent="0">
-              <a:buNone/>
-            </a:pPr>
-            <a:r>
-              <a:rPr lang="en-US" sz="1200" b="1" dirty="0">
-                <a:solidFill>
-                  <a:srgbClr val="2B2118"/>
-                </a:solidFill>
-                <a:latin typeface="Malgun Gothic" pitchFamily="34" charset="0"/>
-                <a:ea typeface="Malgun Gothic" pitchFamily="34" charset="-122"/>
-                <a:cs typeface="Malgun Gothic" pitchFamily="34" charset="-120"/>
-              </a:rPr>
-              <a:t>10-21</a:t>
-            </a:r>
-            <a:endParaRPr lang="en-US" sz="1200" dirty="0"/>
-          </a:p>
-        </p:txBody>
-      </p:sp>
-      <p:sp>
-        <p:nvSpPr>
-          <p:cNvPr id="14" name="Text 12"/>
-          <p:cNvSpPr txBox="1"/>
-          <p:nvPr/>
-        </p:nvSpPr>
-        <p:spPr>
-          <a:xfrm>
-            <a:off x="2057400" y="3657600"/>
-            <a:ext cx="4023360" cy="731520"/>
-          </a:xfrm>
-          <a:prstGeom prst="rect">
-            <a:avLst/>
-          </a:prstGeom>
-          <a:noFill/>
-          <a:ln/>
-        </p:spPr>
-        <p:txBody>
-          <a:bodyPr wrap="square" lIns="0" tIns="0" rIns="0" bIns="0" rtlCol="0" anchor="t"/>
-          <a:lstStyle/>
-          <a:p>
-            <a:pPr marL="0" indent="0">
-              <a:buNone/>
-            </a:pPr>
-            <a:r>
-              <a:rPr lang="en-US" sz="1200" dirty="0">
-                <a:solidFill>
-                  <a:srgbClr val="2B2118"/>
-                </a:solidFill>
-                <a:latin typeface="Malgun Gothic" pitchFamily="34" charset="0"/>
-                <a:ea typeface="Malgun Gothic" pitchFamily="34" charset="-122"/>
-                <a:cs typeface="Malgun Gothic" pitchFamily="34" charset="-120"/>
-              </a:rPr>
-              <a:t>레벨 툴 확장 · UI 글자 툴 · 비탈 규칙 · 일시 정지 · 스테이지 1·2 제작</a:t>
-            </a:r>
-            <a:endParaRPr lang="en-US" sz="1200" dirty="0"/>
-          </a:p>
-        </p:txBody>
-      </p:sp>
-      <p:sp>
-        <p:nvSpPr>
-          <p:cNvPr id="15" name="Shape 13"/>
-          <p:cNvSpPr/>
-          <p:nvPr/>
-        </p:nvSpPr>
-        <p:spPr>
-          <a:xfrm>
-            <a:off x="914400" y="4617720"/>
-            <a:ext cx="219456" cy="219456"/>
-          </a:xfrm>
-          <a:prstGeom prst="ellipse">
-            <a:avLst/>
-          </a:prstGeom>
-          <a:solidFill>
-            <a:srgbClr val="1F6FE0"/>
-          </a:solidFill>
-          <a:ln w="19050">
-            <a:solidFill>
-              <a:srgbClr val="1F6FE0"/>
-            </a:solidFill>
-            <a:prstDash val="solid"/>
-          </a:ln>
-        </p:spPr>
-      </p:sp>
-      <p:sp>
-        <p:nvSpPr>
-          <p:cNvPr id="16" name="Text 14"/>
-          <p:cNvSpPr txBox="1"/>
-          <p:nvPr/>
-        </p:nvSpPr>
-        <p:spPr>
-          <a:xfrm>
-            <a:off x="1325880" y="4572000"/>
-            <a:ext cx="731520" cy="292608"/>
-          </a:xfrm>
-          <a:prstGeom prst="rect">
-            <a:avLst/>
-          </a:prstGeom>
-          <a:noFill/>
-          <a:ln/>
-        </p:spPr>
-        <p:txBody>
-          <a:bodyPr wrap="square" lIns="0" tIns="0" rIns="0" bIns="0" rtlCol="0" anchor="t"/>
-          <a:lstStyle/>
-          <a:p>
-            <a:pPr marL="0" indent="0">
-              <a:buNone/>
-            </a:pPr>
-            <a:r>
-              <a:rPr lang="en-US" sz="1200" b="1" dirty="0">
-                <a:solidFill>
-                  <a:srgbClr val="2B2118"/>
-                </a:solidFill>
-                <a:latin typeface="Malgun Gothic" pitchFamily="34" charset="0"/>
-                <a:ea typeface="Malgun Gothic" pitchFamily="34" charset="-122"/>
-                <a:cs typeface="Malgun Gothic" pitchFamily="34" charset="-120"/>
-              </a:rPr>
-              <a:t>10-22</a:t>
-            </a:r>
-            <a:endParaRPr lang="en-US" sz="1200" dirty="0"/>
-          </a:p>
-        </p:txBody>
-      </p:sp>
-      <p:sp>
-        <p:nvSpPr>
-          <p:cNvPr id="17" name="Text 15"/>
-          <p:cNvSpPr txBox="1"/>
-          <p:nvPr/>
-        </p:nvSpPr>
-        <p:spPr>
-          <a:xfrm>
-            <a:off x="2057400" y="4572000"/>
-            <a:ext cx="4023360" cy="731520"/>
-          </a:xfrm>
-          <a:prstGeom prst="rect">
-            <a:avLst/>
-          </a:prstGeom>
-          <a:noFill/>
-          <a:ln/>
-        </p:spPr>
-        <p:txBody>
-          <a:bodyPr wrap="square" lIns="0" tIns="0" rIns="0" bIns="0" rtlCol="0" anchor="t"/>
-          <a:lstStyle/>
-          <a:p>
-            <a:pPr marL="0" indent="0">
-              <a:buNone/>
-            </a:pPr>
-            <a:r>
-              <a:rPr lang="en-US" sz="1200" dirty="0">
-                <a:solidFill>
-                  <a:srgbClr val="2B2118"/>
-                </a:solidFill>
-                <a:latin typeface="Malgun Gothic" pitchFamily="34" charset="0"/>
-                <a:ea typeface="Malgun Gothic" pitchFamily="34" charset="-122"/>
-                <a:cs typeface="Malgun Gothic" pitchFamily="34" charset="-120"/>
-              </a:rPr>
-              <a:t>발사기(색 투사체) · 세운 빨강 · 스테이지 3 제작 · 플레이 테스트</a:t>
-            </a:r>
-            <a:endParaRPr lang="en-US" sz="1200" dirty="0"/>
-          </a:p>
-        </p:txBody>
-      </p:sp>
-      <p:sp>
-        <p:nvSpPr>
-          <p:cNvPr id="18" name="Shape 16"/>
-          <p:cNvSpPr/>
-          <p:nvPr/>
-        </p:nvSpPr>
-        <p:spPr>
-          <a:xfrm>
-            <a:off x="6492240" y="1234440"/>
-            <a:ext cx="5150815" cy="2148840"/>
-          </a:xfrm>
-          <a:prstGeom prst="roundRect">
-            <a:avLst>
-              <a:gd name="adj" fmla="val 3404"/>
-            </a:avLst>
-          </a:prstGeom>
-          <a:solidFill>
-            <a:srgbClr val="FFFFFF"/>
-          </a:solidFill>
-          <a:ln w="19050">
-            <a:solidFill>
-              <a:srgbClr val="1F6FE0"/>
-            </a:solidFill>
-            <a:prstDash val="solid"/>
-          </a:ln>
-        </p:spPr>
-      </p:sp>
-      <p:sp>
-        <p:nvSpPr>
-          <p:cNvPr id="19" name="Text 17"/>
-          <p:cNvSpPr txBox="1"/>
-          <p:nvPr/>
-        </p:nvSpPr>
-        <p:spPr>
-          <a:xfrm>
-            <a:off x="6766560" y="1371600"/>
-            <a:ext cx="4602175" cy="292608"/>
-          </a:xfrm>
-          <a:prstGeom prst="rect">
-            <a:avLst/>
-          </a:prstGeom>
-          <a:noFill/>
-          <a:ln/>
-        </p:spPr>
-        <p:txBody>
-          <a:bodyPr wrap="square" lIns="0" tIns="0" rIns="0" bIns="0" rtlCol="0" anchor="t"/>
-          <a:lstStyle/>
-          <a:p>
-            <a:pPr marL="0" indent="0">
-              <a:buNone/>
-            </a:pPr>
-            <a:r>
-              <a:rPr lang="en-US" sz="1300" b="1" dirty="0">
-                <a:solidFill>
-                  <a:srgbClr val="1F6FE0"/>
-                </a:solidFill>
-                <a:latin typeface="Malgun Gothic" pitchFamily="34" charset="0"/>
-                <a:ea typeface="Malgun Gothic" pitchFamily="34" charset="-122"/>
-                <a:cs typeface="Malgun Gothic" pitchFamily="34" charset="-120"/>
-              </a:rPr>
-              <a:t>필요한 인력 (가안)</a:t>
-            </a:r>
-            <a:endParaRPr lang="en-US" sz="1300" dirty="0"/>
-          </a:p>
-        </p:txBody>
-      </p:sp>
-      <p:sp>
-        <p:nvSpPr>
-          <p:cNvPr id="20" name="Shape 18"/>
-          <p:cNvSpPr/>
-          <p:nvPr/>
-        </p:nvSpPr>
-        <p:spPr>
-          <a:xfrm>
-            <a:off x="6766560" y="1783080"/>
-            <a:ext cx="329184" cy="329184"/>
-          </a:xfrm>
-          <a:prstGeom prst="ellipse">
-            <a:avLst/>
-          </a:prstGeom>
-          <a:solidFill>
-            <a:srgbClr val="E0312B"/>
-          </a:solidFill>
-          <a:ln w="12700">
-            <a:solidFill>
-              <a:srgbClr val="E0312B"/>
-            </a:solidFill>
-            <a:prstDash val="solid"/>
-          </a:ln>
-        </p:spPr>
-      </p:sp>
-      <p:sp>
-        <p:nvSpPr>
-          <p:cNvPr id="21" name="Text 19"/>
-          <p:cNvSpPr txBox="1"/>
-          <p:nvPr/>
-        </p:nvSpPr>
-        <p:spPr>
-          <a:xfrm>
-            <a:off x="6766560" y="1783080"/>
-            <a:ext cx="329184" cy="329184"/>
-          </a:xfrm>
-          <a:prstGeom prst="rect">
-            <a:avLst/>
-          </a:prstGeom>
-          <a:noFill/>
-          <a:ln/>
-        </p:spPr>
-        <p:txBody>
-          <a:bodyPr wrap="square" lIns="0" tIns="0" rIns="0" bIns="0" rtlCol="0" anchor="ctr"/>
-          <a:lstStyle/>
-          <a:p>
-            <a:pPr marL="0" indent="0" algn="ctr">
-              <a:buNone/>
-            </a:pPr>
-            <a:r>
-              <a:rPr lang="en-US" sz="1400" b="1" dirty="0">
-                <a:solidFill>
-                  <a:srgbClr val="FFFFFF"/>
-                </a:solidFill>
-                <a:latin typeface="Malgun Gothic" pitchFamily="34" charset="0"/>
-                <a:ea typeface="Malgun Gothic" pitchFamily="34" charset="-122"/>
-                <a:cs typeface="Malgun Gothic" pitchFamily="34" charset="-120"/>
-              </a:rPr>
-              <a:t>1</a:t>
-            </a:r>
-            <a:endParaRPr lang="en-US" sz="1400" dirty="0"/>
-          </a:p>
-        </p:txBody>
-      </p:sp>
-      <p:sp>
-        <p:nvSpPr>
-          <p:cNvPr id="22" name="Text 20"/>
-          <p:cNvSpPr txBox="1"/>
-          <p:nvPr/>
-        </p:nvSpPr>
-        <p:spPr>
-          <a:xfrm>
-            <a:off x="7223760" y="1801368"/>
-            <a:ext cx="4144975" cy="329184"/>
-          </a:xfrm>
-          <a:prstGeom prst="rect">
-            <a:avLst/>
-          </a:prstGeom>
-          <a:noFill/>
-          <a:ln/>
-        </p:spPr>
-        <p:txBody>
-          <a:bodyPr wrap="square" lIns="0" tIns="0" rIns="0" bIns="0" rtlCol="0" anchor="ctr"/>
-          <a:lstStyle/>
-          <a:p>
-            <a:pPr marL="0" indent="0">
-              <a:buNone/>
-            </a:pPr>
-            <a:r>
-              <a:rPr lang="en-US" sz="1300" b="1" dirty="0">
-                <a:solidFill>
-                  <a:srgbClr val="2B2118"/>
-                </a:solidFill>
-                <a:latin typeface="Malgun Gothic" pitchFamily="34" charset="0"/>
-                <a:ea typeface="Malgun Gothic" pitchFamily="34" charset="-122"/>
-                <a:cs typeface="Malgun Gothic" pitchFamily="34" charset="-120"/>
-              </a:rPr>
-              <a:t>기획 · 레벨</a:t>
-            </a:r>
-            <a:r>
-              <a:rPr lang="en-US" sz="1100" dirty="0">
-                <a:solidFill>
-                  <a:srgbClr val="7B6B57"/>
-                </a:solidFill>
-                <a:latin typeface="Malgun Gothic" pitchFamily="34" charset="0"/>
-                <a:ea typeface="Malgun Gothic" pitchFamily="34" charset="-122"/>
-                <a:cs typeface="Malgun Gothic" pitchFamily="34" charset="-120"/>
-              </a:rPr>
-              <a:t>   퍼즐 스테이지 설계를 겸함</a:t>
-            </a:r>
-            <a:endParaRPr lang="en-US" sz="1300" dirty="0"/>
-          </a:p>
-        </p:txBody>
-      </p:sp>
-      <p:sp>
-        <p:nvSpPr>
-          <p:cNvPr id="23" name="Shape 21"/>
-          <p:cNvSpPr/>
-          <p:nvPr/>
-        </p:nvSpPr>
-        <p:spPr>
-          <a:xfrm>
-            <a:off x="6766560" y="2286000"/>
-            <a:ext cx="329184" cy="329184"/>
-          </a:xfrm>
-          <a:prstGeom prst="ellipse">
-            <a:avLst/>
-          </a:prstGeom>
-          <a:solidFill>
-            <a:srgbClr val="1F6FE0"/>
-          </a:solidFill>
-          <a:ln w="12700">
-            <a:solidFill>
-              <a:srgbClr val="1F6FE0"/>
-            </a:solidFill>
-            <a:prstDash val="solid"/>
-          </a:ln>
-        </p:spPr>
-      </p:sp>
-      <p:sp>
-        <p:nvSpPr>
-          <p:cNvPr id="24" name="Text 22"/>
-          <p:cNvSpPr txBox="1"/>
-          <p:nvPr/>
-        </p:nvSpPr>
-        <p:spPr>
-          <a:xfrm>
-            <a:off x="6766560" y="2286000"/>
-            <a:ext cx="329184" cy="329184"/>
-          </a:xfrm>
-          <a:prstGeom prst="rect">
-            <a:avLst/>
-          </a:prstGeom>
-          <a:noFill/>
-          <a:ln/>
-        </p:spPr>
-        <p:txBody>
-          <a:bodyPr wrap="square" lIns="0" tIns="0" rIns="0" bIns="0" rtlCol="0" anchor="ctr"/>
-          <a:lstStyle/>
-          <a:p>
-            <a:pPr marL="0" indent="0" algn="ctr">
-              <a:buNone/>
-            </a:pPr>
-            <a:r>
-              <a:rPr lang="en-US" sz="1400" b="1" dirty="0">
-                <a:solidFill>
-                  <a:srgbClr val="FFFFFF"/>
-                </a:solidFill>
-                <a:latin typeface="Malgun Gothic" pitchFamily="34" charset="0"/>
-                <a:ea typeface="Malgun Gothic" pitchFamily="34" charset="-122"/>
-                <a:cs typeface="Malgun Gothic" pitchFamily="34" charset="-120"/>
-              </a:rPr>
-              <a:t>2</a:t>
-            </a:r>
-            <a:endParaRPr lang="en-US" sz="1400" dirty="0"/>
-          </a:p>
-        </p:txBody>
-      </p:sp>
-      <p:sp>
-        <p:nvSpPr>
-          <p:cNvPr id="25" name="Text 23"/>
-          <p:cNvSpPr txBox="1"/>
-          <p:nvPr/>
-        </p:nvSpPr>
-        <p:spPr>
-          <a:xfrm>
-            <a:off x="7223760" y="2304288"/>
-            <a:ext cx="4144975" cy="329184"/>
-          </a:xfrm>
-          <a:prstGeom prst="rect">
-            <a:avLst/>
-          </a:prstGeom>
-          <a:noFill/>
-          <a:ln/>
-        </p:spPr>
-        <p:txBody>
-          <a:bodyPr wrap="square" lIns="0" tIns="0" rIns="0" bIns="0" rtlCol="0" anchor="ctr"/>
-          <a:lstStyle/>
-          <a:p>
-            <a:pPr marL="0" indent="0">
-              <a:buNone/>
-            </a:pPr>
-            <a:r>
-              <a:rPr lang="en-US" sz="1300" b="1" dirty="0">
-                <a:solidFill>
-                  <a:srgbClr val="2B2118"/>
-                </a:solidFill>
-                <a:latin typeface="Malgun Gothic" pitchFamily="34" charset="0"/>
-                <a:ea typeface="Malgun Gothic" pitchFamily="34" charset="-122"/>
-                <a:cs typeface="Malgun Gothic" pitchFamily="34" charset="-120"/>
-              </a:rPr>
-              <a:t>클라이언트</a:t>
-            </a:r>
-            <a:r>
-              <a:rPr lang="en-US" sz="1100" dirty="0">
-                <a:solidFill>
-                  <a:srgbClr val="7B6B57"/>
-                </a:solidFill>
-                <a:latin typeface="Malgun Gothic" pitchFamily="34" charset="0"/>
-                <a:ea typeface="Malgun Gothic" pitchFamily="34" charset="-122"/>
-                <a:cs typeface="Malgun Gothic" pitchFamily="34" charset="-120"/>
-              </a:rPr>
-              <a:t>   물리 · 무리 이동 · 레벨 툴</a:t>
-            </a:r>
-            <a:endParaRPr lang="en-US" sz="1300" dirty="0"/>
-          </a:p>
-        </p:txBody>
-      </p:sp>
-      <p:sp>
-        <p:nvSpPr>
-          <p:cNvPr id="26" name="Shape 24"/>
-          <p:cNvSpPr/>
-          <p:nvPr/>
-        </p:nvSpPr>
-        <p:spPr>
-          <a:xfrm>
-            <a:off x="6766560" y="2788920"/>
-            <a:ext cx="329184" cy="329184"/>
-          </a:xfrm>
-          <a:prstGeom prst="ellipse">
-            <a:avLst/>
-          </a:prstGeom>
-          <a:solidFill>
-            <a:srgbClr val="1FA655"/>
-          </a:solidFill>
-          <a:ln w="12700">
-            <a:solidFill>
-              <a:srgbClr val="1FA655"/>
-            </a:solidFill>
-            <a:prstDash val="solid"/>
-          </a:ln>
-        </p:spPr>
-      </p:sp>
-      <p:sp>
-        <p:nvSpPr>
-          <p:cNvPr id="27" name="Text 25"/>
-          <p:cNvSpPr txBox="1"/>
-          <p:nvPr/>
-        </p:nvSpPr>
-        <p:spPr>
-          <a:xfrm>
-            <a:off x="6766560" y="2788920"/>
-            <a:ext cx="329184" cy="329184"/>
-          </a:xfrm>
-          <a:prstGeom prst="rect">
-            <a:avLst/>
-          </a:prstGeom>
-          <a:noFill/>
-          <a:ln/>
-        </p:spPr>
-        <p:txBody>
-          <a:bodyPr wrap="square" lIns="0" tIns="0" rIns="0" bIns="0" rtlCol="0" anchor="ctr"/>
-          <a:lstStyle/>
-          <a:p>
-            <a:pPr marL="0" indent="0" algn="ctr">
-              <a:buNone/>
-            </a:pPr>
-            <a:r>
-              <a:rPr lang="en-US" sz="1400" b="1" dirty="0">
-                <a:solidFill>
-                  <a:srgbClr val="FFFFFF"/>
-                </a:solidFill>
-                <a:latin typeface="Malgun Gothic" pitchFamily="34" charset="0"/>
-                <a:ea typeface="Malgun Gothic" pitchFamily="34" charset="-122"/>
-                <a:cs typeface="Malgun Gothic" pitchFamily="34" charset="-120"/>
-              </a:rPr>
-              <a:t>3</a:t>
-            </a:r>
-            <a:endParaRPr lang="en-US" sz="1400" dirty="0"/>
-          </a:p>
-        </p:txBody>
-      </p:sp>
-      <p:sp>
-        <p:nvSpPr>
-          <p:cNvPr id="28" name="Text 26"/>
-          <p:cNvSpPr txBox="1"/>
-          <p:nvPr/>
-        </p:nvSpPr>
-        <p:spPr>
-          <a:xfrm>
-            <a:off x="7223760" y="2807208"/>
-            <a:ext cx="4144975" cy="329184"/>
-          </a:xfrm>
-          <a:prstGeom prst="rect">
-            <a:avLst/>
-          </a:prstGeom>
-          <a:noFill/>
-          <a:ln/>
-        </p:spPr>
-        <p:txBody>
-          <a:bodyPr wrap="square" lIns="0" tIns="0" rIns="0" bIns="0" rtlCol="0" anchor="ctr"/>
-          <a:lstStyle/>
-          <a:p>
-            <a:pPr marL="0" indent="0">
-              <a:buNone/>
-            </a:pPr>
-            <a:r>
-              <a:rPr lang="en-US" sz="1300" b="1" dirty="0">
-                <a:solidFill>
-                  <a:srgbClr val="2B2118"/>
-                </a:solidFill>
-                <a:latin typeface="Malgun Gothic" pitchFamily="34" charset="0"/>
-                <a:ea typeface="Malgun Gothic" pitchFamily="34" charset="-122"/>
-                <a:cs typeface="Malgun Gothic" pitchFamily="34" charset="-120"/>
-              </a:rPr>
-              <a:t>아트 · UI</a:t>
-            </a:r>
-            <a:r>
-              <a:rPr lang="en-US" sz="1100" dirty="0">
-                <a:solidFill>
-                  <a:srgbClr val="7B6B57"/>
-                </a:solidFill>
-                <a:latin typeface="Malgun Gothic" pitchFamily="34" charset="0"/>
-                <a:ea typeface="Malgun Gothic" pitchFamily="34" charset="-122"/>
-                <a:cs typeface="Malgun Gothic" pitchFamily="34" charset="-120"/>
-              </a:rPr>
-              <a:t>   손그림 아트 · 연출</a:t>
-            </a:r>
-            <a:endParaRPr lang="en-US" sz="1300" dirty="0"/>
-          </a:p>
-        </p:txBody>
-      </p:sp>
-      <p:sp>
-        <p:nvSpPr>
-          <p:cNvPr id="29" name="Shape 27"/>
-          <p:cNvSpPr/>
-          <p:nvPr/>
-        </p:nvSpPr>
-        <p:spPr>
-          <a:xfrm>
-            <a:off x="6492240" y="3611880"/>
-            <a:ext cx="5150815" cy="2194560"/>
-          </a:xfrm>
-          <a:prstGeom prst="roundRect">
-            <a:avLst>
-              <a:gd name="adj" fmla="val 3333"/>
-            </a:avLst>
-          </a:prstGeom>
-          <a:solidFill>
-            <a:srgbClr val="FAF6EC"/>
-          </a:solidFill>
-          <a:ln w="12700">
-            <a:solidFill>
-              <a:srgbClr val="D8C8A4"/>
-            </a:solidFill>
-            <a:prstDash val="solid"/>
-          </a:ln>
-        </p:spPr>
-      </p:sp>
-      <p:sp>
-        <p:nvSpPr>
-          <p:cNvPr id="30" name="Text 28"/>
-          <p:cNvSpPr txBox="1"/>
-          <p:nvPr/>
-        </p:nvSpPr>
-        <p:spPr>
-          <a:xfrm>
-            <a:off x="6766560" y="3749040"/>
-            <a:ext cx="4602175" cy="292608"/>
-          </a:xfrm>
-          <a:prstGeom prst="rect">
-            <a:avLst/>
-          </a:prstGeom>
-          <a:noFill/>
-          <a:ln/>
-        </p:spPr>
-        <p:txBody>
-          <a:bodyPr wrap="square" lIns="0" tIns="0" rIns="0" bIns="0" rtlCol="0" anchor="t"/>
-          <a:lstStyle/>
-          <a:p>
-            <a:pPr marL="0" indent="0">
-              <a:buNone/>
-            </a:pPr>
-            <a:r>
-              <a:rPr lang="en-US" sz="1300" b="1" dirty="0">
-                <a:solidFill>
-                  <a:srgbClr val="1FA655"/>
-                </a:solidFill>
-                <a:latin typeface="Malgun Gothic" pitchFamily="34" charset="0"/>
-                <a:ea typeface="Malgun Gothic" pitchFamily="34" charset="-122"/>
-                <a:cs typeface="Malgun Gothic" pitchFamily="34" charset="-120"/>
-              </a:rPr>
-              <a:t>다음 단계: 스테이지 · 장치 늘리기</a:t>
-            </a:r>
-            <a:endParaRPr lang="en-US" sz="1300" dirty="0"/>
-          </a:p>
-        </p:txBody>
-      </p:sp>
-      <p:sp>
-        <p:nvSpPr>
-          <p:cNvPr id="31" name="Text 29"/>
-          <p:cNvSpPr txBox="1"/>
-          <p:nvPr/>
-        </p:nvSpPr>
-        <p:spPr>
-          <a:xfrm>
-            <a:off x="6766560" y="4114800"/>
-            <a:ext cx="4602175" cy="1554480"/>
-          </a:xfrm>
-          <a:prstGeom prst="rect">
-            <a:avLst/>
-          </a:prstGeom>
-          <a:noFill/>
-          <a:ln/>
-        </p:spPr>
-        <p:txBody>
-          <a:bodyPr wrap="square" lIns="0" tIns="0" rIns="0" bIns="0" rtlCol="0" anchor="t"/>
-          <a:lstStyle/>
-          <a:p>
-            <a:pPr marL="342900" indent="-342900">
-              <a:spcAft>
-                <a:spcPts val="600"/>
-              </a:spcAft>
-              <a:buSzPct val="100000"/>
-              <a:buChar char="•"/>
-            </a:pPr>
-            <a:r>
-              <a:rPr lang="en-US" sz="1300" dirty="0">
-                <a:solidFill>
-                  <a:srgbClr val="2B2118"/>
-                </a:solidFill>
-                <a:latin typeface="Malgun Gothic" pitchFamily="34" charset="0"/>
-                <a:ea typeface="Malgun Gothic" pitchFamily="34" charset="-122"/>
-                <a:cs typeface="Malgun Gothic" pitchFamily="34" charset="-120"/>
-              </a:rPr>
-              <a:t>레벨 툴로 스테이지를 늘리고, 색 조합 퍼즐을 다양하게</a:t>
-            </a:r>
-            <a:endParaRPr lang="en-US" sz="1300" dirty="0"/>
-          </a:p>
-          <a:p>
-            <a:pPr marL="342900" indent="-342900">
-              <a:spcAft>
-                <a:spcPts val="600"/>
-              </a:spcAft>
-              <a:buSzPct val="100000"/>
-              <a:buChar char="•"/>
-            </a:pPr>
-            <a:r>
-              <a:rPr lang="en-US" sz="1300" dirty="0">
-                <a:solidFill>
-                  <a:srgbClr val="2B2118"/>
-                </a:solidFill>
-                <a:latin typeface="Malgun Gothic" pitchFamily="34" charset="0"/>
-                <a:ea typeface="Malgun Gothic" pitchFamily="34" charset="-122"/>
-                <a:cs typeface="Malgun Gothic" pitchFamily="34" charset="-120"/>
-              </a:rPr>
-              <a:t>새 장치 검토: 체크포인트 · 새 프랍 · 색 투사체 변형</a:t>
-            </a:r>
-            <a:endParaRPr lang="en-US" sz="1300" dirty="0"/>
-          </a:p>
-          <a:p>
-            <a:pPr marL="342900" indent="-342900">
-              <a:spcAft>
-                <a:spcPts val="600"/>
-              </a:spcAft>
-              <a:buSzPct val="100000"/>
-              <a:buChar char="•"/>
-            </a:pPr>
-            <a:r>
-              <a:rPr lang="en-US" sz="1300" dirty="0">
-                <a:solidFill>
-                  <a:srgbClr val="2B2118"/>
-                </a:solidFill>
-                <a:latin typeface="Malgun Gothic" pitchFamily="34" charset="0"/>
-                <a:ea typeface="Malgun Gothic" pitchFamily="34" charset="-122"/>
-                <a:cs typeface="Malgun Gothic" pitchFamily="34" charset="-120"/>
-              </a:rPr>
-              <a:t>데모는 1인 기획·검수 + Claude Code 구현으로 제작</a:t>
-            </a:r>
-            <a:endParaRPr lang="en-US" sz="1300" dirty="0"/>
-          </a:p>
-        </p:txBody>
-      </p:sp>
-      <p:sp>
-        <p:nvSpPr>
-          <p:cNvPr id="32" name="Slide Number Placeholder 0"/>
-          <p:cNvSpPr>
-            <a:spLocks noGrp="1"/>
-          </p:cNvSpPr>
-          <p:nvPr>
-            <p:ph type="sldNum" sz="quarter" idx="4294967295"/>
-          </p:nvPr>
-        </p:nvSpPr>
-        <p:spPr>
-          <a:xfrm>
-            <a:off x="11185855" y="6473952"/>
-            <a:ext cx="457200" cy="274320"/>
-          </a:xfrm>
-          <a:prstGeom prst="rect">
-            <a:avLst/>
-          </a:prstGeom>
-          <a:extLst>
-            <a:ext uri="{C572A759-6A51-4108-AA02-DFA0A04FC94B}">
-              <ma14:wrappingTextBoxFlag xmlns="" xmlns:ma14="http://schemas.microsoft.com/office/mac/drawingml/2011/main" val="0"/>
-            </a:ext>
-          </a:extLst>
-        </p:spPr>
-        <p:txBody>
-          <a:bodyPr/>
-          <a:lstStyle>
-            <a:lvl1pPr>
-              <a:defRPr sz="900">
-                <a:solidFill>
-                  <a:srgbClr val="7B6B57"/>
-                </a:solidFill>
-                <a:latin typeface="Malgun Gothic"/>
-                <a:ea typeface="Malgun Gothic"/>
-                <a:cs typeface="Malgun Gothic"/>
-              </a:defRPr>
-            </a:lvl1pPr>
-          </a:lstStyle>
-          <a:p>
-            <a:pPr algn="r"/>
-            <a:fld id="{F7021451-1387-4CA6-816F-3879F97B5CBC}" type="slidenum">
-              <a:rPr lang="en-US" b="0"/>
-              <a:t>10</a:t>
-            </a:fld>
-            <a:endParaRPr lang="en-US"/>
-          </a:p>
-        </p:txBody>
-      </p:sp>
-    </p:spTree>
-  </p:cSld>
-  <p:clrMapOvr>
-    <a:masterClrMapping/>
-  </p:clrMapOvr>
-</p:sld>
-</file>
-
-<file path=ppt/slides/slide11.xml><?xml version="1.0" encoding="utf-8"?>
-<p:sld xmlns:a="http://schemas.openxmlformats.org/drawingml/2006/main" xmlns:r="http://schemas.openxmlformats.org/officeDocument/2006/relationships" xmlns:p="http://schemas.openxmlformats.org/presentationml/2006/main">
-  <p:cSld name="Slide 11">
-    <p:spTree>
-      <p:nvGrpSpPr>
-        <p:cNvPr id="1" name=""/>
-        <p:cNvGrpSpPr/>
-        <p:nvPr/>
-      </p:nvGrpSpPr>
-      <p:grpSpPr>
-        <a:xfrm>
-          <a:off x="0" y="0"/>
-          <a:ext cx="0" cy="0"/>
-          <a:chOff x="0" y="0"/>
-          <a:chExt cx="0" cy="0"/>
-        </a:xfrm>
-      </p:grpSpPr>
-      <p:sp>
-        <p:nvSpPr>
-          <p:cNvPr id="2" name="Text 1"/>
-          <p:cNvSpPr>
-            <a:spLocks noGrp="1"/>
-          </p:cNvSpPr>
-          <p:nvPr>
-            <p:ph type="title" idx="101" hasCustomPrompt="1"/>
-          </p:nvPr>
-        </p:nvSpPr>
-        <p:spPr>
-          <a:xfrm>
-            <a:off x="548640" y="292608"/>
-            <a:ext cx="11094415" cy="685800"/>
-          </a:xfrm>
-          <a:prstGeom prst="rect">
-            <a:avLst/>
-          </a:prstGeom>
-          <a:noFill/>
-          <a:ln/>
-        </p:spPr>
-        <p:txBody>
-          <a:bodyPr wrap="square" lIns="0" tIns="0" rIns="0" bIns="0" rtlCol="0" anchor="ctr"/>
-          <a:lstStyle/>
-          <a:p>
-            <a:pPr marL="0" indent="0" algn="l">
-              <a:buNone/>
-            </a:pPr>
-            <a:r>
-              <a:rPr lang="en-US" sz="2800" b="1" dirty="0">
-                <a:solidFill>
-                  <a:srgbClr val="2B2118"/>
-                </a:solidFill>
-                <a:latin typeface="Batang" pitchFamily="34" charset="0"/>
-                <a:ea typeface="Batang" pitchFamily="34" charset="-122"/>
-                <a:cs typeface="Batang" pitchFamily="34" charset="-120"/>
-              </a:rPr>
-              <a:t>이제 직접 보여 드릴게요</a:t>
-            </a:r>
-            <a:endParaRPr lang="en-US" sz="2800" dirty="0"/>
-          </a:p>
-        </p:txBody>
-      </p:sp>
-      <p:pic>
-        <p:nvPicPr>
-          <p:cNvPr id="3" name="Image 0" descr="D:\stopsketch\데모제출\2_대표이미지\06_줄지어_튕겨올라_공중물방울_깨우기.png"/>
-          <p:cNvPicPr>
-            <a:picLocks noChangeAspect="1"/>
-          </p:cNvPicPr>
-          <p:nvPr/>
-        </p:nvPicPr>
-        <p:blipFill>
-          <a:blip r:embed="rId3"/>
-          <a:stretch>
-            <a:fillRect/>
-          </a:stretch>
-        </p:blipFill>
-        <p:spPr>
-          <a:xfrm>
-            <a:off x="5608015" y="1234440"/>
-            <a:ext cx="6035040" cy="3394710"/>
-          </a:xfrm>
-          <a:prstGeom prst="rect">
-            <a:avLst/>
-          </a:prstGeom>
-        </p:spPr>
-      </p:pic>
-      <p:sp>
-        <p:nvSpPr>
-          <p:cNvPr id="4" name="Shape 1"/>
-          <p:cNvSpPr/>
-          <p:nvPr/>
-        </p:nvSpPr>
-        <p:spPr>
-          <a:xfrm>
-            <a:off x="5608015" y="1234440"/>
-            <a:ext cx="6035040" cy="3394710"/>
-          </a:xfrm>
-          <a:prstGeom prst="rect">
-            <a:avLst/>
-          </a:prstGeom>
-          <a:ln w="12700">
-            <a:solidFill>
-              <a:srgbClr val="D8C8A4"/>
-            </a:solidFill>
-            <a:prstDash val="solid"/>
-          </a:ln>
-        </p:spPr>
-      </p:sp>
-      <p:sp>
-        <p:nvSpPr>
-          <p:cNvPr id="5" name="Text 2"/>
-          <p:cNvSpPr txBox="1"/>
-          <p:nvPr/>
-        </p:nvSpPr>
-        <p:spPr>
-          <a:xfrm>
-            <a:off x="548640" y="1280160"/>
-            <a:ext cx="4572000" cy="292608"/>
-          </a:xfrm>
-          <a:prstGeom prst="rect">
-            <a:avLst/>
-          </a:prstGeom>
-          <a:noFill/>
-          <a:ln/>
-        </p:spPr>
-        <p:txBody>
-          <a:bodyPr wrap="square" lIns="0" tIns="0" rIns="0" bIns="0" rtlCol="0" anchor="t"/>
-          <a:lstStyle/>
-          <a:p>
-            <a:pPr marL="0" indent="0">
-              <a:buNone/>
-            </a:pPr>
-            <a:r>
-              <a:rPr lang="en-US" sz="1300" b="1" dirty="0">
-                <a:solidFill>
-                  <a:srgbClr val="1F6FE0"/>
-                </a:solidFill>
-                <a:latin typeface="Malgun Gothic" pitchFamily="34" charset="0"/>
-                <a:ea typeface="Malgun Gothic" pitchFamily="34" charset="-122"/>
-                <a:cs typeface="Malgun Gothic" pitchFamily="34" charset="-120"/>
-              </a:rPr>
-              <a:t>시연에서 볼 것</a:t>
-            </a:r>
-            <a:endParaRPr lang="en-US" sz="1300" dirty="0"/>
-          </a:p>
-        </p:txBody>
-      </p:sp>
-      <p:sp>
-        <p:nvSpPr>
-          <p:cNvPr id="6" name="Shape 3"/>
-          <p:cNvSpPr/>
-          <p:nvPr/>
-        </p:nvSpPr>
-        <p:spPr>
-          <a:xfrm>
-            <a:off x="548640" y="1737360"/>
-            <a:ext cx="384048" cy="384048"/>
-          </a:xfrm>
-          <a:prstGeom prst="ellipse">
-            <a:avLst/>
-          </a:prstGeom>
-          <a:solidFill>
-            <a:srgbClr val="1F6FE0"/>
-          </a:solidFill>
-          <a:ln w="12700">
-            <a:solidFill>
-              <a:srgbClr val="1F6FE0"/>
-            </a:solidFill>
-            <a:prstDash val="solid"/>
-          </a:ln>
-        </p:spPr>
-      </p:sp>
-      <p:sp>
-        <p:nvSpPr>
-          <p:cNvPr id="7" name="Text 4"/>
-          <p:cNvSpPr txBox="1"/>
-          <p:nvPr/>
-        </p:nvSpPr>
-        <p:spPr>
-          <a:xfrm>
-            <a:off x="548640" y="1737360"/>
-            <a:ext cx="384048" cy="384048"/>
-          </a:xfrm>
-          <a:prstGeom prst="rect">
-            <a:avLst/>
-          </a:prstGeom>
-          <a:noFill/>
-          <a:ln/>
-        </p:spPr>
-        <p:txBody>
-          <a:bodyPr wrap="square" lIns="0" tIns="0" rIns="0" bIns="0" rtlCol="0" anchor="ctr"/>
-          <a:lstStyle/>
-          <a:p>
-            <a:pPr marL="0" indent="0" algn="ctr">
-              <a:buNone/>
-            </a:pPr>
-            <a:r>
-              <a:rPr lang="en-US" sz="1400" b="1" dirty="0">
-                <a:solidFill>
-                  <a:srgbClr val="FFFFFF"/>
-                </a:solidFill>
-                <a:latin typeface="Malgun Gothic" pitchFamily="34" charset="0"/>
-                <a:ea typeface="Malgun Gothic" pitchFamily="34" charset="-122"/>
-                <a:cs typeface="Malgun Gothic" pitchFamily="34" charset="-120"/>
-              </a:rPr>
-              <a:t>1</a:t>
-            </a:r>
-            <a:endParaRPr lang="en-US" sz="1400" dirty="0"/>
-          </a:p>
-        </p:txBody>
-      </p:sp>
-      <p:sp>
-        <p:nvSpPr>
-          <p:cNvPr id="8" name="Text 5"/>
-          <p:cNvSpPr txBox="1"/>
-          <p:nvPr/>
-        </p:nvSpPr>
-        <p:spPr>
-          <a:xfrm>
-            <a:off x="1097280" y="1755648"/>
-            <a:ext cx="4389120" cy="347472"/>
-          </a:xfrm>
-          <a:prstGeom prst="rect">
-            <a:avLst/>
-          </a:prstGeom>
-          <a:noFill/>
-          <a:ln/>
-        </p:spPr>
-        <p:txBody>
-          <a:bodyPr wrap="square" lIns="0" tIns="0" rIns="0" bIns="0" rtlCol="0" anchor="t"/>
-          <a:lstStyle/>
-          <a:p>
-            <a:pPr marL="0" indent="0">
-              <a:buNone/>
-            </a:pPr>
-            <a:r>
-              <a:rPr lang="en-US" sz="1700" b="1" dirty="0">
-                <a:solidFill>
-                  <a:srgbClr val="2B2118"/>
-                </a:solidFill>
-                <a:latin typeface="Batang" pitchFamily="34" charset="0"/>
-                <a:ea typeface="Batang" pitchFamily="34" charset="-122"/>
-                <a:cs typeface="Batang" pitchFamily="34" charset="-120"/>
-              </a:rPr>
-              <a:t>멈추고 그리기</a:t>
-            </a:r>
-            <a:endParaRPr lang="en-US" sz="1700" dirty="0"/>
-          </a:p>
-        </p:txBody>
-      </p:sp>
-      <p:sp>
-        <p:nvSpPr>
-          <p:cNvPr id="9" name="Text 6"/>
-          <p:cNvSpPr txBox="1"/>
-          <p:nvPr/>
-        </p:nvSpPr>
-        <p:spPr>
-          <a:xfrm>
-            <a:off x="1097280" y="2148840"/>
-            <a:ext cx="4389120" cy="594360"/>
-          </a:xfrm>
-          <a:prstGeom prst="rect">
-            <a:avLst/>
-          </a:prstGeom>
-          <a:noFill/>
-          <a:ln/>
-        </p:spPr>
-        <p:txBody>
-          <a:bodyPr wrap="square" lIns="0" tIns="0" rIns="0" bIns="0" rtlCol="0" anchor="t"/>
-          <a:lstStyle/>
-          <a:p>
-            <a:pPr marL="0" indent="0">
-              <a:buNone/>
-            </a:pPr>
-            <a:r>
-              <a:rPr lang="en-US" sz="1250" dirty="0">
-                <a:solidFill>
-                  <a:srgbClr val="2B2118"/>
-                </a:solidFill>
-                <a:latin typeface="Malgun Gothic" pitchFamily="34" charset="0"/>
-                <a:ea typeface="Malgun Gothic" pitchFamily="34" charset="-122"/>
-                <a:cs typeface="Malgun Gothic" pitchFamily="34" charset="-120"/>
-              </a:rPr>
-              <a:t>스페이스로 시간을 멈추고, 색을 골라 길을 그린다</a:t>
-            </a:r>
-            <a:endParaRPr lang="en-US" sz="1250" dirty="0"/>
-          </a:p>
-        </p:txBody>
-      </p:sp>
-      <p:sp>
-        <p:nvSpPr>
-          <p:cNvPr id="10" name="Shape 7"/>
-          <p:cNvSpPr/>
-          <p:nvPr/>
-        </p:nvSpPr>
-        <p:spPr>
-          <a:xfrm>
-            <a:off x="548640" y="2834640"/>
-            <a:ext cx="384048" cy="384048"/>
-          </a:xfrm>
-          <a:prstGeom prst="ellipse">
-            <a:avLst/>
-          </a:prstGeom>
-          <a:solidFill>
-            <a:srgbClr val="E0312B"/>
-          </a:solidFill>
-          <a:ln w="12700">
-            <a:solidFill>
-              <a:srgbClr val="E0312B"/>
-            </a:solidFill>
-            <a:prstDash val="solid"/>
-          </a:ln>
-        </p:spPr>
-      </p:sp>
-      <p:sp>
-        <p:nvSpPr>
-          <p:cNvPr id="11" name="Text 8"/>
-          <p:cNvSpPr txBox="1"/>
-          <p:nvPr/>
-        </p:nvSpPr>
-        <p:spPr>
-          <a:xfrm>
-            <a:off x="548640" y="2834640"/>
-            <a:ext cx="384048" cy="384048"/>
-          </a:xfrm>
-          <a:prstGeom prst="rect">
-            <a:avLst/>
-          </a:prstGeom>
-          <a:noFill/>
-          <a:ln/>
-        </p:spPr>
-        <p:txBody>
-          <a:bodyPr wrap="square" lIns="0" tIns="0" rIns="0" bIns="0" rtlCol="0" anchor="ctr"/>
-          <a:lstStyle/>
-          <a:p>
-            <a:pPr marL="0" indent="0" algn="ctr">
-              <a:buNone/>
-            </a:pPr>
-            <a:r>
-              <a:rPr lang="en-US" sz="1400" b="1" dirty="0">
-                <a:solidFill>
-                  <a:srgbClr val="FFFFFF"/>
-                </a:solidFill>
-                <a:latin typeface="Malgun Gothic" pitchFamily="34" charset="0"/>
-                <a:ea typeface="Malgun Gothic" pitchFamily="34" charset="-122"/>
-                <a:cs typeface="Malgun Gothic" pitchFamily="34" charset="-120"/>
-              </a:rPr>
-              <a:t>2</a:t>
-            </a:r>
-            <a:endParaRPr lang="en-US" sz="1400" dirty="0"/>
-          </a:p>
-        </p:txBody>
-      </p:sp>
-      <p:sp>
-        <p:nvSpPr>
-          <p:cNvPr id="12" name="Text 9"/>
-          <p:cNvSpPr txBox="1"/>
-          <p:nvPr/>
-        </p:nvSpPr>
-        <p:spPr>
-          <a:xfrm>
-            <a:off x="1097280" y="2852928"/>
-            <a:ext cx="4389120" cy="347472"/>
-          </a:xfrm>
-          <a:prstGeom prst="rect">
-            <a:avLst/>
-          </a:prstGeom>
-          <a:noFill/>
-          <a:ln/>
-        </p:spPr>
-        <p:txBody>
-          <a:bodyPr wrap="square" lIns="0" tIns="0" rIns="0" bIns="0" rtlCol="0" anchor="t"/>
-          <a:lstStyle/>
-          <a:p>
-            <a:pPr marL="0" indent="0">
-              <a:buNone/>
-            </a:pPr>
-            <a:r>
-              <a:rPr lang="en-US" sz="1700" b="1" dirty="0">
-                <a:solidFill>
-                  <a:srgbClr val="2B2118"/>
-                </a:solidFill>
-                <a:latin typeface="Batang" pitchFamily="34" charset="0"/>
-                <a:ea typeface="Batang" pitchFamily="34" charset="-122"/>
-                <a:cs typeface="Batang" pitchFamily="34" charset="-120"/>
-              </a:rPr>
-              <a:t>선이 떨어진다</a:t>
-            </a:r>
-            <a:endParaRPr lang="en-US" sz="1700" dirty="0"/>
-          </a:p>
-        </p:txBody>
-      </p:sp>
-      <p:sp>
-        <p:nvSpPr>
-          <p:cNvPr id="13" name="Text 10"/>
-          <p:cNvSpPr txBox="1"/>
-          <p:nvPr/>
-        </p:nvSpPr>
-        <p:spPr>
-          <a:xfrm>
-            <a:off x="1097280" y="3246120"/>
-            <a:ext cx="4389120" cy="594360"/>
-          </a:xfrm>
-          <a:prstGeom prst="rect">
-            <a:avLst/>
-          </a:prstGeom>
-          <a:noFill/>
-          <a:ln/>
-        </p:spPr>
-        <p:txBody>
-          <a:bodyPr wrap="square" lIns="0" tIns="0" rIns="0" bIns="0" rtlCol="0" anchor="t"/>
-          <a:lstStyle/>
-          <a:p>
-            <a:pPr marL="0" indent="0">
-              <a:buNone/>
-            </a:pPr>
-            <a:r>
-              <a:rPr lang="en-US" sz="1250" dirty="0">
-                <a:solidFill>
-                  <a:srgbClr val="2B2118"/>
-                </a:solidFill>
-                <a:latin typeface="Malgun Gothic" pitchFamily="34" charset="0"/>
-                <a:ea typeface="Malgun Gothic" pitchFamily="34" charset="-122"/>
-                <a:cs typeface="Malgun Gothic" pitchFamily="34" charset="-120"/>
-              </a:rPr>
-              <a:t>재생하면 그린 선이 떨어져 걸쳐지고, 색마다 튕기고 · 빨라지고 · 떠오른다</a:t>
-            </a:r>
-            <a:endParaRPr lang="en-US" sz="1250" dirty="0"/>
-          </a:p>
-        </p:txBody>
-      </p:sp>
-      <p:sp>
-        <p:nvSpPr>
-          <p:cNvPr id="14" name="Shape 11"/>
-          <p:cNvSpPr/>
-          <p:nvPr/>
-        </p:nvSpPr>
-        <p:spPr>
-          <a:xfrm>
-            <a:off x="548640" y="3931920"/>
-            <a:ext cx="384048" cy="384048"/>
-          </a:xfrm>
-          <a:prstGeom prst="ellipse">
-            <a:avLst/>
-          </a:prstGeom>
-          <a:solidFill>
-            <a:srgbClr val="1FA655"/>
-          </a:solidFill>
-          <a:ln w="12700">
-            <a:solidFill>
-              <a:srgbClr val="1FA655"/>
-            </a:solidFill>
-            <a:prstDash val="solid"/>
-          </a:ln>
-        </p:spPr>
-      </p:sp>
-      <p:sp>
-        <p:nvSpPr>
-          <p:cNvPr id="15" name="Text 12"/>
-          <p:cNvSpPr txBox="1"/>
-          <p:nvPr/>
-        </p:nvSpPr>
-        <p:spPr>
-          <a:xfrm>
-            <a:off x="548640" y="3931920"/>
-            <a:ext cx="384048" cy="384048"/>
-          </a:xfrm>
-          <a:prstGeom prst="rect">
-            <a:avLst/>
-          </a:prstGeom>
-          <a:noFill/>
-          <a:ln/>
-        </p:spPr>
-        <p:txBody>
-          <a:bodyPr wrap="square" lIns="0" tIns="0" rIns="0" bIns="0" rtlCol="0" anchor="ctr"/>
-          <a:lstStyle/>
-          <a:p>
-            <a:pPr marL="0" indent="0" algn="ctr">
-              <a:buNone/>
-            </a:pPr>
-            <a:r>
-              <a:rPr lang="en-US" sz="1400" b="1" dirty="0">
-                <a:solidFill>
-                  <a:srgbClr val="FFFFFF"/>
-                </a:solidFill>
-                <a:latin typeface="Malgun Gothic" pitchFamily="34" charset="0"/>
-                <a:ea typeface="Malgun Gothic" pitchFamily="34" charset="-122"/>
-                <a:cs typeface="Malgun Gothic" pitchFamily="34" charset="-120"/>
-              </a:rPr>
-              <a:t>3</a:t>
-            </a:r>
-            <a:endParaRPr lang="en-US" sz="1400" dirty="0"/>
-          </a:p>
-        </p:txBody>
-      </p:sp>
-      <p:sp>
-        <p:nvSpPr>
-          <p:cNvPr id="16" name="Text 13"/>
-          <p:cNvSpPr txBox="1"/>
-          <p:nvPr/>
-        </p:nvSpPr>
-        <p:spPr>
-          <a:xfrm>
-            <a:off x="1097280" y="3950208"/>
-            <a:ext cx="4389120" cy="347472"/>
-          </a:xfrm>
-          <a:prstGeom prst="rect">
-            <a:avLst/>
-          </a:prstGeom>
-          <a:noFill/>
-          <a:ln/>
-        </p:spPr>
-        <p:txBody>
-          <a:bodyPr wrap="square" lIns="0" tIns="0" rIns="0" bIns="0" rtlCol="0" anchor="t"/>
-          <a:lstStyle/>
-          <a:p>
-            <a:pPr marL="0" indent="0">
-              <a:buNone/>
-            </a:pPr>
-            <a:r>
-              <a:rPr lang="en-US" sz="1700" b="1" dirty="0">
-                <a:solidFill>
-                  <a:srgbClr val="2B2118"/>
-                </a:solidFill>
-                <a:latin typeface="Batang" pitchFamily="34" charset="0"/>
-                <a:ea typeface="Batang" pitchFamily="34" charset="-122"/>
-                <a:cs typeface="Batang" pitchFamily="34" charset="-120"/>
-              </a:rPr>
-              <a:t>무리가 따라온다</a:t>
-            </a:r>
-            <a:endParaRPr lang="en-US" sz="1700" dirty="0"/>
-          </a:p>
-        </p:txBody>
-      </p:sp>
-      <p:sp>
-        <p:nvSpPr>
-          <p:cNvPr id="17" name="Text 14"/>
-          <p:cNvSpPr txBox="1"/>
-          <p:nvPr/>
-        </p:nvSpPr>
-        <p:spPr>
-          <a:xfrm>
-            <a:off x="1097280" y="4343400"/>
-            <a:ext cx="4389120" cy="594360"/>
-          </a:xfrm>
-          <a:prstGeom prst="rect">
-            <a:avLst/>
-          </a:prstGeom>
-          <a:noFill/>
-          <a:ln/>
-        </p:spPr>
-        <p:txBody>
-          <a:bodyPr wrap="square" lIns="0" tIns="0" rIns="0" bIns="0" rtlCol="0" anchor="t"/>
-          <a:lstStyle/>
-          <a:p>
-            <a:pPr marL="0" indent="0">
-              <a:buNone/>
-            </a:pPr>
-            <a:r>
-              <a:rPr lang="en-US" sz="1250" dirty="0">
-                <a:solidFill>
-                  <a:srgbClr val="2B2118"/>
-                </a:solidFill>
-                <a:latin typeface="Malgun Gothic" pitchFamily="34" charset="0"/>
-                <a:ea typeface="Malgun Gothic" pitchFamily="34" charset="-122"/>
-                <a:cs typeface="Malgun Gothic" pitchFamily="34" charset="-120"/>
-              </a:rPr>
-              <a:t>물방울들이 줄지어 함께 움직이고, 검은 잉크병이 맑아진다</a:t>
-            </a:r>
-            <a:endParaRPr lang="en-US" sz="1250" dirty="0"/>
-          </a:p>
-        </p:txBody>
-      </p:sp>
-      <p:sp>
-        <p:nvSpPr>
-          <p:cNvPr id="18" name="Shape 15"/>
-          <p:cNvSpPr/>
-          <p:nvPr/>
-        </p:nvSpPr>
-        <p:spPr>
-          <a:xfrm>
-            <a:off x="548640" y="5120640"/>
-            <a:ext cx="11094415" cy="685800"/>
-          </a:xfrm>
-          <a:prstGeom prst="roundRect">
-            <a:avLst>
-              <a:gd name="adj" fmla="val 10667"/>
-            </a:avLst>
-          </a:prstGeom>
-          <a:solidFill>
-            <a:srgbClr val="FFFFFF"/>
-          </a:solidFill>
-          <a:ln w="12700">
-            <a:solidFill>
-              <a:srgbClr val="D8C8A4"/>
-            </a:solidFill>
-            <a:prstDash val="solid"/>
-          </a:ln>
-        </p:spPr>
-      </p:sp>
-      <p:sp>
-        <p:nvSpPr>
-          <p:cNvPr id="19" name="Text 16"/>
-          <p:cNvSpPr txBox="1"/>
-          <p:nvPr/>
-        </p:nvSpPr>
-        <p:spPr>
-          <a:xfrm>
-            <a:off x="822960" y="5120640"/>
-            <a:ext cx="10545775" cy="685800"/>
-          </a:xfrm>
-          <a:prstGeom prst="rect">
-            <a:avLst/>
-          </a:prstGeom>
-          <a:noFill/>
-          <a:ln/>
-        </p:spPr>
-        <p:txBody>
-          <a:bodyPr wrap="square" lIns="0" tIns="0" rIns="0" bIns="0" rtlCol="0" anchor="ctr"/>
-          <a:lstStyle/>
-          <a:p>
-            <a:pPr marL="0" indent="0">
-              <a:buNone/>
-            </a:pPr>
-            <a:r>
-              <a:rPr lang="en-US" sz="1200" dirty="0">
-                <a:solidFill>
-                  <a:srgbClr val="7B6B57"/>
-                </a:solidFill>
-                <a:latin typeface="Malgun Gothic" pitchFamily="34" charset="0"/>
-                <a:ea typeface="Malgun Gothic" pitchFamily="34" charset="-122"/>
-                <a:cs typeface="Malgun Gothic" pitchFamily="34" charset="-120"/>
-              </a:rPr>
-              <a:t>실행: HTML 한 파일 (Chrome) · 설치 없음      조작: 드래그 그리기 · 스페이스 정지 · 우클릭 빨아들이기 · 1~5 물감 · 휠 줌</a:t>
-            </a:r>
-            <a:endParaRPr lang="en-US" sz="1200" dirty="0"/>
-          </a:p>
-        </p:txBody>
-      </p:sp>
-      <p:sp>
-        <p:nvSpPr>
-          <p:cNvPr id="25" name="Slide Number Placeholder 0"/>
-          <p:cNvSpPr>
-            <a:spLocks noGrp="1"/>
-          </p:cNvSpPr>
-          <p:nvPr>
-            <p:ph type="sldNum" sz="quarter" idx="4294967295"/>
-          </p:nvPr>
-        </p:nvSpPr>
-        <p:spPr>
-          <a:xfrm>
-            <a:off x="11185855" y="6473952"/>
-            <a:ext cx="457200" cy="274320"/>
-          </a:xfrm>
-          <a:prstGeom prst="rect">
-            <a:avLst/>
-          </a:prstGeom>
-          <a:extLst>
-            <a:ext uri="{C572A759-6A51-4108-AA02-DFA0A04FC94B}">
-              <ma14:wrappingTextBoxFlag xmlns="" xmlns:ma14="http://schemas.microsoft.com/office/mac/drawingml/2011/main" val="0"/>
-            </a:ext>
-          </a:extLst>
-        </p:spPr>
-        <p:txBody>
-          <a:bodyPr/>
-          <a:lstStyle>
-            <a:lvl1pPr>
-              <a:defRPr sz="900">
-                <a:solidFill>
-                  <a:srgbClr val="7B6B57"/>
-                </a:solidFill>
-                <a:latin typeface="Malgun Gothic"/>
-                <a:ea typeface="Malgun Gothic"/>
-                <a:cs typeface="Malgun Gothic"/>
-              </a:defRPr>
-            </a:lvl1pPr>
-          </a:lstStyle>
-          <a:p>
-            <a:pPr algn="r"/>
-            <a:fld id="{F7021451-1387-4CA6-816F-3879F97B5CBC}" type="slidenum">
-              <a:rPr lang="en-US" b="0"/>
-              <a:t>11</a:t>
-            </a:fld>
-            <a:endParaRPr lang="en-US"/>
-          </a:p>
-        </p:txBody>
-      </p:sp>
-    </p:spTree>
-  </p:cSld>
-  <p:clrMapOvr>
-    <a:masterClrMapping/>
-  </p:clrMapOvr>
-</p:sld>
-</file>
-
 <file path=ppt/slides/slide2.xml><?xml version="1.0" encoding="utf-8"?>
 <p:sld xmlns:a="http://schemas.openxmlformats.org/drawingml/2006/main" xmlns:r="http://schemas.openxmlformats.org/officeDocument/2006/relationships" xmlns:p="http://schemas.openxmlformats.org/presentationml/2006/main">
   <p:cSld name="Slide 2">
@@ -8188,7 +6064,7 @@
         </p:nvSpPr>
         <p:spPr>
           <a:xfrm>
-            <a:off x="777240" y="1554480"/>
+            <a:off x="777240" y="1653870"/>
             <a:ext cx="2468880" cy="640080"/>
           </a:xfrm>
           <a:prstGeom prst="rect">
@@ -8332,7 +6208,7 @@
         </p:nvSpPr>
         <p:spPr>
           <a:xfrm>
-            <a:off x="3794760" y="1554480"/>
+            <a:off x="3794760" y="1653870"/>
             <a:ext cx="2468880" cy="640080"/>
           </a:xfrm>
           <a:prstGeom prst="rect">
@@ -8476,7 +6352,7 @@
         </p:nvSpPr>
         <p:spPr>
           <a:xfrm>
-            <a:off x="777240" y="3794760"/>
+            <a:off x="777240" y="3894150"/>
             <a:ext cx="2468880" cy="640080"/>
           </a:xfrm>
           <a:prstGeom prst="rect">
@@ -8620,7 +6496,7 @@
         </p:nvSpPr>
         <p:spPr>
           <a:xfrm>
-            <a:off x="3794760" y="3794760"/>
+            <a:off x="3794760" y="3894150"/>
             <a:ext cx="2468880" cy="640080"/>
           </a:xfrm>
           <a:prstGeom prst="rect">
@@ -8764,7 +6640,7 @@
         </p:nvSpPr>
         <p:spPr>
           <a:xfrm>
-            <a:off x="6995160" y="1371600"/>
+            <a:off x="6995160" y="1431234"/>
             <a:ext cx="2743200" cy="274320"/>
           </a:xfrm>
           <a:prstGeom prst="rect">
@@ -8868,7 +6744,7 @@
         </p:nvSpPr>
         <p:spPr>
           <a:xfrm>
-            <a:off x="6995160" y="3337560"/>
+            <a:off x="6995160" y="3397194"/>
             <a:ext cx="2743200" cy="274320"/>
           </a:xfrm>
           <a:prstGeom prst="rect">
@@ -9239,6 +7115,1495 @@
 </file>
 
 <file path=ppt/slides/slide5.xml><?xml version="1.0" encoding="utf-8"?>
+<p:sld xmlns:a="http://schemas.openxmlformats.org/drawingml/2006/main" xmlns:r="http://schemas.openxmlformats.org/officeDocument/2006/relationships" xmlns:p="http://schemas.openxmlformats.org/presentationml/2006/main">
+  <p:cSld name="Slide 6">
+    <p:spTree>
+      <p:nvGrpSpPr>
+        <p:cNvPr id="1" name=""/>
+        <p:cNvGrpSpPr/>
+        <p:nvPr/>
+      </p:nvGrpSpPr>
+      <p:grpSpPr>
+        <a:xfrm>
+          <a:off x="0" y="0"/>
+          <a:ext cx="0" cy="0"/>
+          <a:chOff x="0" y="0"/>
+          <a:chExt cx="0" cy="0"/>
+        </a:xfrm>
+      </p:grpSpPr>
+      <p:sp>
+        <p:nvSpPr>
+          <p:cNvPr id="2" name="Text 1"/>
+          <p:cNvSpPr>
+            <a:spLocks noGrp="1"/>
+          </p:cNvSpPr>
+          <p:nvPr>
+            <p:ph type="title" idx="101" hasCustomPrompt="1"/>
+          </p:nvPr>
+        </p:nvSpPr>
+        <p:spPr>
+          <a:xfrm>
+            <a:off x="548640" y="292608"/>
+            <a:ext cx="11094415" cy="685800"/>
+          </a:xfrm>
+          <a:prstGeom prst="rect">
+            <a:avLst/>
+          </a:prstGeom>
+          <a:noFill/>
+          <a:ln/>
+        </p:spPr>
+        <p:txBody>
+          <a:bodyPr wrap="square" lIns="0" tIns="0" rIns="0" bIns="0" rtlCol="0" anchor="ctr"/>
+          <a:lstStyle/>
+          <a:p>
+            <a:pPr marL="0" indent="0" algn="l">
+              <a:buNone/>
+            </a:pPr>
+            <a:r>
+              <a:rPr lang="ko-KR" altLang="en-US" sz="2800" b="1" dirty="0">
+                <a:solidFill>
+                  <a:srgbClr val="2B2118"/>
+                </a:solidFill>
+                <a:latin typeface="Batang" pitchFamily="34" charset="0"/>
+                <a:ea typeface="Batang" pitchFamily="34" charset="-122"/>
+                <a:cs typeface="Batang" pitchFamily="34" charset="-120"/>
+              </a:rPr>
+              <a:t>진행 흐름</a:t>
+            </a:r>
+            <a:endParaRPr lang="en-US" sz="2800" dirty="0"/>
+          </a:p>
+        </p:txBody>
+      </p:sp>
+      <p:sp>
+        <p:nvSpPr>
+          <p:cNvPr id="3" name="Shape 1"/>
+          <p:cNvSpPr/>
+          <p:nvPr/>
+        </p:nvSpPr>
+        <p:spPr>
+          <a:xfrm>
+            <a:off x="548640" y="1371600"/>
+            <a:ext cx="329184" cy="329184"/>
+          </a:xfrm>
+          <a:prstGeom prst="ellipse">
+            <a:avLst/>
+          </a:prstGeom>
+          <a:solidFill>
+            <a:srgbClr val="1F6FE0"/>
+          </a:solidFill>
+          <a:ln w="12700">
+            <a:solidFill>
+              <a:srgbClr val="1F6FE0"/>
+            </a:solidFill>
+            <a:prstDash val="solid"/>
+          </a:ln>
+        </p:spPr>
+      </p:sp>
+      <p:sp>
+        <p:nvSpPr>
+          <p:cNvPr id="4" name="Text 2"/>
+          <p:cNvSpPr txBox="1"/>
+          <p:nvPr/>
+        </p:nvSpPr>
+        <p:spPr>
+          <a:xfrm>
+            <a:off x="548640" y="1371600"/>
+            <a:ext cx="329184" cy="329184"/>
+          </a:xfrm>
+          <a:prstGeom prst="rect">
+            <a:avLst/>
+          </a:prstGeom>
+          <a:noFill/>
+          <a:ln/>
+        </p:spPr>
+        <p:txBody>
+          <a:bodyPr wrap="square" lIns="0" tIns="0" rIns="0" bIns="0" rtlCol="0" anchor="ctr"/>
+          <a:lstStyle/>
+          <a:p>
+            <a:pPr marL="0" indent="0" algn="ctr">
+              <a:buNone/>
+            </a:pPr>
+            <a:r>
+              <a:rPr lang="en-US" sz="1400" b="1" dirty="0">
+                <a:solidFill>
+                  <a:srgbClr val="FFFFFF"/>
+                </a:solidFill>
+                <a:latin typeface="Malgun Gothic" pitchFamily="34" charset="0"/>
+                <a:ea typeface="Malgun Gothic" pitchFamily="34" charset="-122"/>
+                <a:cs typeface="Malgun Gothic" pitchFamily="34" charset="-120"/>
+              </a:rPr>
+              <a:t>1</a:t>
+            </a:r>
+            <a:endParaRPr lang="en-US" sz="1400" dirty="0"/>
+          </a:p>
+        </p:txBody>
+      </p:sp>
+      <p:sp>
+        <p:nvSpPr>
+          <p:cNvPr id="5" name="Text 3"/>
+          <p:cNvSpPr txBox="1"/>
+          <p:nvPr/>
+        </p:nvSpPr>
+        <p:spPr>
+          <a:xfrm>
+            <a:off x="960120" y="1439583"/>
+            <a:ext cx="2190674" cy="310896"/>
+          </a:xfrm>
+          <a:prstGeom prst="rect">
+            <a:avLst/>
+          </a:prstGeom>
+          <a:noFill/>
+          <a:ln/>
+        </p:spPr>
+        <p:txBody>
+          <a:bodyPr wrap="square" lIns="0" tIns="0" rIns="0" bIns="0" rtlCol="0" anchor="t"/>
+          <a:lstStyle/>
+          <a:p>
+            <a:pPr marL="0" indent="0">
+              <a:buNone/>
+            </a:pPr>
+            <a:r>
+              <a:rPr lang="en-US" sz="1400" b="1" dirty="0">
+                <a:solidFill>
+                  <a:srgbClr val="2B2118"/>
+                </a:solidFill>
+                <a:latin typeface="Malgun Gothic" pitchFamily="34" charset="0"/>
+                <a:ea typeface="Malgun Gothic" pitchFamily="34" charset="-122"/>
+                <a:cs typeface="Malgun Gothic" pitchFamily="34" charset="-120"/>
+              </a:rPr>
+              <a:t>멈추고 그리기</a:t>
+            </a:r>
+            <a:endParaRPr lang="en-US" sz="1400" dirty="0"/>
+          </a:p>
+        </p:txBody>
+      </p:sp>
+      <p:pic>
+        <p:nvPicPr>
+          <p:cNvPr id="6" name="Image 0" descr="D:\stopsketch\데모제출\2_대표이미지\01_시간정지_색골라그리기.png"/>
+          <p:cNvPicPr>
+            <a:picLocks noChangeAspect="1"/>
+          </p:cNvPicPr>
+          <p:nvPr/>
+        </p:nvPicPr>
+        <p:blipFill>
+          <a:blip r:embed="rId3"/>
+          <a:stretch>
+            <a:fillRect/>
+          </a:stretch>
+        </p:blipFill>
+        <p:spPr>
+          <a:xfrm>
+            <a:off x="548640" y="1828800"/>
+            <a:ext cx="2602154" cy="1463712"/>
+          </a:xfrm>
+          <a:prstGeom prst="rect">
+            <a:avLst/>
+          </a:prstGeom>
+        </p:spPr>
+      </p:pic>
+      <p:sp>
+        <p:nvSpPr>
+          <p:cNvPr id="7" name="Shape 4"/>
+          <p:cNvSpPr/>
+          <p:nvPr/>
+        </p:nvSpPr>
+        <p:spPr>
+          <a:xfrm>
+            <a:off x="548640" y="1828800"/>
+            <a:ext cx="2602154" cy="1463712"/>
+          </a:xfrm>
+          <a:prstGeom prst="rect">
+            <a:avLst/>
+          </a:prstGeom>
+          <a:ln w="12700">
+            <a:solidFill>
+              <a:srgbClr val="D8C8A4"/>
+            </a:solidFill>
+            <a:prstDash val="solid"/>
+          </a:ln>
+        </p:spPr>
+      </p:sp>
+      <p:sp>
+        <p:nvSpPr>
+          <p:cNvPr id="8" name="Text 5"/>
+          <p:cNvSpPr txBox="1"/>
+          <p:nvPr/>
+        </p:nvSpPr>
+        <p:spPr>
+          <a:xfrm>
+            <a:off x="548640" y="3383952"/>
+            <a:ext cx="2602154" cy="685800"/>
+          </a:xfrm>
+          <a:prstGeom prst="rect">
+            <a:avLst/>
+          </a:prstGeom>
+          <a:noFill/>
+          <a:ln/>
+        </p:spPr>
+        <p:txBody>
+          <a:bodyPr wrap="square" lIns="0" tIns="0" rIns="0" bIns="0" rtlCol="0" anchor="t"/>
+          <a:lstStyle/>
+          <a:p>
+            <a:pPr marL="0" indent="0">
+              <a:buNone/>
+            </a:pPr>
+            <a:r>
+              <a:rPr lang="en-US" sz="1300" dirty="0">
+                <a:solidFill>
+                  <a:srgbClr val="2B2118"/>
+                </a:solidFill>
+                <a:latin typeface="Malgun Gothic" pitchFamily="34" charset="0"/>
+                <a:ea typeface="Malgun Gothic" pitchFamily="34" charset="-122"/>
+                <a:cs typeface="Malgun Gothic" pitchFamily="34" charset="-120"/>
+              </a:rPr>
+              <a:t>스페이스로 멈추고 색을 골라 그린다. </a:t>
+            </a:r>
+            <a:r>
+              <a:rPr lang="en-US" sz="1300" dirty="0" err="1">
+                <a:solidFill>
+                  <a:srgbClr val="2B2118"/>
+                </a:solidFill>
+                <a:latin typeface="Malgun Gothic" pitchFamily="34" charset="0"/>
+                <a:ea typeface="Malgun Gothic" pitchFamily="34" charset="-122"/>
+                <a:cs typeface="Malgun Gothic" pitchFamily="34" charset="-120"/>
+              </a:rPr>
+              <a:t>재생하면</a:t>
+            </a:r>
+            <a:r>
+              <a:rPr lang="en-US" sz="1300" dirty="0">
+                <a:solidFill>
+                  <a:srgbClr val="2B2118"/>
+                </a:solidFill>
+                <a:latin typeface="Malgun Gothic" pitchFamily="34" charset="0"/>
+                <a:ea typeface="Malgun Gothic" pitchFamily="34" charset="-122"/>
+                <a:cs typeface="Malgun Gothic" pitchFamily="34" charset="-120"/>
+              </a:rPr>
+              <a:t> </a:t>
+            </a:r>
+            <a:r>
+              <a:rPr lang="ko-KR" altLang="en-US" sz="1300" dirty="0">
+                <a:solidFill>
+                  <a:srgbClr val="2B2118"/>
+                </a:solidFill>
+                <a:latin typeface="Malgun Gothic" pitchFamily="34" charset="0"/>
+                <a:ea typeface="Malgun Gothic" pitchFamily="34" charset="-122"/>
+                <a:cs typeface="Malgun Gothic" pitchFamily="34" charset="-120"/>
+              </a:rPr>
+              <a:t>선에 물리법칙이 적용 된다</a:t>
+            </a:r>
+            <a:endParaRPr lang="en-US" sz="1300" dirty="0"/>
+          </a:p>
+        </p:txBody>
+      </p:sp>
+      <p:sp>
+        <p:nvSpPr>
+          <p:cNvPr id="9" name="Shape 6"/>
+          <p:cNvSpPr/>
+          <p:nvPr/>
+        </p:nvSpPr>
+        <p:spPr>
+          <a:xfrm>
+            <a:off x="548640" y="4161192"/>
+            <a:ext cx="2602154" cy="548640"/>
+          </a:xfrm>
+          <a:prstGeom prst="roundRect">
+            <a:avLst>
+              <a:gd name="adj" fmla="val 13333"/>
+            </a:avLst>
+          </a:prstGeom>
+          <a:solidFill>
+            <a:srgbClr val="FAF6EC"/>
+          </a:solidFill>
+          <a:ln w="12700">
+            <a:solidFill>
+              <a:srgbClr val="D8C8A4"/>
+            </a:solidFill>
+            <a:prstDash val="solid"/>
+          </a:ln>
+        </p:spPr>
+      </p:sp>
+      <p:sp>
+        <p:nvSpPr>
+          <p:cNvPr id="10" name="Text 7"/>
+          <p:cNvSpPr txBox="1"/>
+          <p:nvPr/>
+        </p:nvSpPr>
+        <p:spPr>
+          <a:xfrm>
+            <a:off x="548640" y="4161192"/>
+            <a:ext cx="2602154" cy="548640"/>
+          </a:xfrm>
+          <a:prstGeom prst="rect">
+            <a:avLst/>
+          </a:prstGeom>
+          <a:noFill/>
+          <a:ln/>
+        </p:spPr>
+        <p:txBody>
+          <a:bodyPr wrap="square" lIns="0" tIns="0" rIns="0" bIns="0" rtlCol="0" anchor="ctr"/>
+          <a:lstStyle/>
+          <a:p>
+            <a:pPr marL="0" indent="0" algn="ctr">
+              <a:buNone/>
+            </a:pPr>
+            <a:r>
+              <a:rPr lang="en-US" sz="1300" dirty="0">
+                <a:solidFill>
+                  <a:srgbClr val="7B6B57"/>
+                </a:solidFill>
+                <a:latin typeface="Batang" pitchFamily="34" charset="0"/>
+                <a:ea typeface="Batang" pitchFamily="34" charset="-122"/>
+                <a:cs typeface="Batang" pitchFamily="34" charset="-120"/>
+              </a:rPr>
+              <a:t>"</a:t>
+            </a:r>
+            <a:r>
+              <a:rPr lang="en-US" sz="1300" dirty="0" err="1">
+                <a:solidFill>
+                  <a:srgbClr val="7B6B57"/>
+                </a:solidFill>
+                <a:latin typeface="Batang" pitchFamily="34" charset="0"/>
+                <a:ea typeface="Batang" pitchFamily="34" charset="-122"/>
+                <a:cs typeface="Batang" pitchFamily="34" charset="-120"/>
+              </a:rPr>
+              <a:t>어디에</a:t>
+            </a:r>
+            <a:r>
+              <a:rPr lang="en-US" sz="1300" dirty="0">
+                <a:solidFill>
+                  <a:srgbClr val="7B6B57"/>
+                </a:solidFill>
+                <a:latin typeface="Batang" pitchFamily="34" charset="0"/>
+                <a:ea typeface="Batang" pitchFamily="34" charset="-122"/>
+                <a:cs typeface="Batang" pitchFamily="34" charset="-120"/>
+              </a:rPr>
+              <a:t> </a:t>
+            </a:r>
+            <a:r>
+              <a:rPr lang="ko-KR" altLang="en-US" sz="1300" dirty="0">
+                <a:solidFill>
+                  <a:srgbClr val="7B6B57"/>
+                </a:solidFill>
+                <a:latin typeface="Batang" pitchFamily="34" charset="0"/>
+                <a:ea typeface="Batang" pitchFamily="34" charset="-122"/>
+                <a:cs typeface="Batang" pitchFamily="34" charset="-120"/>
+              </a:rPr>
+              <a:t>어떻게 그릴까</a:t>
+            </a:r>
+            <a:r>
+              <a:rPr lang="en-US" sz="1300" dirty="0">
+                <a:solidFill>
+                  <a:srgbClr val="7B6B57"/>
+                </a:solidFill>
+                <a:latin typeface="Batang" pitchFamily="34" charset="0"/>
+                <a:ea typeface="Batang" pitchFamily="34" charset="-122"/>
+                <a:cs typeface="Batang" pitchFamily="34" charset="-120"/>
+              </a:rPr>
+              <a:t>"</a:t>
+            </a:r>
+            <a:endParaRPr lang="en-US" sz="1300" dirty="0"/>
+          </a:p>
+        </p:txBody>
+      </p:sp>
+      <p:sp>
+        <p:nvSpPr>
+          <p:cNvPr id="11" name="Shape 8"/>
+          <p:cNvSpPr/>
+          <p:nvPr/>
+        </p:nvSpPr>
+        <p:spPr>
+          <a:xfrm>
+            <a:off x="3379394" y="1371600"/>
+            <a:ext cx="329184" cy="329184"/>
+          </a:xfrm>
+          <a:prstGeom prst="ellipse">
+            <a:avLst/>
+          </a:prstGeom>
+          <a:solidFill>
+            <a:srgbClr val="E0312B"/>
+          </a:solidFill>
+          <a:ln w="12700">
+            <a:solidFill>
+              <a:srgbClr val="E0312B"/>
+            </a:solidFill>
+            <a:prstDash val="solid"/>
+          </a:ln>
+        </p:spPr>
+      </p:sp>
+      <p:sp>
+        <p:nvSpPr>
+          <p:cNvPr id="12" name="Text 9"/>
+          <p:cNvSpPr txBox="1"/>
+          <p:nvPr/>
+        </p:nvSpPr>
+        <p:spPr>
+          <a:xfrm>
+            <a:off x="3379394" y="1371600"/>
+            <a:ext cx="329184" cy="329184"/>
+          </a:xfrm>
+          <a:prstGeom prst="rect">
+            <a:avLst/>
+          </a:prstGeom>
+          <a:noFill/>
+          <a:ln/>
+        </p:spPr>
+        <p:txBody>
+          <a:bodyPr wrap="square" lIns="0" tIns="0" rIns="0" bIns="0" rtlCol="0" anchor="ctr"/>
+          <a:lstStyle/>
+          <a:p>
+            <a:pPr marL="0" indent="0" algn="ctr">
+              <a:buNone/>
+            </a:pPr>
+            <a:r>
+              <a:rPr lang="en-US" sz="1400" b="1" dirty="0">
+                <a:solidFill>
+                  <a:srgbClr val="FFFFFF"/>
+                </a:solidFill>
+                <a:latin typeface="Malgun Gothic" pitchFamily="34" charset="0"/>
+                <a:ea typeface="Malgun Gothic" pitchFamily="34" charset="-122"/>
+                <a:cs typeface="Malgun Gothic" pitchFamily="34" charset="-120"/>
+              </a:rPr>
+              <a:t>2</a:t>
+            </a:r>
+            <a:endParaRPr lang="en-US" sz="1400" dirty="0"/>
+          </a:p>
+        </p:txBody>
+      </p:sp>
+      <p:sp>
+        <p:nvSpPr>
+          <p:cNvPr id="13" name="Text 10"/>
+          <p:cNvSpPr txBox="1"/>
+          <p:nvPr/>
+        </p:nvSpPr>
+        <p:spPr>
+          <a:xfrm>
+            <a:off x="3790874" y="1439583"/>
+            <a:ext cx="2190674" cy="310896"/>
+          </a:xfrm>
+          <a:prstGeom prst="rect">
+            <a:avLst/>
+          </a:prstGeom>
+          <a:noFill/>
+          <a:ln/>
+        </p:spPr>
+        <p:txBody>
+          <a:bodyPr wrap="square" lIns="0" tIns="0" rIns="0" bIns="0" rtlCol="0" anchor="t"/>
+          <a:lstStyle/>
+          <a:p>
+            <a:pPr marL="0" indent="0">
+              <a:buNone/>
+            </a:pPr>
+            <a:r>
+              <a:rPr lang="en-US" sz="1400" b="1" dirty="0" err="1">
+                <a:solidFill>
+                  <a:srgbClr val="2B2118"/>
+                </a:solidFill>
+                <a:latin typeface="Malgun Gothic" pitchFamily="34" charset="0"/>
+                <a:ea typeface="Malgun Gothic" pitchFamily="34" charset="-122"/>
+                <a:cs typeface="Malgun Gothic" pitchFamily="34" charset="-120"/>
+              </a:rPr>
+              <a:t>함께</a:t>
+            </a:r>
+            <a:r>
+              <a:rPr lang="en-US" sz="1400" b="1" dirty="0">
+                <a:solidFill>
+                  <a:srgbClr val="2B2118"/>
+                </a:solidFill>
+                <a:latin typeface="Malgun Gothic" pitchFamily="34" charset="0"/>
+                <a:ea typeface="Malgun Gothic" pitchFamily="34" charset="-122"/>
+                <a:cs typeface="Malgun Gothic" pitchFamily="34" charset="-120"/>
+              </a:rPr>
+              <a:t> </a:t>
+            </a:r>
+            <a:r>
+              <a:rPr lang="en-US" sz="1400" b="1" dirty="0" err="1">
+                <a:solidFill>
+                  <a:srgbClr val="2B2118"/>
+                </a:solidFill>
+                <a:latin typeface="Malgun Gothic" pitchFamily="34" charset="0"/>
+                <a:ea typeface="Malgun Gothic" pitchFamily="34" charset="-122"/>
+                <a:cs typeface="Malgun Gothic" pitchFamily="34" charset="-120"/>
+              </a:rPr>
+              <a:t>움직이</a:t>
+            </a:r>
+            <a:r>
+              <a:rPr lang="ko-KR" altLang="en-US" sz="1400" b="1" dirty="0">
+                <a:solidFill>
+                  <a:srgbClr val="2B2118"/>
+                </a:solidFill>
+                <a:latin typeface="Malgun Gothic" pitchFamily="34" charset="0"/>
+                <a:ea typeface="Malgun Gothic" pitchFamily="34" charset="-122"/>
+                <a:cs typeface="Malgun Gothic" pitchFamily="34" charset="-120"/>
+              </a:rPr>
+              <a:t>면서 별을 획득</a:t>
+            </a:r>
+            <a:endParaRPr lang="en-US" sz="1400" dirty="0"/>
+          </a:p>
+        </p:txBody>
+      </p:sp>
+      <p:pic>
+        <p:nvPicPr>
+          <p:cNvPr id="14" name="Image 1" descr="D:\stopsketch\데모제출\2_대표이미지\06_줄지어_튕겨올라_공중물방울_깨우기.png"/>
+          <p:cNvPicPr>
+            <a:picLocks noChangeAspect="1"/>
+          </p:cNvPicPr>
+          <p:nvPr/>
+        </p:nvPicPr>
+        <p:blipFill>
+          <a:blip r:embed="rId4"/>
+          <a:stretch>
+            <a:fillRect/>
+          </a:stretch>
+        </p:blipFill>
+        <p:spPr>
+          <a:xfrm>
+            <a:off x="3379394" y="1828800"/>
+            <a:ext cx="2602154" cy="1463712"/>
+          </a:xfrm>
+          <a:prstGeom prst="rect">
+            <a:avLst/>
+          </a:prstGeom>
+        </p:spPr>
+      </p:pic>
+      <p:sp>
+        <p:nvSpPr>
+          <p:cNvPr id="15" name="Shape 11"/>
+          <p:cNvSpPr/>
+          <p:nvPr/>
+        </p:nvSpPr>
+        <p:spPr>
+          <a:xfrm>
+            <a:off x="3379394" y="1828800"/>
+            <a:ext cx="2602154" cy="1463712"/>
+          </a:xfrm>
+          <a:prstGeom prst="rect">
+            <a:avLst/>
+          </a:prstGeom>
+          <a:ln w="12700">
+            <a:solidFill>
+              <a:srgbClr val="D8C8A4"/>
+            </a:solidFill>
+            <a:prstDash val="solid"/>
+          </a:ln>
+        </p:spPr>
+      </p:sp>
+      <p:sp>
+        <p:nvSpPr>
+          <p:cNvPr id="16" name="Text 12"/>
+          <p:cNvSpPr txBox="1"/>
+          <p:nvPr/>
+        </p:nvSpPr>
+        <p:spPr>
+          <a:xfrm>
+            <a:off x="3379394" y="3383952"/>
+            <a:ext cx="2602154" cy="685800"/>
+          </a:xfrm>
+          <a:prstGeom prst="rect">
+            <a:avLst/>
+          </a:prstGeom>
+          <a:noFill/>
+          <a:ln/>
+        </p:spPr>
+        <p:txBody>
+          <a:bodyPr wrap="square" lIns="0" tIns="0" rIns="0" bIns="0" rtlCol="0" anchor="t"/>
+          <a:lstStyle/>
+          <a:p>
+            <a:pPr marL="0" indent="0">
+              <a:buNone/>
+            </a:pPr>
+            <a:r>
+              <a:rPr lang="ko-KR" altLang="en-US" sz="1300" dirty="0">
+                <a:solidFill>
+                  <a:srgbClr val="2B2118"/>
+                </a:solidFill>
+                <a:latin typeface="Malgun Gothic" pitchFamily="34" charset="0"/>
+                <a:ea typeface="Malgun Gothic" pitchFamily="34" charset="-122"/>
+                <a:cs typeface="Malgun Gothic" pitchFamily="34" charset="-120"/>
+              </a:rPr>
+              <a:t>잠든 물방울들을 깨워서 합류 시키고 별을 획득하러 같이 이동한다</a:t>
+            </a:r>
+            <a:endParaRPr lang="en-US" sz="1300" dirty="0"/>
+          </a:p>
+        </p:txBody>
+      </p:sp>
+      <p:sp>
+        <p:nvSpPr>
+          <p:cNvPr id="17" name="Shape 13"/>
+          <p:cNvSpPr/>
+          <p:nvPr/>
+        </p:nvSpPr>
+        <p:spPr>
+          <a:xfrm>
+            <a:off x="3379394" y="4161192"/>
+            <a:ext cx="2602154" cy="548640"/>
+          </a:xfrm>
+          <a:prstGeom prst="roundRect">
+            <a:avLst>
+              <a:gd name="adj" fmla="val 13333"/>
+            </a:avLst>
+          </a:prstGeom>
+          <a:solidFill>
+            <a:srgbClr val="FAF6EC"/>
+          </a:solidFill>
+          <a:ln w="12700">
+            <a:solidFill>
+              <a:srgbClr val="D8C8A4"/>
+            </a:solidFill>
+            <a:prstDash val="solid"/>
+          </a:ln>
+        </p:spPr>
+      </p:sp>
+      <p:sp>
+        <p:nvSpPr>
+          <p:cNvPr id="18" name="Text 14"/>
+          <p:cNvSpPr txBox="1"/>
+          <p:nvPr/>
+        </p:nvSpPr>
+        <p:spPr>
+          <a:xfrm>
+            <a:off x="3379394" y="4161192"/>
+            <a:ext cx="2602154" cy="548640"/>
+          </a:xfrm>
+          <a:prstGeom prst="rect">
+            <a:avLst/>
+          </a:prstGeom>
+          <a:noFill/>
+          <a:ln/>
+        </p:spPr>
+        <p:txBody>
+          <a:bodyPr wrap="square" lIns="0" tIns="0" rIns="0" bIns="0" rtlCol="0" anchor="ctr"/>
+          <a:lstStyle/>
+          <a:p>
+            <a:pPr marL="0" indent="0" algn="ctr">
+              <a:buNone/>
+            </a:pPr>
+            <a:r>
+              <a:rPr lang="en-US" sz="1300" dirty="0">
+                <a:solidFill>
+                  <a:srgbClr val="7B6B57"/>
+                </a:solidFill>
+                <a:latin typeface="Batang" pitchFamily="34" charset="0"/>
+                <a:ea typeface="Batang" pitchFamily="34" charset="-122"/>
+                <a:cs typeface="Batang" pitchFamily="34" charset="-120"/>
+              </a:rPr>
+              <a:t>"</a:t>
+            </a:r>
+            <a:r>
+              <a:rPr lang="ko-KR" altLang="en-US" sz="1300" dirty="0">
+                <a:solidFill>
+                  <a:srgbClr val="7B6B57"/>
+                </a:solidFill>
+                <a:latin typeface="Batang" pitchFamily="34" charset="0"/>
+                <a:ea typeface="Batang" pitchFamily="34" charset="-122"/>
+                <a:cs typeface="Batang" pitchFamily="34" charset="-120"/>
+              </a:rPr>
+              <a:t>퍼즐을 풀어 벽을 획득</a:t>
+            </a:r>
+            <a:r>
+              <a:rPr lang="en-US" sz="1300" dirty="0">
+                <a:solidFill>
+                  <a:srgbClr val="7B6B57"/>
+                </a:solidFill>
+                <a:latin typeface="Batang" pitchFamily="34" charset="0"/>
+                <a:ea typeface="Batang" pitchFamily="34" charset="-122"/>
+                <a:cs typeface="Batang" pitchFamily="34" charset="-120"/>
+              </a:rPr>
+              <a:t>"</a:t>
+            </a:r>
+            <a:endParaRPr lang="en-US" sz="1300" dirty="0"/>
+          </a:p>
+        </p:txBody>
+      </p:sp>
+      <p:sp>
+        <p:nvSpPr>
+          <p:cNvPr id="19" name="Shape 15"/>
+          <p:cNvSpPr/>
+          <p:nvPr/>
+        </p:nvSpPr>
+        <p:spPr>
+          <a:xfrm>
+            <a:off x="6210148" y="1371600"/>
+            <a:ext cx="329184" cy="329184"/>
+          </a:xfrm>
+          <a:prstGeom prst="ellipse">
+            <a:avLst/>
+          </a:prstGeom>
+          <a:solidFill>
+            <a:srgbClr val="1FA655"/>
+          </a:solidFill>
+          <a:ln w="12700">
+            <a:solidFill>
+              <a:srgbClr val="1FA655"/>
+            </a:solidFill>
+            <a:prstDash val="solid"/>
+          </a:ln>
+        </p:spPr>
+      </p:sp>
+      <p:sp>
+        <p:nvSpPr>
+          <p:cNvPr id="20" name="Text 16"/>
+          <p:cNvSpPr txBox="1"/>
+          <p:nvPr/>
+        </p:nvSpPr>
+        <p:spPr>
+          <a:xfrm>
+            <a:off x="6210148" y="1371600"/>
+            <a:ext cx="329184" cy="329184"/>
+          </a:xfrm>
+          <a:prstGeom prst="rect">
+            <a:avLst/>
+          </a:prstGeom>
+          <a:noFill/>
+          <a:ln/>
+        </p:spPr>
+        <p:txBody>
+          <a:bodyPr wrap="square" lIns="0" tIns="0" rIns="0" bIns="0" rtlCol="0" anchor="ctr"/>
+          <a:lstStyle/>
+          <a:p>
+            <a:pPr marL="0" indent="0" algn="ctr">
+              <a:buNone/>
+            </a:pPr>
+            <a:r>
+              <a:rPr lang="en-US" sz="1400" b="1" dirty="0">
+                <a:solidFill>
+                  <a:srgbClr val="FFFFFF"/>
+                </a:solidFill>
+                <a:latin typeface="Malgun Gothic" pitchFamily="34" charset="0"/>
+                <a:ea typeface="Malgun Gothic" pitchFamily="34" charset="-122"/>
+                <a:cs typeface="Malgun Gothic" pitchFamily="34" charset="-120"/>
+              </a:rPr>
+              <a:t>3</a:t>
+            </a:r>
+            <a:endParaRPr lang="en-US" sz="1400" dirty="0"/>
+          </a:p>
+        </p:txBody>
+      </p:sp>
+      <p:sp>
+        <p:nvSpPr>
+          <p:cNvPr id="21" name="Text 17"/>
+          <p:cNvSpPr txBox="1"/>
+          <p:nvPr/>
+        </p:nvSpPr>
+        <p:spPr>
+          <a:xfrm>
+            <a:off x="6621628" y="1439583"/>
+            <a:ext cx="2190674" cy="310896"/>
+          </a:xfrm>
+          <a:prstGeom prst="rect">
+            <a:avLst/>
+          </a:prstGeom>
+          <a:noFill/>
+          <a:ln/>
+        </p:spPr>
+        <p:txBody>
+          <a:bodyPr wrap="square" lIns="0" tIns="0" rIns="0" bIns="0" rtlCol="0" anchor="t"/>
+          <a:lstStyle/>
+          <a:p>
+            <a:pPr marL="0" indent="0">
+              <a:buNone/>
+            </a:pPr>
+            <a:r>
+              <a:rPr lang="ko-KR" altLang="en-US" sz="1400" b="1" dirty="0">
+                <a:solidFill>
+                  <a:srgbClr val="2B2118"/>
+                </a:solidFill>
+                <a:latin typeface="Malgun Gothic" pitchFamily="34" charset="0"/>
+                <a:ea typeface="Malgun Gothic" pitchFamily="34" charset="-122"/>
+                <a:cs typeface="Malgun Gothic" pitchFamily="34" charset="-120"/>
+              </a:rPr>
+              <a:t>검은 </a:t>
+            </a:r>
+            <a:r>
+              <a:rPr lang="en-US" sz="1400" b="1" dirty="0" err="1">
+                <a:solidFill>
+                  <a:srgbClr val="2B2118"/>
+                </a:solidFill>
+                <a:latin typeface="Malgun Gothic" pitchFamily="34" charset="0"/>
+                <a:ea typeface="Malgun Gothic" pitchFamily="34" charset="-122"/>
+                <a:cs typeface="Malgun Gothic" pitchFamily="34" charset="-120"/>
+              </a:rPr>
+              <a:t>잉크병에</a:t>
+            </a:r>
+            <a:r>
+              <a:rPr lang="en-US" sz="1400" b="1" dirty="0">
+                <a:solidFill>
+                  <a:srgbClr val="2B2118"/>
+                </a:solidFill>
+                <a:latin typeface="Malgun Gothic" pitchFamily="34" charset="0"/>
+                <a:ea typeface="Malgun Gothic" pitchFamily="34" charset="-122"/>
+                <a:cs typeface="Malgun Gothic" pitchFamily="34" charset="-120"/>
+              </a:rPr>
+              <a:t> 데려가기</a:t>
+            </a:r>
+            <a:endParaRPr lang="en-US" sz="1400" dirty="0"/>
+          </a:p>
+        </p:txBody>
+      </p:sp>
+      <p:pic>
+        <p:nvPicPr>
+          <p:cNvPr id="22" name="Image 2" descr="D:\stopsketch\데모제출\2_대표이미지\07_검은잉크병_정화.png"/>
+          <p:cNvPicPr>
+            <a:picLocks noChangeAspect="1"/>
+          </p:cNvPicPr>
+          <p:nvPr/>
+        </p:nvPicPr>
+        <p:blipFill>
+          <a:blip r:embed="rId5"/>
+          <a:stretch>
+            <a:fillRect/>
+          </a:stretch>
+        </p:blipFill>
+        <p:spPr>
+          <a:xfrm>
+            <a:off x="6210148" y="1828800"/>
+            <a:ext cx="2602154" cy="1463712"/>
+          </a:xfrm>
+          <a:prstGeom prst="rect">
+            <a:avLst/>
+          </a:prstGeom>
+        </p:spPr>
+      </p:pic>
+      <p:sp>
+        <p:nvSpPr>
+          <p:cNvPr id="23" name="Shape 18"/>
+          <p:cNvSpPr/>
+          <p:nvPr/>
+        </p:nvSpPr>
+        <p:spPr>
+          <a:xfrm>
+            <a:off x="6210148" y="1828800"/>
+            <a:ext cx="2602154" cy="1463712"/>
+          </a:xfrm>
+          <a:prstGeom prst="rect">
+            <a:avLst/>
+          </a:prstGeom>
+          <a:ln w="12700">
+            <a:solidFill>
+              <a:srgbClr val="D8C8A4"/>
+            </a:solidFill>
+            <a:prstDash val="solid"/>
+          </a:ln>
+        </p:spPr>
+      </p:sp>
+      <p:sp>
+        <p:nvSpPr>
+          <p:cNvPr id="24" name="Text 19"/>
+          <p:cNvSpPr txBox="1"/>
+          <p:nvPr/>
+        </p:nvSpPr>
+        <p:spPr>
+          <a:xfrm>
+            <a:off x="6210148" y="3383952"/>
+            <a:ext cx="2602154" cy="685800"/>
+          </a:xfrm>
+          <a:prstGeom prst="rect">
+            <a:avLst/>
+          </a:prstGeom>
+          <a:noFill/>
+          <a:ln/>
+        </p:spPr>
+        <p:txBody>
+          <a:bodyPr wrap="square" lIns="0" tIns="0" rIns="0" bIns="0" rtlCol="0" anchor="t"/>
+          <a:lstStyle/>
+          <a:p>
+            <a:pPr marL="0" indent="0">
+              <a:buNone/>
+            </a:pPr>
+            <a:r>
+              <a:rPr lang="en-US" sz="1300" dirty="0" err="1">
+                <a:solidFill>
+                  <a:srgbClr val="2B2118"/>
+                </a:solidFill>
+                <a:latin typeface="Malgun Gothic" pitchFamily="34" charset="0"/>
+                <a:ea typeface="Malgun Gothic" pitchFamily="34" charset="-122"/>
+                <a:cs typeface="Malgun Gothic" pitchFamily="34" charset="-120"/>
+              </a:rPr>
+              <a:t>주인공이</a:t>
+            </a:r>
+            <a:r>
+              <a:rPr lang="en-US" sz="1300" dirty="0">
+                <a:solidFill>
+                  <a:srgbClr val="2B2118"/>
+                </a:solidFill>
+                <a:latin typeface="Malgun Gothic" pitchFamily="34" charset="0"/>
+                <a:ea typeface="Malgun Gothic" pitchFamily="34" charset="-122"/>
+                <a:cs typeface="Malgun Gothic" pitchFamily="34" charset="-120"/>
+              </a:rPr>
+              <a:t> </a:t>
+            </a:r>
+            <a:r>
+              <a:rPr lang="ko-KR" altLang="en-US" sz="1300" dirty="0">
+                <a:solidFill>
+                  <a:srgbClr val="2B2118"/>
+                </a:solidFill>
+                <a:latin typeface="Malgun Gothic" pitchFamily="34" charset="0"/>
+                <a:ea typeface="Malgun Gothic" pitchFamily="34" charset="-122"/>
+                <a:cs typeface="Malgun Gothic" pitchFamily="34" charset="-120"/>
+              </a:rPr>
+              <a:t>도착하면 물방울들이</a:t>
+            </a:r>
+            <a:r>
+              <a:rPr lang="en-US" sz="1300" dirty="0">
+                <a:solidFill>
+                  <a:srgbClr val="2B2118"/>
+                </a:solidFill>
+                <a:latin typeface="Malgun Gothic" pitchFamily="34" charset="0"/>
+                <a:ea typeface="Malgun Gothic" pitchFamily="34" charset="-122"/>
+                <a:cs typeface="Malgun Gothic" pitchFamily="34" charset="-120"/>
+              </a:rPr>
+              <a:t> 차례로 </a:t>
+            </a:r>
+            <a:r>
+              <a:rPr lang="en-US" sz="1300" dirty="0" err="1">
+                <a:solidFill>
+                  <a:srgbClr val="2B2118"/>
+                </a:solidFill>
+                <a:latin typeface="Malgun Gothic" pitchFamily="34" charset="0"/>
+                <a:ea typeface="Malgun Gothic" pitchFamily="34" charset="-122"/>
+                <a:cs typeface="Malgun Gothic" pitchFamily="34" charset="-120"/>
+              </a:rPr>
+              <a:t>뛰어들고</a:t>
+            </a:r>
+            <a:r>
+              <a:rPr lang="en-US" sz="1300" dirty="0">
+                <a:solidFill>
+                  <a:srgbClr val="2B2118"/>
+                </a:solidFill>
+                <a:latin typeface="Malgun Gothic" pitchFamily="34" charset="0"/>
+                <a:ea typeface="Malgun Gothic" pitchFamily="34" charset="-122"/>
+                <a:cs typeface="Malgun Gothic" pitchFamily="34" charset="-120"/>
+              </a:rPr>
+              <a:t> </a:t>
+            </a:r>
+            <a:r>
+              <a:rPr lang="en-US" sz="1300" dirty="0" err="1">
+                <a:solidFill>
+                  <a:srgbClr val="2B2118"/>
+                </a:solidFill>
+                <a:latin typeface="Malgun Gothic" pitchFamily="34" charset="0"/>
+                <a:ea typeface="Malgun Gothic" pitchFamily="34" charset="-122"/>
+                <a:cs typeface="Malgun Gothic" pitchFamily="34" charset="-120"/>
+              </a:rPr>
+              <a:t>병이</a:t>
+            </a:r>
+            <a:r>
+              <a:rPr lang="en-US" sz="1300" dirty="0">
+                <a:solidFill>
+                  <a:srgbClr val="2B2118"/>
+                </a:solidFill>
+                <a:latin typeface="Malgun Gothic" pitchFamily="34" charset="0"/>
+                <a:ea typeface="Malgun Gothic" pitchFamily="34" charset="-122"/>
+                <a:cs typeface="Malgun Gothic" pitchFamily="34" charset="-120"/>
+              </a:rPr>
+              <a:t> </a:t>
+            </a:r>
+            <a:r>
+              <a:rPr lang="ko-KR" altLang="en-US" sz="1300" dirty="0">
+                <a:solidFill>
+                  <a:srgbClr val="2B2118"/>
+                </a:solidFill>
+                <a:latin typeface="Malgun Gothic" pitchFamily="34" charset="0"/>
+                <a:ea typeface="Malgun Gothic" pitchFamily="34" charset="-122"/>
+                <a:cs typeface="Malgun Gothic" pitchFamily="34" charset="-120"/>
+              </a:rPr>
+              <a:t>정화돼서</a:t>
+            </a:r>
+            <a:r>
+              <a:rPr lang="en-US" sz="1300" dirty="0">
+                <a:solidFill>
+                  <a:srgbClr val="2B2118"/>
+                </a:solidFill>
+                <a:latin typeface="Malgun Gothic" pitchFamily="34" charset="0"/>
+                <a:ea typeface="Malgun Gothic" pitchFamily="34" charset="-122"/>
+                <a:cs typeface="Malgun Gothic" pitchFamily="34" charset="-120"/>
+              </a:rPr>
+              <a:t> 맑아진다</a:t>
+            </a:r>
+            <a:endParaRPr lang="en-US" sz="1300" dirty="0"/>
+          </a:p>
+        </p:txBody>
+      </p:sp>
+      <p:sp>
+        <p:nvSpPr>
+          <p:cNvPr id="25" name="Shape 20"/>
+          <p:cNvSpPr/>
+          <p:nvPr/>
+        </p:nvSpPr>
+        <p:spPr>
+          <a:xfrm>
+            <a:off x="6210148" y="4161192"/>
+            <a:ext cx="2602154" cy="548640"/>
+          </a:xfrm>
+          <a:prstGeom prst="roundRect">
+            <a:avLst>
+              <a:gd name="adj" fmla="val 13333"/>
+            </a:avLst>
+          </a:prstGeom>
+          <a:solidFill>
+            <a:srgbClr val="FAF6EC"/>
+          </a:solidFill>
+          <a:ln w="12700">
+            <a:solidFill>
+              <a:srgbClr val="D8C8A4"/>
+            </a:solidFill>
+            <a:prstDash val="solid"/>
+          </a:ln>
+        </p:spPr>
+      </p:sp>
+      <p:sp>
+        <p:nvSpPr>
+          <p:cNvPr id="26" name="Text 21"/>
+          <p:cNvSpPr txBox="1"/>
+          <p:nvPr/>
+        </p:nvSpPr>
+        <p:spPr>
+          <a:xfrm>
+            <a:off x="6210148" y="4161192"/>
+            <a:ext cx="2602154" cy="548640"/>
+          </a:xfrm>
+          <a:prstGeom prst="rect">
+            <a:avLst/>
+          </a:prstGeom>
+          <a:noFill/>
+          <a:ln/>
+        </p:spPr>
+        <p:txBody>
+          <a:bodyPr wrap="square" lIns="0" tIns="0" rIns="0" bIns="0" rtlCol="0" anchor="ctr"/>
+          <a:lstStyle/>
+          <a:p>
+            <a:pPr marL="0" indent="0" algn="ctr">
+              <a:buNone/>
+            </a:pPr>
+            <a:r>
+              <a:rPr lang="en-US" sz="1300" dirty="0">
+                <a:solidFill>
+                  <a:srgbClr val="7B6B57"/>
+                </a:solidFill>
+                <a:latin typeface="Batang" pitchFamily="34" charset="0"/>
+                <a:ea typeface="Batang" pitchFamily="34" charset="-122"/>
+                <a:cs typeface="Batang" pitchFamily="34" charset="-120"/>
+              </a:rPr>
+              <a:t>"몇 마리나 왔지"</a:t>
+            </a:r>
+            <a:endParaRPr lang="en-US" sz="1300" dirty="0"/>
+          </a:p>
+        </p:txBody>
+      </p:sp>
+      <p:sp>
+        <p:nvSpPr>
+          <p:cNvPr id="27" name="Shape 22"/>
+          <p:cNvSpPr/>
+          <p:nvPr/>
+        </p:nvSpPr>
+        <p:spPr>
+          <a:xfrm>
+            <a:off x="9040901" y="1371600"/>
+            <a:ext cx="329184" cy="329184"/>
+          </a:xfrm>
+          <a:prstGeom prst="ellipse">
+            <a:avLst/>
+          </a:prstGeom>
+          <a:solidFill>
+            <a:srgbClr val="C99A00"/>
+          </a:solidFill>
+          <a:ln w="12700">
+            <a:solidFill>
+              <a:srgbClr val="C99A00"/>
+            </a:solidFill>
+            <a:prstDash val="solid"/>
+          </a:ln>
+        </p:spPr>
+      </p:sp>
+      <p:sp>
+        <p:nvSpPr>
+          <p:cNvPr id="28" name="Text 23"/>
+          <p:cNvSpPr txBox="1"/>
+          <p:nvPr/>
+        </p:nvSpPr>
+        <p:spPr>
+          <a:xfrm>
+            <a:off x="9040901" y="1371600"/>
+            <a:ext cx="329184" cy="329184"/>
+          </a:xfrm>
+          <a:prstGeom prst="rect">
+            <a:avLst/>
+          </a:prstGeom>
+          <a:noFill/>
+          <a:ln/>
+        </p:spPr>
+        <p:txBody>
+          <a:bodyPr wrap="square" lIns="0" tIns="0" rIns="0" bIns="0" rtlCol="0" anchor="ctr"/>
+          <a:lstStyle/>
+          <a:p>
+            <a:pPr marL="0" indent="0" algn="ctr">
+              <a:buNone/>
+            </a:pPr>
+            <a:r>
+              <a:rPr lang="en-US" sz="1400" b="1" dirty="0">
+                <a:solidFill>
+                  <a:srgbClr val="FFFFFF"/>
+                </a:solidFill>
+                <a:latin typeface="Malgun Gothic" pitchFamily="34" charset="0"/>
+                <a:ea typeface="Malgun Gothic" pitchFamily="34" charset="-122"/>
+                <a:cs typeface="Malgun Gothic" pitchFamily="34" charset="-120"/>
+              </a:rPr>
+              <a:t>4</a:t>
+            </a:r>
+            <a:endParaRPr lang="en-US" sz="1400" dirty="0"/>
+          </a:p>
+        </p:txBody>
+      </p:sp>
+      <p:sp>
+        <p:nvSpPr>
+          <p:cNvPr id="29" name="Text 24"/>
+          <p:cNvSpPr txBox="1"/>
+          <p:nvPr/>
+        </p:nvSpPr>
+        <p:spPr>
+          <a:xfrm>
+            <a:off x="9452381" y="1439583"/>
+            <a:ext cx="2190674" cy="310896"/>
+          </a:xfrm>
+          <a:prstGeom prst="rect">
+            <a:avLst/>
+          </a:prstGeom>
+          <a:noFill/>
+          <a:ln/>
+        </p:spPr>
+        <p:txBody>
+          <a:bodyPr wrap="square" lIns="0" tIns="0" rIns="0" bIns="0" rtlCol="0" anchor="t"/>
+          <a:lstStyle/>
+          <a:p>
+            <a:pPr marL="0" indent="0">
+              <a:buNone/>
+            </a:pPr>
+            <a:r>
+              <a:rPr lang="en-US" sz="1400" b="1" dirty="0">
+                <a:solidFill>
+                  <a:srgbClr val="2B2118"/>
+                </a:solidFill>
+                <a:latin typeface="Malgun Gothic" pitchFamily="34" charset="0"/>
+                <a:ea typeface="Malgun Gothic" pitchFamily="34" charset="-122"/>
+                <a:cs typeface="Malgun Gothic" pitchFamily="34" charset="-120"/>
+              </a:rPr>
+              <a:t>결과 · 재도전</a:t>
+            </a:r>
+            <a:endParaRPr lang="en-US" sz="1400" dirty="0"/>
+          </a:p>
+        </p:txBody>
+      </p:sp>
+      <p:pic>
+        <p:nvPicPr>
+          <p:cNvPr id="30" name="Image 3" descr="D:\stopsketch\데모제출\2_대표이미지\08_결과창_별3_정화100.png"/>
+          <p:cNvPicPr>
+            <a:picLocks noChangeAspect="1"/>
+          </p:cNvPicPr>
+          <p:nvPr/>
+        </p:nvPicPr>
+        <p:blipFill>
+          <a:blip r:embed="rId6"/>
+          <a:stretch>
+            <a:fillRect/>
+          </a:stretch>
+        </p:blipFill>
+        <p:spPr>
+          <a:xfrm>
+            <a:off x="9040901" y="1828800"/>
+            <a:ext cx="2602154" cy="1463712"/>
+          </a:xfrm>
+          <a:prstGeom prst="rect">
+            <a:avLst/>
+          </a:prstGeom>
+        </p:spPr>
+      </p:pic>
+      <p:sp>
+        <p:nvSpPr>
+          <p:cNvPr id="31" name="Shape 25"/>
+          <p:cNvSpPr/>
+          <p:nvPr/>
+        </p:nvSpPr>
+        <p:spPr>
+          <a:xfrm>
+            <a:off x="9040901" y="1828800"/>
+            <a:ext cx="2602154" cy="1463712"/>
+          </a:xfrm>
+          <a:prstGeom prst="rect">
+            <a:avLst/>
+          </a:prstGeom>
+          <a:ln w="12700">
+            <a:solidFill>
+              <a:srgbClr val="D8C8A4"/>
+            </a:solidFill>
+            <a:prstDash val="solid"/>
+          </a:ln>
+        </p:spPr>
+      </p:sp>
+      <p:sp>
+        <p:nvSpPr>
+          <p:cNvPr id="32" name="Text 26"/>
+          <p:cNvSpPr txBox="1"/>
+          <p:nvPr/>
+        </p:nvSpPr>
+        <p:spPr>
+          <a:xfrm>
+            <a:off x="9040901" y="3383952"/>
+            <a:ext cx="2602154" cy="685800"/>
+          </a:xfrm>
+          <a:prstGeom prst="rect">
+            <a:avLst/>
+          </a:prstGeom>
+          <a:noFill/>
+          <a:ln/>
+        </p:spPr>
+        <p:txBody>
+          <a:bodyPr wrap="square" lIns="0" tIns="0" rIns="0" bIns="0" rtlCol="0" anchor="t"/>
+          <a:lstStyle/>
+          <a:p>
+            <a:pPr marL="0" indent="0">
+              <a:buNone/>
+            </a:pPr>
+            <a:r>
+              <a:rPr lang="ko-KR" altLang="en-US" sz="1300" dirty="0">
+                <a:solidFill>
+                  <a:srgbClr val="2B2118"/>
+                </a:solidFill>
+                <a:latin typeface="Malgun Gothic" pitchFamily="34" charset="0"/>
+                <a:ea typeface="Malgun Gothic" pitchFamily="34" charset="-122"/>
+                <a:cs typeface="Malgun Gothic" pitchFamily="34" charset="-120"/>
+              </a:rPr>
+              <a:t>결과 </a:t>
+            </a:r>
+            <a:r>
+              <a:rPr lang="en-US" altLang="ko-KR" sz="1300" dirty="0">
+                <a:solidFill>
+                  <a:srgbClr val="2B2118"/>
+                </a:solidFill>
+                <a:latin typeface="Malgun Gothic" pitchFamily="34" charset="0"/>
+                <a:ea typeface="Malgun Gothic" pitchFamily="34" charset="-122"/>
+                <a:cs typeface="Malgun Gothic" pitchFamily="34" charset="-120"/>
+              </a:rPr>
+              <a:t>: </a:t>
+            </a:r>
+            <a:r>
+              <a:rPr lang="en-US" sz="1300" dirty="0">
+                <a:solidFill>
+                  <a:srgbClr val="2B2118"/>
+                </a:solidFill>
+                <a:latin typeface="Malgun Gothic" pitchFamily="34" charset="0"/>
+                <a:ea typeface="Malgun Gothic" pitchFamily="34" charset="-122"/>
+                <a:cs typeface="Malgun Gothic" pitchFamily="34" charset="-120"/>
+              </a:rPr>
+              <a:t>별 n/3, </a:t>
+            </a:r>
+            <a:r>
+              <a:rPr lang="en-US" sz="1300" dirty="0" err="1">
+                <a:solidFill>
+                  <a:srgbClr val="2B2118"/>
+                </a:solidFill>
+                <a:latin typeface="Malgun Gothic" pitchFamily="34" charset="0"/>
+                <a:ea typeface="Malgun Gothic" pitchFamily="34" charset="-122"/>
+                <a:cs typeface="Malgun Gothic" pitchFamily="34" charset="-120"/>
+              </a:rPr>
+              <a:t>정화</a:t>
+            </a:r>
+            <a:r>
+              <a:rPr lang="en-US" sz="1300" dirty="0">
+                <a:solidFill>
+                  <a:srgbClr val="2B2118"/>
+                </a:solidFill>
+                <a:latin typeface="Malgun Gothic" pitchFamily="34" charset="0"/>
+                <a:ea typeface="Malgun Gothic" pitchFamily="34" charset="-122"/>
+                <a:cs typeface="Malgun Gothic" pitchFamily="34" charset="-120"/>
+              </a:rPr>
+              <a:t> n%. </a:t>
+            </a:r>
+          </a:p>
+          <a:p>
+            <a:pPr marL="0" indent="0">
+              <a:buNone/>
+            </a:pPr>
+            <a:r>
+              <a:rPr lang="en-US" sz="1300" dirty="0">
+                <a:solidFill>
+                  <a:srgbClr val="2B2118"/>
+                </a:solidFill>
+                <a:latin typeface="Malgun Gothic" pitchFamily="34" charset="0"/>
+                <a:ea typeface="Malgun Gothic" pitchFamily="34" charset="-122"/>
+                <a:cs typeface="Malgun Gothic" pitchFamily="34" charset="-120"/>
+              </a:rPr>
+              <a:t>별 3개</a:t>
+            </a:r>
+            <a:r>
+              <a:rPr lang="ko-KR" altLang="en-US" sz="1300" dirty="0">
+                <a:solidFill>
+                  <a:srgbClr val="2B2118"/>
+                </a:solidFill>
+                <a:latin typeface="Malgun Gothic" pitchFamily="34" charset="0"/>
+                <a:ea typeface="Malgun Gothic" pitchFamily="34" charset="-122"/>
+                <a:cs typeface="Malgun Gothic" pitchFamily="34" charset="-120"/>
+              </a:rPr>
+              <a:t>와 정화 </a:t>
+            </a:r>
+            <a:r>
+              <a:rPr lang="en-US" altLang="ko-KR" sz="1300" dirty="0">
+                <a:solidFill>
+                  <a:srgbClr val="2B2118"/>
+                </a:solidFill>
+                <a:latin typeface="Malgun Gothic" pitchFamily="34" charset="0"/>
+                <a:ea typeface="Malgun Gothic" pitchFamily="34" charset="-122"/>
+                <a:cs typeface="Malgun Gothic" pitchFamily="34" charset="-120"/>
+              </a:rPr>
+              <a:t>100%</a:t>
+            </a:r>
+            <a:r>
+              <a:rPr lang="ko-KR" altLang="en-US" sz="1300" dirty="0">
+                <a:solidFill>
+                  <a:srgbClr val="2B2118"/>
+                </a:solidFill>
+                <a:latin typeface="Malgun Gothic" pitchFamily="34" charset="0"/>
+                <a:ea typeface="Malgun Gothic" pitchFamily="34" charset="-122"/>
+                <a:cs typeface="Malgun Gothic" pitchFamily="34" charset="-120"/>
+              </a:rPr>
+              <a:t>를 목표로 다시 도전한다</a:t>
+            </a:r>
+            <a:r>
+              <a:rPr lang="en-US" altLang="ko-KR" sz="1300" dirty="0">
+                <a:solidFill>
+                  <a:srgbClr val="2B2118"/>
+                </a:solidFill>
+                <a:latin typeface="Malgun Gothic" pitchFamily="34" charset="0"/>
+                <a:ea typeface="Malgun Gothic" pitchFamily="34" charset="-122"/>
+                <a:cs typeface="Malgun Gothic" pitchFamily="34" charset="-120"/>
+              </a:rPr>
+              <a:t>.</a:t>
+            </a:r>
+            <a:endParaRPr lang="en-US" sz="1300" dirty="0"/>
+          </a:p>
+        </p:txBody>
+      </p:sp>
+      <p:sp>
+        <p:nvSpPr>
+          <p:cNvPr id="33" name="Shape 27"/>
+          <p:cNvSpPr/>
+          <p:nvPr/>
+        </p:nvSpPr>
+        <p:spPr>
+          <a:xfrm>
+            <a:off x="9040901" y="4161192"/>
+            <a:ext cx="2602154" cy="548640"/>
+          </a:xfrm>
+          <a:prstGeom prst="roundRect">
+            <a:avLst>
+              <a:gd name="adj" fmla="val 13333"/>
+            </a:avLst>
+          </a:prstGeom>
+          <a:solidFill>
+            <a:srgbClr val="FAF6EC"/>
+          </a:solidFill>
+          <a:ln w="12700">
+            <a:solidFill>
+              <a:srgbClr val="D8C8A4"/>
+            </a:solidFill>
+            <a:prstDash val="solid"/>
+          </a:ln>
+        </p:spPr>
+      </p:sp>
+      <p:sp>
+        <p:nvSpPr>
+          <p:cNvPr id="34" name="Text 28"/>
+          <p:cNvSpPr txBox="1"/>
+          <p:nvPr/>
+        </p:nvSpPr>
+        <p:spPr>
+          <a:xfrm>
+            <a:off x="9040901" y="4161192"/>
+            <a:ext cx="2602154" cy="548640"/>
+          </a:xfrm>
+          <a:prstGeom prst="rect">
+            <a:avLst/>
+          </a:prstGeom>
+          <a:noFill/>
+          <a:ln/>
+        </p:spPr>
+        <p:txBody>
+          <a:bodyPr wrap="square" lIns="0" tIns="0" rIns="0" bIns="0" rtlCol="0" anchor="ctr"/>
+          <a:lstStyle/>
+          <a:p>
+            <a:pPr marL="0" indent="0" algn="ctr">
+              <a:buNone/>
+            </a:pPr>
+            <a:r>
+              <a:rPr lang="en-US" sz="1300" dirty="0">
+                <a:solidFill>
+                  <a:srgbClr val="7B6B57"/>
+                </a:solidFill>
+                <a:latin typeface="Batang" pitchFamily="34" charset="0"/>
+                <a:ea typeface="Batang" pitchFamily="34" charset="-122"/>
+                <a:cs typeface="Batang" pitchFamily="34" charset="-120"/>
+              </a:rPr>
+              <a:t>"한 번 더"</a:t>
+            </a:r>
+            <a:endParaRPr lang="en-US" sz="1300" dirty="0"/>
+          </a:p>
+        </p:txBody>
+      </p:sp>
+      <p:sp>
+        <p:nvSpPr>
+          <p:cNvPr id="36" name="Slide Number Placeholder 0"/>
+          <p:cNvSpPr>
+            <a:spLocks noGrp="1"/>
+          </p:cNvSpPr>
+          <p:nvPr>
+            <p:ph type="sldNum" sz="quarter" idx="4294967295"/>
+          </p:nvPr>
+        </p:nvSpPr>
+        <p:spPr>
+          <a:xfrm>
+            <a:off x="11185855" y="6473952"/>
+            <a:ext cx="457200" cy="274320"/>
+          </a:xfrm>
+          <a:prstGeom prst="rect">
+            <a:avLst/>
+          </a:prstGeom>
+          <a:extLst>
+            <a:ext uri="{C572A759-6A51-4108-AA02-DFA0A04FC94B}">
+              <ma14:wrappingTextBoxFlag xmlns="" xmlns:ma14="http://schemas.microsoft.com/office/mac/drawingml/2011/main" val="0"/>
+            </a:ext>
+          </a:extLst>
+        </p:spPr>
+        <p:txBody>
+          <a:bodyPr/>
+          <a:lstStyle>
+            <a:lvl1pPr>
+              <a:defRPr sz="900">
+                <a:solidFill>
+                  <a:srgbClr val="7B6B57"/>
+                </a:solidFill>
+                <a:latin typeface="Malgun Gothic"/>
+                <a:ea typeface="Malgun Gothic"/>
+                <a:cs typeface="Malgun Gothic"/>
+              </a:defRPr>
+            </a:lvl1pPr>
+          </a:lstStyle>
+          <a:p>
+            <a:pPr algn="r"/>
+            <a:fld id="{F7021451-1387-4CA6-816F-3879F97B5CBC}" type="slidenum">
+              <a:rPr lang="en-US" b="0"/>
+              <a:t>5</a:t>
+            </a:fld>
+            <a:endParaRPr lang="en-US"/>
+          </a:p>
+        </p:txBody>
+      </p:sp>
+    </p:spTree>
+  </p:cSld>
+  <p:clrMapOvr>
+    <a:masterClrMapping/>
+  </p:clrMapOvr>
+</p:sld>
+</file>
+
+<file path=ppt/slides/slide6.xml><?xml version="1.0" encoding="utf-8"?>
 <p:sld xmlns:a="http://schemas.openxmlformats.org/drawingml/2006/main" xmlns:r="http://schemas.openxmlformats.org/officeDocument/2006/relationships" xmlns:p="http://schemas.openxmlformats.org/presentationml/2006/main">
   <p:cSld name="Slide 5">
     <p:spTree>
@@ -10269,1177 +9634,6 @@
             <a:pPr algn="r"/>
             <a:fld id="{F7021451-1387-4CA6-816F-3879F97B5CBC}" type="slidenum">
               <a:rPr lang="en-US" b="0"/>
-              <a:t>5</a:t>
-            </a:fld>
-            <a:endParaRPr lang="en-US"/>
-          </a:p>
-        </p:txBody>
-      </p:sp>
-    </p:spTree>
-  </p:cSld>
-  <p:clrMapOvr>
-    <a:masterClrMapping/>
-  </p:clrMapOvr>
-</p:sld>
-</file>
-
-<file path=ppt/slides/slide6.xml><?xml version="1.0" encoding="utf-8"?>
-<p:sld xmlns:a="http://schemas.openxmlformats.org/drawingml/2006/main" xmlns:r="http://schemas.openxmlformats.org/officeDocument/2006/relationships" xmlns:p="http://schemas.openxmlformats.org/presentationml/2006/main">
-  <p:cSld name="Slide 6">
-    <p:spTree>
-      <p:nvGrpSpPr>
-        <p:cNvPr id="1" name=""/>
-        <p:cNvGrpSpPr/>
-        <p:nvPr/>
-      </p:nvGrpSpPr>
-      <p:grpSpPr>
-        <a:xfrm>
-          <a:off x="0" y="0"/>
-          <a:ext cx="0" cy="0"/>
-          <a:chOff x="0" y="0"/>
-          <a:chExt cx="0" cy="0"/>
-        </a:xfrm>
-      </p:grpSpPr>
-      <p:sp>
-        <p:nvSpPr>
-          <p:cNvPr id="2" name="Text 1"/>
-          <p:cNvSpPr>
-            <a:spLocks noGrp="1"/>
-          </p:cNvSpPr>
-          <p:nvPr>
-            <p:ph type="title" idx="101" hasCustomPrompt="1"/>
-          </p:nvPr>
-        </p:nvSpPr>
-        <p:spPr>
-          <a:xfrm>
-            <a:off x="548640" y="292608"/>
-            <a:ext cx="11094415" cy="685800"/>
-          </a:xfrm>
-          <a:prstGeom prst="rect">
-            <a:avLst/>
-          </a:prstGeom>
-          <a:noFill/>
-          <a:ln/>
-        </p:spPr>
-        <p:txBody>
-          <a:bodyPr wrap="square" lIns="0" tIns="0" rIns="0" bIns="0" rtlCol="0" anchor="ctr"/>
-          <a:lstStyle/>
-          <a:p>
-            <a:pPr marL="0" indent="0" algn="l">
-              <a:buNone/>
-            </a:pPr>
-            <a:r>
-              <a:rPr lang="ko-KR" altLang="en-US" sz="2800" b="1" dirty="0">
-                <a:solidFill>
-                  <a:srgbClr val="2B2118"/>
-                </a:solidFill>
-                <a:latin typeface="Batang" pitchFamily="34" charset="0"/>
-                <a:ea typeface="Batang" pitchFamily="34" charset="-122"/>
-                <a:cs typeface="Batang" pitchFamily="34" charset="-120"/>
-              </a:rPr>
-              <a:t>진행 흐름</a:t>
-            </a:r>
-            <a:endParaRPr lang="en-US" sz="2800" dirty="0"/>
-          </a:p>
-        </p:txBody>
-      </p:sp>
-      <p:sp>
-        <p:nvSpPr>
-          <p:cNvPr id="3" name="Shape 1"/>
-          <p:cNvSpPr/>
-          <p:nvPr/>
-        </p:nvSpPr>
-        <p:spPr>
-          <a:xfrm>
-            <a:off x="548640" y="1371600"/>
-            <a:ext cx="329184" cy="329184"/>
-          </a:xfrm>
-          <a:prstGeom prst="ellipse">
-            <a:avLst/>
-          </a:prstGeom>
-          <a:solidFill>
-            <a:srgbClr val="1F6FE0"/>
-          </a:solidFill>
-          <a:ln w="12700">
-            <a:solidFill>
-              <a:srgbClr val="1F6FE0"/>
-            </a:solidFill>
-            <a:prstDash val="solid"/>
-          </a:ln>
-        </p:spPr>
-      </p:sp>
-      <p:sp>
-        <p:nvSpPr>
-          <p:cNvPr id="4" name="Text 2"/>
-          <p:cNvSpPr txBox="1"/>
-          <p:nvPr/>
-        </p:nvSpPr>
-        <p:spPr>
-          <a:xfrm>
-            <a:off x="548640" y="1371600"/>
-            <a:ext cx="329184" cy="329184"/>
-          </a:xfrm>
-          <a:prstGeom prst="rect">
-            <a:avLst/>
-          </a:prstGeom>
-          <a:noFill/>
-          <a:ln/>
-        </p:spPr>
-        <p:txBody>
-          <a:bodyPr wrap="square" lIns="0" tIns="0" rIns="0" bIns="0" rtlCol="0" anchor="ctr"/>
-          <a:lstStyle/>
-          <a:p>
-            <a:pPr marL="0" indent="0" algn="ctr">
-              <a:buNone/>
-            </a:pPr>
-            <a:r>
-              <a:rPr lang="en-US" sz="1400" b="1" dirty="0">
-                <a:solidFill>
-                  <a:srgbClr val="FFFFFF"/>
-                </a:solidFill>
-                <a:latin typeface="Malgun Gothic" pitchFamily="34" charset="0"/>
-                <a:ea typeface="Malgun Gothic" pitchFamily="34" charset="-122"/>
-                <a:cs typeface="Malgun Gothic" pitchFamily="34" charset="-120"/>
-              </a:rPr>
-              <a:t>1</a:t>
-            </a:r>
-            <a:endParaRPr lang="en-US" sz="1400" dirty="0"/>
-          </a:p>
-        </p:txBody>
-      </p:sp>
-      <p:sp>
-        <p:nvSpPr>
-          <p:cNvPr id="5" name="Text 3"/>
-          <p:cNvSpPr txBox="1"/>
-          <p:nvPr/>
-        </p:nvSpPr>
-        <p:spPr>
-          <a:xfrm>
-            <a:off x="960120" y="1389888"/>
-            <a:ext cx="2190674" cy="310896"/>
-          </a:xfrm>
-          <a:prstGeom prst="rect">
-            <a:avLst/>
-          </a:prstGeom>
-          <a:noFill/>
-          <a:ln/>
-        </p:spPr>
-        <p:txBody>
-          <a:bodyPr wrap="square" lIns="0" tIns="0" rIns="0" bIns="0" rtlCol="0" anchor="t"/>
-          <a:lstStyle/>
-          <a:p>
-            <a:pPr marL="0" indent="0">
-              <a:buNone/>
-            </a:pPr>
-            <a:r>
-              <a:rPr lang="en-US" sz="1400" b="1" dirty="0">
-                <a:solidFill>
-                  <a:srgbClr val="2B2118"/>
-                </a:solidFill>
-                <a:latin typeface="Malgun Gothic" pitchFamily="34" charset="0"/>
-                <a:ea typeface="Malgun Gothic" pitchFamily="34" charset="-122"/>
-                <a:cs typeface="Malgun Gothic" pitchFamily="34" charset="-120"/>
-              </a:rPr>
-              <a:t>멈추고 그리기</a:t>
-            </a:r>
-            <a:endParaRPr lang="en-US" sz="1400" dirty="0"/>
-          </a:p>
-        </p:txBody>
-      </p:sp>
-      <p:pic>
-        <p:nvPicPr>
-          <p:cNvPr id="6" name="Image 0" descr="D:\stopsketch\데모제출\2_대표이미지\01_시간정지_색골라그리기.png"/>
-          <p:cNvPicPr>
-            <a:picLocks noChangeAspect="1"/>
-          </p:cNvPicPr>
-          <p:nvPr/>
-        </p:nvPicPr>
-        <p:blipFill>
-          <a:blip r:embed="rId3"/>
-          <a:stretch>
-            <a:fillRect/>
-          </a:stretch>
-        </p:blipFill>
-        <p:spPr>
-          <a:xfrm>
-            <a:off x="548640" y="1828800"/>
-            <a:ext cx="2602154" cy="1463712"/>
-          </a:xfrm>
-          <a:prstGeom prst="rect">
-            <a:avLst/>
-          </a:prstGeom>
-        </p:spPr>
-      </p:pic>
-      <p:sp>
-        <p:nvSpPr>
-          <p:cNvPr id="7" name="Shape 4"/>
-          <p:cNvSpPr/>
-          <p:nvPr/>
-        </p:nvSpPr>
-        <p:spPr>
-          <a:xfrm>
-            <a:off x="548640" y="1828800"/>
-            <a:ext cx="2602154" cy="1463712"/>
-          </a:xfrm>
-          <a:prstGeom prst="rect">
-            <a:avLst/>
-          </a:prstGeom>
-          <a:ln w="12700">
-            <a:solidFill>
-              <a:srgbClr val="D8C8A4"/>
-            </a:solidFill>
-            <a:prstDash val="solid"/>
-          </a:ln>
-        </p:spPr>
-      </p:sp>
-      <p:sp>
-        <p:nvSpPr>
-          <p:cNvPr id="8" name="Text 5"/>
-          <p:cNvSpPr txBox="1"/>
-          <p:nvPr/>
-        </p:nvSpPr>
-        <p:spPr>
-          <a:xfrm>
-            <a:off x="548640" y="3383952"/>
-            <a:ext cx="2602154" cy="685800"/>
-          </a:xfrm>
-          <a:prstGeom prst="rect">
-            <a:avLst/>
-          </a:prstGeom>
-          <a:noFill/>
-          <a:ln/>
-        </p:spPr>
-        <p:txBody>
-          <a:bodyPr wrap="square" lIns="0" tIns="0" rIns="0" bIns="0" rtlCol="0" anchor="t"/>
-          <a:lstStyle/>
-          <a:p>
-            <a:pPr marL="0" indent="0">
-              <a:buNone/>
-            </a:pPr>
-            <a:r>
-              <a:rPr lang="en-US" sz="1300" dirty="0">
-                <a:solidFill>
-                  <a:srgbClr val="2B2118"/>
-                </a:solidFill>
-                <a:latin typeface="Malgun Gothic" pitchFamily="34" charset="0"/>
-                <a:ea typeface="Malgun Gothic" pitchFamily="34" charset="-122"/>
-                <a:cs typeface="Malgun Gothic" pitchFamily="34" charset="-120"/>
-              </a:rPr>
-              <a:t>스페이스로 멈추고 색을 골라 그린다. 재생하면 선이 떨어진다</a:t>
-            </a:r>
-            <a:endParaRPr lang="en-US" sz="1300" dirty="0"/>
-          </a:p>
-        </p:txBody>
-      </p:sp>
-      <p:sp>
-        <p:nvSpPr>
-          <p:cNvPr id="9" name="Shape 6"/>
-          <p:cNvSpPr/>
-          <p:nvPr/>
-        </p:nvSpPr>
-        <p:spPr>
-          <a:xfrm>
-            <a:off x="548640" y="4161192"/>
-            <a:ext cx="2602154" cy="548640"/>
-          </a:xfrm>
-          <a:prstGeom prst="roundRect">
-            <a:avLst>
-              <a:gd name="adj" fmla="val 13333"/>
-            </a:avLst>
-          </a:prstGeom>
-          <a:solidFill>
-            <a:srgbClr val="FAF6EC"/>
-          </a:solidFill>
-          <a:ln w="12700">
-            <a:solidFill>
-              <a:srgbClr val="D8C8A4"/>
-            </a:solidFill>
-            <a:prstDash val="solid"/>
-          </a:ln>
-        </p:spPr>
-      </p:sp>
-      <p:sp>
-        <p:nvSpPr>
-          <p:cNvPr id="10" name="Text 7"/>
-          <p:cNvSpPr txBox="1"/>
-          <p:nvPr/>
-        </p:nvSpPr>
-        <p:spPr>
-          <a:xfrm>
-            <a:off x="548640" y="4161192"/>
-            <a:ext cx="2602154" cy="548640"/>
-          </a:xfrm>
-          <a:prstGeom prst="rect">
-            <a:avLst/>
-          </a:prstGeom>
-          <a:noFill/>
-          <a:ln/>
-        </p:spPr>
-        <p:txBody>
-          <a:bodyPr wrap="square" lIns="0" tIns="0" rIns="0" bIns="0" rtlCol="0" anchor="ctr"/>
-          <a:lstStyle/>
-          <a:p>
-            <a:pPr marL="0" indent="0" algn="ctr">
-              <a:buNone/>
-            </a:pPr>
-            <a:r>
-              <a:rPr lang="en-US" sz="1300" dirty="0">
-                <a:solidFill>
-                  <a:srgbClr val="7B6B57"/>
-                </a:solidFill>
-                <a:latin typeface="Batang" pitchFamily="34" charset="0"/>
-                <a:ea typeface="Batang" pitchFamily="34" charset="-122"/>
-                <a:cs typeface="Batang" pitchFamily="34" charset="-120"/>
-              </a:rPr>
-              <a:t>"어디에 걸칠까"</a:t>
-            </a:r>
-            <a:endParaRPr lang="en-US" sz="1300" dirty="0"/>
-          </a:p>
-        </p:txBody>
-      </p:sp>
-      <p:sp>
-        <p:nvSpPr>
-          <p:cNvPr id="11" name="Shape 8"/>
-          <p:cNvSpPr/>
-          <p:nvPr/>
-        </p:nvSpPr>
-        <p:spPr>
-          <a:xfrm>
-            <a:off x="3379394" y="1371600"/>
-            <a:ext cx="329184" cy="329184"/>
-          </a:xfrm>
-          <a:prstGeom prst="ellipse">
-            <a:avLst/>
-          </a:prstGeom>
-          <a:solidFill>
-            <a:srgbClr val="E0312B"/>
-          </a:solidFill>
-          <a:ln w="12700">
-            <a:solidFill>
-              <a:srgbClr val="E0312B"/>
-            </a:solidFill>
-            <a:prstDash val="solid"/>
-          </a:ln>
-        </p:spPr>
-      </p:sp>
-      <p:sp>
-        <p:nvSpPr>
-          <p:cNvPr id="12" name="Text 9"/>
-          <p:cNvSpPr txBox="1"/>
-          <p:nvPr/>
-        </p:nvSpPr>
-        <p:spPr>
-          <a:xfrm>
-            <a:off x="3379394" y="1371600"/>
-            <a:ext cx="329184" cy="329184"/>
-          </a:xfrm>
-          <a:prstGeom prst="rect">
-            <a:avLst/>
-          </a:prstGeom>
-          <a:noFill/>
-          <a:ln/>
-        </p:spPr>
-        <p:txBody>
-          <a:bodyPr wrap="square" lIns="0" tIns="0" rIns="0" bIns="0" rtlCol="0" anchor="ctr"/>
-          <a:lstStyle/>
-          <a:p>
-            <a:pPr marL="0" indent="0" algn="ctr">
-              <a:buNone/>
-            </a:pPr>
-            <a:r>
-              <a:rPr lang="en-US" sz="1400" b="1" dirty="0">
-                <a:solidFill>
-                  <a:srgbClr val="FFFFFF"/>
-                </a:solidFill>
-                <a:latin typeface="Malgun Gothic" pitchFamily="34" charset="0"/>
-                <a:ea typeface="Malgun Gothic" pitchFamily="34" charset="-122"/>
-                <a:cs typeface="Malgun Gothic" pitchFamily="34" charset="-120"/>
-              </a:rPr>
-              <a:t>2</a:t>
-            </a:r>
-            <a:endParaRPr lang="en-US" sz="1400" dirty="0"/>
-          </a:p>
-        </p:txBody>
-      </p:sp>
-      <p:sp>
-        <p:nvSpPr>
-          <p:cNvPr id="13" name="Text 10"/>
-          <p:cNvSpPr txBox="1"/>
-          <p:nvPr/>
-        </p:nvSpPr>
-        <p:spPr>
-          <a:xfrm>
-            <a:off x="3790874" y="1389888"/>
-            <a:ext cx="2190674" cy="310896"/>
-          </a:xfrm>
-          <a:prstGeom prst="rect">
-            <a:avLst/>
-          </a:prstGeom>
-          <a:noFill/>
-          <a:ln/>
-        </p:spPr>
-        <p:txBody>
-          <a:bodyPr wrap="square" lIns="0" tIns="0" rIns="0" bIns="0" rtlCol="0" anchor="t"/>
-          <a:lstStyle/>
-          <a:p>
-            <a:pPr marL="0" indent="0">
-              <a:buNone/>
-            </a:pPr>
-            <a:r>
-              <a:rPr lang="en-US" sz="1400" b="1" dirty="0">
-                <a:solidFill>
-                  <a:srgbClr val="2B2118"/>
-                </a:solidFill>
-                <a:latin typeface="Malgun Gothic" pitchFamily="34" charset="0"/>
-                <a:ea typeface="Malgun Gothic" pitchFamily="34" charset="-122"/>
-                <a:cs typeface="Malgun Gothic" pitchFamily="34" charset="-120"/>
-              </a:rPr>
-              <a:t>함께 움직이는 무리</a:t>
-            </a:r>
-            <a:endParaRPr lang="en-US" sz="1400" dirty="0"/>
-          </a:p>
-        </p:txBody>
-      </p:sp>
-      <p:pic>
-        <p:nvPicPr>
-          <p:cNvPr id="14" name="Image 1" descr="D:\stopsketch\데모제출\2_대표이미지\06_줄지어_튕겨올라_공중물방울_깨우기.png"/>
-          <p:cNvPicPr>
-            <a:picLocks noChangeAspect="1"/>
-          </p:cNvPicPr>
-          <p:nvPr/>
-        </p:nvPicPr>
-        <p:blipFill>
-          <a:blip r:embed="rId4"/>
-          <a:stretch>
-            <a:fillRect/>
-          </a:stretch>
-        </p:blipFill>
-        <p:spPr>
-          <a:xfrm>
-            <a:off x="3379394" y="1828800"/>
-            <a:ext cx="2602154" cy="1463712"/>
-          </a:xfrm>
-          <a:prstGeom prst="rect">
-            <a:avLst/>
-          </a:prstGeom>
-        </p:spPr>
-      </p:pic>
-      <p:sp>
-        <p:nvSpPr>
-          <p:cNvPr id="15" name="Shape 11"/>
-          <p:cNvSpPr/>
-          <p:nvPr/>
-        </p:nvSpPr>
-        <p:spPr>
-          <a:xfrm>
-            <a:off x="3379394" y="1828800"/>
-            <a:ext cx="2602154" cy="1463712"/>
-          </a:xfrm>
-          <a:prstGeom prst="rect">
-            <a:avLst/>
-          </a:prstGeom>
-          <a:ln w="12700">
-            <a:solidFill>
-              <a:srgbClr val="D8C8A4"/>
-            </a:solidFill>
-            <a:prstDash val="solid"/>
-          </a:ln>
-        </p:spPr>
-      </p:sp>
-      <p:sp>
-        <p:nvSpPr>
-          <p:cNvPr id="16" name="Text 12"/>
-          <p:cNvSpPr txBox="1"/>
-          <p:nvPr/>
-        </p:nvSpPr>
-        <p:spPr>
-          <a:xfrm>
-            <a:off x="3379394" y="3383952"/>
-            <a:ext cx="2602154" cy="685800"/>
-          </a:xfrm>
-          <a:prstGeom prst="rect">
-            <a:avLst/>
-          </a:prstGeom>
-          <a:noFill/>
-          <a:ln/>
-        </p:spPr>
-        <p:txBody>
-          <a:bodyPr wrap="square" lIns="0" tIns="0" rIns="0" bIns="0" rtlCol="0" anchor="t"/>
-          <a:lstStyle/>
-          <a:p>
-            <a:pPr marL="0" indent="0">
-              <a:buNone/>
-            </a:pPr>
-            <a:r>
-              <a:rPr lang="en-US" sz="1300" dirty="0">
-                <a:solidFill>
-                  <a:srgbClr val="2B2118"/>
-                </a:solidFill>
-                <a:latin typeface="Malgun Gothic" pitchFamily="34" charset="0"/>
-                <a:ea typeface="Malgun Gothic" pitchFamily="34" charset="-122"/>
-                <a:cs typeface="Malgun Gothic" pitchFamily="34" charset="-120"/>
-              </a:rPr>
-              <a:t>대열이 주인공 발자국을 따라 함께 튕기고, 잠든 물방울을 깨운다</a:t>
-            </a:r>
-            <a:endParaRPr lang="en-US" sz="1300" dirty="0"/>
-          </a:p>
-        </p:txBody>
-      </p:sp>
-      <p:sp>
-        <p:nvSpPr>
-          <p:cNvPr id="17" name="Shape 13"/>
-          <p:cNvSpPr/>
-          <p:nvPr/>
-        </p:nvSpPr>
-        <p:spPr>
-          <a:xfrm>
-            <a:off x="3379394" y="4161192"/>
-            <a:ext cx="2602154" cy="548640"/>
-          </a:xfrm>
-          <a:prstGeom prst="roundRect">
-            <a:avLst>
-              <a:gd name="adj" fmla="val 13333"/>
-            </a:avLst>
-          </a:prstGeom>
-          <a:solidFill>
-            <a:srgbClr val="FAF6EC"/>
-          </a:solidFill>
-          <a:ln w="12700">
-            <a:solidFill>
-              <a:srgbClr val="D8C8A4"/>
-            </a:solidFill>
-            <a:prstDash val="solid"/>
-          </a:ln>
-        </p:spPr>
-      </p:sp>
-      <p:sp>
-        <p:nvSpPr>
-          <p:cNvPr id="18" name="Text 14"/>
-          <p:cNvSpPr txBox="1"/>
-          <p:nvPr/>
-        </p:nvSpPr>
-        <p:spPr>
-          <a:xfrm>
-            <a:off x="3379394" y="4161192"/>
-            <a:ext cx="2602154" cy="548640"/>
-          </a:xfrm>
-          <a:prstGeom prst="rect">
-            <a:avLst/>
-          </a:prstGeom>
-          <a:noFill/>
-          <a:ln/>
-        </p:spPr>
-        <p:txBody>
-          <a:bodyPr wrap="square" lIns="0" tIns="0" rIns="0" bIns="0" rtlCol="0" anchor="ctr"/>
-          <a:lstStyle/>
-          <a:p>
-            <a:pPr marL="0" indent="0" algn="ctr">
-              <a:buNone/>
-            </a:pPr>
-            <a:r>
-              <a:rPr lang="en-US" sz="1300" dirty="0">
-                <a:solidFill>
-                  <a:srgbClr val="7B6B57"/>
-                </a:solidFill>
-                <a:latin typeface="Batang" pitchFamily="34" charset="0"/>
-                <a:ea typeface="Batang" pitchFamily="34" charset="-122"/>
-                <a:cs typeface="Batang" pitchFamily="34" charset="-120"/>
-              </a:rPr>
-              <a:t>"다 따라올까"</a:t>
-            </a:r>
-            <a:endParaRPr lang="en-US" sz="1300" dirty="0"/>
-          </a:p>
-        </p:txBody>
-      </p:sp>
-      <p:sp>
-        <p:nvSpPr>
-          <p:cNvPr id="19" name="Shape 15"/>
-          <p:cNvSpPr/>
-          <p:nvPr/>
-        </p:nvSpPr>
-        <p:spPr>
-          <a:xfrm>
-            <a:off x="6210148" y="1371600"/>
-            <a:ext cx="329184" cy="329184"/>
-          </a:xfrm>
-          <a:prstGeom prst="ellipse">
-            <a:avLst/>
-          </a:prstGeom>
-          <a:solidFill>
-            <a:srgbClr val="1FA655"/>
-          </a:solidFill>
-          <a:ln w="12700">
-            <a:solidFill>
-              <a:srgbClr val="1FA655"/>
-            </a:solidFill>
-            <a:prstDash val="solid"/>
-          </a:ln>
-        </p:spPr>
-      </p:sp>
-      <p:sp>
-        <p:nvSpPr>
-          <p:cNvPr id="20" name="Text 16"/>
-          <p:cNvSpPr txBox="1"/>
-          <p:nvPr/>
-        </p:nvSpPr>
-        <p:spPr>
-          <a:xfrm>
-            <a:off x="6210148" y="1371600"/>
-            <a:ext cx="329184" cy="329184"/>
-          </a:xfrm>
-          <a:prstGeom prst="rect">
-            <a:avLst/>
-          </a:prstGeom>
-          <a:noFill/>
-          <a:ln/>
-        </p:spPr>
-        <p:txBody>
-          <a:bodyPr wrap="square" lIns="0" tIns="0" rIns="0" bIns="0" rtlCol="0" anchor="ctr"/>
-          <a:lstStyle/>
-          <a:p>
-            <a:pPr marL="0" indent="0" algn="ctr">
-              <a:buNone/>
-            </a:pPr>
-            <a:r>
-              <a:rPr lang="en-US" sz="1400" b="1" dirty="0">
-                <a:solidFill>
-                  <a:srgbClr val="FFFFFF"/>
-                </a:solidFill>
-                <a:latin typeface="Malgun Gothic" pitchFamily="34" charset="0"/>
-                <a:ea typeface="Malgun Gothic" pitchFamily="34" charset="-122"/>
-                <a:cs typeface="Malgun Gothic" pitchFamily="34" charset="-120"/>
-              </a:rPr>
-              <a:t>3</a:t>
-            </a:r>
-            <a:endParaRPr lang="en-US" sz="1400" dirty="0"/>
-          </a:p>
-        </p:txBody>
-      </p:sp>
-      <p:sp>
-        <p:nvSpPr>
-          <p:cNvPr id="21" name="Text 17"/>
-          <p:cNvSpPr txBox="1"/>
-          <p:nvPr/>
-        </p:nvSpPr>
-        <p:spPr>
-          <a:xfrm>
-            <a:off x="6621628" y="1389888"/>
-            <a:ext cx="2190674" cy="310896"/>
-          </a:xfrm>
-          <a:prstGeom prst="rect">
-            <a:avLst/>
-          </a:prstGeom>
-          <a:noFill/>
-          <a:ln/>
-        </p:spPr>
-        <p:txBody>
-          <a:bodyPr wrap="square" lIns="0" tIns="0" rIns="0" bIns="0" rtlCol="0" anchor="t"/>
-          <a:lstStyle/>
-          <a:p>
-            <a:pPr marL="0" indent="0">
-              <a:buNone/>
-            </a:pPr>
-            <a:r>
-              <a:rPr lang="en-US" sz="1400" b="1" dirty="0">
-                <a:solidFill>
-                  <a:srgbClr val="2B2118"/>
-                </a:solidFill>
-                <a:latin typeface="Malgun Gothic" pitchFamily="34" charset="0"/>
-                <a:ea typeface="Malgun Gothic" pitchFamily="34" charset="-122"/>
-                <a:cs typeface="Malgun Gothic" pitchFamily="34" charset="-120"/>
-              </a:rPr>
-              <a:t>잉크병에 데려가기</a:t>
-            </a:r>
-            <a:endParaRPr lang="en-US" sz="1400" dirty="0"/>
-          </a:p>
-        </p:txBody>
-      </p:sp>
-      <p:pic>
-        <p:nvPicPr>
-          <p:cNvPr id="22" name="Image 2" descr="D:\stopsketch\데모제출\2_대표이미지\07_검은잉크병_정화.png"/>
-          <p:cNvPicPr>
-            <a:picLocks noChangeAspect="1"/>
-          </p:cNvPicPr>
-          <p:nvPr/>
-        </p:nvPicPr>
-        <p:blipFill>
-          <a:blip r:embed="rId5"/>
-          <a:stretch>
-            <a:fillRect/>
-          </a:stretch>
-        </p:blipFill>
-        <p:spPr>
-          <a:xfrm>
-            <a:off x="6210148" y="1828800"/>
-            <a:ext cx="2602154" cy="1463712"/>
-          </a:xfrm>
-          <a:prstGeom prst="rect">
-            <a:avLst/>
-          </a:prstGeom>
-        </p:spPr>
-      </p:pic>
-      <p:sp>
-        <p:nvSpPr>
-          <p:cNvPr id="23" name="Shape 18"/>
-          <p:cNvSpPr/>
-          <p:nvPr/>
-        </p:nvSpPr>
-        <p:spPr>
-          <a:xfrm>
-            <a:off x="6210148" y="1828800"/>
-            <a:ext cx="2602154" cy="1463712"/>
-          </a:xfrm>
-          <a:prstGeom prst="rect">
-            <a:avLst/>
-          </a:prstGeom>
-          <a:ln w="12700">
-            <a:solidFill>
-              <a:srgbClr val="D8C8A4"/>
-            </a:solidFill>
-            <a:prstDash val="solid"/>
-          </a:ln>
-        </p:spPr>
-      </p:sp>
-      <p:sp>
-        <p:nvSpPr>
-          <p:cNvPr id="24" name="Text 19"/>
-          <p:cNvSpPr txBox="1"/>
-          <p:nvPr/>
-        </p:nvSpPr>
-        <p:spPr>
-          <a:xfrm>
-            <a:off x="6210148" y="3383952"/>
-            <a:ext cx="2602154" cy="685800"/>
-          </a:xfrm>
-          <a:prstGeom prst="rect">
-            <a:avLst/>
-          </a:prstGeom>
-          <a:noFill/>
-          <a:ln/>
-        </p:spPr>
-        <p:txBody>
-          <a:bodyPr wrap="square" lIns="0" tIns="0" rIns="0" bIns="0" rtlCol="0" anchor="t"/>
-          <a:lstStyle/>
-          <a:p>
-            <a:pPr marL="0" indent="0">
-              <a:buNone/>
-            </a:pPr>
-            <a:r>
-              <a:rPr lang="en-US" sz="1300" dirty="0">
-                <a:solidFill>
-                  <a:srgbClr val="2B2118"/>
-                </a:solidFill>
-                <a:latin typeface="Malgun Gothic" pitchFamily="34" charset="0"/>
-                <a:ea typeface="Malgun Gothic" pitchFamily="34" charset="-122"/>
-                <a:cs typeface="Malgun Gothic" pitchFamily="34" charset="-120"/>
-              </a:rPr>
-              <a:t>주인공이 닿으면 대열이 차례로 뛰어들고 병이 맑아진다</a:t>
-            </a:r>
-            <a:endParaRPr lang="en-US" sz="1300" dirty="0"/>
-          </a:p>
-        </p:txBody>
-      </p:sp>
-      <p:sp>
-        <p:nvSpPr>
-          <p:cNvPr id="25" name="Shape 20"/>
-          <p:cNvSpPr/>
-          <p:nvPr/>
-        </p:nvSpPr>
-        <p:spPr>
-          <a:xfrm>
-            <a:off x="6210148" y="4161192"/>
-            <a:ext cx="2602154" cy="548640"/>
-          </a:xfrm>
-          <a:prstGeom prst="roundRect">
-            <a:avLst>
-              <a:gd name="adj" fmla="val 13333"/>
-            </a:avLst>
-          </a:prstGeom>
-          <a:solidFill>
-            <a:srgbClr val="FAF6EC"/>
-          </a:solidFill>
-          <a:ln w="12700">
-            <a:solidFill>
-              <a:srgbClr val="D8C8A4"/>
-            </a:solidFill>
-            <a:prstDash val="solid"/>
-          </a:ln>
-        </p:spPr>
-      </p:sp>
-      <p:sp>
-        <p:nvSpPr>
-          <p:cNvPr id="26" name="Text 21"/>
-          <p:cNvSpPr txBox="1"/>
-          <p:nvPr/>
-        </p:nvSpPr>
-        <p:spPr>
-          <a:xfrm>
-            <a:off x="6210148" y="4161192"/>
-            <a:ext cx="2602154" cy="548640"/>
-          </a:xfrm>
-          <a:prstGeom prst="rect">
-            <a:avLst/>
-          </a:prstGeom>
-          <a:noFill/>
-          <a:ln/>
-        </p:spPr>
-        <p:txBody>
-          <a:bodyPr wrap="square" lIns="0" tIns="0" rIns="0" bIns="0" rtlCol="0" anchor="ctr"/>
-          <a:lstStyle/>
-          <a:p>
-            <a:pPr marL="0" indent="0" algn="ctr">
-              <a:buNone/>
-            </a:pPr>
-            <a:r>
-              <a:rPr lang="en-US" sz="1300" dirty="0">
-                <a:solidFill>
-                  <a:srgbClr val="7B6B57"/>
-                </a:solidFill>
-                <a:latin typeface="Batang" pitchFamily="34" charset="0"/>
-                <a:ea typeface="Batang" pitchFamily="34" charset="-122"/>
-                <a:cs typeface="Batang" pitchFamily="34" charset="-120"/>
-              </a:rPr>
-              <a:t>"몇 마리나 왔지"</a:t>
-            </a:r>
-            <a:endParaRPr lang="en-US" sz="1300" dirty="0"/>
-          </a:p>
-        </p:txBody>
-      </p:sp>
-      <p:sp>
-        <p:nvSpPr>
-          <p:cNvPr id="27" name="Shape 22"/>
-          <p:cNvSpPr/>
-          <p:nvPr/>
-        </p:nvSpPr>
-        <p:spPr>
-          <a:xfrm>
-            <a:off x="9040901" y="1371600"/>
-            <a:ext cx="329184" cy="329184"/>
-          </a:xfrm>
-          <a:prstGeom prst="ellipse">
-            <a:avLst/>
-          </a:prstGeom>
-          <a:solidFill>
-            <a:srgbClr val="C99A00"/>
-          </a:solidFill>
-          <a:ln w="12700">
-            <a:solidFill>
-              <a:srgbClr val="C99A00"/>
-            </a:solidFill>
-            <a:prstDash val="solid"/>
-          </a:ln>
-        </p:spPr>
-      </p:sp>
-      <p:sp>
-        <p:nvSpPr>
-          <p:cNvPr id="28" name="Text 23"/>
-          <p:cNvSpPr txBox="1"/>
-          <p:nvPr/>
-        </p:nvSpPr>
-        <p:spPr>
-          <a:xfrm>
-            <a:off x="9040901" y="1371600"/>
-            <a:ext cx="329184" cy="329184"/>
-          </a:xfrm>
-          <a:prstGeom prst="rect">
-            <a:avLst/>
-          </a:prstGeom>
-          <a:noFill/>
-          <a:ln/>
-        </p:spPr>
-        <p:txBody>
-          <a:bodyPr wrap="square" lIns="0" tIns="0" rIns="0" bIns="0" rtlCol="0" anchor="ctr"/>
-          <a:lstStyle/>
-          <a:p>
-            <a:pPr marL="0" indent="0" algn="ctr">
-              <a:buNone/>
-            </a:pPr>
-            <a:r>
-              <a:rPr lang="en-US" sz="1400" b="1" dirty="0">
-                <a:solidFill>
-                  <a:srgbClr val="FFFFFF"/>
-                </a:solidFill>
-                <a:latin typeface="Malgun Gothic" pitchFamily="34" charset="0"/>
-                <a:ea typeface="Malgun Gothic" pitchFamily="34" charset="-122"/>
-                <a:cs typeface="Malgun Gothic" pitchFamily="34" charset="-120"/>
-              </a:rPr>
-              <a:t>4</a:t>
-            </a:r>
-            <a:endParaRPr lang="en-US" sz="1400" dirty="0"/>
-          </a:p>
-        </p:txBody>
-      </p:sp>
-      <p:sp>
-        <p:nvSpPr>
-          <p:cNvPr id="29" name="Text 24"/>
-          <p:cNvSpPr txBox="1"/>
-          <p:nvPr/>
-        </p:nvSpPr>
-        <p:spPr>
-          <a:xfrm>
-            <a:off x="9452381" y="1389888"/>
-            <a:ext cx="2190674" cy="310896"/>
-          </a:xfrm>
-          <a:prstGeom prst="rect">
-            <a:avLst/>
-          </a:prstGeom>
-          <a:noFill/>
-          <a:ln/>
-        </p:spPr>
-        <p:txBody>
-          <a:bodyPr wrap="square" lIns="0" tIns="0" rIns="0" bIns="0" rtlCol="0" anchor="t"/>
-          <a:lstStyle/>
-          <a:p>
-            <a:pPr marL="0" indent="0">
-              <a:buNone/>
-            </a:pPr>
-            <a:r>
-              <a:rPr lang="en-US" sz="1400" b="1" dirty="0">
-                <a:solidFill>
-                  <a:srgbClr val="2B2118"/>
-                </a:solidFill>
-                <a:latin typeface="Malgun Gothic" pitchFamily="34" charset="0"/>
-                <a:ea typeface="Malgun Gothic" pitchFamily="34" charset="-122"/>
-                <a:cs typeface="Malgun Gothic" pitchFamily="34" charset="-120"/>
-              </a:rPr>
-              <a:t>결과 · 재도전</a:t>
-            </a:r>
-            <a:endParaRPr lang="en-US" sz="1400" dirty="0"/>
-          </a:p>
-        </p:txBody>
-      </p:sp>
-      <p:pic>
-        <p:nvPicPr>
-          <p:cNvPr id="30" name="Image 3" descr="D:\stopsketch\데모제출\2_대표이미지\08_결과창_별3_정화100.png"/>
-          <p:cNvPicPr>
-            <a:picLocks noChangeAspect="1"/>
-          </p:cNvPicPr>
-          <p:nvPr/>
-        </p:nvPicPr>
-        <p:blipFill>
-          <a:blip r:embed="rId6"/>
-          <a:stretch>
-            <a:fillRect/>
-          </a:stretch>
-        </p:blipFill>
-        <p:spPr>
-          <a:xfrm>
-            <a:off x="9040901" y="1828800"/>
-            <a:ext cx="2602154" cy="1463712"/>
-          </a:xfrm>
-          <a:prstGeom prst="rect">
-            <a:avLst/>
-          </a:prstGeom>
-        </p:spPr>
-      </p:pic>
-      <p:sp>
-        <p:nvSpPr>
-          <p:cNvPr id="31" name="Shape 25"/>
-          <p:cNvSpPr/>
-          <p:nvPr/>
-        </p:nvSpPr>
-        <p:spPr>
-          <a:xfrm>
-            <a:off x="9040901" y="1828800"/>
-            <a:ext cx="2602154" cy="1463712"/>
-          </a:xfrm>
-          <a:prstGeom prst="rect">
-            <a:avLst/>
-          </a:prstGeom>
-          <a:ln w="12700">
-            <a:solidFill>
-              <a:srgbClr val="D8C8A4"/>
-            </a:solidFill>
-            <a:prstDash val="solid"/>
-          </a:ln>
-        </p:spPr>
-      </p:sp>
-      <p:sp>
-        <p:nvSpPr>
-          <p:cNvPr id="32" name="Text 26"/>
-          <p:cNvSpPr txBox="1"/>
-          <p:nvPr/>
-        </p:nvSpPr>
-        <p:spPr>
-          <a:xfrm>
-            <a:off x="9040901" y="3383952"/>
-            <a:ext cx="2602154" cy="685800"/>
-          </a:xfrm>
-          <a:prstGeom prst="rect">
-            <a:avLst/>
-          </a:prstGeom>
-          <a:noFill/>
-          <a:ln/>
-        </p:spPr>
-        <p:txBody>
-          <a:bodyPr wrap="square" lIns="0" tIns="0" rIns="0" bIns="0" rtlCol="0" anchor="t"/>
-          <a:lstStyle/>
-          <a:p>
-            <a:pPr marL="0" indent="0">
-              <a:buNone/>
-            </a:pPr>
-            <a:r>
-              <a:rPr lang="en-US" sz="1300" dirty="0">
-                <a:solidFill>
-                  <a:srgbClr val="2B2118"/>
-                </a:solidFill>
-                <a:latin typeface="Malgun Gothic" pitchFamily="34" charset="0"/>
-                <a:ea typeface="Malgun Gothic" pitchFamily="34" charset="-122"/>
-                <a:cs typeface="Malgun Gothic" pitchFamily="34" charset="-120"/>
-              </a:rPr>
-              <a:t>별 n/3 과 정화 %. 더 많이, 별 3개를 노려 다시 한다</a:t>
-            </a:r>
-            <a:endParaRPr lang="en-US" sz="1300" dirty="0"/>
-          </a:p>
-        </p:txBody>
-      </p:sp>
-      <p:sp>
-        <p:nvSpPr>
-          <p:cNvPr id="33" name="Shape 27"/>
-          <p:cNvSpPr/>
-          <p:nvPr/>
-        </p:nvSpPr>
-        <p:spPr>
-          <a:xfrm>
-            <a:off x="9040901" y="4161192"/>
-            <a:ext cx="2602154" cy="548640"/>
-          </a:xfrm>
-          <a:prstGeom prst="roundRect">
-            <a:avLst>
-              <a:gd name="adj" fmla="val 13333"/>
-            </a:avLst>
-          </a:prstGeom>
-          <a:solidFill>
-            <a:srgbClr val="FAF6EC"/>
-          </a:solidFill>
-          <a:ln w="12700">
-            <a:solidFill>
-              <a:srgbClr val="D8C8A4"/>
-            </a:solidFill>
-            <a:prstDash val="solid"/>
-          </a:ln>
-        </p:spPr>
-      </p:sp>
-      <p:sp>
-        <p:nvSpPr>
-          <p:cNvPr id="34" name="Text 28"/>
-          <p:cNvSpPr txBox="1"/>
-          <p:nvPr/>
-        </p:nvSpPr>
-        <p:spPr>
-          <a:xfrm>
-            <a:off x="9040901" y="4161192"/>
-            <a:ext cx="2602154" cy="548640"/>
-          </a:xfrm>
-          <a:prstGeom prst="rect">
-            <a:avLst/>
-          </a:prstGeom>
-          <a:noFill/>
-          <a:ln/>
-        </p:spPr>
-        <p:txBody>
-          <a:bodyPr wrap="square" lIns="0" tIns="0" rIns="0" bIns="0" rtlCol="0" anchor="ctr"/>
-          <a:lstStyle/>
-          <a:p>
-            <a:pPr marL="0" indent="0" algn="ctr">
-              <a:buNone/>
-            </a:pPr>
-            <a:r>
-              <a:rPr lang="en-US" sz="1300" dirty="0">
-                <a:solidFill>
-                  <a:srgbClr val="7B6B57"/>
-                </a:solidFill>
-                <a:latin typeface="Batang" pitchFamily="34" charset="0"/>
-                <a:ea typeface="Batang" pitchFamily="34" charset="-122"/>
-                <a:cs typeface="Batang" pitchFamily="34" charset="-120"/>
-              </a:rPr>
-              <a:t>"한 번 더"</a:t>
-            </a:r>
-            <a:endParaRPr lang="en-US" sz="1300" dirty="0"/>
-          </a:p>
-        </p:txBody>
-      </p:sp>
-      <p:sp>
-        <p:nvSpPr>
-          <p:cNvPr id="35" name="Text 29"/>
-          <p:cNvSpPr txBox="1"/>
-          <p:nvPr/>
-        </p:nvSpPr>
-        <p:spPr>
-          <a:xfrm>
-            <a:off x="548640" y="5440680"/>
-            <a:ext cx="11094415" cy="274320"/>
-          </a:xfrm>
-          <a:prstGeom prst="rect">
-            <a:avLst/>
-          </a:prstGeom>
-          <a:noFill/>
-          <a:ln/>
-        </p:spPr>
-        <p:txBody>
-          <a:bodyPr wrap="square" lIns="0" tIns="0" rIns="0" bIns="0" rtlCol="0" anchor="t"/>
-          <a:lstStyle/>
-          <a:p>
-            <a:pPr marL="0" indent="0">
-              <a:buNone/>
-            </a:pPr>
-            <a:r>
-              <a:rPr lang="en-US" sz="1000" dirty="0">
-                <a:solidFill>
-                  <a:srgbClr val="7B6B57"/>
-                </a:solidFill>
-                <a:latin typeface="Malgun Gothic" pitchFamily="34" charset="0"/>
-                <a:ea typeface="Malgun Gothic" pitchFamily="34" charset="-122"/>
-                <a:cs typeface="Malgun Gothic" pitchFamily="34" charset="-120"/>
-              </a:rPr>
-              <a:t>아래 줄은 그 단계에서 플레이어가 하는 생각. 스크린샷은 모두 실제 데모 화면 (데모 3 정석 루트).</a:t>
-            </a:r>
-            <a:endParaRPr lang="en-US" sz="1000" dirty="0"/>
-          </a:p>
-        </p:txBody>
-      </p:sp>
-      <p:sp>
-        <p:nvSpPr>
-          <p:cNvPr id="36" name="Slide Number Placeholder 0"/>
-          <p:cNvSpPr>
-            <a:spLocks noGrp="1"/>
-          </p:cNvSpPr>
-          <p:nvPr>
-            <p:ph type="sldNum" sz="quarter" idx="4294967295"/>
-          </p:nvPr>
-        </p:nvSpPr>
-        <p:spPr>
-          <a:xfrm>
-            <a:off x="11185855" y="6473952"/>
-            <a:ext cx="457200" cy="274320"/>
-          </a:xfrm>
-          <a:prstGeom prst="rect">
-            <a:avLst/>
-          </a:prstGeom>
-          <a:extLst>
-            <a:ext uri="{C572A759-6A51-4108-AA02-DFA0A04FC94B}">
-              <ma14:wrappingTextBoxFlag xmlns="" xmlns:ma14="http://schemas.microsoft.com/office/mac/drawingml/2011/main" val="0"/>
-            </a:ext>
-          </a:extLst>
-        </p:spPr>
-        <p:txBody>
-          <a:bodyPr/>
-          <a:lstStyle>
-            <a:lvl1pPr>
-              <a:defRPr sz="900">
-                <a:solidFill>
-                  <a:srgbClr val="7B6B57"/>
-                </a:solidFill>
-                <a:latin typeface="Malgun Gothic"/>
-                <a:ea typeface="Malgun Gothic"/>
-                <a:cs typeface="Malgun Gothic"/>
-              </a:defRPr>
-            </a:lvl1pPr>
-          </a:lstStyle>
-          <a:p>
-            <a:pPr algn="r"/>
-            <a:fld id="{F7021451-1387-4CA6-816F-3879F97B5CBC}" type="slidenum">
-              <a:rPr lang="en-US" b="0"/>
               <a:t>6</a:t>
             </a:fld>
             <a:endParaRPr lang="en-US"/>
@@ -11455,2059 +9649,6 @@
 </file>
 
 <file path=ppt/slides/slide7.xml><?xml version="1.0" encoding="utf-8"?>
-<p:sld xmlns:a="http://schemas.openxmlformats.org/drawingml/2006/main" xmlns:r="http://schemas.openxmlformats.org/officeDocument/2006/relationships" xmlns:p="http://schemas.openxmlformats.org/presentationml/2006/main">
-  <p:cSld name="Slide 7">
-    <p:spTree>
-      <p:nvGrpSpPr>
-        <p:cNvPr id="1" name=""/>
-        <p:cNvGrpSpPr/>
-        <p:nvPr/>
-      </p:nvGrpSpPr>
-      <p:grpSpPr>
-        <a:xfrm>
-          <a:off x="0" y="0"/>
-          <a:ext cx="0" cy="0"/>
-          <a:chOff x="0" y="0"/>
-          <a:chExt cx="0" cy="0"/>
-        </a:xfrm>
-      </p:grpSpPr>
-      <p:sp>
-        <p:nvSpPr>
-          <p:cNvPr id="2" name="Text 1"/>
-          <p:cNvSpPr>
-            <a:spLocks noGrp="1"/>
-          </p:cNvSpPr>
-          <p:nvPr>
-            <p:ph type="title" idx="101" hasCustomPrompt="1"/>
-          </p:nvPr>
-        </p:nvSpPr>
-        <p:spPr>
-          <a:xfrm>
-            <a:off x="548640" y="292608"/>
-            <a:ext cx="11094415" cy="685800"/>
-          </a:xfrm>
-          <a:prstGeom prst="rect">
-            <a:avLst/>
-          </a:prstGeom>
-          <a:noFill/>
-          <a:ln/>
-        </p:spPr>
-        <p:txBody>
-          <a:bodyPr wrap="square" lIns="0" tIns="0" rIns="0" bIns="0" rtlCol="0" anchor="ctr"/>
-          <a:lstStyle/>
-          <a:p>
-            <a:pPr marL="0" indent="0" algn="l">
-              <a:buNone/>
-            </a:pPr>
-            <a:r>
-              <a:rPr lang="en-US" sz="2800" b="1" dirty="0">
-                <a:solidFill>
-                  <a:srgbClr val="2B2118"/>
-                </a:solidFill>
-                <a:latin typeface="Batang" pitchFamily="34" charset="0"/>
-                <a:ea typeface="Batang" pitchFamily="34" charset="-122"/>
-                <a:cs typeface="Batang" pitchFamily="34" charset="-120"/>
-              </a:rPr>
-              <a:t>물감 5색: 색마다 다른 물리 성질</a:t>
-            </a:r>
-            <a:endParaRPr lang="en-US" sz="2800" dirty="0"/>
-          </a:p>
-        </p:txBody>
-      </p:sp>
-      <p:sp>
-        <p:nvSpPr>
-          <p:cNvPr id="3" name="Shape 1"/>
-          <p:cNvSpPr/>
-          <p:nvPr/>
-        </p:nvSpPr>
-        <p:spPr>
-          <a:xfrm>
-            <a:off x="548640" y="1280160"/>
-            <a:ext cx="2036003" cy="3154680"/>
-          </a:xfrm>
-          <a:prstGeom prst="roundRect">
-            <a:avLst>
-              <a:gd name="adj" fmla="val 3593"/>
-            </a:avLst>
-          </a:prstGeom>
-          <a:solidFill>
-            <a:srgbClr val="FAF6EC"/>
-          </a:solidFill>
-          <a:ln w="12700">
-            <a:solidFill>
-              <a:srgbClr val="D8C8A4"/>
-            </a:solidFill>
-            <a:prstDash val="solid"/>
-          </a:ln>
-        </p:spPr>
-      </p:sp>
-      <p:pic>
-        <p:nvPicPr>
-          <p:cNvPr id="4" name="Image 0" descr="D:\stopsketch\stopsketch\assets\ink_black.png"/>
-          <p:cNvPicPr>
-            <a:picLocks noChangeAspect="1"/>
-          </p:cNvPicPr>
-          <p:nvPr/>
-        </p:nvPicPr>
-        <p:blipFill>
-          <a:blip r:embed="rId3"/>
-          <a:stretch>
-            <a:fillRect/>
-          </a:stretch>
-        </p:blipFill>
-        <p:spPr>
-          <a:xfrm>
-            <a:off x="1155162" y="1508760"/>
-            <a:ext cx="822960" cy="1097280"/>
-          </a:xfrm>
-          <a:prstGeom prst="rect">
-            <a:avLst/>
-          </a:prstGeom>
-        </p:spPr>
-      </p:pic>
-      <p:sp>
-        <p:nvSpPr>
-          <p:cNvPr id="5" name="Shape 2"/>
-          <p:cNvSpPr/>
-          <p:nvPr/>
-        </p:nvSpPr>
-        <p:spPr>
-          <a:xfrm>
-            <a:off x="731520" y="1463040"/>
-            <a:ext cx="329184" cy="329184"/>
-          </a:xfrm>
-          <a:prstGeom prst="ellipse">
-            <a:avLst/>
-          </a:prstGeom>
-          <a:solidFill>
-            <a:srgbClr val="2B2118"/>
-          </a:solidFill>
-          <a:ln w="12700">
-            <a:solidFill>
-              <a:srgbClr val="2B2118"/>
-            </a:solidFill>
-            <a:prstDash val="solid"/>
-          </a:ln>
-        </p:spPr>
-      </p:sp>
-      <p:sp>
-        <p:nvSpPr>
-          <p:cNvPr id="6" name="Text 3"/>
-          <p:cNvSpPr txBox="1"/>
-          <p:nvPr/>
-        </p:nvSpPr>
-        <p:spPr>
-          <a:xfrm>
-            <a:off x="731520" y="1463040"/>
-            <a:ext cx="329184" cy="329184"/>
-          </a:xfrm>
-          <a:prstGeom prst="rect">
-            <a:avLst/>
-          </a:prstGeom>
-          <a:noFill/>
-          <a:ln/>
-        </p:spPr>
-        <p:txBody>
-          <a:bodyPr wrap="square" lIns="0" tIns="0" rIns="0" bIns="0" rtlCol="0" anchor="ctr"/>
-          <a:lstStyle/>
-          <a:p>
-            <a:pPr marL="0" indent="0" algn="ctr">
-              <a:buNone/>
-            </a:pPr>
-            <a:r>
-              <a:rPr lang="en-US" sz="1400" b="1" dirty="0">
-                <a:solidFill>
-                  <a:srgbClr val="FFFFFF"/>
-                </a:solidFill>
-                <a:latin typeface="Malgun Gothic" pitchFamily="34" charset="0"/>
-                <a:ea typeface="Malgun Gothic" pitchFamily="34" charset="-122"/>
-                <a:cs typeface="Malgun Gothic" pitchFamily="34" charset="-120"/>
-              </a:rPr>
-              <a:t>1</a:t>
-            </a:r>
-            <a:endParaRPr lang="en-US" sz="1400" dirty="0"/>
-          </a:p>
-        </p:txBody>
-      </p:sp>
-      <p:sp>
-        <p:nvSpPr>
-          <p:cNvPr id="7" name="Text 4"/>
-          <p:cNvSpPr txBox="1"/>
-          <p:nvPr/>
-        </p:nvSpPr>
-        <p:spPr>
-          <a:xfrm>
-            <a:off x="731520" y="2743200"/>
-            <a:ext cx="1670243" cy="411480"/>
-          </a:xfrm>
-          <a:prstGeom prst="rect">
-            <a:avLst/>
-          </a:prstGeom>
-          <a:noFill/>
-          <a:ln/>
-        </p:spPr>
-        <p:txBody>
-          <a:bodyPr wrap="square" lIns="0" tIns="0" rIns="0" bIns="0" rtlCol="0" anchor="t"/>
-          <a:lstStyle/>
-          <a:p>
-            <a:pPr marL="0" indent="0" algn="ctr">
-              <a:buNone/>
-            </a:pPr>
-            <a:r>
-              <a:rPr lang="en-US" sz="1800" b="1" dirty="0">
-                <a:solidFill>
-                  <a:srgbClr val="2B2118"/>
-                </a:solidFill>
-                <a:latin typeface="Batang" pitchFamily="34" charset="0"/>
-                <a:ea typeface="Batang" pitchFamily="34" charset="-122"/>
-                <a:cs typeface="Batang" pitchFamily="34" charset="-120"/>
-              </a:rPr>
-              <a:t>검정</a:t>
-            </a:r>
-            <a:r>
-              <a:rPr lang="en-US" sz="1800" dirty="0">
-                <a:solidFill>
-                  <a:srgbClr val="2B2118"/>
-                </a:solidFill>
-                <a:latin typeface="Batang" pitchFamily="34" charset="0"/>
-                <a:ea typeface="Batang" pitchFamily="34" charset="-122"/>
-                <a:cs typeface="Batang" pitchFamily="34" charset="-120"/>
-              </a:rPr>
-              <a:t>  기본</a:t>
-            </a:r>
-            <a:endParaRPr lang="en-US" sz="1800" dirty="0"/>
-          </a:p>
-        </p:txBody>
-      </p:sp>
-      <p:sp>
-        <p:nvSpPr>
-          <p:cNvPr id="8" name="Text 5"/>
-          <p:cNvSpPr txBox="1"/>
-          <p:nvPr/>
-        </p:nvSpPr>
-        <p:spPr>
-          <a:xfrm>
-            <a:off x="777240" y="3246120"/>
-            <a:ext cx="1578803" cy="1097280"/>
-          </a:xfrm>
-          <a:prstGeom prst="rect">
-            <a:avLst/>
-          </a:prstGeom>
-          <a:noFill/>
-          <a:ln/>
-        </p:spPr>
-        <p:txBody>
-          <a:bodyPr wrap="square" lIns="0" tIns="0" rIns="0" bIns="0" rtlCol="0" anchor="t"/>
-          <a:lstStyle/>
-          <a:p>
-            <a:pPr marL="0" indent="0">
-              <a:buNone/>
-            </a:pPr>
-            <a:r>
-              <a:rPr lang="en-US" sz="1300" dirty="0">
-                <a:solidFill>
-                  <a:srgbClr val="2B2118"/>
-                </a:solidFill>
-                <a:latin typeface="Malgun Gothic" pitchFamily="34" charset="0"/>
-                <a:ea typeface="Malgun Gothic" pitchFamily="34" charset="-122"/>
-                <a:cs typeface="Malgun Gothic" pitchFamily="34" charset="-120"/>
-              </a:rPr>
-              <a:t>떨어져 걸쳐지는 다리 · 가시 덮개</a:t>
-            </a:r>
-            <a:endParaRPr lang="en-US" sz="1300" dirty="0"/>
-          </a:p>
-        </p:txBody>
-      </p:sp>
-      <p:sp>
-        <p:nvSpPr>
-          <p:cNvPr id="9" name="Shape 6"/>
-          <p:cNvSpPr/>
-          <p:nvPr/>
-        </p:nvSpPr>
-        <p:spPr>
-          <a:xfrm>
-            <a:off x="2813243" y="1280160"/>
-            <a:ext cx="2036003" cy="3154680"/>
-          </a:xfrm>
-          <a:prstGeom prst="roundRect">
-            <a:avLst>
-              <a:gd name="adj" fmla="val 3593"/>
-            </a:avLst>
-          </a:prstGeom>
-          <a:solidFill>
-            <a:srgbClr val="FAF6EC"/>
-          </a:solidFill>
-          <a:ln w="12700">
-            <a:solidFill>
-              <a:srgbClr val="D8C8A4"/>
-            </a:solidFill>
-            <a:prstDash val="solid"/>
-          </a:ln>
-        </p:spPr>
-      </p:sp>
-      <p:pic>
-        <p:nvPicPr>
-          <p:cNvPr id="10" name="Image 1" descr="D:\stopsketch\stopsketch\assets\ink_red.png"/>
-          <p:cNvPicPr>
-            <a:picLocks noChangeAspect="1"/>
-          </p:cNvPicPr>
-          <p:nvPr/>
-        </p:nvPicPr>
-        <p:blipFill>
-          <a:blip r:embed="rId4"/>
-          <a:stretch>
-            <a:fillRect/>
-          </a:stretch>
-        </p:blipFill>
-        <p:spPr>
-          <a:xfrm>
-            <a:off x="3419765" y="1508760"/>
-            <a:ext cx="822960" cy="1097280"/>
-          </a:xfrm>
-          <a:prstGeom prst="rect">
-            <a:avLst/>
-          </a:prstGeom>
-        </p:spPr>
-      </p:pic>
-      <p:sp>
-        <p:nvSpPr>
-          <p:cNvPr id="11" name="Shape 7"/>
-          <p:cNvSpPr/>
-          <p:nvPr/>
-        </p:nvSpPr>
-        <p:spPr>
-          <a:xfrm>
-            <a:off x="2996123" y="1463040"/>
-            <a:ext cx="329184" cy="329184"/>
-          </a:xfrm>
-          <a:prstGeom prst="ellipse">
-            <a:avLst/>
-          </a:prstGeom>
-          <a:solidFill>
-            <a:srgbClr val="E0312B"/>
-          </a:solidFill>
-          <a:ln w="12700">
-            <a:solidFill>
-              <a:srgbClr val="E0312B"/>
-            </a:solidFill>
-            <a:prstDash val="solid"/>
-          </a:ln>
-        </p:spPr>
-      </p:sp>
-      <p:sp>
-        <p:nvSpPr>
-          <p:cNvPr id="12" name="Text 8"/>
-          <p:cNvSpPr txBox="1"/>
-          <p:nvPr/>
-        </p:nvSpPr>
-        <p:spPr>
-          <a:xfrm>
-            <a:off x="2996123" y="1463040"/>
-            <a:ext cx="329184" cy="329184"/>
-          </a:xfrm>
-          <a:prstGeom prst="rect">
-            <a:avLst/>
-          </a:prstGeom>
-          <a:noFill/>
-          <a:ln/>
-        </p:spPr>
-        <p:txBody>
-          <a:bodyPr wrap="square" lIns="0" tIns="0" rIns="0" bIns="0" rtlCol="0" anchor="ctr"/>
-          <a:lstStyle/>
-          <a:p>
-            <a:pPr marL="0" indent="0" algn="ctr">
-              <a:buNone/>
-            </a:pPr>
-            <a:r>
-              <a:rPr lang="en-US" sz="1400" b="1" dirty="0">
-                <a:solidFill>
-                  <a:srgbClr val="FFFFFF"/>
-                </a:solidFill>
-                <a:latin typeface="Malgun Gothic" pitchFamily="34" charset="0"/>
-                <a:ea typeface="Malgun Gothic" pitchFamily="34" charset="-122"/>
-                <a:cs typeface="Malgun Gothic" pitchFamily="34" charset="-120"/>
-              </a:rPr>
-              <a:t>2</a:t>
-            </a:r>
-            <a:endParaRPr lang="en-US" sz="1400" dirty="0"/>
-          </a:p>
-        </p:txBody>
-      </p:sp>
-      <p:sp>
-        <p:nvSpPr>
-          <p:cNvPr id="13" name="Text 9"/>
-          <p:cNvSpPr txBox="1"/>
-          <p:nvPr/>
-        </p:nvSpPr>
-        <p:spPr>
-          <a:xfrm>
-            <a:off x="2996123" y="2743200"/>
-            <a:ext cx="1670243" cy="411480"/>
-          </a:xfrm>
-          <a:prstGeom prst="rect">
-            <a:avLst/>
-          </a:prstGeom>
-          <a:noFill/>
-          <a:ln/>
-        </p:spPr>
-        <p:txBody>
-          <a:bodyPr wrap="square" lIns="0" tIns="0" rIns="0" bIns="0" rtlCol="0" anchor="t"/>
-          <a:lstStyle/>
-          <a:p>
-            <a:pPr marL="0" indent="0" algn="ctr">
-              <a:buNone/>
-            </a:pPr>
-            <a:r>
-              <a:rPr lang="en-US" sz="1800" b="1" dirty="0">
-                <a:solidFill>
-                  <a:srgbClr val="E0312B"/>
-                </a:solidFill>
-                <a:latin typeface="Batang" pitchFamily="34" charset="0"/>
-                <a:ea typeface="Batang" pitchFamily="34" charset="-122"/>
-                <a:cs typeface="Batang" pitchFamily="34" charset="-120"/>
-              </a:rPr>
-              <a:t>빨강</a:t>
-            </a:r>
-            <a:r>
-              <a:rPr lang="en-US" sz="1800" dirty="0">
-                <a:solidFill>
-                  <a:srgbClr val="2B2118"/>
-                </a:solidFill>
-                <a:latin typeface="Batang" pitchFamily="34" charset="0"/>
-                <a:ea typeface="Batang" pitchFamily="34" charset="-122"/>
-                <a:cs typeface="Batang" pitchFamily="34" charset="-120"/>
-              </a:rPr>
-              <a:t>  튕김</a:t>
-            </a:r>
-            <a:endParaRPr lang="en-US" sz="1800" dirty="0"/>
-          </a:p>
-        </p:txBody>
-      </p:sp>
-      <p:sp>
-        <p:nvSpPr>
-          <p:cNvPr id="14" name="Text 10"/>
-          <p:cNvSpPr txBox="1"/>
-          <p:nvPr/>
-        </p:nvSpPr>
-        <p:spPr>
-          <a:xfrm>
-            <a:off x="3041843" y="3246120"/>
-            <a:ext cx="1578803" cy="1097280"/>
-          </a:xfrm>
-          <a:prstGeom prst="rect">
-            <a:avLst/>
-          </a:prstGeom>
-          <a:noFill/>
-          <a:ln/>
-        </p:spPr>
-        <p:txBody>
-          <a:bodyPr wrap="square" lIns="0" tIns="0" rIns="0" bIns="0" rtlCol="0" anchor="t"/>
-          <a:lstStyle/>
-          <a:p>
-            <a:pPr marL="0" indent="0">
-              <a:buNone/>
-            </a:pPr>
-            <a:r>
-              <a:rPr lang="en-US" sz="1300" dirty="0">
-                <a:solidFill>
-                  <a:srgbClr val="2B2118"/>
-                </a:solidFill>
-                <a:latin typeface="Malgun Gothic" pitchFamily="34" charset="0"/>
-                <a:ea typeface="Malgun Gothic" pitchFamily="34" charset="-122"/>
-                <a:cs typeface="Malgun Gothic" pitchFamily="34" charset="-120"/>
-              </a:rPr>
-              <a:t>밟으면 선과 수직으로 튕김. 세워 그리면 옆으로 튕기고 방향이 바뀜</a:t>
-            </a:r>
-            <a:endParaRPr lang="en-US" sz="1300" dirty="0"/>
-          </a:p>
-        </p:txBody>
-      </p:sp>
-      <p:sp>
-        <p:nvSpPr>
-          <p:cNvPr id="15" name="Shape 11"/>
-          <p:cNvSpPr/>
-          <p:nvPr/>
-        </p:nvSpPr>
-        <p:spPr>
-          <a:xfrm>
-            <a:off x="5077846" y="1280160"/>
-            <a:ext cx="2036003" cy="3154680"/>
-          </a:xfrm>
-          <a:prstGeom prst="roundRect">
-            <a:avLst>
-              <a:gd name="adj" fmla="val 3593"/>
-            </a:avLst>
-          </a:prstGeom>
-          <a:solidFill>
-            <a:srgbClr val="FAF6EC"/>
-          </a:solidFill>
-          <a:ln w="12700">
-            <a:solidFill>
-              <a:srgbClr val="D8C8A4"/>
-            </a:solidFill>
-            <a:prstDash val="solid"/>
-          </a:ln>
-        </p:spPr>
-      </p:sp>
-      <p:pic>
-        <p:nvPicPr>
-          <p:cNvPr id="16" name="Image 2" descr="D:\stopsketch\stopsketch\assets\ink_blue.png"/>
-          <p:cNvPicPr>
-            <a:picLocks noChangeAspect="1"/>
-          </p:cNvPicPr>
-          <p:nvPr/>
-        </p:nvPicPr>
-        <p:blipFill>
-          <a:blip r:embed="rId5"/>
-          <a:stretch>
-            <a:fillRect/>
-          </a:stretch>
-        </p:blipFill>
-        <p:spPr>
-          <a:xfrm>
-            <a:off x="5684368" y="1508760"/>
-            <a:ext cx="822960" cy="1097280"/>
-          </a:xfrm>
-          <a:prstGeom prst="rect">
-            <a:avLst/>
-          </a:prstGeom>
-        </p:spPr>
-      </p:pic>
-      <p:sp>
-        <p:nvSpPr>
-          <p:cNvPr id="17" name="Shape 12"/>
-          <p:cNvSpPr/>
-          <p:nvPr/>
-        </p:nvSpPr>
-        <p:spPr>
-          <a:xfrm>
-            <a:off x="5260726" y="1463040"/>
-            <a:ext cx="329184" cy="329184"/>
-          </a:xfrm>
-          <a:prstGeom prst="ellipse">
-            <a:avLst/>
-          </a:prstGeom>
-          <a:solidFill>
-            <a:srgbClr val="1F6FE0"/>
-          </a:solidFill>
-          <a:ln w="12700">
-            <a:solidFill>
-              <a:srgbClr val="1F6FE0"/>
-            </a:solidFill>
-            <a:prstDash val="solid"/>
-          </a:ln>
-        </p:spPr>
-      </p:sp>
-      <p:sp>
-        <p:nvSpPr>
-          <p:cNvPr id="18" name="Text 13"/>
-          <p:cNvSpPr txBox="1"/>
-          <p:nvPr/>
-        </p:nvSpPr>
-        <p:spPr>
-          <a:xfrm>
-            <a:off x="5260726" y="1463040"/>
-            <a:ext cx="329184" cy="329184"/>
-          </a:xfrm>
-          <a:prstGeom prst="rect">
-            <a:avLst/>
-          </a:prstGeom>
-          <a:noFill/>
-          <a:ln/>
-        </p:spPr>
-        <p:txBody>
-          <a:bodyPr wrap="square" lIns="0" tIns="0" rIns="0" bIns="0" rtlCol="0" anchor="ctr"/>
-          <a:lstStyle/>
-          <a:p>
-            <a:pPr marL="0" indent="0" algn="ctr">
-              <a:buNone/>
-            </a:pPr>
-            <a:r>
-              <a:rPr lang="en-US" sz="1400" b="1" dirty="0">
-                <a:solidFill>
-                  <a:srgbClr val="FFFFFF"/>
-                </a:solidFill>
-                <a:latin typeface="Malgun Gothic" pitchFamily="34" charset="0"/>
-                <a:ea typeface="Malgun Gothic" pitchFamily="34" charset="-122"/>
-                <a:cs typeface="Malgun Gothic" pitchFamily="34" charset="-120"/>
-              </a:rPr>
-              <a:t>3</a:t>
-            </a:r>
-            <a:endParaRPr lang="en-US" sz="1400" dirty="0"/>
-          </a:p>
-        </p:txBody>
-      </p:sp>
-      <p:sp>
-        <p:nvSpPr>
-          <p:cNvPr id="19" name="Text 14"/>
-          <p:cNvSpPr txBox="1"/>
-          <p:nvPr/>
-        </p:nvSpPr>
-        <p:spPr>
-          <a:xfrm>
-            <a:off x="5260726" y="2743200"/>
-            <a:ext cx="1670243" cy="411480"/>
-          </a:xfrm>
-          <a:prstGeom prst="rect">
-            <a:avLst/>
-          </a:prstGeom>
-          <a:noFill/>
-          <a:ln/>
-        </p:spPr>
-        <p:txBody>
-          <a:bodyPr wrap="square" lIns="0" tIns="0" rIns="0" bIns="0" rtlCol="0" anchor="t"/>
-          <a:lstStyle/>
-          <a:p>
-            <a:pPr marL="0" indent="0" algn="ctr">
-              <a:buNone/>
-            </a:pPr>
-            <a:r>
-              <a:rPr lang="en-US" sz="1800" b="1" dirty="0">
-                <a:solidFill>
-                  <a:srgbClr val="1F6FE0"/>
-                </a:solidFill>
-                <a:latin typeface="Batang" pitchFamily="34" charset="0"/>
-                <a:ea typeface="Batang" pitchFamily="34" charset="-122"/>
-                <a:cs typeface="Batang" pitchFamily="34" charset="-120"/>
-              </a:rPr>
-              <a:t>파랑</a:t>
-            </a:r>
-            <a:r>
-              <a:rPr lang="en-US" sz="1800" dirty="0">
-                <a:solidFill>
-                  <a:srgbClr val="2B2118"/>
-                </a:solidFill>
-                <a:latin typeface="Batang" pitchFamily="34" charset="0"/>
-                <a:ea typeface="Batang" pitchFamily="34" charset="-122"/>
-                <a:cs typeface="Batang" pitchFamily="34" charset="-120"/>
-              </a:rPr>
-              <a:t>  가속</a:t>
-            </a:r>
-            <a:endParaRPr lang="en-US" sz="1800" dirty="0"/>
-          </a:p>
-        </p:txBody>
-      </p:sp>
-      <p:sp>
-        <p:nvSpPr>
-          <p:cNvPr id="20" name="Text 15"/>
-          <p:cNvSpPr txBox="1"/>
-          <p:nvPr/>
-        </p:nvSpPr>
-        <p:spPr>
-          <a:xfrm>
-            <a:off x="5306446" y="3246120"/>
-            <a:ext cx="1578803" cy="1097280"/>
-          </a:xfrm>
-          <a:prstGeom prst="rect">
-            <a:avLst/>
-          </a:prstGeom>
-          <a:noFill/>
-          <a:ln/>
-        </p:spPr>
-        <p:txBody>
-          <a:bodyPr wrap="square" lIns="0" tIns="0" rIns="0" bIns="0" rtlCol="0" anchor="t"/>
-          <a:lstStyle/>
-          <a:p>
-            <a:pPr marL="0" indent="0">
-              <a:buNone/>
-            </a:pPr>
-            <a:r>
-              <a:rPr lang="en-US" sz="1300" dirty="0">
-                <a:solidFill>
-                  <a:srgbClr val="2B2118"/>
-                </a:solidFill>
-                <a:latin typeface="Malgun Gothic" pitchFamily="34" charset="0"/>
-                <a:ea typeface="Malgun Gothic" pitchFamily="34" charset="-122"/>
-                <a:cs typeface="Malgun Gothic" pitchFamily="34" charset="-120"/>
-              </a:rPr>
-              <a:t>밟는 동안 · 내린 뒤 잠시 빨라짐. 가파른 비탈도 오른다</a:t>
-            </a:r>
-            <a:endParaRPr lang="en-US" sz="1300" dirty="0"/>
-          </a:p>
-        </p:txBody>
-      </p:sp>
-      <p:sp>
-        <p:nvSpPr>
-          <p:cNvPr id="21" name="Shape 16"/>
-          <p:cNvSpPr/>
-          <p:nvPr/>
-        </p:nvSpPr>
-        <p:spPr>
-          <a:xfrm>
-            <a:off x="7342449" y="1280160"/>
-            <a:ext cx="2036003" cy="3154680"/>
-          </a:xfrm>
-          <a:prstGeom prst="roundRect">
-            <a:avLst>
-              <a:gd name="adj" fmla="val 3593"/>
-            </a:avLst>
-          </a:prstGeom>
-          <a:solidFill>
-            <a:srgbClr val="FAF6EC"/>
-          </a:solidFill>
-          <a:ln w="12700">
-            <a:solidFill>
-              <a:srgbClr val="D8C8A4"/>
-            </a:solidFill>
-            <a:prstDash val="solid"/>
-          </a:ln>
-        </p:spPr>
-      </p:sp>
-      <p:pic>
-        <p:nvPicPr>
-          <p:cNvPr id="22" name="Image 3" descr="D:\stopsketch\stopsketch\assets\ink_green.png"/>
-          <p:cNvPicPr>
-            <a:picLocks noChangeAspect="1"/>
-          </p:cNvPicPr>
-          <p:nvPr/>
-        </p:nvPicPr>
-        <p:blipFill>
-          <a:blip r:embed="rId6"/>
-          <a:stretch>
-            <a:fillRect/>
-          </a:stretch>
-        </p:blipFill>
-        <p:spPr>
-          <a:xfrm>
-            <a:off x="7948971" y="1508760"/>
-            <a:ext cx="822960" cy="1097280"/>
-          </a:xfrm>
-          <a:prstGeom prst="rect">
-            <a:avLst/>
-          </a:prstGeom>
-        </p:spPr>
-      </p:pic>
-      <p:sp>
-        <p:nvSpPr>
-          <p:cNvPr id="23" name="Shape 17"/>
-          <p:cNvSpPr/>
-          <p:nvPr/>
-        </p:nvSpPr>
-        <p:spPr>
-          <a:xfrm>
-            <a:off x="7525329" y="1463040"/>
-            <a:ext cx="329184" cy="329184"/>
-          </a:xfrm>
-          <a:prstGeom prst="ellipse">
-            <a:avLst/>
-          </a:prstGeom>
-          <a:solidFill>
-            <a:srgbClr val="1FA655"/>
-          </a:solidFill>
-          <a:ln w="12700">
-            <a:solidFill>
-              <a:srgbClr val="1FA655"/>
-            </a:solidFill>
-            <a:prstDash val="solid"/>
-          </a:ln>
-        </p:spPr>
-      </p:sp>
-      <p:sp>
-        <p:nvSpPr>
-          <p:cNvPr id="24" name="Text 18"/>
-          <p:cNvSpPr txBox="1"/>
-          <p:nvPr/>
-        </p:nvSpPr>
-        <p:spPr>
-          <a:xfrm>
-            <a:off x="7525329" y="1463040"/>
-            <a:ext cx="329184" cy="329184"/>
-          </a:xfrm>
-          <a:prstGeom prst="rect">
-            <a:avLst/>
-          </a:prstGeom>
-          <a:noFill/>
-          <a:ln/>
-        </p:spPr>
-        <p:txBody>
-          <a:bodyPr wrap="square" lIns="0" tIns="0" rIns="0" bIns="0" rtlCol="0" anchor="ctr"/>
-          <a:lstStyle/>
-          <a:p>
-            <a:pPr marL="0" indent="0" algn="ctr">
-              <a:buNone/>
-            </a:pPr>
-            <a:r>
-              <a:rPr lang="en-US" sz="1400" b="1" dirty="0">
-                <a:solidFill>
-                  <a:srgbClr val="FFFFFF"/>
-                </a:solidFill>
-                <a:latin typeface="Malgun Gothic" pitchFamily="34" charset="0"/>
-                <a:ea typeface="Malgun Gothic" pitchFamily="34" charset="-122"/>
-                <a:cs typeface="Malgun Gothic" pitchFamily="34" charset="-120"/>
-              </a:rPr>
-              <a:t>4</a:t>
-            </a:r>
-            <a:endParaRPr lang="en-US" sz="1400" dirty="0"/>
-          </a:p>
-        </p:txBody>
-      </p:sp>
-      <p:sp>
-        <p:nvSpPr>
-          <p:cNvPr id="25" name="Text 19"/>
-          <p:cNvSpPr txBox="1"/>
-          <p:nvPr/>
-        </p:nvSpPr>
-        <p:spPr>
-          <a:xfrm>
-            <a:off x="7525329" y="2743200"/>
-            <a:ext cx="1670243" cy="411480"/>
-          </a:xfrm>
-          <a:prstGeom prst="rect">
-            <a:avLst/>
-          </a:prstGeom>
-          <a:noFill/>
-          <a:ln/>
-        </p:spPr>
-        <p:txBody>
-          <a:bodyPr wrap="square" lIns="0" tIns="0" rIns="0" bIns="0" rtlCol="0" anchor="t"/>
-          <a:lstStyle/>
-          <a:p>
-            <a:pPr marL="0" indent="0" algn="ctr">
-              <a:buNone/>
-            </a:pPr>
-            <a:r>
-              <a:rPr lang="en-US" sz="1800" b="1" dirty="0">
-                <a:solidFill>
-                  <a:srgbClr val="1FA655"/>
-                </a:solidFill>
-                <a:latin typeface="Batang" pitchFamily="34" charset="0"/>
-                <a:ea typeface="Batang" pitchFamily="34" charset="-122"/>
-                <a:cs typeface="Batang" pitchFamily="34" charset="-120"/>
-              </a:rPr>
-              <a:t>초록</a:t>
-            </a:r>
-            <a:r>
-              <a:rPr lang="en-US" sz="1800" dirty="0">
-                <a:solidFill>
-                  <a:srgbClr val="2B2118"/>
-                </a:solidFill>
-                <a:latin typeface="Batang" pitchFamily="34" charset="0"/>
-                <a:ea typeface="Batang" pitchFamily="34" charset="-122"/>
-                <a:cs typeface="Batang" pitchFamily="34" charset="-120"/>
-              </a:rPr>
-              <a:t>  떠오름</a:t>
-            </a:r>
-            <a:endParaRPr lang="en-US" sz="1800" dirty="0"/>
-          </a:p>
-        </p:txBody>
-      </p:sp>
-      <p:sp>
-        <p:nvSpPr>
-          <p:cNvPr id="26" name="Text 20"/>
-          <p:cNvSpPr txBox="1"/>
-          <p:nvPr/>
-        </p:nvSpPr>
-        <p:spPr>
-          <a:xfrm>
-            <a:off x="7571049" y="3246120"/>
-            <a:ext cx="1578803" cy="1097280"/>
-          </a:xfrm>
-          <a:prstGeom prst="rect">
-            <a:avLst/>
-          </a:prstGeom>
-          <a:noFill/>
-          <a:ln/>
-        </p:spPr>
-        <p:txBody>
-          <a:bodyPr wrap="square" lIns="0" tIns="0" rIns="0" bIns="0" rtlCol="0" anchor="t"/>
-          <a:lstStyle/>
-          <a:p>
-            <a:pPr marL="0" indent="0">
-              <a:buNone/>
-            </a:pPr>
-            <a:r>
-              <a:rPr lang="en-US" sz="1300" dirty="0">
-                <a:solidFill>
-                  <a:srgbClr val="2B2118"/>
-                </a:solidFill>
-                <a:latin typeface="Malgun Gothic" pitchFamily="34" charset="0"/>
-                <a:ea typeface="Malgun Gothic" pitchFamily="34" charset="-122"/>
-                <a:cs typeface="Malgun Gothic" pitchFamily="34" charset="-120"/>
-              </a:rPr>
-              <a:t>떨어지지 않고 천천히 떠올라 닿으면 멈춤. 무리를 태우는 엘리베이터</a:t>
-            </a:r>
-            <a:endParaRPr lang="en-US" sz="1300" dirty="0"/>
-          </a:p>
-        </p:txBody>
-      </p:sp>
-      <p:sp>
-        <p:nvSpPr>
-          <p:cNvPr id="27" name="Shape 21"/>
-          <p:cNvSpPr/>
-          <p:nvPr/>
-        </p:nvSpPr>
-        <p:spPr>
-          <a:xfrm>
-            <a:off x="9607052" y="1280160"/>
-            <a:ext cx="2036003" cy="3154680"/>
-          </a:xfrm>
-          <a:prstGeom prst="roundRect">
-            <a:avLst>
-              <a:gd name="adj" fmla="val 3593"/>
-            </a:avLst>
-          </a:prstGeom>
-          <a:solidFill>
-            <a:srgbClr val="FAF6EC"/>
-          </a:solidFill>
-          <a:ln w="12700">
-            <a:solidFill>
-              <a:srgbClr val="D8C8A4"/>
-            </a:solidFill>
-            <a:prstDash val="solid"/>
-          </a:ln>
-        </p:spPr>
-      </p:sp>
-      <p:pic>
-        <p:nvPicPr>
-          <p:cNvPr id="28" name="Image 4" descr="D:\stopsketch\stopsketch\assets\ink_yellow.png"/>
-          <p:cNvPicPr>
-            <a:picLocks noChangeAspect="1"/>
-          </p:cNvPicPr>
-          <p:nvPr/>
-        </p:nvPicPr>
-        <p:blipFill>
-          <a:blip r:embed="rId7"/>
-          <a:stretch>
-            <a:fillRect/>
-          </a:stretch>
-        </p:blipFill>
-        <p:spPr>
-          <a:xfrm>
-            <a:off x="10213574" y="1508760"/>
-            <a:ext cx="822960" cy="1097280"/>
-          </a:xfrm>
-          <a:prstGeom prst="rect">
-            <a:avLst/>
-          </a:prstGeom>
-        </p:spPr>
-      </p:pic>
-      <p:sp>
-        <p:nvSpPr>
-          <p:cNvPr id="29" name="Shape 22"/>
-          <p:cNvSpPr/>
-          <p:nvPr/>
-        </p:nvSpPr>
-        <p:spPr>
-          <a:xfrm>
-            <a:off x="9789932" y="1463040"/>
-            <a:ext cx="329184" cy="329184"/>
-          </a:xfrm>
-          <a:prstGeom prst="ellipse">
-            <a:avLst/>
-          </a:prstGeom>
-          <a:solidFill>
-            <a:srgbClr val="C99A00"/>
-          </a:solidFill>
-          <a:ln w="12700">
-            <a:solidFill>
-              <a:srgbClr val="C99A00"/>
-            </a:solidFill>
-            <a:prstDash val="solid"/>
-          </a:ln>
-        </p:spPr>
-      </p:sp>
-      <p:sp>
-        <p:nvSpPr>
-          <p:cNvPr id="30" name="Text 23"/>
-          <p:cNvSpPr txBox="1"/>
-          <p:nvPr/>
-        </p:nvSpPr>
-        <p:spPr>
-          <a:xfrm>
-            <a:off x="9789932" y="1463040"/>
-            <a:ext cx="329184" cy="329184"/>
-          </a:xfrm>
-          <a:prstGeom prst="rect">
-            <a:avLst/>
-          </a:prstGeom>
-          <a:noFill/>
-          <a:ln/>
-        </p:spPr>
-        <p:txBody>
-          <a:bodyPr wrap="square" lIns="0" tIns="0" rIns="0" bIns="0" rtlCol="0" anchor="ctr"/>
-          <a:lstStyle/>
-          <a:p>
-            <a:pPr marL="0" indent="0" algn="ctr">
-              <a:buNone/>
-            </a:pPr>
-            <a:r>
-              <a:rPr lang="en-US" sz="1400" b="1" dirty="0">
-                <a:solidFill>
-                  <a:srgbClr val="FFFFFF"/>
-                </a:solidFill>
-                <a:latin typeface="Malgun Gothic" pitchFamily="34" charset="0"/>
-                <a:ea typeface="Malgun Gothic" pitchFamily="34" charset="-122"/>
-                <a:cs typeface="Malgun Gothic" pitchFamily="34" charset="-120"/>
-              </a:rPr>
-              <a:t>5</a:t>
-            </a:r>
-            <a:endParaRPr lang="en-US" sz="1400" dirty="0"/>
-          </a:p>
-        </p:txBody>
-      </p:sp>
-      <p:sp>
-        <p:nvSpPr>
-          <p:cNvPr id="31" name="Text 24"/>
-          <p:cNvSpPr txBox="1"/>
-          <p:nvPr/>
-        </p:nvSpPr>
-        <p:spPr>
-          <a:xfrm>
-            <a:off x="9789932" y="2743200"/>
-            <a:ext cx="1670243" cy="411480"/>
-          </a:xfrm>
-          <a:prstGeom prst="rect">
-            <a:avLst/>
-          </a:prstGeom>
-          <a:noFill/>
-          <a:ln/>
-        </p:spPr>
-        <p:txBody>
-          <a:bodyPr wrap="square" lIns="0" tIns="0" rIns="0" bIns="0" rtlCol="0" anchor="t"/>
-          <a:lstStyle/>
-          <a:p>
-            <a:pPr marL="0" indent="0" algn="ctr">
-              <a:buNone/>
-            </a:pPr>
-            <a:r>
-              <a:rPr lang="en-US" sz="1800" b="1" dirty="0">
-                <a:solidFill>
-                  <a:srgbClr val="C99A00"/>
-                </a:solidFill>
-                <a:latin typeface="Batang" pitchFamily="34" charset="0"/>
-                <a:ea typeface="Batang" pitchFamily="34" charset="-122"/>
-                <a:cs typeface="Batang" pitchFamily="34" charset="-120"/>
-              </a:rPr>
-              <a:t>노랑</a:t>
-            </a:r>
-            <a:r>
-              <a:rPr lang="en-US" sz="1800" dirty="0">
-                <a:solidFill>
-                  <a:srgbClr val="2B2118"/>
-                </a:solidFill>
-                <a:latin typeface="Batang" pitchFamily="34" charset="0"/>
-                <a:ea typeface="Batang" pitchFamily="34" charset="-122"/>
-                <a:cs typeface="Batang" pitchFamily="34" charset="-120"/>
-              </a:rPr>
-              <a:t>  지우기</a:t>
-            </a:r>
-            <a:endParaRPr lang="en-US" sz="1800" dirty="0"/>
-          </a:p>
-        </p:txBody>
-      </p:sp>
-      <p:sp>
-        <p:nvSpPr>
-          <p:cNvPr id="32" name="Text 25"/>
-          <p:cNvSpPr txBox="1"/>
-          <p:nvPr/>
-        </p:nvSpPr>
-        <p:spPr>
-          <a:xfrm>
-            <a:off x="9835652" y="3246120"/>
-            <a:ext cx="1578803" cy="1097280"/>
-          </a:xfrm>
-          <a:prstGeom prst="rect">
-            <a:avLst/>
-          </a:prstGeom>
-          <a:noFill/>
-          <a:ln/>
-        </p:spPr>
-        <p:txBody>
-          <a:bodyPr wrap="square" lIns="0" tIns="0" rIns="0" bIns="0" rtlCol="0" anchor="t"/>
-          <a:lstStyle/>
-          <a:p>
-            <a:pPr marL="0" indent="0">
-              <a:buNone/>
-            </a:pPr>
-            <a:r>
-              <a:rPr lang="en-US" sz="1300" dirty="0">
-                <a:solidFill>
-                  <a:srgbClr val="2B2118"/>
-                </a:solidFill>
-                <a:latin typeface="Malgun Gothic" pitchFamily="34" charset="0"/>
-                <a:ea typeface="Malgun Gothic" pitchFamily="34" charset="-122"/>
-                <a:cs typeface="Malgun Gothic" pitchFamily="34" charset="-120"/>
-              </a:rPr>
-              <a:t>칠한 자리의 결정 막대를 지운다. 길을 막던 벽·우리를 연다</a:t>
-            </a:r>
-            <a:endParaRPr lang="en-US" sz="1300" dirty="0"/>
-          </a:p>
-        </p:txBody>
-      </p:sp>
-      <p:sp>
-        <p:nvSpPr>
-          <p:cNvPr id="33" name="Shape 26"/>
-          <p:cNvSpPr/>
-          <p:nvPr/>
-        </p:nvSpPr>
-        <p:spPr>
-          <a:xfrm>
-            <a:off x="548640" y="4663440"/>
-            <a:ext cx="11094415" cy="777240"/>
-          </a:xfrm>
-          <a:prstGeom prst="roundRect">
-            <a:avLst>
-              <a:gd name="adj" fmla="val 9412"/>
-            </a:avLst>
-          </a:prstGeom>
-          <a:solidFill>
-            <a:srgbClr val="FFFFFF"/>
-          </a:solidFill>
-          <a:ln w="12700">
-            <a:solidFill>
-              <a:srgbClr val="D8C8A4"/>
-            </a:solidFill>
-            <a:prstDash val="solid"/>
-          </a:ln>
-        </p:spPr>
-      </p:sp>
-      <p:sp>
-        <p:nvSpPr>
-          <p:cNvPr id="34" name="Text 27"/>
-          <p:cNvSpPr txBox="1"/>
-          <p:nvPr/>
-        </p:nvSpPr>
-        <p:spPr>
-          <a:xfrm>
-            <a:off x="822960" y="4663440"/>
-            <a:ext cx="10545775" cy="777240"/>
-          </a:xfrm>
-          <a:prstGeom prst="rect">
-            <a:avLst/>
-          </a:prstGeom>
-          <a:noFill/>
-          <a:ln/>
-        </p:spPr>
-        <p:txBody>
-          <a:bodyPr wrap="square" lIns="0" tIns="0" rIns="0" bIns="0" rtlCol="0" anchor="ctr"/>
-          <a:lstStyle/>
-          <a:p>
-            <a:pPr marL="0" indent="0" algn="ctr">
-              <a:buNone/>
-            </a:pPr>
-            <a:r>
-              <a:rPr lang="en-US" sz="1300" dirty="0">
-                <a:solidFill>
-                  <a:srgbClr val="2B2118"/>
-                </a:solidFill>
-                <a:latin typeface="Malgun Gothic" pitchFamily="34" charset="0"/>
-                <a:ea typeface="Malgun Gothic" pitchFamily="34" charset="-122"/>
-                <a:cs typeface="Malgun Gothic" pitchFamily="34" charset="-120"/>
-              </a:rPr>
-              <a:t>모든 선은 떨어진다 (초록 제외)   ·   우클릭으로 빨아들이면 잉크를 전부 돌려받는다   ·   시간 정지 중엔 물방울 · 지우개 · 발사기 모두 멈춘다</a:t>
-            </a:r>
-            <a:endParaRPr lang="en-US" sz="1300" dirty="0"/>
-          </a:p>
-        </p:txBody>
-      </p:sp>
-      <p:sp>
-        <p:nvSpPr>
-          <p:cNvPr id="35" name="Slide Number Placeholder 0"/>
-          <p:cNvSpPr>
-            <a:spLocks noGrp="1"/>
-          </p:cNvSpPr>
-          <p:nvPr>
-            <p:ph type="sldNum" sz="quarter" idx="4294967295"/>
-          </p:nvPr>
-        </p:nvSpPr>
-        <p:spPr>
-          <a:xfrm>
-            <a:off x="11185855" y="6473952"/>
-            <a:ext cx="457200" cy="274320"/>
-          </a:xfrm>
-          <a:prstGeom prst="rect">
-            <a:avLst/>
-          </a:prstGeom>
-          <a:extLst>
-            <a:ext uri="{C572A759-6A51-4108-AA02-DFA0A04FC94B}">
-              <ma14:wrappingTextBoxFlag xmlns="" xmlns:ma14="http://schemas.microsoft.com/office/mac/drawingml/2011/main" val="0"/>
-            </a:ext>
-          </a:extLst>
-        </p:spPr>
-        <p:txBody>
-          <a:bodyPr/>
-          <a:lstStyle>
-            <a:lvl1pPr>
-              <a:defRPr sz="900">
-                <a:solidFill>
-                  <a:srgbClr val="7B6B57"/>
-                </a:solidFill>
-                <a:latin typeface="Malgun Gothic"/>
-                <a:ea typeface="Malgun Gothic"/>
-                <a:cs typeface="Malgun Gothic"/>
-              </a:defRPr>
-            </a:lvl1pPr>
-          </a:lstStyle>
-          <a:p>
-            <a:pPr algn="r"/>
-            <a:fld id="{F7021451-1387-4CA6-816F-3879F97B5CBC}" type="slidenum">
-              <a:rPr lang="en-US" b="0"/>
-              <a:t>7</a:t>
-            </a:fld>
-            <a:endParaRPr lang="en-US"/>
-          </a:p>
-        </p:txBody>
-      </p:sp>
-    </p:spTree>
-  </p:cSld>
-  <p:clrMapOvr>
-    <a:masterClrMapping/>
-  </p:clrMapOvr>
-</p:sld>
-</file>
-
-<file path=ppt/slides/slide8.xml><?xml version="1.0" encoding="utf-8"?>
-<p:sld xmlns:a="http://schemas.openxmlformats.org/drawingml/2006/main" xmlns:r="http://schemas.openxmlformats.org/officeDocument/2006/relationships" xmlns:p="http://schemas.openxmlformats.org/presentationml/2006/main">
-  <p:cSld name="Slide 8">
-    <p:spTree>
-      <p:nvGrpSpPr>
-        <p:cNvPr id="1" name=""/>
-        <p:cNvGrpSpPr/>
-        <p:nvPr/>
-      </p:nvGrpSpPr>
-      <p:grpSpPr>
-        <a:xfrm>
-          <a:off x="0" y="0"/>
-          <a:ext cx="0" cy="0"/>
-          <a:chOff x="0" y="0"/>
-          <a:chExt cx="0" cy="0"/>
-        </a:xfrm>
-      </p:grpSpPr>
-      <p:sp>
-        <p:nvSpPr>
-          <p:cNvPr id="2" name="Text 1"/>
-          <p:cNvSpPr>
-            <a:spLocks noGrp="1"/>
-          </p:cNvSpPr>
-          <p:nvPr>
-            <p:ph type="title" idx="101" hasCustomPrompt="1"/>
-          </p:nvPr>
-        </p:nvSpPr>
-        <p:spPr>
-          <a:xfrm>
-            <a:off x="548640" y="292608"/>
-            <a:ext cx="11094415" cy="685800"/>
-          </a:xfrm>
-          <a:prstGeom prst="rect">
-            <a:avLst/>
-          </a:prstGeom>
-          <a:noFill/>
-          <a:ln/>
-        </p:spPr>
-        <p:txBody>
-          <a:bodyPr wrap="square" lIns="0" tIns="0" rIns="0" bIns="0" rtlCol="0" anchor="ctr"/>
-          <a:lstStyle/>
-          <a:p>
-            <a:pPr marL="0" indent="0" algn="l">
-              <a:buNone/>
-            </a:pPr>
-            <a:r>
-              <a:rPr lang="en-US" sz="2800" b="1" dirty="0">
-                <a:solidFill>
-                  <a:srgbClr val="2B2118"/>
-                </a:solidFill>
-                <a:latin typeface="Batang" pitchFamily="34" charset="0"/>
-                <a:ea typeface="Batang" pitchFamily="34" charset="-122"/>
-                <a:cs typeface="Batang" pitchFamily="34" charset="-120"/>
-              </a:rPr>
-              <a:t>무리를 데려가는 길: 대열 · 정화 · 장애물</a:t>
-            </a:r>
-            <a:endParaRPr lang="en-US" sz="2800" dirty="0"/>
-          </a:p>
-        </p:txBody>
-      </p:sp>
-      <p:pic>
-        <p:nvPicPr>
-          <p:cNvPr id="3" name="Image 0" descr="D:\stopsketch\데모제출\2_대표이미지\05_같은색_빨강으로_포탄막고_튕겨나오기.png"/>
-          <p:cNvPicPr>
-            <a:picLocks noChangeAspect="1"/>
-          </p:cNvPicPr>
-          <p:nvPr/>
-        </p:nvPicPr>
-        <p:blipFill>
-          <a:blip r:embed="rId3"/>
-          <a:stretch>
-            <a:fillRect/>
-          </a:stretch>
-        </p:blipFill>
-        <p:spPr>
-          <a:xfrm>
-            <a:off x="548640" y="1234440"/>
-            <a:ext cx="5852160" cy="3291840"/>
-          </a:xfrm>
-          <a:prstGeom prst="rect">
-            <a:avLst/>
-          </a:prstGeom>
-        </p:spPr>
-      </p:pic>
-      <p:sp>
-        <p:nvSpPr>
-          <p:cNvPr id="4" name="Shape 1"/>
-          <p:cNvSpPr/>
-          <p:nvPr/>
-        </p:nvSpPr>
-        <p:spPr>
-          <a:xfrm>
-            <a:off x="548640" y="1234440"/>
-            <a:ext cx="5852160" cy="3291840"/>
-          </a:xfrm>
-          <a:prstGeom prst="rect">
-            <a:avLst/>
-          </a:prstGeom>
-          <a:ln w="12700">
-            <a:solidFill>
-              <a:srgbClr val="D8C8A4"/>
-            </a:solidFill>
-            <a:prstDash val="solid"/>
-          </a:ln>
-        </p:spPr>
-      </p:sp>
-      <p:sp>
-        <p:nvSpPr>
-          <p:cNvPr id="5" name="Text 2"/>
-          <p:cNvSpPr txBox="1"/>
-          <p:nvPr/>
-        </p:nvSpPr>
-        <p:spPr>
-          <a:xfrm>
-            <a:off x="548640" y="4581144"/>
-            <a:ext cx="5852160" cy="256032"/>
-          </a:xfrm>
-          <a:prstGeom prst="rect">
-            <a:avLst/>
-          </a:prstGeom>
-          <a:noFill/>
-          <a:ln/>
-        </p:spPr>
-        <p:txBody>
-          <a:bodyPr wrap="square" lIns="0" tIns="0" rIns="0" bIns="0" rtlCol="0" anchor="t"/>
-          <a:lstStyle/>
-          <a:p>
-            <a:pPr marL="0" indent="0">
-              <a:buNone/>
-            </a:pPr>
-            <a:r>
-              <a:rPr lang="en-US" sz="1000" dirty="0">
-                <a:solidFill>
-                  <a:srgbClr val="7B6B57"/>
-                </a:solidFill>
-                <a:latin typeface="Malgun Gothic" pitchFamily="34" charset="0"/>
-                <a:ea typeface="Malgun Gothic" pitchFamily="34" charset="-122"/>
-                <a:cs typeface="Malgun Gothic" pitchFamily="34" charset="-120"/>
-              </a:rPr>
-              <a:t>실제 데모 화면 · 빨강 포탄을 같은 색 빨강 삼각형으로 막고, 대열 6마리와 튕겨 나오는 순간</a:t>
-            </a:r>
-            <a:endParaRPr lang="en-US" sz="1000" dirty="0"/>
-          </a:p>
-        </p:txBody>
-      </p:sp>
-      <p:sp>
-        <p:nvSpPr>
-          <p:cNvPr id="6" name="Shape 3"/>
-          <p:cNvSpPr/>
-          <p:nvPr/>
-        </p:nvSpPr>
-        <p:spPr>
-          <a:xfrm>
-            <a:off x="6720840" y="1234440"/>
-            <a:ext cx="4922215" cy="786384"/>
-          </a:xfrm>
-          <a:prstGeom prst="roundRect">
-            <a:avLst>
-              <a:gd name="adj" fmla="val 9302"/>
-            </a:avLst>
-          </a:prstGeom>
-          <a:solidFill>
-            <a:srgbClr val="FAF6EC"/>
-          </a:solidFill>
-          <a:ln w="12700">
-            <a:solidFill>
-              <a:srgbClr val="D8C8A4"/>
-            </a:solidFill>
-            <a:prstDash val="solid"/>
-          </a:ln>
-        </p:spPr>
-      </p:sp>
-      <p:sp>
-        <p:nvSpPr>
-          <p:cNvPr id="7" name="Shape 4"/>
-          <p:cNvSpPr/>
-          <p:nvPr/>
-        </p:nvSpPr>
-        <p:spPr>
-          <a:xfrm>
-            <a:off x="6903720" y="1399032"/>
-            <a:ext cx="201168" cy="201168"/>
-          </a:xfrm>
-          <a:prstGeom prst="ellipse">
-            <a:avLst/>
-          </a:prstGeom>
-          <a:solidFill>
-            <a:srgbClr val="1F6FE0"/>
-          </a:solidFill>
-          <a:ln w="12700">
-            <a:solidFill>
-              <a:srgbClr val="1F6FE0"/>
-            </a:solidFill>
-            <a:prstDash val="solid"/>
-          </a:ln>
-        </p:spPr>
-      </p:sp>
-      <p:sp>
-        <p:nvSpPr>
-          <p:cNvPr id="8" name="Text 5"/>
-          <p:cNvSpPr txBox="1"/>
-          <p:nvPr/>
-        </p:nvSpPr>
-        <p:spPr>
-          <a:xfrm>
-            <a:off x="7223760" y="1325880"/>
-            <a:ext cx="4236415" cy="274320"/>
-          </a:xfrm>
-          <a:prstGeom prst="rect">
-            <a:avLst/>
-          </a:prstGeom>
-          <a:noFill/>
-          <a:ln/>
-        </p:spPr>
-        <p:txBody>
-          <a:bodyPr wrap="square" lIns="0" tIns="0" rIns="0" bIns="0" rtlCol="0" anchor="t"/>
-          <a:lstStyle/>
-          <a:p>
-            <a:pPr marL="0" indent="0">
-              <a:buNone/>
-            </a:pPr>
-            <a:r>
-              <a:rPr lang="en-US" sz="1300" b="1" dirty="0">
-                <a:solidFill>
-                  <a:srgbClr val="2B2118"/>
-                </a:solidFill>
-                <a:latin typeface="Malgun Gothic" pitchFamily="34" charset="0"/>
-                <a:ea typeface="Malgun Gothic" pitchFamily="34" charset="-122"/>
-                <a:cs typeface="Malgun Gothic" pitchFamily="34" charset="-120"/>
-              </a:rPr>
-              <a:t>대열</a:t>
-            </a:r>
-            <a:endParaRPr lang="en-US" sz="1300" dirty="0"/>
-          </a:p>
-        </p:txBody>
-      </p:sp>
-      <p:sp>
-        <p:nvSpPr>
-          <p:cNvPr id="9" name="Text 6"/>
-          <p:cNvSpPr txBox="1"/>
-          <p:nvPr/>
-        </p:nvSpPr>
-        <p:spPr>
-          <a:xfrm>
-            <a:off x="7223760" y="1600200"/>
-            <a:ext cx="4236415" cy="384048"/>
-          </a:xfrm>
-          <a:prstGeom prst="rect">
-            <a:avLst/>
-          </a:prstGeom>
-          <a:noFill/>
-          <a:ln/>
-        </p:spPr>
-        <p:txBody>
-          <a:bodyPr wrap="square" lIns="0" tIns="0" rIns="0" bIns="0" rtlCol="0" anchor="t"/>
-          <a:lstStyle/>
-          <a:p>
-            <a:pPr marL="0" indent="0">
-              <a:buNone/>
-            </a:pPr>
-            <a:r>
-              <a:rPr lang="en-US" sz="1050" dirty="0">
-                <a:solidFill>
-                  <a:srgbClr val="2B2118"/>
-                </a:solidFill>
-                <a:latin typeface="Malgun Gothic" pitchFamily="34" charset="0"/>
-                <a:ea typeface="Malgun Gothic" pitchFamily="34" charset="-122"/>
-                <a:cs typeface="Malgun Gothic" pitchFamily="34" charset="-120"/>
-              </a:rPr>
-              <a:t>깨운 물방울은 주인공 발자국을 따라 줄지어 걷는다. 밀리면 이탈, 다시 닿으면 합류. 발밑이 사라져도 대열에 남아 떨어졌다 복귀</a:t>
-            </a:r>
-            <a:endParaRPr lang="en-US" sz="1050" dirty="0"/>
-          </a:p>
-        </p:txBody>
-      </p:sp>
-      <p:sp>
-        <p:nvSpPr>
-          <p:cNvPr id="10" name="Shape 7"/>
-          <p:cNvSpPr/>
-          <p:nvPr/>
-        </p:nvSpPr>
-        <p:spPr>
-          <a:xfrm>
-            <a:off x="6720840" y="2130552"/>
-            <a:ext cx="4922215" cy="786384"/>
-          </a:xfrm>
-          <a:prstGeom prst="roundRect">
-            <a:avLst>
-              <a:gd name="adj" fmla="val 9302"/>
-            </a:avLst>
-          </a:prstGeom>
-          <a:solidFill>
-            <a:srgbClr val="FAF6EC"/>
-          </a:solidFill>
-          <a:ln w="12700">
-            <a:solidFill>
-              <a:srgbClr val="D8C8A4"/>
-            </a:solidFill>
-            <a:prstDash val="solid"/>
-          </a:ln>
-        </p:spPr>
-      </p:sp>
-      <p:sp>
-        <p:nvSpPr>
-          <p:cNvPr id="11" name="Shape 8"/>
-          <p:cNvSpPr/>
-          <p:nvPr/>
-        </p:nvSpPr>
-        <p:spPr>
-          <a:xfrm>
-            <a:off x="6903720" y="2295144"/>
-            <a:ext cx="201168" cy="201168"/>
-          </a:xfrm>
-          <a:prstGeom prst="ellipse">
-            <a:avLst/>
-          </a:prstGeom>
-          <a:solidFill>
-            <a:srgbClr val="7FC8DC"/>
-          </a:solidFill>
-          <a:ln w="12700">
-            <a:solidFill>
-              <a:srgbClr val="7FC8DC"/>
-            </a:solidFill>
-            <a:prstDash val="solid"/>
-          </a:ln>
-        </p:spPr>
-      </p:sp>
-      <p:sp>
-        <p:nvSpPr>
-          <p:cNvPr id="12" name="Text 9"/>
-          <p:cNvSpPr txBox="1"/>
-          <p:nvPr/>
-        </p:nvSpPr>
-        <p:spPr>
-          <a:xfrm>
-            <a:off x="7223760" y="2221992"/>
-            <a:ext cx="4236415" cy="274320"/>
-          </a:xfrm>
-          <a:prstGeom prst="rect">
-            <a:avLst/>
-          </a:prstGeom>
-          <a:noFill/>
-          <a:ln/>
-        </p:spPr>
-        <p:txBody>
-          <a:bodyPr wrap="square" lIns="0" tIns="0" rIns="0" bIns="0" rtlCol="0" anchor="t"/>
-          <a:lstStyle/>
-          <a:p>
-            <a:pPr marL="0" indent="0">
-              <a:buNone/>
-            </a:pPr>
-            <a:r>
-              <a:rPr lang="en-US" sz="1300" b="1" dirty="0">
-                <a:solidFill>
-                  <a:srgbClr val="2B2118"/>
-                </a:solidFill>
-                <a:latin typeface="Malgun Gothic" pitchFamily="34" charset="0"/>
-                <a:ea typeface="Malgun Gothic" pitchFamily="34" charset="-122"/>
-                <a:cs typeface="Malgun Gothic" pitchFamily="34" charset="-120"/>
-              </a:rPr>
-              <a:t>정화</a:t>
-            </a:r>
-            <a:endParaRPr lang="en-US" sz="1300" dirty="0"/>
-          </a:p>
-        </p:txBody>
-      </p:sp>
-      <p:sp>
-        <p:nvSpPr>
-          <p:cNvPr id="13" name="Text 10"/>
-          <p:cNvSpPr txBox="1"/>
-          <p:nvPr/>
-        </p:nvSpPr>
-        <p:spPr>
-          <a:xfrm>
-            <a:off x="7223760" y="2496312"/>
-            <a:ext cx="4236415" cy="384048"/>
-          </a:xfrm>
-          <a:prstGeom prst="rect">
-            <a:avLst/>
-          </a:prstGeom>
-          <a:noFill/>
-          <a:ln/>
-        </p:spPr>
-        <p:txBody>
-          <a:bodyPr wrap="square" lIns="0" tIns="0" rIns="0" bIns="0" rtlCol="0" anchor="t"/>
-          <a:lstStyle/>
-          <a:p>
-            <a:pPr marL="0" indent="0">
-              <a:buNone/>
-            </a:pPr>
-            <a:r>
-              <a:rPr lang="en-US" sz="1050" dirty="0">
-                <a:solidFill>
-                  <a:srgbClr val="2B2118"/>
-                </a:solidFill>
-                <a:latin typeface="Malgun Gothic" pitchFamily="34" charset="0"/>
-                <a:ea typeface="Malgun Gothic" pitchFamily="34" charset="-122"/>
-                <a:cs typeface="Malgun Gothic" pitchFamily="34" charset="-120"/>
-              </a:rPr>
-              <a:t>주인공이 검은 잉크병에 닿으면 클리어. 데려간 비율만큼 병이 맑아진다 (정화 %)</a:t>
-            </a:r>
-            <a:endParaRPr lang="en-US" sz="1050" dirty="0"/>
-          </a:p>
-        </p:txBody>
-      </p:sp>
-      <p:sp>
-        <p:nvSpPr>
-          <p:cNvPr id="14" name="Shape 11"/>
-          <p:cNvSpPr/>
-          <p:nvPr/>
-        </p:nvSpPr>
-        <p:spPr>
-          <a:xfrm>
-            <a:off x="6720840" y="3026664"/>
-            <a:ext cx="4922215" cy="786384"/>
-          </a:xfrm>
-          <a:prstGeom prst="roundRect">
-            <a:avLst>
-              <a:gd name="adj" fmla="val 9302"/>
-            </a:avLst>
-          </a:prstGeom>
-          <a:solidFill>
-            <a:srgbClr val="FAF6EC"/>
-          </a:solidFill>
-          <a:ln w="12700">
-            <a:solidFill>
-              <a:srgbClr val="D8C8A4"/>
-            </a:solidFill>
-            <a:prstDash val="solid"/>
-          </a:ln>
-        </p:spPr>
-      </p:sp>
-      <p:sp>
-        <p:nvSpPr>
-          <p:cNvPr id="15" name="Shape 12"/>
-          <p:cNvSpPr/>
-          <p:nvPr/>
-        </p:nvSpPr>
-        <p:spPr>
-          <a:xfrm>
-            <a:off x="6903720" y="3191256"/>
-            <a:ext cx="201168" cy="201168"/>
-          </a:xfrm>
-          <a:prstGeom prst="ellipse">
-            <a:avLst/>
-          </a:prstGeom>
-          <a:solidFill>
-            <a:srgbClr val="E0312B"/>
-          </a:solidFill>
-          <a:ln w="12700">
-            <a:solidFill>
-              <a:srgbClr val="E0312B"/>
-            </a:solidFill>
-            <a:prstDash val="solid"/>
-          </a:ln>
-        </p:spPr>
-      </p:sp>
-      <p:sp>
-        <p:nvSpPr>
-          <p:cNvPr id="16" name="Text 13"/>
-          <p:cNvSpPr txBox="1"/>
-          <p:nvPr/>
-        </p:nvSpPr>
-        <p:spPr>
-          <a:xfrm>
-            <a:off x="7223760" y="3118104"/>
-            <a:ext cx="4236415" cy="274320"/>
-          </a:xfrm>
-          <a:prstGeom prst="rect">
-            <a:avLst/>
-          </a:prstGeom>
-          <a:noFill/>
-          <a:ln/>
-        </p:spPr>
-        <p:txBody>
-          <a:bodyPr wrap="square" lIns="0" tIns="0" rIns="0" bIns="0" rtlCol="0" anchor="t"/>
-          <a:lstStyle/>
-          <a:p>
-            <a:pPr marL="0" indent="0">
-              <a:buNone/>
-            </a:pPr>
-            <a:r>
-              <a:rPr lang="en-US" sz="1300" b="1" dirty="0">
-                <a:solidFill>
-                  <a:srgbClr val="2B2118"/>
-                </a:solidFill>
-                <a:latin typeface="Malgun Gothic" pitchFamily="34" charset="0"/>
-                <a:ea typeface="Malgun Gothic" pitchFamily="34" charset="-122"/>
-                <a:cs typeface="Malgun Gothic" pitchFamily="34" charset="-120"/>
-              </a:rPr>
-              <a:t>발사기</a:t>
-            </a:r>
-            <a:endParaRPr lang="en-US" sz="1300" dirty="0"/>
-          </a:p>
-        </p:txBody>
-      </p:sp>
-      <p:sp>
-        <p:nvSpPr>
-          <p:cNvPr id="17" name="Text 14"/>
-          <p:cNvSpPr txBox="1"/>
-          <p:nvPr/>
-        </p:nvSpPr>
-        <p:spPr>
-          <a:xfrm>
-            <a:off x="7223760" y="3392424"/>
-            <a:ext cx="4236415" cy="384048"/>
-          </a:xfrm>
-          <a:prstGeom prst="rect">
-            <a:avLst/>
-          </a:prstGeom>
-          <a:noFill/>
-          <a:ln/>
-        </p:spPr>
-        <p:txBody>
-          <a:bodyPr wrap="square" lIns="0" tIns="0" rIns="0" bIns="0" rtlCol="0" anchor="t"/>
-          <a:lstStyle/>
-          <a:p>
-            <a:pPr marL="0" indent="0">
-              <a:buNone/>
-            </a:pPr>
-            <a:r>
-              <a:rPr lang="en-US" sz="1050" dirty="0">
-                <a:solidFill>
-                  <a:srgbClr val="2B2118"/>
-                </a:solidFill>
-                <a:latin typeface="Malgun Gothic" pitchFamily="34" charset="0"/>
-                <a:ea typeface="Malgun Gothic" pitchFamily="34" charset="-122"/>
-                <a:cs typeface="Malgun Gothic" pitchFamily="34" charset="-120"/>
-              </a:rPr>
-              <a:t>색 투사체는 같은 색 선으로만 막힌다. 주인공이 맞으면 실패, 작은 물방울은 잃는다</a:t>
-            </a:r>
-            <a:endParaRPr lang="en-US" sz="1050" dirty="0"/>
-          </a:p>
-        </p:txBody>
-      </p:sp>
-      <p:sp>
-        <p:nvSpPr>
-          <p:cNvPr id="18" name="Shape 15"/>
-          <p:cNvSpPr/>
-          <p:nvPr/>
-        </p:nvSpPr>
-        <p:spPr>
-          <a:xfrm>
-            <a:off x="6720840" y="3922776"/>
-            <a:ext cx="4922215" cy="786384"/>
-          </a:xfrm>
-          <a:prstGeom prst="roundRect">
-            <a:avLst>
-              <a:gd name="adj" fmla="val 9302"/>
-            </a:avLst>
-          </a:prstGeom>
-          <a:solidFill>
-            <a:srgbClr val="FAF6EC"/>
-          </a:solidFill>
-          <a:ln w="12700">
-            <a:solidFill>
-              <a:srgbClr val="D8C8A4"/>
-            </a:solidFill>
-            <a:prstDash val="solid"/>
-          </a:ln>
-        </p:spPr>
-      </p:sp>
-      <p:sp>
-        <p:nvSpPr>
-          <p:cNvPr id="19" name="Shape 16"/>
-          <p:cNvSpPr/>
-          <p:nvPr/>
-        </p:nvSpPr>
-        <p:spPr>
-          <a:xfrm>
-            <a:off x="6903720" y="4087368"/>
-            <a:ext cx="201168" cy="201168"/>
-          </a:xfrm>
-          <a:prstGeom prst="ellipse">
-            <a:avLst/>
-          </a:prstGeom>
-          <a:solidFill>
-            <a:srgbClr val="1FA655"/>
-          </a:solidFill>
-          <a:ln w="12700">
-            <a:solidFill>
-              <a:srgbClr val="1FA655"/>
-            </a:solidFill>
-            <a:prstDash val="solid"/>
-          </a:ln>
-        </p:spPr>
-      </p:sp>
-      <p:sp>
-        <p:nvSpPr>
-          <p:cNvPr id="20" name="Text 17"/>
-          <p:cNvSpPr txBox="1"/>
-          <p:nvPr/>
-        </p:nvSpPr>
-        <p:spPr>
-          <a:xfrm>
-            <a:off x="7223760" y="4014216"/>
-            <a:ext cx="4236415" cy="274320"/>
-          </a:xfrm>
-          <a:prstGeom prst="rect">
-            <a:avLst/>
-          </a:prstGeom>
-          <a:noFill/>
-          <a:ln/>
-        </p:spPr>
-        <p:txBody>
-          <a:bodyPr wrap="square" lIns="0" tIns="0" rIns="0" bIns="0" rtlCol="0" anchor="t"/>
-          <a:lstStyle/>
-          <a:p>
-            <a:pPr marL="0" indent="0">
-              <a:buNone/>
-            </a:pPr>
-            <a:r>
-              <a:rPr lang="en-US" sz="1300" b="1" dirty="0">
-                <a:solidFill>
-                  <a:srgbClr val="2B2118"/>
-                </a:solidFill>
-                <a:latin typeface="Malgun Gothic" pitchFamily="34" charset="0"/>
-                <a:ea typeface="Malgun Gothic" pitchFamily="34" charset="-122"/>
-                <a:cs typeface="Malgun Gothic" pitchFamily="34" charset="-120"/>
-              </a:rPr>
-              <a:t>가시 · 틈 · 결정 막대</a:t>
-            </a:r>
-            <a:endParaRPr lang="en-US" sz="1300" dirty="0"/>
-          </a:p>
-        </p:txBody>
-      </p:sp>
-      <p:sp>
-        <p:nvSpPr>
-          <p:cNvPr id="21" name="Text 18"/>
-          <p:cNvSpPr txBox="1"/>
-          <p:nvPr/>
-        </p:nvSpPr>
-        <p:spPr>
-          <a:xfrm>
-            <a:off x="7223760" y="4288536"/>
-            <a:ext cx="4236415" cy="384048"/>
-          </a:xfrm>
-          <a:prstGeom prst="rect">
-            <a:avLst/>
-          </a:prstGeom>
-          <a:noFill/>
-          <a:ln/>
-        </p:spPr>
-        <p:txBody>
-          <a:bodyPr wrap="square" lIns="0" tIns="0" rIns="0" bIns="0" rtlCol="0" anchor="t"/>
-          <a:lstStyle/>
-          <a:p>
-            <a:pPr marL="0" indent="0">
-              <a:buNone/>
-            </a:pPr>
-            <a:r>
-              <a:rPr lang="en-US" sz="1050" dirty="0">
-                <a:solidFill>
-                  <a:srgbClr val="2B2118"/>
-                </a:solidFill>
-                <a:latin typeface="Malgun Gothic" pitchFamily="34" charset="0"/>
-                <a:ea typeface="Malgun Gothic" pitchFamily="34" charset="-122"/>
-                <a:cs typeface="Malgun Gothic" pitchFamily="34" charset="-120"/>
-              </a:rPr>
-              <a:t>선으로 덮고, 다리를 놓고, 노랑으로 지운다</a:t>
-            </a:r>
-            <a:endParaRPr lang="en-US" sz="1050" dirty="0"/>
-          </a:p>
-        </p:txBody>
-      </p:sp>
-      <p:sp>
-        <p:nvSpPr>
-          <p:cNvPr id="22" name="Shape 19"/>
-          <p:cNvSpPr/>
-          <p:nvPr/>
-        </p:nvSpPr>
-        <p:spPr>
-          <a:xfrm>
-            <a:off x="6720840" y="4818888"/>
-            <a:ext cx="4922215" cy="786384"/>
-          </a:xfrm>
-          <a:prstGeom prst="roundRect">
-            <a:avLst>
-              <a:gd name="adj" fmla="val 9302"/>
-            </a:avLst>
-          </a:prstGeom>
-          <a:solidFill>
-            <a:srgbClr val="FAF6EC"/>
-          </a:solidFill>
-          <a:ln w="12700">
-            <a:solidFill>
-              <a:srgbClr val="D8C8A4"/>
-            </a:solidFill>
-            <a:prstDash val="solid"/>
-          </a:ln>
-        </p:spPr>
-      </p:sp>
-      <p:sp>
-        <p:nvSpPr>
-          <p:cNvPr id="23" name="Shape 20"/>
-          <p:cNvSpPr/>
-          <p:nvPr/>
-        </p:nvSpPr>
-        <p:spPr>
-          <a:xfrm>
-            <a:off x="6903720" y="4983480"/>
-            <a:ext cx="201168" cy="201168"/>
-          </a:xfrm>
-          <a:prstGeom prst="ellipse">
-            <a:avLst/>
-          </a:prstGeom>
-          <a:solidFill>
-            <a:srgbClr val="7B6B57"/>
-          </a:solidFill>
-          <a:ln w="12700">
-            <a:solidFill>
-              <a:srgbClr val="7B6B57"/>
-            </a:solidFill>
-            <a:prstDash val="solid"/>
-          </a:ln>
-        </p:spPr>
-      </p:sp>
-      <p:sp>
-        <p:nvSpPr>
-          <p:cNvPr id="24" name="Text 21"/>
-          <p:cNvSpPr txBox="1"/>
-          <p:nvPr/>
-        </p:nvSpPr>
-        <p:spPr>
-          <a:xfrm>
-            <a:off x="7223760" y="4910328"/>
-            <a:ext cx="4236415" cy="274320"/>
-          </a:xfrm>
-          <a:prstGeom prst="rect">
-            <a:avLst/>
-          </a:prstGeom>
-          <a:noFill/>
-          <a:ln/>
-        </p:spPr>
-        <p:txBody>
-          <a:bodyPr wrap="square" lIns="0" tIns="0" rIns="0" bIns="0" rtlCol="0" anchor="t"/>
-          <a:lstStyle/>
-          <a:p>
-            <a:pPr marL="0" indent="0">
-              <a:buNone/>
-            </a:pPr>
-            <a:r>
-              <a:rPr lang="en-US" sz="1300" b="1" dirty="0">
-                <a:solidFill>
-                  <a:srgbClr val="2B2118"/>
-                </a:solidFill>
-                <a:latin typeface="Malgun Gothic" pitchFamily="34" charset="0"/>
-                <a:ea typeface="Malgun Gothic" pitchFamily="34" charset="-122"/>
-                <a:cs typeface="Malgun Gothic" pitchFamily="34" charset="-120"/>
-              </a:rPr>
-              <a:t>지우개</a:t>
-            </a:r>
-            <a:endParaRPr lang="en-US" sz="1300" dirty="0"/>
-          </a:p>
-        </p:txBody>
-      </p:sp>
-      <p:sp>
-        <p:nvSpPr>
-          <p:cNvPr id="25" name="Text 22"/>
-          <p:cNvSpPr txBox="1"/>
-          <p:nvPr/>
-        </p:nvSpPr>
-        <p:spPr>
-          <a:xfrm>
-            <a:off x="7223760" y="5184648"/>
-            <a:ext cx="4236415" cy="384048"/>
-          </a:xfrm>
-          <a:prstGeom prst="rect">
-            <a:avLst/>
-          </a:prstGeom>
-          <a:noFill/>
-          <a:ln/>
-        </p:spPr>
-        <p:txBody>
-          <a:bodyPr wrap="square" lIns="0" tIns="0" rIns="0" bIns="0" rtlCol="0" anchor="t"/>
-          <a:lstStyle/>
-          <a:p>
-            <a:pPr marL="0" indent="0">
-              <a:buNone/>
-            </a:pPr>
-            <a:r>
-              <a:rPr lang="en-US" sz="1050" dirty="0">
-                <a:solidFill>
-                  <a:srgbClr val="2B2118"/>
-                </a:solidFill>
-                <a:latin typeface="Malgun Gothic" pitchFamily="34" charset="0"/>
-                <a:ea typeface="Malgun Gothic" pitchFamily="34" charset="-122"/>
-                <a:cs typeface="Malgun Gothic" pitchFamily="34" charset="-120"/>
-              </a:rPr>
-              <a:t>왼쪽에서 문지르며 따라온다. 멈추면 지우개도 멈춘다</a:t>
-            </a:r>
-            <a:endParaRPr lang="en-US" sz="1050" dirty="0"/>
-          </a:p>
-        </p:txBody>
-      </p:sp>
-      <p:sp>
-        <p:nvSpPr>
-          <p:cNvPr id="26" name="Slide Number Placeholder 0"/>
-          <p:cNvSpPr>
-            <a:spLocks noGrp="1"/>
-          </p:cNvSpPr>
-          <p:nvPr>
-            <p:ph type="sldNum" sz="quarter" idx="4294967295"/>
-          </p:nvPr>
-        </p:nvSpPr>
-        <p:spPr>
-          <a:xfrm>
-            <a:off x="11185855" y="6473952"/>
-            <a:ext cx="457200" cy="274320"/>
-          </a:xfrm>
-          <a:prstGeom prst="rect">
-            <a:avLst/>
-          </a:prstGeom>
-          <a:extLst>
-            <a:ext uri="{C572A759-6A51-4108-AA02-DFA0A04FC94B}">
-              <ma14:wrappingTextBoxFlag xmlns="" xmlns:ma14="http://schemas.microsoft.com/office/mac/drawingml/2011/main" val="0"/>
-            </a:ext>
-          </a:extLst>
-        </p:spPr>
-        <p:txBody>
-          <a:bodyPr/>
-          <a:lstStyle>
-            <a:lvl1pPr>
-              <a:defRPr sz="900">
-                <a:solidFill>
-                  <a:srgbClr val="7B6B57"/>
-                </a:solidFill>
-                <a:latin typeface="Malgun Gothic"/>
-                <a:ea typeface="Malgun Gothic"/>
-                <a:cs typeface="Malgun Gothic"/>
-              </a:defRPr>
-            </a:lvl1pPr>
-          </a:lstStyle>
-          <a:p>
-            <a:pPr algn="r"/>
-            <a:fld id="{F7021451-1387-4CA6-816F-3879F97B5CBC}" type="slidenum">
-              <a:rPr lang="en-US" b="0"/>
-              <a:t>8</a:t>
-            </a:fld>
-            <a:endParaRPr lang="en-US"/>
-          </a:p>
-        </p:txBody>
-      </p:sp>
-    </p:spTree>
-  </p:cSld>
-  <p:clrMapOvr>
-    <a:masterClrMapping/>
-  </p:clrMapOvr>
-</p:sld>
-</file>
-
-<file path=ppt/slides/slide9.xml><?xml version="1.0" encoding="utf-8"?>
 <p:sld xmlns:a="http://schemas.openxmlformats.org/drawingml/2006/main" xmlns:r="http://schemas.openxmlformats.org/officeDocument/2006/relationships" xmlns:p="http://schemas.openxmlformats.org/presentationml/2006/main">
   <p:cSld name="Slide 9">
     <p:spTree>
@@ -13561,7 +9702,7 @@
                 <a:ea typeface="Batang" pitchFamily="34" charset="-122"/>
                 <a:cs typeface="Batang" pitchFamily="34" charset="-120"/>
               </a:rPr>
-              <a:t>데모 스테이지 3개: 색과 장치를 하나씩 늘린다</a:t>
+              <a:t>데모 스테이지 3개</a:t>
             </a:r>
             <a:endParaRPr lang="en-US" sz="2800" dirty="0"/>
           </a:p>
@@ -14786,45 +10927,6 @@
       </p:sp>
       <p:sp>
         <p:nvSpPr>
-          <p:cNvPr id="35" name="Text 33"/>
-          <p:cNvSpPr txBox="1"/>
-          <p:nvPr/>
-        </p:nvSpPr>
-        <p:spPr>
-          <a:xfrm>
-            <a:off x="548640" y="4892040"/>
-            <a:ext cx="11094415" cy="274320"/>
-          </a:xfrm>
-          <a:prstGeom prst="rect">
-            <a:avLst/>
-          </a:prstGeom>
-          <a:noFill/>
-          <a:ln/>
-        </p:spPr>
-        <p:txBody>
-          <a:bodyPr wrap="square" lIns="0" tIns="0" rIns="0" bIns="0" rtlCol="0" anchor="t"/>
-          <a:lstStyle/>
-          <a:p>
-            <a:pPr marL="0" indent="0">
-              <a:buNone/>
-            </a:pPr>
-            <a:r>
-              <a:rPr lang="en-US" sz="1000" dirty="0">
-                <a:solidFill>
-                  <a:srgbClr val="7B6B57"/>
-                </a:solidFill>
-                <a:latin typeface="Malgun Gothic" pitchFamily="34" charset="0"/>
-                <a:ea typeface="Malgun Gothic" pitchFamily="34" charset="-122"/>
-                <a:cs typeface="Malgun Gothic" pitchFamily="34" charset="-120"/>
-              </a:rPr>
-              <a:t>스테이지는 레벨 툴로 직접 제작. 스테이지 3 은 정석 풀이로 별 3 · 정화 100% 를 확인 (물리 시뮬레이션)</a:t>
-            </a:r>
-            <a:endParaRPr lang="en-US" sz="1000" dirty="0"/>
-          </a:p>
-        </p:txBody>
-      </p:sp>
-      <p:sp>
-        <p:nvSpPr>
           <p:cNvPr id="36" name="Slide Number Placeholder 0"/>
           <p:cNvSpPr>
             <a:spLocks noGrp="1"/>
@@ -14865,7 +10967,1206 @@
             <a:pPr algn="r"/>
             <a:fld id="{F7021451-1387-4CA6-816F-3879F97B5CBC}" type="slidenum">
               <a:rPr lang="en-US" b="0"/>
-              <a:t>9</a:t>
+              <a:t>7</a:t>
+            </a:fld>
+            <a:endParaRPr lang="en-US"/>
+          </a:p>
+        </p:txBody>
+      </p:sp>
+    </p:spTree>
+  </p:cSld>
+  <p:clrMapOvr>
+    <a:masterClrMapping/>
+  </p:clrMapOvr>
+</p:sld>
+</file>
+
+<file path=ppt/slides/slide8.xml><?xml version="1.0" encoding="utf-8"?>
+<p:sld xmlns:a="http://schemas.openxmlformats.org/drawingml/2006/main" xmlns:r="http://schemas.openxmlformats.org/officeDocument/2006/relationships" xmlns:p="http://schemas.openxmlformats.org/presentationml/2006/main">
+  <p:cSld name="Slide 10">
+    <p:spTree>
+      <p:nvGrpSpPr>
+        <p:cNvPr id="1" name=""/>
+        <p:cNvGrpSpPr/>
+        <p:nvPr/>
+      </p:nvGrpSpPr>
+      <p:grpSpPr>
+        <a:xfrm>
+          <a:off x="0" y="0"/>
+          <a:ext cx="0" cy="0"/>
+          <a:chOff x="0" y="0"/>
+          <a:chExt cx="0" cy="0"/>
+        </a:xfrm>
+      </p:grpSpPr>
+      <p:sp>
+        <p:nvSpPr>
+          <p:cNvPr id="2" name="Text 1"/>
+          <p:cNvSpPr>
+            <a:spLocks noGrp="1"/>
+          </p:cNvSpPr>
+          <p:nvPr>
+            <p:ph type="title" idx="101" hasCustomPrompt="1"/>
+          </p:nvPr>
+        </p:nvSpPr>
+        <p:spPr>
+          <a:xfrm>
+            <a:off x="548640" y="292608"/>
+            <a:ext cx="11094415" cy="685800"/>
+          </a:xfrm>
+          <a:prstGeom prst="rect">
+            <a:avLst/>
+          </a:prstGeom>
+          <a:noFill/>
+          <a:ln/>
+        </p:spPr>
+        <p:txBody>
+          <a:bodyPr wrap="square" lIns="0" tIns="0" rIns="0" bIns="0" rtlCol="0" anchor="ctr"/>
+          <a:lstStyle/>
+          <a:p>
+            <a:pPr marL="0" indent="0" algn="l">
+              <a:buNone/>
+            </a:pPr>
+            <a:r>
+              <a:rPr lang="en-US" sz="2800" b="1" dirty="0">
+                <a:solidFill>
+                  <a:srgbClr val="2B2118"/>
+                </a:solidFill>
+                <a:latin typeface="Batang" pitchFamily="34" charset="0"/>
+                <a:ea typeface="Batang" pitchFamily="34" charset="-122"/>
+                <a:cs typeface="Batang" pitchFamily="34" charset="-120"/>
+              </a:rPr>
+              <a:t>개발 현황과 앞으로 필요한 것</a:t>
+            </a:r>
+            <a:endParaRPr lang="en-US" sz="2800" dirty="0"/>
+          </a:p>
+        </p:txBody>
+      </p:sp>
+      <p:sp>
+        <p:nvSpPr>
+          <p:cNvPr id="3" name="Shape 1"/>
+          <p:cNvSpPr/>
+          <p:nvPr/>
+        </p:nvSpPr>
+        <p:spPr>
+          <a:xfrm>
+            <a:off x="548640" y="1234440"/>
+            <a:ext cx="5669280" cy="4572000"/>
+          </a:xfrm>
+          <a:prstGeom prst="roundRect">
+            <a:avLst>
+              <a:gd name="adj" fmla="val 1600"/>
+            </a:avLst>
+          </a:prstGeom>
+          <a:solidFill>
+            <a:srgbClr val="FAF6EC"/>
+          </a:solidFill>
+          <a:ln w="12700">
+            <a:solidFill>
+              <a:srgbClr val="D8C8A4"/>
+            </a:solidFill>
+            <a:prstDash val="solid"/>
+          </a:ln>
+        </p:spPr>
+      </p:sp>
+      <p:sp>
+        <p:nvSpPr>
+          <p:cNvPr id="4" name="Text 2"/>
+          <p:cNvSpPr txBox="1"/>
+          <p:nvPr/>
+        </p:nvSpPr>
+        <p:spPr>
+          <a:xfrm>
+            <a:off x="822960" y="1480929"/>
+            <a:ext cx="5120640" cy="292608"/>
+          </a:xfrm>
+          <a:prstGeom prst="rect">
+            <a:avLst/>
+          </a:prstGeom>
+          <a:noFill/>
+          <a:ln/>
+        </p:spPr>
+        <p:txBody>
+          <a:bodyPr wrap="square" lIns="0" tIns="0" rIns="0" bIns="0" rtlCol="0" anchor="t"/>
+          <a:lstStyle/>
+          <a:p>
+            <a:pPr marL="0" indent="0">
+              <a:buNone/>
+            </a:pPr>
+            <a:r>
+              <a:rPr lang="ko-KR" altLang="en-US" sz="1300" b="1" dirty="0">
+                <a:solidFill>
+                  <a:srgbClr val="1F6FE0"/>
+                </a:solidFill>
+                <a:latin typeface="Malgun Gothic" pitchFamily="34" charset="0"/>
+                <a:ea typeface="Malgun Gothic" pitchFamily="34" charset="-122"/>
+                <a:cs typeface="Malgun Gothic" pitchFamily="34" charset="-120"/>
+              </a:rPr>
+              <a:t>데모</a:t>
+            </a:r>
+            <a:r>
+              <a:rPr lang="en-US" sz="1300" b="1" dirty="0">
+                <a:solidFill>
+                  <a:srgbClr val="1F6FE0"/>
+                </a:solidFill>
+                <a:latin typeface="Malgun Gothic" pitchFamily="34" charset="0"/>
+                <a:ea typeface="Malgun Gothic" pitchFamily="34" charset="-122"/>
+                <a:cs typeface="Malgun Gothic" pitchFamily="34" charset="-120"/>
+              </a:rPr>
+              <a:t> 4일 (2026-10-19 ~ 22)</a:t>
+            </a:r>
+            <a:endParaRPr lang="en-US" sz="1300" dirty="0"/>
+          </a:p>
+        </p:txBody>
+      </p:sp>
+      <p:sp>
+        <p:nvSpPr>
+          <p:cNvPr id="5" name="Shape 3"/>
+          <p:cNvSpPr/>
+          <p:nvPr/>
+        </p:nvSpPr>
+        <p:spPr>
+          <a:xfrm>
+            <a:off x="1024128" y="1965960"/>
+            <a:ext cx="0" cy="3291840"/>
+          </a:xfrm>
+          <a:prstGeom prst="line">
+            <a:avLst/>
+          </a:prstGeom>
+          <a:noFill/>
+          <a:ln w="25400">
+            <a:solidFill>
+              <a:srgbClr val="D8C8A4"/>
+            </a:solidFill>
+            <a:prstDash val="solid"/>
+          </a:ln>
+        </p:spPr>
+      </p:sp>
+      <p:sp>
+        <p:nvSpPr>
+          <p:cNvPr id="6" name="Shape 4"/>
+          <p:cNvSpPr/>
+          <p:nvPr/>
+        </p:nvSpPr>
+        <p:spPr>
+          <a:xfrm>
+            <a:off x="914400" y="1874520"/>
+            <a:ext cx="219456" cy="219456"/>
+          </a:xfrm>
+          <a:prstGeom prst="ellipse">
+            <a:avLst/>
+          </a:prstGeom>
+          <a:solidFill>
+            <a:srgbClr val="FFFFFF"/>
+          </a:solidFill>
+          <a:ln w="19050">
+            <a:solidFill>
+              <a:srgbClr val="1F6FE0"/>
+            </a:solidFill>
+            <a:prstDash val="solid"/>
+          </a:ln>
+        </p:spPr>
+      </p:sp>
+      <p:sp>
+        <p:nvSpPr>
+          <p:cNvPr id="7" name="Text 5"/>
+          <p:cNvSpPr txBox="1"/>
+          <p:nvPr/>
+        </p:nvSpPr>
+        <p:spPr>
+          <a:xfrm>
+            <a:off x="1325880" y="1828800"/>
+            <a:ext cx="731520" cy="292608"/>
+          </a:xfrm>
+          <a:prstGeom prst="rect">
+            <a:avLst/>
+          </a:prstGeom>
+          <a:noFill/>
+          <a:ln/>
+        </p:spPr>
+        <p:txBody>
+          <a:bodyPr wrap="square" lIns="0" tIns="0" rIns="0" bIns="0" rtlCol="0" anchor="t"/>
+          <a:lstStyle/>
+          <a:p>
+            <a:pPr marL="0" indent="0">
+              <a:buNone/>
+            </a:pPr>
+            <a:r>
+              <a:rPr lang="en-US" sz="1200" b="1" dirty="0">
+                <a:solidFill>
+                  <a:srgbClr val="2B2118"/>
+                </a:solidFill>
+                <a:latin typeface="Malgun Gothic" pitchFamily="34" charset="0"/>
+                <a:ea typeface="Malgun Gothic" pitchFamily="34" charset="-122"/>
+                <a:cs typeface="Malgun Gothic" pitchFamily="34" charset="-120"/>
+              </a:rPr>
+              <a:t>10-19</a:t>
+            </a:r>
+            <a:endParaRPr lang="en-US" sz="1200" dirty="0"/>
+          </a:p>
+        </p:txBody>
+      </p:sp>
+      <p:sp>
+        <p:nvSpPr>
+          <p:cNvPr id="8" name="Text 6"/>
+          <p:cNvSpPr txBox="1"/>
+          <p:nvPr/>
+        </p:nvSpPr>
+        <p:spPr>
+          <a:xfrm>
+            <a:off x="2057400" y="1828800"/>
+            <a:ext cx="4023360" cy="731520"/>
+          </a:xfrm>
+          <a:prstGeom prst="rect">
+            <a:avLst/>
+          </a:prstGeom>
+          <a:noFill/>
+          <a:ln/>
+        </p:spPr>
+        <p:txBody>
+          <a:bodyPr wrap="square" lIns="0" tIns="0" rIns="0" bIns="0" rtlCol="0" anchor="t"/>
+          <a:lstStyle/>
+          <a:p>
+            <a:pPr marL="0" indent="0">
+              <a:buNone/>
+            </a:pPr>
+            <a:r>
+              <a:rPr lang="en-US" sz="1200" dirty="0">
+                <a:solidFill>
+                  <a:srgbClr val="2B2118"/>
+                </a:solidFill>
+                <a:latin typeface="Malgun Gothic" pitchFamily="34" charset="0"/>
+                <a:ea typeface="Malgun Gothic" pitchFamily="34" charset="-122"/>
+                <a:cs typeface="Malgun Gothic" pitchFamily="34" charset="-120"/>
+              </a:rPr>
+              <a:t>한 마리 버전: 자동 달리기 · 선 물리 · 완전 정지 · 색 3종 · 레벨 툴</a:t>
+            </a:r>
+            <a:endParaRPr lang="en-US" sz="1200" dirty="0"/>
+          </a:p>
+        </p:txBody>
+      </p:sp>
+      <p:sp>
+        <p:nvSpPr>
+          <p:cNvPr id="9" name="Shape 7"/>
+          <p:cNvSpPr/>
+          <p:nvPr/>
+        </p:nvSpPr>
+        <p:spPr>
+          <a:xfrm>
+            <a:off x="914400" y="2788920"/>
+            <a:ext cx="219456" cy="219456"/>
+          </a:xfrm>
+          <a:prstGeom prst="ellipse">
+            <a:avLst/>
+          </a:prstGeom>
+          <a:solidFill>
+            <a:srgbClr val="FFFFFF"/>
+          </a:solidFill>
+          <a:ln w="19050">
+            <a:solidFill>
+              <a:srgbClr val="1F6FE0"/>
+            </a:solidFill>
+            <a:prstDash val="solid"/>
+          </a:ln>
+        </p:spPr>
+      </p:sp>
+      <p:sp>
+        <p:nvSpPr>
+          <p:cNvPr id="10" name="Text 8"/>
+          <p:cNvSpPr txBox="1"/>
+          <p:nvPr/>
+        </p:nvSpPr>
+        <p:spPr>
+          <a:xfrm>
+            <a:off x="1325880" y="2743200"/>
+            <a:ext cx="731520" cy="292608"/>
+          </a:xfrm>
+          <a:prstGeom prst="rect">
+            <a:avLst/>
+          </a:prstGeom>
+          <a:noFill/>
+          <a:ln/>
+        </p:spPr>
+        <p:txBody>
+          <a:bodyPr wrap="square" lIns="0" tIns="0" rIns="0" bIns="0" rtlCol="0" anchor="t"/>
+          <a:lstStyle/>
+          <a:p>
+            <a:pPr marL="0" indent="0">
+              <a:buNone/>
+            </a:pPr>
+            <a:r>
+              <a:rPr lang="en-US" sz="1200" b="1" dirty="0">
+                <a:solidFill>
+                  <a:srgbClr val="2B2118"/>
+                </a:solidFill>
+                <a:latin typeface="Malgun Gothic" pitchFamily="34" charset="0"/>
+                <a:ea typeface="Malgun Gothic" pitchFamily="34" charset="-122"/>
+                <a:cs typeface="Malgun Gothic" pitchFamily="34" charset="-120"/>
+              </a:rPr>
+              <a:t>10-20</a:t>
+            </a:r>
+            <a:endParaRPr lang="en-US" sz="1200" dirty="0"/>
+          </a:p>
+        </p:txBody>
+      </p:sp>
+      <p:sp>
+        <p:nvSpPr>
+          <p:cNvPr id="11" name="Text 9"/>
+          <p:cNvSpPr txBox="1"/>
+          <p:nvPr/>
+        </p:nvSpPr>
+        <p:spPr>
+          <a:xfrm>
+            <a:off x="2057400" y="2743200"/>
+            <a:ext cx="4023360" cy="731520"/>
+          </a:xfrm>
+          <a:prstGeom prst="rect">
+            <a:avLst/>
+          </a:prstGeom>
+          <a:noFill/>
+          <a:ln/>
+        </p:spPr>
+        <p:txBody>
+          <a:bodyPr wrap="square" lIns="0" tIns="0" rIns="0" bIns="0" rtlCol="0" anchor="t"/>
+          <a:lstStyle/>
+          <a:p>
+            <a:pPr marL="0" indent="0">
+              <a:buNone/>
+            </a:pPr>
+            <a:r>
+              <a:rPr lang="en-US" sz="1200" dirty="0">
+                <a:solidFill>
+                  <a:srgbClr val="2B2118"/>
+                </a:solidFill>
+                <a:latin typeface="Malgun Gothic" pitchFamily="34" charset="0"/>
+                <a:ea typeface="Malgun Gothic" pitchFamily="34" charset="-122"/>
+                <a:cs typeface="Malgun Gothic" pitchFamily="34" charset="-120"/>
+              </a:rPr>
+              <a:t>물방울 무리 방식으로 전환: 떨어지는 선 · 빨아들이기 · 5색 · 대열 · 정화</a:t>
+            </a:r>
+            <a:endParaRPr lang="en-US" sz="1200" dirty="0"/>
+          </a:p>
+        </p:txBody>
+      </p:sp>
+      <p:sp>
+        <p:nvSpPr>
+          <p:cNvPr id="12" name="Shape 10"/>
+          <p:cNvSpPr/>
+          <p:nvPr/>
+        </p:nvSpPr>
+        <p:spPr>
+          <a:xfrm>
+            <a:off x="914400" y="3703320"/>
+            <a:ext cx="219456" cy="219456"/>
+          </a:xfrm>
+          <a:prstGeom prst="ellipse">
+            <a:avLst/>
+          </a:prstGeom>
+          <a:solidFill>
+            <a:srgbClr val="FFFFFF"/>
+          </a:solidFill>
+          <a:ln w="19050">
+            <a:solidFill>
+              <a:srgbClr val="1F6FE0"/>
+            </a:solidFill>
+            <a:prstDash val="solid"/>
+          </a:ln>
+        </p:spPr>
+      </p:sp>
+      <p:sp>
+        <p:nvSpPr>
+          <p:cNvPr id="13" name="Text 11"/>
+          <p:cNvSpPr txBox="1"/>
+          <p:nvPr/>
+        </p:nvSpPr>
+        <p:spPr>
+          <a:xfrm>
+            <a:off x="1325880" y="3657600"/>
+            <a:ext cx="731520" cy="292608"/>
+          </a:xfrm>
+          <a:prstGeom prst="rect">
+            <a:avLst/>
+          </a:prstGeom>
+          <a:noFill/>
+          <a:ln/>
+        </p:spPr>
+        <p:txBody>
+          <a:bodyPr wrap="square" lIns="0" tIns="0" rIns="0" bIns="0" rtlCol="0" anchor="t"/>
+          <a:lstStyle/>
+          <a:p>
+            <a:pPr marL="0" indent="0">
+              <a:buNone/>
+            </a:pPr>
+            <a:r>
+              <a:rPr lang="en-US" sz="1200" b="1" dirty="0">
+                <a:solidFill>
+                  <a:srgbClr val="2B2118"/>
+                </a:solidFill>
+                <a:latin typeface="Malgun Gothic" pitchFamily="34" charset="0"/>
+                <a:ea typeface="Malgun Gothic" pitchFamily="34" charset="-122"/>
+                <a:cs typeface="Malgun Gothic" pitchFamily="34" charset="-120"/>
+              </a:rPr>
+              <a:t>10-21</a:t>
+            </a:r>
+            <a:endParaRPr lang="en-US" sz="1200" dirty="0"/>
+          </a:p>
+        </p:txBody>
+      </p:sp>
+      <p:sp>
+        <p:nvSpPr>
+          <p:cNvPr id="14" name="Text 12"/>
+          <p:cNvSpPr txBox="1"/>
+          <p:nvPr/>
+        </p:nvSpPr>
+        <p:spPr>
+          <a:xfrm>
+            <a:off x="2057400" y="3657600"/>
+            <a:ext cx="4023360" cy="731520"/>
+          </a:xfrm>
+          <a:prstGeom prst="rect">
+            <a:avLst/>
+          </a:prstGeom>
+          <a:noFill/>
+          <a:ln/>
+        </p:spPr>
+        <p:txBody>
+          <a:bodyPr wrap="square" lIns="0" tIns="0" rIns="0" bIns="0" rtlCol="0" anchor="t"/>
+          <a:lstStyle/>
+          <a:p>
+            <a:pPr marL="0" indent="0">
+              <a:buNone/>
+            </a:pPr>
+            <a:r>
+              <a:rPr lang="en-US" sz="1200" dirty="0">
+                <a:solidFill>
+                  <a:srgbClr val="2B2118"/>
+                </a:solidFill>
+                <a:latin typeface="Malgun Gothic" pitchFamily="34" charset="0"/>
+                <a:ea typeface="Malgun Gothic" pitchFamily="34" charset="-122"/>
+                <a:cs typeface="Malgun Gothic" pitchFamily="34" charset="-120"/>
+              </a:rPr>
+              <a:t>레벨 툴 확장 · UI 글자 툴 · 비탈 규칙 · 일시 정지 · 스테이지 1·2 제작</a:t>
+            </a:r>
+            <a:endParaRPr lang="en-US" sz="1200" dirty="0"/>
+          </a:p>
+        </p:txBody>
+      </p:sp>
+      <p:sp>
+        <p:nvSpPr>
+          <p:cNvPr id="15" name="Shape 13"/>
+          <p:cNvSpPr/>
+          <p:nvPr/>
+        </p:nvSpPr>
+        <p:spPr>
+          <a:xfrm>
+            <a:off x="914400" y="4617720"/>
+            <a:ext cx="219456" cy="219456"/>
+          </a:xfrm>
+          <a:prstGeom prst="ellipse">
+            <a:avLst/>
+          </a:prstGeom>
+          <a:solidFill>
+            <a:srgbClr val="1F6FE0"/>
+          </a:solidFill>
+          <a:ln w="19050">
+            <a:solidFill>
+              <a:srgbClr val="1F6FE0"/>
+            </a:solidFill>
+            <a:prstDash val="solid"/>
+          </a:ln>
+        </p:spPr>
+      </p:sp>
+      <p:sp>
+        <p:nvSpPr>
+          <p:cNvPr id="16" name="Text 14"/>
+          <p:cNvSpPr txBox="1"/>
+          <p:nvPr/>
+        </p:nvSpPr>
+        <p:spPr>
+          <a:xfrm>
+            <a:off x="1325880" y="4572000"/>
+            <a:ext cx="731520" cy="292608"/>
+          </a:xfrm>
+          <a:prstGeom prst="rect">
+            <a:avLst/>
+          </a:prstGeom>
+          <a:noFill/>
+          <a:ln/>
+        </p:spPr>
+        <p:txBody>
+          <a:bodyPr wrap="square" lIns="0" tIns="0" rIns="0" bIns="0" rtlCol="0" anchor="t"/>
+          <a:lstStyle/>
+          <a:p>
+            <a:pPr marL="0" indent="0">
+              <a:buNone/>
+            </a:pPr>
+            <a:r>
+              <a:rPr lang="en-US" sz="1200" b="1" dirty="0">
+                <a:solidFill>
+                  <a:srgbClr val="2B2118"/>
+                </a:solidFill>
+                <a:latin typeface="Malgun Gothic" pitchFamily="34" charset="0"/>
+                <a:ea typeface="Malgun Gothic" pitchFamily="34" charset="-122"/>
+                <a:cs typeface="Malgun Gothic" pitchFamily="34" charset="-120"/>
+              </a:rPr>
+              <a:t>10-22</a:t>
+            </a:r>
+            <a:endParaRPr lang="en-US" sz="1200" dirty="0"/>
+          </a:p>
+        </p:txBody>
+      </p:sp>
+      <p:sp>
+        <p:nvSpPr>
+          <p:cNvPr id="17" name="Text 15"/>
+          <p:cNvSpPr txBox="1"/>
+          <p:nvPr/>
+        </p:nvSpPr>
+        <p:spPr>
+          <a:xfrm>
+            <a:off x="2057400" y="4572000"/>
+            <a:ext cx="4023360" cy="731520"/>
+          </a:xfrm>
+          <a:prstGeom prst="rect">
+            <a:avLst/>
+          </a:prstGeom>
+          <a:noFill/>
+          <a:ln/>
+        </p:spPr>
+        <p:txBody>
+          <a:bodyPr wrap="square" lIns="0" tIns="0" rIns="0" bIns="0" rtlCol="0" anchor="t"/>
+          <a:lstStyle/>
+          <a:p>
+            <a:pPr marL="0" indent="0">
+              <a:buNone/>
+            </a:pPr>
+            <a:r>
+              <a:rPr lang="en-US" sz="1200" dirty="0">
+                <a:solidFill>
+                  <a:srgbClr val="2B2118"/>
+                </a:solidFill>
+                <a:latin typeface="Malgun Gothic" pitchFamily="34" charset="0"/>
+                <a:ea typeface="Malgun Gothic" pitchFamily="34" charset="-122"/>
+                <a:cs typeface="Malgun Gothic" pitchFamily="34" charset="-120"/>
+              </a:rPr>
+              <a:t>발사기(색 투사체)  · 스테이지 3 제작 · 플레이 테스트</a:t>
+            </a:r>
+            <a:endParaRPr lang="en-US" sz="1200" dirty="0"/>
+          </a:p>
+        </p:txBody>
+      </p:sp>
+      <p:sp>
+        <p:nvSpPr>
+          <p:cNvPr id="18" name="Shape 16"/>
+          <p:cNvSpPr/>
+          <p:nvPr/>
+        </p:nvSpPr>
+        <p:spPr>
+          <a:xfrm>
+            <a:off x="6492240" y="1234440"/>
+            <a:ext cx="5150815" cy="2148840"/>
+          </a:xfrm>
+          <a:prstGeom prst="roundRect">
+            <a:avLst>
+              <a:gd name="adj" fmla="val 3404"/>
+            </a:avLst>
+          </a:prstGeom>
+          <a:solidFill>
+            <a:srgbClr val="FFFFFF"/>
+          </a:solidFill>
+          <a:ln w="19050">
+            <a:solidFill>
+              <a:srgbClr val="1F6FE0"/>
+            </a:solidFill>
+            <a:prstDash val="solid"/>
+          </a:ln>
+        </p:spPr>
+      </p:sp>
+      <p:sp>
+        <p:nvSpPr>
+          <p:cNvPr id="19" name="Text 17"/>
+          <p:cNvSpPr txBox="1"/>
+          <p:nvPr/>
+        </p:nvSpPr>
+        <p:spPr>
+          <a:xfrm>
+            <a:off x="6766560" y="1431234"/>
+            <a:ext cx="4602175" cy="292608"/>
+          </a:xfrm>
+          <a:prstGeom prst="rect">
+            <a:avLst/>
+          </a:prstGeom>
+          <a:noFill/>
+          <a:ln/>
+        </p:spPr>
+        <p:txBody>
+          <a:bodyPr wrap="square" lIns="0" tIns="0" rIns="0" bIns="0" rtlCol="0" anchor="t"/>
+          <a:lstStyle/>
+          <a:p>
+            <a:pPr marL="0" indent="0">
+              <a:buNone/>
+            </a:pPr>
+            <a:r>
+              <a:rPr lang="en-US" sz="1300" b="1" dirty="0">
+                <a:solidFill>
+                  <a:srgbClr val="1F6FE0"/>
+                </a:solidFill>
+                <a:latin typeface="Malgun Gothic" pitchFamily="34" charset="0"/>
+                <a:ea typeface="Malgun Gothic" pitchFamily="34" charset="-122"/>
+                <a:cs typeface="Malgun Gothic" pitchFamily="34" charset="-120"/>
+              </a:rPr>
+              <a:t>필요한 인력 (가안)</a:t>
+            </a:r>
+            <a:endParaRPr lang="en-US" sz="1300" dirty="0"/>
+          </a:p>
+        </p:txBody>
+      </p:sp>
+      <p:sp>
+        <p:nvSpPr>
+          <p:cNvPr id="20" name="Shape 18"/>
+          <p:cNvSpPr/>
+          <p:nvPr/>
+        </p:nvSpPr>
+        <p:spPr>
+          <a:xfrm>
+            <a:off x="6766560" y="1783080"/>
+            <a:ext cx="329184" cy="329184"/>
+          </a:xfrm>
+          <a:prstGeom prst="ellipse">
+            <a:avLst/>
+          </a:prstGeom>
+          <a:solidFill>
+            <a:srgbClr val="E0312B"/>
+          </a:solidFill>
+          <a:ln w="12700">
+            <a:solidFill>
+              <a:srgbClr val="E0312B"/>
+            </a:solidFill>
+            <a:prstDash val="solid"/>
+          </a:ln>
+        </p:spPr>
+      </p:sp>
+      <p:sp>
+        <p:nvSpPr>
+          <p:cNvPr id="21" name="Text 19"/>
+          <p:cNvSpPr txBox="1"/>
+          <p:nvPr/>
+        </p:nvSpPr>
+        <p:spPr>
+          <a:xfrm>
+            <a:off x="6766560" y="1783080"/>
+            <a:ext cx="329184" cy="329184"/>
+          </a:xfrm>
+          <a:prstGeom prst="rect">
+            <a:avLst/>
+          </a:prstGeom>
+          <a:noFill/>
+          <a:ln/>
+        </p:spPr>
+        <p:txBody>
+          <a:bodyPr wrap="square" lIns="0" tIns="0" rIns="0" bIns="0" rtlCol="0" anchor="ctr"/>
+          <a:lstStyle/>
+          <a:p>
+            <a:pPr marL="0" indent="0" algn="ctr">
+              <a:buNone/>
+            </a:pPr>
+            <a:r>
+              <a:rPr lang="en-US" sz="1400" b="1" dirty="0">
+                <a:solidFill>
+                  <a:srgbClr val="FFFFFF"/>
+                </a:solidFill>
+                <a:latin typeface="Malgun Gothic" pitchFamily="34" charset="0"/>
+                <a:ea typeface="Malgun Gothic" pitchFamily="34" charset="-122"/>
+                <a:cs typeface="Malgun Gothic" pitchFamily="34" charset="-120"/>
+              </a:rPr>
+              <a:t>1</a:t>
+            </a:r>
+            <a:endParaRPr lang="en-US" sz="1400" dirty="0"/>
+          </a:p>
+        </p:txBody>
+      </p:sp>
+      <p:sp>
+        <p:nvSpPr>
+          <p:cNvPr id="22" name="Text 20"/>
+          <p:cNvSpPr txBox="1"/>
+          <p:nvPr/>
+        </p:nvSpPr>
+        <p:spPr>
+          <a:xfrm>
+            <a:off x="7223760" y="1801368"/>
+            <a:ext cx="4144975" cy="329184"/>
+          </a:xfrm>
+          <a:prstGeom prst="rect">
+            <a:avLst/>
+          </a:prstGeom>
+          <a:noFill/>
+          <a:ln/>
+        </p:spPr>
+        <p:txBody>
+          <a:bodyPr wrap="square" lIns="0" tIns="0" rIns="0" bIns="0" rtlCol="0" anchor="ctr"/>
+          <a:lstStyle/>
+          <a:p>
+            <a:pPr marL="0" indent="0">
+              <a:buNone/>
+            </a:pPr>
+            <a:r>
+              <a:rPr lang="en-US" sz="1300" b="1" dirty="0">
+                <a:solidFill>
+                  <a:srgbClr val="2B2118"/>
+                </a:solidFill>
+                <a:latin typeface="Malgun Gothic" pitchFamily="34" charset="0"/>
+                <a:ea typeface="Malgun Gothic" pitchFamily="34" charset="-122"/>
+                <a:cs typeface="Malgun Gothic" pitchFamily="34" charset="-120"/>
+              </a:rPr>
+              <a:t>기획 · 레벨</a:t>
+            </a:r>
+            <a:r>
+              <a:rPr lang="en-US" sz="1100" dirty="0">
+                <a:solidFill>
+                  <a:srgbClr val="7B6B57"/>
+                </a:solidFill>
+                <a:latin typeface="Malgun Gothic" pitchFamily="34" charset="0"/>
+                <a:ea typeface="Malgun Gothic" pitchFamily="34" charset="-122"/>
+                <a:cs typeface="Malgun Gothic" pitchFamily="34" charset="-120"/>
+              </a:rPr>
+              <a:t>   퍼즐 스테이지 설계를 겸함</a:t>
+            </a:r>
+            <a:endParaRPr lang="en-US" sz="1300" dirty="0"/>
+          </a:p>
+        </p:txBody>
+      </p:sp>
+      <p:sp>
+        <p:nvSpPr>
+          <p:cNvPr id="23" name="Shape 21"/>
+          <p:cNvSpPr/>
+          <p:nvPr/>
+        </p:nvSpPr>
+        <p:spPr>
+          <a:xfrm>
+            <a:off x="6766560" y="2286000"/>
+            <a:ext cx="329184" cy="329184"/>
+          </a:xfrm>
+          <a:prstGeom prst="ellipse">
+            <a:avLst/>
+          </a:prstGeom>
+          <a:solidFill>
+            <a:srgbClr val="1F6FE0"/>
+          </a:solidFill>
+          <a:ln w="12700">
+            <a:solidFill>
+              <a:srgbClr val="1F6FE0"/>
+            </a:solidFill>
+            <a:prstDash val="solid"/>
+          </a:ln>
+        </p:spPr>
+      </p:sp>
+      <p:sp>
+        <p:nvSpPr>
+          <p:cNvPr id="24" name="Text 22"/>
+          <p:cNvSpPr txBox="1"/>
+          <p:nvPr/>
+        </p:nvSpPr>
+        <p:spPr>
+          <a:xfrm>
+            <a:off x="6766560" y="2286000"/>
+            <a:ext cx="329184" cy="329184"/>
+          </a:xfrm>
+          <a:prstGeom prst="rect">
+            <a:avLst/>
+          </a:prstGeom>
+          <a:noFill/>
+          <a:ln/>
+        </p:spPr>
+        <p:txBody>
+          <a:bodyPr wrap="square" lIns="0" tIns="0" rIns="0" bIns="0" rtlCol="0" anchor="ctr"/>
+          <a:lstStyle/>
+          <a:p>
+            <a:pPr marL="0" indent="0" algn="ctr">
+              <a:buNone/>
+            </a:pPr>
+            <a:r>
+              <a:rPr lang="en-US" sz="1400" b="1" dirty="0">
+                <a:solidFill>
+                  <a:srgbClr val="FFFFFF"/>
+                </a:solidFill>
+                <a:latin typeface="Malgun Gothic" pitchFamily="34" charset="0"/>
+                <a:ea typeface="Malgun Gothic" pitchFamily="34" charset="-122"/>
+                <a:cs typeface="Malgun Gothic" pitchFamily="34" charset="-120"/>
+              </a:rPr>
+              <a:t>2</a:t>
+            </a:r>
+            <a:endParaRPr lang="en-US" sz="1400" dirty="0"/>
+          </a:p>
+        </p:txBody>
+      </p:sp>
+      <p:sp>
+        <p:nvSpPr>
+          <p:cNvPr id="25" name="Text 23"/>
+          <p:cNvSpPr txBox="1"/>
+          <p:nvPr/>
+        </p:nvSpPr>
+        <p:spPr>
+          <a:xfrm>
+            <a:off x="7223760" y="2304288"/>
+            <a:ext cx="4144975" cy="329184"/>
+          </a:xfrm>
+          <a:prstGeom prst="rect">
+            <a:avLst/>
+          </a:prstGeom>
+          <a:noFill/>
+          <a:ln/>
+        </p:spPr>
+        <p:txBody>
+          <a:bodyPr wrap="square" lIns="0" tIns="0" rIns="0" bIns="0" rtlCol="0" anchor="ctr"/>
+          <a:lstStyle/>
+          <a:p>
+            <a:pPr marL="0" indent="0">
+              <a:buNone/>
+            </a:pPr>
+            <a:r>
+              <a:rPr lang="en-US" sz="1300" b="1" dirty="0">
+                <a:solidFill>
+                  <a:srgbClr val="2B2118"/>
+                </a:solidFill>
+                <a:latin typeface="Malgun Gothic" pitchFamily="34" charset="0"/>
+                <a:ea typeface="Malgun Gothic" pitchFamily="34" charset="-122"/>
+                <a:cs typeface="Malgun Gothic" pitchFamily="34" charset="-120"/>
+              </a:rPr>
+              <a:t>클라이언트</a:t>
+            </a:r>
+            <a:r>
+              <a:rPr lang="en-US" sz="1100" dirty="0">
+                <a:solidFill>
+                  <a:srgbClr val="7B6B57"/>
+                </a:solidFill>
+                <a:latin typeface="Malgun Gothic" pitchFamily="34" charset="0"/>
+                <a:ea typeface="Malgun Gothic" pitchFamily="34" charset="-122"/>
+                <a:cs typeface="Malgun Gothic" pitchFamily="34" charset="-120"/>
+              </a:rPr>
+              <a:t>   물리 · 무리 이동 · 레벨 툴</a:t>
+            </a:r>
+            <a:endParaRPr lang="en-US" sz="1300" dirty="0"/>
+          </a:p>
+        </p:txBody>
+      </p:sp>
+      <p:sp>
+        <p:nvSpPr>
+          <p:cNvPr id="26" name="Shape 24"/>
+          <p:cNvSpPr/>
+          <p:nvPr/>
+        </p:nvSpPr>
+        <p:spPr>
+          <a:xfrm>
+            <a:off x="6766560" y="2788920"/>
+            <a:ext cx="329184" cy="329184"/>
+          </a:xfrm>
+          <a:prstGeom prst="ellipse">
+            <a:avLst/>
+          </a:prstGeom>
+          <a:solidFill>
+            <a:srgbClr val="1FA655"/>
+          </a:solidFill>
+          <a:ln w="12700">
+            <a:solidFill>
+              <a:srgbClr val="1FA655"/>
+            </a:solidFill>
+            <a:prstDash val="solid"/>
+          </a:ln>
+        </p:spPr>
+      </p:sp>
+      <p:sp>
+        <p:nvSpPr>
+          <p:cNvPr id="27" name="Text 25"/>
+          <p:cNvSpPr txBox="1"/>
+          <p:nvPr/>
+        </p:nvSpPr>
+        <p:spPr>
+          <a:xfrm>
+            <a:off x="6766560" y="2788920"/>
+            <a:ext cx="329184" cy="329184"/>
+          </a:xfrm>
+          <a:prstGeom prst="rect">
+            <a:avLst/>
+          </a:prstGeom>
+          <a:noFill/>
+          <a:ln/>
+        </p:spPr>
+        <p:txBody>
+          <a:bodyPr wrap="square" lIns="0" tIns="0" rIns="0" bIns="0" rtlCol="0" anchor="ctr"/>
+          <a:lstStyle/>
+          <a:p>
+            <a:pPr marL="0" indent="0" algn="ctr">
+              <a:buNone/>
+            </a:pPr>
+            <a:r>
+              <a:rPr lang="en-US" sz="1400" b="1" dirty="0">
+                <a:solidFill>
+                  <a:srgbClr val="FFFFFF"/>
+                </a:solidFill>
+                <a:latin typeface="Malgun Gothic" pitchFamily="34" charset="0"/>
+                <a:ea typeface="Malgun Gothic" pitchFamily="34" charset="-122"/>
+                <a:cs typeface="Malgun Gothic" pitchFamily="34" charset="-120"/>
+              </a:rPr>
+              <a:t>3</a:t>
+            </a:r>
+            <a:endParaRPr lang="en-US" sz="1400" dirty="0"/>
+          </a:p>
+        </p:txBody>
+      </p:sp>
+      <p:sp>
+        <p:nvSpPr>
+          <p:cNvPr id="28" name="Text 26"/>
+          <p:cNvSpPr txBox="1"/>
+          <p:nvPr/>
+        </p:nvSpPr>
+        <p:spPr>
+          <a:xfrm>
+            <a:off x="7223760" y="2807208"/>
+            <a:ext cx="4144975" cy="329184"/>
+          </a:xfrm>
+          <a:prstGeom prst="rect">
+            <a:avLst/>
+          </a:prstGeom>
+          <a:noFill/>
+          <a:ln/>
+        </p:spPr>
+        <p:txBody>
+          <a:bodyPr wrap="square" lIns="0" tIns="0" rIns="0" bIns="0" rtlCol="0" anchor="ctr"/>
+          <a:lstStyle/>
+          <a:p>
+            <a:pPr marL="0" indent="0">
+              <a:buNone/>
+            </a:pPr>
+            <a:r>
+              <a:rPr lang="en-US" sz="1300" b="1" dirty="0">
+                <a:solidFill>
+                  <a:srgbClr val="2B2118"/>
+                </a:solidFill>
+                <a:latin typeface="Malgun Gothic" pitchFamily="34" charset="0"/>
+                <a:ea typeface="Malgun Gothic" pitchFamily="34" charset="-122"/>
+                <a:cs typeface="Malgun Gothic" pitchFamily="34" charset="-120"/>
+              </a:rPr>
+              <a:t>아트 · UI</a:t>
+            </a:r>
+            <a:r>
+              <a:rPr lang="en-US" sz="1100" dirty="0">
+                <a:solidFill>
+                  <a:srgbClr val="7B6B57"/>
+                </a:solidFill>
+                <a:latin typeface="Malgun Gothic" pitchFamily="34" charset="0"/>
+                <a:ea typeface="Malgun Gothic" pitchFamily="34" charset="-122"/>
+                <a:cs typeface="Malgun Gothic" pitchFamily="34" charset="-120"/>
+              </a:rPr>
+              <a:t>   손그림 아트 · 연출</a:t>
+            </a:r>
+            <a:endParaRPr lang="en-US" sz="1300" dirty="0"/>
+          </a:p>
+        </p:txBody>
+      </p:sp>
+      <p:sp>
+        <p:nvSpPr>
+          <p:cNvPr id="29" name="Shape 27"/>
+          <p:cNvSpPr/>
+          <p:nvPr/>
+        </p:nvSpPr>
+        <p:spPr>
+          <a:xfrm>
+            <a:off x="6492240" y="3611880"/>
+            <a:ext cx="5150815" cy="2194560"/>
+          </a:xfrm>
+          <a:prstGeom prst="roundRect">
+            <a:avLst>
+              <a:gd name="adj" fmla="val 3333"/>
+            </a:avLst>
+          </a:prstGeom>
+          <a:solidFill>
+            <a:srgbClr val="FAF6EC"/>
+          </a:solidFill>
+          <a:ln w="12700">
+            <a:solidFill>
+              <a:srgbClr val="D8C8A4"/>
+            </a:solidFill>
+            <a:prstDash val="solid"/>
+          </a:ln>
+        </p:spPr>
+      </p:sp>
+      <p:sp>
+        <p:nvSpPr>
+          <p:cNvPr id="30" name="Text 28"/>
+          <p:cNvSpPr txBox="1"/>
+          <p:nvPr/>
+        </p:nvSpPr>
+        <p:spPr>
+          <a:xfrm>
+            <a:off x="6766560" y="3749040"/>
+            <a:ext cx="4602175" cy="292608"/>
+          </a:xfrm>
+          <a:prstGeom prst="rect">
+            <a:avLst/>
+          </a:prstGeom>
+          <a:noFill/>
+          <a:ln/>
+        </p:spPr>
+        <p:txBody>
+          <a:bodyPr wrap="square" lIns="0" tIns="0" rIns="0" bIns="0" rtlCol="0" anchor="t"/>
+          <a:lstStyle/>
+          <a:p>
+            <a:pPr marL="0" indent="0">
+              <a:buNone/>
+            </a:pPr>
+            <a:r>
+              <a:rPr lang="en-US" sz="1300" b="1" dirty="0">
+                <a:solidFill>
+                  <a:srgbClr val="1FA655"/>
+                </a:solidFill>
+                <a:latin typeface="Malgun Gothic" pitchFamily="34" charset="0"/>
+                <a:ea typeface="Malgun Gothic" pitchFamily="34" charset="-122"/>
+                <a:cs typeface="Malgun Gothic" pitchFamily="34" charset="-120"/>
+              </a:rPr>
+              <a:t>다음 단계: 스테이지 · 장치 늘리기</a:t>
+            </a:r>
+            <a:endParaRPr lang="en-US" sz="1300" dirty="0"/>
+          </a:p>
+        </p:txBody>
+      </p:sp>
+      <p:sp>
+        <p:nvSpPr>
+          <p:cNvPr id="31" name="Text 29"/>
+          <p:cNvSpPr txBox="1"/>
+          <p:nvPr/>
+        </p:nvSpPr>
+        <p:spPr>
+          <a:xfrm>
+            <a:off x="6766560" y="4114800"/>
+            <a:ext cx="4602175" cy="1554480"/>
+          </a:xfrm>
+          <a:prstGeom prst="rect">
+            <a:avLst/>
+          </a:prstGeom>
+          <a:noFill/>
+          <a:ln/>
+        </p:spPr>
+        <p:txBody>
+          <a:bodyPr wrap="square" lIns="0" tIns="0" rIns="0" bIns="0" rtlCol="0" anchor="t"/>
+          <a:lstStyle/>
+          <a:p>
+            <a:pPr marL="342900" indent="-342900">
+              <a:spcAft>
+                <a:spcPts val="600"/>
+              </a:spcAft>
+              <a:buSzPct val="100000"/>
+              <a:buChar char="•"/>
+            </a:pPr>
+            <a:r>
+              <a:rPr lang="en-US" sz="1300" dirty="0">
+                <a:solidFill>
+                  <a:srgbClr val="2B2118"/>
+                </a:solidFill>
+                <a:latin typeface="Malgun Gothic" pitchFamily="34" charset="0"/>
+                <a:ea typeface="Malgun Gothic" pitchFamily="34" charset="-122"/>
+                <a:cs typeface="Malgun Gothic" pitchFamily="34" charset="-120"/>
+              </a:rPr>
+              <a:t>레벨 툴로 스테이지를 늘리고, 색 조합 퍼즐을 다양하게</a:t>
+            </a:r>
+            <a:endParaRPr lang="en-US" sz="1300" dirty="0"/>
+          </a:p>
+          <a:p>
+            <a:pPr marL="342900" indent="-342900">
+              <a:spcAft>
+                <a:spcPts val="600"/>
+              </a:spcAft>
+              <a:buSzPct val="100000"/>
+              <a:buChar char="•"/>
+            </a:pPr>
+            <a:r>
+              <a:rPr lang="en-US" sz="1300" dirty="0">
+                <a:solidFill>
+                  <a:srgbClr val="2B2118"/>
+                </a:solidFill>
+                <a:latin typeface="Malgun Gothic" pitchFamily="34" charset="0"/>
+                <a:ea typeface="Malgun Gothic" pitchFamily="34" charset="-122"/>
+                <a:cs typeface="Malgun Gothic" pitchFamily="34" charset="-120"/>
+              </a:rPr>
+              <a:t>새 장치 검토: 체크포인트 · 새 프랍 · 색 </a:t>
+            </a:r>
+            <a:r>
+              <a:rPr lang="en-US" sz="1300" dirty="0" err="1">
+                <a:solidFill>
+                  <a:srgbClr val="2B2118"/>
+                </a:solidFill>
+                <a:latin typeface="Malgun Gothic" pitchFamily="34" charset="0"/>
+                <a:ea typeface="Malgun Gothic" pitchFamily="34" charset="-122"/>
+                <a:cs typeface="Malgun Gothic" pitchFamily="34" charset="-120"/>
+              </a:rPr>
+              <a:t>투사체</a:t>
+            </a:r>
+            <a:r>
+              <a:rPr lang="en-US" sz="1300" dirty="0">
+                <a:solidFill>
+                  <a:srgbClr val="2B2118"/>
+                </a:solidFill>
+                <a:latin typeface="Malgun Gothic" pitchFamily="34" charset="0"/>
+                <a:ea typeface="Malgun Gothic" pitchFamily="34" charset="-122"/>
+                <a:cs typeface="Malgun Gothic" pitchFamily="34" charset="-120"/>
+              </a:rPr>
+              <a:t> </a:t>
+            </a:r>
+            <a:r>
+              <a:rPr lang="en-US" sz="1300" dirty="0" err="1">
+                <a:solidFill>
+                  <a:srgbClr val="2B2118"/>
+                </a:solidFill>
+                <a:latin typeface="Malgun Gothic" pitchFamily="34" charset="0"/>
+                <a:ea typeface="Malgun Gothic" pitchFamily="34" charset="-122"/>
+                <a:cs typeface="Malgun Gothic" pitchFamily="34" charset="-120"/>
+              </a:rPr>
+              <a:t>변형</a:t>
+            </a:r>
+            <a:endParaRPr lang="en-US" sz="1300" dirty="0"/>
+          </a:p>
+        </p:txBody>
+      </p:sp>
+      <p:sp>
+        <p:nvSpPr>
+          <p:cNvPr id="32" name="Slide Number Placeholder 0"/>
+          <p:cNvSpPr>
+            <a:spLocks noGrp="1"/>
+          </p:cNvSpPr>
+          <p:nvPr>
+            <p:ph type="sldNum" sz="quarter" idx="4294967295"/>
+          </p:nvPr>
+        </p:nvSpPr>
+        <p:spPr>
+          <a:xfrm>
+            <a:off x="11185855" y="6473952"/>
+            <a:ext cx="457200" cy="274320"/>
+          </a:xfrm>
+          <a:prstGeom prst="rect">
+            <a:avLst/>
+          </a:prstGeom>
+          <a:extLst>
+            <a:ext uri="{C572A759-6A51-4108-AA02-DFA0A04FC94B}">
+              <ma14:wrappingTextBoxFlag xmlns="" xmlns:ma14="http://schemas.microsoft.com/office/mac/drawingml/2011/main" val="0"/>
+            </a:ext>
+          </a:extLst>
+        </p:spPr>
+        <p:txBody>
+          <a:bodyPr/>
+          <a:lstStyle>
+            <a:lvl1pPr>
+              <a:defRPr sz="900">
+                <a:solidFill>
+                  <a:srgbClr val="7B6B57"/>
+                </a:solidFill>
+                <a:latin typeface="Malgun Gothic"/>
+                <a:ea typeface="Malgun Gothic"/>
+                <a:cs typeface="Malgun Gothic"/>
+              </a:defRPr>
+            </a:lvl1pPr>
+          </a:lstStyle>
+          <a:p>
+            <a:pPr algn="r"/>
+            <a:fld id="{F7021451-1387-4CA6-816F-3879F97B5CBC}" type="slidenum">
+              <a:rPr lang="en-US" b="0"/>
+              <a:t>8</a:t>
             </a:fld>
             <a:endParaRPr lang="en-US"/>
           </a:p>

--- a/스톱앤스케치_제안서.pptx
+++ b/스톱앤스케치_제안서.pptx
@@ -1672,7 +1672,7 @@
                 <a:ea typeface="Malgun Gothic" pitchFamily="34" charset="-122"/>
                 <a:cs typeface="Malgun Gothic" pitchFamily="34" charset="-120"/>
               </a:rPr>
-              <a:t>물리 그리기 퍼즐 액션 · 물방울 무리 이끌기</a:t>
+              <a:t>물리 드로잉 퍼즐 플랫포머 · 물방울 무리 이끌기</a:t>
             </a:r>
             <a:endParaRPr lang="en-US" sz="1200" dirty="0"/>
           </a:p>
@@ -2015,7 +2015,7 @@
                           <a:ea typeface="Malgun Gothic" pitchFamily="34" charset="-122"/>
                           <a:cs typeface="Malgun Gothic" pitchFamily="34" charset="-120"/>
                         </a:rPr>
-                        <a:t>물리 그리기 퍼즐 액션 (2D 횡스크롤)</a:t>
+                        <a:t>물리 드로잉 퍼즐 플랫포머 (2D 횡스크롤)</a:t>
                       </a:r>
                       <a:endParaRPr lang="en-US" sz="1200" dirty="0">
                         <a:latin typeface="Malgun Gothic" charset="0"/>
